--- a/Fall 2026/Week 5 -- Genome Assembly Algorithms.pptx
+++ b/Fall 2026/Week 5 -- Genome Assembly Algorithms.pptx
@@ -5,7 +5,7 @@
     <p:sldMasterId id="2147483648" r:id="rId1"/>
   </p:sldMasterIdLst>
   <p:notesMasterIdLst>
-    <p:notesMasterId r:id="rId77"/>
+    <p:notesMasterId r:id="rId78"/>
   </p:notesMasterIdLst>
   <p:sldIdLst>
     <p:sldId id="272" r:id="rId2"/>
@@ -29,60 +29,61 @@
     <p:sldId id="501" r:id="rId20"/>
     <p:sldId id="502" r:id="rId21"/>
     <p:sldId id="453" r:id="rId22"/>
-    <p:sldId id="506" r:id="rId23"/>
-    <p:sldId id="505" r:id="rId24"/>
-    <p:sldId id="455" r:id="rId25"/>
-    <p:sldId id="479" r:id="rId26"/>
-    <p:sldId id="504" r:id="rId27"/>
-    <p:sldId id="513" r:id="rId28"/>
-    <p:sldId id="514" r:id="rId29"/>
-    <p:sldId id="515" r:id="rId30"/>
-    <p:sldId id="508" r:id="rId31"/>
-    <p:sldId id="546" r:id="rId32"/>
-    <p:sldId id="547" r:id="rId33"/>
-    <p:sldId id="548" r:id="rId34"/>
-    <p:sldId id="410" r:id="rId35"/>
-    <p:sldId id="440" r:id="rId36"/>
-    <p:sldId id="441" r:id="rId37"/>
-    <p:sldId id="442" r:id="rId38"/>
-    <p:sldId id="469" r:id="rId39"/>
-    <p:sldId id="470" r:id="rId40"/>
-    <p:sldId id="443" r:id="rId41"/>
-    <p:sldId id="468" r:id="rId42"/>
-    <p:sldId id="467" r:id="rId43"/>
-    <p:sldId id="471" r:id="rId44"/>
-    <p:sldId id="472" r:id="rId45"/>
-    <p:sldId id="473" r:id="rId46"/>
-    <p:sldId id="477" r:id="rId47"/>
-    <p:sldId id="551" r:id="rId48"/>
-    <p:sldId id="552" r:id="rId49"/>
-    <p:sldId id="553" r:id="rId50"/>
-    <p:sldId id="554" r:id="rId51"/>
-    <p:sldId id="550" r:id="rId52"/>
-    <p:sldId id="549" r:id="rId53"/>
-    <p:sldId id="412" r:id="rId54"/>
-    <p:sldId id="516" r:id="rId55"/>
-    <p:sldId id="282" r:id="rId56"/>
-    <p:sldId id="283" r:id="rId57"/>
-    <p:sldId id="284" r:id="rId58"/>
-    <p:sldId id="285" r:id="rId59"/>
-    <p:sldId id="286" r:id="rId60"/>
-    <p:sldId id="287" r:id="rId61"/>
-    <p:sldId id="517" r:id="rId62"/>
-    <p:sldId id="518" r:id="rId63"/>
-    <p:sldId id="532" r:id="rId64"/>
-    <p:sldId id="519" r:id="rId65"/>
-    <p:sldId id="520" r:id="rId66"/>
-    <p:sldId id="521" r:id="rId67"/>
-    <p:sldId id="522" r:id="rId68"/>
-    <p:sldId id="523" r:id="rId69"/>
-    <p:sldId id="524" r:id="rId70"/>
-    <p:sldId id="525" r:id="rId71"/>
-    <p:sldId id="526" r:id="rId72"/>
-    <p:sldId id="528" r:id="rId73"/>
-    <p:sldId id="529" r:id="rId74"/>
-    <p:sldId id="533" r:id="rId75"/>
-    <p:sldId id="531" r:id="rId76"/>
+    <p:sldId id="556" r:id="rId23"/>
+    <p:sldId id="506" r:id="rId24"/>
+    <p:sldId id="505" r:id="rId25"/>
+    <p:sldId id="455" r:id="rId26"/>
+    <p:sldId id="479" r:id="rId27"/>
+    <p:sldId id="504" r:id="rId28"/>
+    <p:sldId id="513" r:id="rId29"/>
+    <p:sldId id="514" r:id="rId30"/>
+    <p:sldId id="515" r:id="rId31"/>
+    <p:sldId id="508" r:id="rId32"/>
+    <p:sldId id="546" r:id="rId33"/>
+    <p:sldId id="547" r:id="rId34"/>
+    <p:sldId id="548" r:id="rId35"/>
+    <p:sldId id="410" r:id="rId36"/>
+    <p:sldId id="440" r:id="rId37"/>
+    <p:sldId id="441" r:id="rId38"/>
+    <p:sldId id="442" r:id="rId39"/>
+    <p:sldId id="469" r:id="rId40"/>
+    <p:sldId id="470" r:id="rId41"/>
+    <p:sldId id="443" r:id="rId42"/>
+    <p:sldId id="468" r:id="rId43"/>
+    <p:sldId id="467" r:id="rId44"/>
+    <p:sldId id="471" r:id="rId45"/>
+    <p:sldId id="472" r:id="rId46"/>
+    <p:sldId id="473" r:id="rId47"/>
+    <p:sldId id="477" r:id="rId48"/>
+    <p:sldId id="551" r:id="rId49"/>
+    <p:sldId id="552" r:id="rId50"/>
+    <p:sldId id="553" r:id="rId51"/>
+    <p:sldId id="554" r:id="rId52"/>
+    <p:sldId id="550" r:id="rId53"/>
+    <p:sldId id="549" r:id="rId54"/>
+    <p:sldId id="412" r:id="rId55"/>
+    <p:sldId id="516" r:id="rId56"/>
+    <p:sldId id="282" r:id="rId57"/>
+    <p:sldId id="283" r:id="rId58"/>
+    <p:sldId id="284" r:id="rId59"/>
+    <p:sldId id="285" r:id="rId60"/>
+    <p:sldId id="286" r:id="rId61"/>
+    <p:sldId id="287" r:id="rId62"/>
+    <p:sldId id="517" r:id="rId63"/>
+    <p:sldId id="518" r:id="rId64"/>
+    <p:sldId id="532" r:id="rId65"/>
+    <p:sldId id="519" r:id="rId66"/>
+    <p:sldId id="520" r:id="rId67"/>
+    <p:sldId id="521" r:id="rId68"/>
+    <p:sldId id="522" r:id="rId69"/>
+    <p:sldId id="523" r:id="rId70"/>
+    <p:sldId id="524" r:id="rId71"/>
+    <p:sldId id="525" r:id="rId72"/>
+    <p:sldId id="526" r:id="rId73"/>
+    <p:sldId id="528" r:id="rId74"/>
+    <p:sldId id="529" r:id="rId75"/>
+    <p:sldId id="533" r:id="rId76"/>
+    <p:sldId id="531" r:id="rId77"/>
   </p:sldIdLst>
   <p:sldSz cx="12192000" cy="6858000"/>
   <p:notesSz cx="6858000" cy="9144000"/>
@@ -203,7 +204,7 @@
 <file path=ppt/revisionInfo.xml><?xml version="1.0" encoding="utf-8"?>
 <p1510:revInfo xmlns:a="http://schemas.openxmlformats.org/drawingml/2006/main" xmlns:r="http://schemas.openxmlformats.org/officeDocument/2006/relationships" xmlns:p1510="http://schemas.microsoft.com/office/powerpoint/2015/10/main">
   <p1510:revLst>
-    <p1510:client id="{7FFC2F98-A6B4-40DA-954F-88B2EEDB9609}" v="7" dt="2026-09-28T14:44:26.111"/>
+    <p1510:client id="{7FFC2F98-A6B4-40DA-954F-88B2EEDB9609}" v="13" dt="2026-09-28T20:03:13.682"/>
   </p1510:revLst>
 </p1510:revInfo>
 </file>
@@ -213,7 +214,7 @@
   <pc:docChgLst>
     <pc:chgData name="Aleksey Zimin" userId="7f2637d0bc515791" providerId="LiveId" clId="{5F359FD6-B8E9-41DA-90EC-0BA4FD0F3073}"/>
     <pc:docChg chg="undo custSel addSld delSld modSld">
-      <pc:chgData name="Aleksey Zimin" userId="7f2637d0bc515791" providerId="LiveId" clId="{5F359FD6-B8E9-41DA-90EC-0BA4FD0F3073}" dt="2026-09-28T14:44:26.096" v="95"/>
+      <pc:chgData name="Aleksey Zimin" userId="7f2637d0bc515791" providerId="LiveId" clId="{5F359FD6-B8E9-41DA-90EC-0BA4FD0F3073}" dt="2026-09-28T20:04:04.451" v="144" actId="1076"/>
       <pc:docMkLst>
         <pc:docMk/>
       </pc:docMkLst>
@@ -253,12 +254,235 @@
           <pc:sldMk cId="1730381858" sldId="449"/>
         </pc:sldMkLst>
       </pc:sldChg>
-      <pc:sldChg chg="add">
-        <pc:chgData name="Aleksey Zimin" userId="7f2637d0bc515791" providerId="LiveId" clId="{5F359FD6-B8E9-41DA-90EC-0BA4FD0F3073}" dt="2026-09-28T14:44:26.096" v="95"/>
+      <pc:sldChg chg="addSp delSp modSp add mod">
+        <pc:chgData name="Aleksey Zimin" userId="7f2637d0bc515791" providerId="LiveId" clId="{5F359FD6-B8E9-41DA-90EC-0BA4FD0F3073}" dt="2026-09-28T17:52:11.108" v="117" actId="9405"/>
         <pc:sldMkLst>
           <pc:docMk/>
           <pc:sldMk cId="963822541" sldId="450"/>
         </pc:sldMkLst>
+        <pc:spChg chg="add del">
+          <ac:chgData name="Aleksey Zimin" userId="7f2637d0bc515791" providerId="LiveId" clId="{5F359FD6-B8E9-41DA-90EC-0BA4FD0F3073}" dt="2026-09-28T17:50:36.967" v="106" actId="478"/>
+          <ac:spMkLst>
+            <pc:docMk/>
+            <pc:sldMk cId="963822541" sldId="450"/>
+            <ac:spMk id="14" creationId="{EBAB4615-5B95-15E3-CDDA-F19025DC123D}"/>
+          </ac:spMkLst>
+        </pc:spChg>
+        <pc:inkChg chg="add">
+          <ac:chgData name="Aleksey Zimin" userId="7f2637d0bc515791" providerId="LiveId" clId="{5F359FD6-B8E9-41DA-90EC-0BA4FD0F3073}" dt="2026-09-28T17:51:19.050" v="109" actId="9405"/>
+          <ac:inkMkLst>
+            <pc:docMk/>
+            <pc:sldMk cId="963822541" sldId="450"/>
+            <ac:inkMk id="16" creationId="{30886686-FE92-5C5D-BEF3-EDDFD5E36E08}"/>
+          </ac:inkMkLst>
+        </pc:inkChg>
+        <pc:inkChg chg="add">
+          <ac:chgData name="Aleksey Zimin" userId="7f2637d0bc515791" providerId="LiveId" clId="{5F359FD6-B8E9-41DA-90EC-0BA4FD0F3073}" dt="2026-09-28T17:51:23.475" v="110" actId="9405"/>
+          <ac:inkMkLst>
+            <pc:docMk/>
+            <pc:sldMk cId="963822541" sldId="450"/>
+            <ac:inkMk id="17" creationId="{4202475A-F840-2E0D-6B81-E9F9776B7135}"/>
+          </ac:inkMkLst>
+        </pc:inkChg>
+        <pc:inkChg chg="add mod">
+          <ac:chgData name="Aleksey Zimin" userId="7f2637d0bc515791" providerId="LiveId" clId="{5F359FD6-B8E9-41DA-90EC-0BA4FD0F3073}" dt="2026-09-28T17:51:37.186" v="113" actId="1076"/>
+          <ac:inkMkLst>
+            <pc:docMk/>
+            <pc:sldMk cId="963822541" sldId="450"/>
+            <ac:inkMk id="22" creationId="{4BFA8BCF-683F-3430-7B88-6005F23124BF}"/>
+          </ac:inkMkLst>
+        </pc:inkChg>
+        <pc:inkChg chg="add mod">
+          <ac:chgData name="Aleksey Zimin" userId="7f2637d0bc515791" providerId="LiveId" clId="{5F359FD6-B8E9-41DA-90EC-0BA4FD0F3073}" dt="2026-09-28T17:51:37.186" v="113" actId="1076"/>
+          <ac:inkMkLst>
+            <pc:docMk/>
+            <pc:sldMk cId="963822541" sldId="450"/>
+            <ac:inkMk id="23" creationId="{355D84FB-919C-E434-CEB7-67F9D864E701}"/>
+          </ac:inkMkLst>
+        </pc:inkChg>
+        <pc:inkChg chg="add del">
+          <ac:chgData name="Aleksey Zimin" userId="7f2637d0bc515791" providerId="LiveId" clId="{5F359FD6-B8E9-41DA-90EC-0BA4FD0F3073}" dt="2026-09-28T17:51:51.831" v="115" actId="9405"/>
+          <ac:inkMkLst>
+            <pc:docMk/>
+            <pc:sldMk cId="963822541" sldId="450"/>
+            <ac:inkMk id="24" creationId="{C0C6E95D-B84A-63FB-721C-3B31B64809EB}"/>
+          </ac:inkMkLst>
+        </pc:inkChg>
+        <pc:inkChg chg="add">
+          <ac:chgData name="Aleksey Zimin" userId="7f2637d0bc515791" providerId="LiveId" clId="{5F359FD6-B8E9-41DA-90EC-0BA4FD0F3073}" dt="2026-09-28T17:52:05.811" v="116" actId="9405"/>
+          <ac:inkMkLst>
+            <pc:docMk/>
+            <pc:sldMk cId="963822541" sldId="450"/>
+            <ac:inkMk id="25" creationId="{CF193435-9698-43DC-6C92-C221CF2BC018}"/>
+          </ac:inkMkLst>
+        </pc:inkChg>
+        <pc:inkChg chg="add">
+          <ac:chgData name="Aleksey Zimin" userId="7f2637d0bc515791" providerId="LiveId" clId="{5F359FD6-B8E9-41DA-90EC-0BA4FD0F3073}" dt="2026-09-28T17:52:11.108" v="117" actId="9405"/>
+          <ac:inkMkLst>
+            <pc:docMk/>
+            <pc:sldMk cId="963822541" sldId="450"/>
+            <ac:inkMk id="26" creationId="{B05AE4FB-32D6-09CF-F0B0-F846BDE4414E}"/>
+          </ac:inkMkLst>
+        </pc:inkChg>
+        <pc:cxnChg chg="add mod">
+          <ac:chgData name="Aleksey Zimin" userId="7f2637d0bc515791" providerId="LiveId" clId="{5F359FD6-B8E9-41DA-90EC-0BA4FD0F3073}" dt="2026-09-28T17:50:01.626" v="98" actId="13822"/>
+          <ac:cxnSpMkLst>
+            <pc:docMk/>
+            <pc:sldMk cId="963822541" sldId="450"/>
+            <ac:cxnSpMk id="6" creationId="{04BA9DA3-F53F-6406-98B7-A7D57AAACA3A}"/>
+          </ac:cxnSpMkLst>
+        </pc:cxnChg>
+        <pc:cxnChg chg="add mod">
+          <ac:chgData name="Aleksey Zimin" userId="7f2637d0bc515791" providerId="LiveId" clId="{5F359FD6-B8E9-41DA-90EC-0BA4FD0F3073}" dt="2026-09-28T17:50:06.131" v="100" actId="1076"/>
+          <ac:cxnSpMkLst>
+            <pc:docMk/>
+            <pc:sldMk cId="963822541" sldId="450"/>
+            <ac:cxnSpMk id="7" creationId="{FA509E3C-2A69-AE9F-337B-D9258C063796}"/>
+          </ac:cxnSpMkLst>
+        </pc:cxnChg>
+        <pc:cxnChg chg="add mod">
+          <ac:chgData name="Aleksey Zimin" userId="7f2637d0bc515791" providerId="LiveId" clId="{5F359FD6-B8E9-41DA-90EC-0BA4FD0F3073}" dt="2026-09-28T17:50:15.763" v="102" actId="1076"/>
+          <ac:cxnSpMkLst>
+            <pc:docMk/>
+            <pc:sldMk cId="963822541" sldId="450"/>
+            <ac:cxnSpMk id="8" creationId="{75ECEEFF-5F26-29D4-F2C1-4EFB02ACEF28}"/>
+          </ac:cxnSpMkLst>
+        </pc:cxnChg>
+        <pc:cxnChg chg="add mod">
+          <ac:chgData name="Aleksey Zimin" userId="7f2637d0bc515791" providerId="LiveId" clId="{5F359FD6-B8E9-41DA-90EC-0BA4FD0F3073}" dt="2026-09-28T17:50:15.763" v="102" actId="1076"/>
+          <ac:cxnSpMkLst>
+            <pc:docMk/>
+            <pc:sldMk cId="963822541" sldId="450"/>
+            <ac:cxnSpMk id="9" creationId="{45884D49-E9BC-822C-D1D9-73C50086011C}"/>
+          </ac:cxnSpMkLst>
+        </pc:cxnChg>
+        <pc:cxnChg chg="add mod">
+          <ac:chgData name="Aleksey Zimin" userId="7f2637d0bc515791" providerId="LiveId" clId="{5F359FD6-B8E9-41DA-90EC-0BA4FD0F3073}" dt="2026-09-28T17:50:25.779" v="104" actId="1076"/>
+          <ac:cxnSpMkLst>
+            <pc:docMk/>
+            <pc:sldMk cId="963822541" sldId="450"/>
+            <ac:cxnSpMk id="10" creationId="{9D500E48-2112-B041-D082-F1AB300C9A63}"/>
+          </ac:cxnSpMkLst>
+        </pc:cxnChg>
+        <pc:cxnChg chg="add mod">
+          <ac:chgData name="Aleksey Zimin" userId="7f2637d0bc515791" providerId="LiveId" clId="{5F359FD6-B8E9-41DA-90EC-0BA4FD0F3073}" dt="2026-09-28T17:50:25.779" v="104" actId="1076"/>
+          <ac:cxnSpMkLst>
+            <pc:docMk/>
+            <pc:sldMk cId="963822541" sldId="450"/>
+            <ac:cxnSpMk id="11" creationId="{88B2650F-FFC7-2DE4-8A1D-8A7CDA8FDBD7}"/>
+          </ac:cxnSpMkLst>
+        </pc:cxnChg>
+        <pc:cxnChg chg="add mod">
+          <ac:chgData name="Aleksey Zimin" userId="7f2637d0bc515791" providerId="LiveId" clId="{5F359FD6-B8E9-41DA-90EC-0BA4FD0F3073}" dt="2026-09-28T17:50:48.667" v="107" actId="1076"/>
+          <ac:cxnSpMkLst>
+            <pc:docMk/>
+            <pc:sldMk cId="963822541" sldId="450"/>
+            <ac:cxnSpMk id="12" creationId="{5C430535-8680-1AC7-C202-D8F7A384CBEA}"/>
+          </ac:cxnSpMkLst>
+        </pc:cxnChg>
+        <pc:cxnChg chg="add mod">
+          <ac:chgData name="Aleksey Zimin" userId="7f2637d0bc515791" providerId="LiveId" clId="{5F359FD6-B8E9-41DA-90EC-0BA4FD0F3073}" dt="2026-09-28T17:50:25.779" v="104" actId="1076"/>
+          <ac:cxnSpMkLst>
+            <pc:docMk/>
+            <pc:sldMk cId="963822541" sldId="450"/>
+            <ac:cxnSpMk id="13" creationId="{553C039B-2ED9-0516-49B3-04DBA23184BE}"/>
+          </ac:cxnSpMkLst>
+        </pc:cxnChg>
+        <pc:cxnChg chg="add del mod">
+          <ac:chgData name="Aleksey Zimin" userId="7f2637d0bc515791" providerId="LiveId" clId="{5F359FD6-B8E9-41DA-90EC-0BA4FD0F3073}" dt="2026-09-28T17:51:28.340" v="111" actId="478"/>
+          <ac:cxnSpMkLst>
+            <pc:docMk/>
+            <pc:sldMk cId="963822541" sldId="450"/>
+            <ac:cxnSpMk id="15" creationId="{DAD74376-F12D-5895-7AA1-8DCF14F467CF}"/>
+          </ac:cxnSpMkLst>
+        </pc:cxnChg>
+        <pc:cxnChg chg="add mod">
+          <ac:chgData name="Aleksey Zimin" userId="7f2637d0bc515791" providerId="LiveId" clId="{5F359FD6-B8E9-41DA-90EC-0BA4FD0F3073}" dt="2026-09-28T17:51:37.186" v="113" actId="1076"/>
+          <ac:cxnSpMkLst>
+            <pc:docMk/>
+            <pc:sldMk cId="963822541" sldId="450"/>
+            <ac:cxnSpMk id="18" creationId="{919BA0C4-1ECA-AFD2-C4EA-E1C0EFDC0F65}"/>
+          </ac:cxnSpMkLst>
+        </pc:cxnChg>
+        <pc:cxnChg chg="add mod">
+          <ac:chgData name="Aleksey Zimin" userId="7f2637d0bc515791" providerId="LiveId" clId="{5F359FD6-B8E9-41DA-90EC-0BA4FD0F3073}" dt="2026-09-28T17:51:37.186" v="113" actId="1076"/>
+          <ac:cxnSpMkLst>
+            <pc:docMk/>
+            <pc:sldMk cId="963822541" sldId="450"/>
+            <ac:cxnSpMk id="19" creationId="{18460F0B-74D6-B1DF-7A6F-576C6373DF12}"/>
+          </ac:cxnSpMkLst>
+        </pc:cxnChg>
+        <pc:cxnChg chg="add mod">
+          <ac:chgData name="Aleksey Zimin" userId="7f2637d0bc515791" providerId="LiveId" clId="{5F359FD6-B8E9-41DA-90EC-0BA4FD0F3073}" dt="2026-09-28T17:51:37.186" v="113" actId="1076"/>
+          <ac:cxnSpMkLst>
+            <pc:docMk/>
+            <pc:sldMk cId="963822541" sldId="450"/>
+            <ac:cxnSpMk id="20" creationId="{8226B477-C047-A09E-D7E4-8267B5E97E8D}"/>
+          </ac:cxnSpMkLst>
+        </pc:cxnChg>
+        <pc:cxnChg chg="add mod">
+          <ac:chgData name="Aleksey Zimin" userId="7f2637d0bc515791" providerId="LiveId" clId="{5F359FD6-B8E9-41DA-90EC-0BA4FD0F3073}" dt="2026-09-28T17:51:37.186" v="113" actId="1076"/>
+          <ac:cxnSpMkLst>
+            <pc:docMk/>
+            <pc:sldMk cId="963822541" sldId="450"/>
+            <ac:cxnSpMk id="21" creationId="{86141C11-6EEA-617D-CBF3-58A88777AE22}"/>
+          </ac:cxnSpMkLst>
+        </pc:cxnChg>
+      </pc:sldChg>
+      <pc:sldChg chg="addSp delSp modSp mod">
+        <pc:chgData name="Aleksey Zimin" userId="7f2637d0bc515791" providerId="LiveId" clId="{5F359FD6-B8E9-41DA-90EC-0BA4FD0F3073}" dt="2026-09-28T20:01:51.236" v="121" actId="1076"/>
+        <pc:sldMkLst>
+          <pc:docMk/>
+          <pc:sldMk cId="1331428061" sldId="453"/>
+        </pc:sldMkLst>
+        <pc:picChg chg="add mod">
+          <ac:chgData name="Aleksey Zimin" userId="7f2637d0bc515791" providerId="LiveId" clId="{5F359FD6-B8E9-41DA-90EC-0BA4FD0F3073}" dt="2026-09-28T20:01:51.236" v="121" actId="1076"/>
+          <ac:picMkLst>
+            <pc:docMk/>
+            <pc:sldMk cId="1331428061" sldId="453"/>
+            <ac:picMk id="7" creationId="{65547F82-3FC3-29F3-FDE8-ED01C176C677}"/>
+          </ac:picMkLst>
+        </pc:picChg>
+        <pc:cxnChg chg="del">
+          <ac:chgData name="Aleksey Zimin" userId="7f2637d0bc515791" providerId="LiveId" clId="{5F359FD6-B8E9-41DA-90EC-0BA4FD0F3073}" dt="2026-09-28T20:01:46.306" v="119" actId="478"/>
+          <ac:cxnSpMkLst>
+            <pc:docMk/>
+            <pc:sldMk cId="1331428061" sldId="453"/>
+            <ac:cxnSpMk id="6" creationId="{34DC410F-7733-5269-0284-008B323E6DE1}"/>
+          </ac:cxnSpMkLst>
+        </pc:cxnChg>
+        <pc:cxnChg chg="del">
+          <ac:chgData name="Aleksey Zimin" userId="7f2637d0bc515791" providerId="LiveId" clId="{5F359FD6-B8E9-41DA-90EC-0BA4FD0F3073}" dt="2026-09-28T20:01:46.306" v="119" actId="478"/>
+          <ac:cxnSpMkLst>
+            <pc:docMk/>
+            <pc:sldMk cId="1331428061" sldId="453"/>
+            <ac:cxnSpMk id="8" creationId="{B69AA401-0CBB-86D3-E15D-33411F3FEDF0}"/>
+          </ac:cxnSpMkLst>
+        </pc:cxnChg>
+        <pc:cxnChg chg="del">
+          <ac:chgData name="Aleksey Zimin" userId="7f2637d0bc515791" providerId="LiveId" clId="{5F359FD6-B8E9-41DA-90EC-0BA4FD0F3073}" dt="2026-09-28T20:01:46.306" v="119" actId="478"/>
+          <ac:cxnSpMkLst>
+            <pc:docMk/>
+            <pc:sldMk cId="1331428061" sldId="453"/>
+            <ac:cxnSpMk id="10" creationId="{61D4609D-AE0D-CA79-22BD-BCC6C55285AB}"/>
+          </ac:cxnSpMkLst>
+        </pc:cxnChg>
+        <pc:cxnChg chg="del">
+          <ac:chgData name="Aleksey Zimin" userId="7f2637d0bc515791" providerId="LiveId" clId="{5F359FD6-B8E9-41DA-90EC-0BA4FD0F3073}" dt="2026-09-28T20:01:46.306" v="119" actId="478"/>
+          <ac:cxnSpMkLst>
+            <pc:docMk/>
+            <pc:sldMk cId="1331428061" sldId="453"/>
+            <ac:cxnSpMk id="13" creationId="{98E03E6D-5D77-11AA-7E97-994DC730AC88}"/>
+          </ac:cxnSpMkLst>
+        </pc:cxnChg>
+        <pc:cxnChg chg="del">
+          <ac:chgData name="Aleksey Zimin" userId="7f2637d0bc515791" providerId="LiveId" clId="{5F359FD6-B8E9-41DA-90EC-0BA4FD0F3073}" dt="2026-09-28T20:01:46.306" v="119" actId="478"/>
+          <ac:cxnSpMkLst>
+            <pc:docMk/>
+            <pc:sldMk cId="1331428061" sldId="453"/>
+            <ac:cxnSpMk id="15" creationId="{EB6D4CC3-8416-6D34-47F3-A1E6FB0ACEB9}"/>
+          </ac:cxnSpMkLst>
+        </pc:cxnChg>
       </pc:sldChg>
       <pc:sldChg chg="del">
         <pc:chgData name="Aleksey Zimin" userId="7f2637d0bc515791" providerId="LiveId" clId="{5F359FD6-B8E9-41DA-90EC-0BA4FD0F3073}" dt="2026-09-28T14:37:52.209" v="27" actId="47"/>
@@ -326,6 +550,101 @@
           <pc:docMk/>
           <pc:sldMk cId="4266177015" sldId="478"/>
         </pc:sldMkLst>
+      </pc:sldChg>
+      <pc:sldChg chg="addSp delSp modSp mod">
+        <pc:chgData name="Aleksey Zimin" userId="7f2637d0bc515791" providerId="LiveId" clId="{5F359FD6-B8E9-41DA-90EC-0BA4FD0F3073}" dt="2026-09-28T20:04:04.451" v="144" actId="1076"/>
+        <pc:sldMkLst>
+          <pc:docMk/>
+          <pc:sldMk cId="3340996165" sldId="506"/>
+        </pc:sldMkLst>
+        <pc:picChg chg="add mod">
+          <ac:chgData name="Aleksey Zimin" userId="7f2637d0bc515791" providerId="LiveId" clId="{5F359FD6-B8E9-41DA-90EC-0BA4FD0F3073}" dt="2026-09-28T20:03:04.756" v="128" actId="1076"/>
+          <ac:picMkLst>
+            <pc:docMk/>
+            <pc:sldMk cId="3340996165" sldId="506"/>
+            <ac:picMk id="7" creationId="{27BE2F5B-D595-98C2-957E-3FD32797B598}"/>
+          </ac:picMkLst>
+        </pc:picChg>
+        <pc:cxnChg chg="del">
+          <ac:chgData name="Aleksey Zimin" userId="7f2637d0bc515791" providerId="LiveId" clId="{5F359FD6-B8E9-41DA-90EC-0BA4FD0F3073}" dt="2026-09-28T20:03:01.342" v="126" actId="478"/>
+          <ac:cxnSpMkLst>
+            <pc:docMk/>
+            <pc:sldMk cId="3340996165" sldId="506"/>
+            <ac:cxnSpMk id="6" creationId="{84ABF028-7B4F-6283-AF57-F6555A2E78F4}"/>
+          </ac:cxnSpMkLst>
+        </pc:cxnChg>
+        <pc:cxnChg chg="del">
+          <ac:chgData name="Aleksey Zimin" userId="7f2637d0bc515791" providerId="LiveId" clId="{5F359FD6-B8E9-41DA-90EC-0BA4FD0F3073}" dt="2026-09-28T20:03:01.342" v="126" actId="478"/>
+          <ac:cxnSpMkLst>
+            <pc:docMk/>
+            <pc:sldMk cId="3340996165" sldId="506"/>
+            <ac:cxnSpMk id="8" creationId="{BBCA5915-F07A-6C67-7D54-15D84EA1AD51}"/>
+          </ac:cxnSpMkLst>
+        </pc:cxnChg>
+        <pc:cxnChg chg="add mod">
+          <ac:chgData name="Aleksey Zimin" userId="7f2637d0bc515791" providerId="LiveId" clId="{5F359FD6-B8E9-41DA-90EC-0BA4FD0F3073}" dt="2026-09-28T20:04:04.451" v="144" actId="1076"/>
+          <ac:cxnSpMkLst>
+            <pc:docMk/>
+            <pc:sldMk cId="3340996165" sldId="506"/>
+            <ac:cxnSpMk id="9" creationId="{E3F21D60-7F81-6C1A-D105-A679C046991D}"/>
+          </ac:cxnSpMkLst>
+        </pc:cxnChg>
+        <pc:cxnChg chg="del">
+          <ac:chgData name="Aleksey Zimin" userId="7f2637d0bc515791" providerId="LiveId" clId="{5F359FD6-B8E9-41DA-90EC-0BA4FD0F3073}" dt="2026-09-28T20:03:01.342" v="126" actId="478"/>
+          <ac:cxnSpMkLst>
+            <pc:docMk/>
+            <pc:sldMk cId="3340996165" sldId="506"/>
+            <ac:cxnSpMk id="10" creationId="{28F3B478-5BBD-75C9-21DE-2DA24DB45DDD}"/>
+          </ac:cxnSpMkLst>
+        </pc:cxnChg>
+        <pc:cxnChg chg="add mod">
+          <ac:chgData name="Aleksey Zimin" userId="7f2637d0bc515791" providerId="LiveId" clId="{5F359FD6-B8E9-41DA-90EC-0BA4FD0F3073}" dt="2026-09-28T20:04:04.451" v="144" actId="1076"/>
+          <ac:cxnSpMkLst>
+            <pc:docMk/>
+            <pc:sldMk cId="3340996165" sldId="506"/>
+            <ac:cxnSpMk id="11" creationId="{367CC66E-908B-D824-6330-DE3CE8CFA251}"/>
+          </ac:cxnSpMkLst>
+        </pc:cxnChg>
+        <pc:cxnChg chg="add mod">
+          <ac:chgData name="Aleksey Zimin" userId="7f2637d0bc515791" providerId="LiveId" clId="{5F359FD6-B8E9-41DA-90EC-0BA4FD0F3073}" dt="2026-09-28T20:04:04.451" v="144" actId="1076"/>
+          <ac:cxnSpMkLst>
+            <pc:docMk/>
+            <pc:sldMk cId="3340996165" sldId="506"/>
+            <ac:cxnSpMk id="12" creationId="{10B151E6-E37C-FACD-715E-D3F84ED212F7}"/>
+          </ac:cxnSpMkLst>
+        </pc:cxnChg>
+        <pc:cxnChg chg="del">
+          <ac:chgData name="Aleksey Zimin" userId="7f2637d0bc515791" providerId="LiveId" clId="{5F359FD6-B8E9-41DA-90EC-0BA4FD0F3073}" dt="2026-09-28T20:03:01.342" v="126" actId="478"/>
+          <ac:cxnSpMkLst>
+            <pc:docMk/>
+            <pc:sldMk cId="3340996165" sldId="506"/>
+            <ac:cxnSpMk id="13" creationId="{C0F7CB0F-0D3B-7B72-04F0-C3074929666D}"/>
+          </ac:cxnSpMkLst>
+        </pc:cxnChg>
+        <pc:cxnChg chg="add mod">
+          <ac:chgData name="Aleksey Zimin" userId="7f2637d0bc515791" providerId="LiveId" clId="{5F359FD6-B8E9-41DA-90EC-0BA4FD0F3073}" dt="2026-09-28T20:04:04.451" v="144" actId="1076"/>
+          <ac:cxnSpMkLst>
+            <pc:docMk/>
+            <pc:sldMk cId="3340996165" sldId="506"/>
+            <ac:cxnSpMk id="14" creationId="{CA55E126-2D19-3824-2D25-E75905221540}"/>
+          </ac:cxnSpMkLst>
+        </pc:cxnChg>
+        <pc:cxnChg chg="del">
+          <ac:chgData name="Aleksey Zimin" userId="7f2637d0bc515791" providerId="LiveId" clId="{5F359FD6-B8E9-41DA-90EC-0BA4FD0F3073}" dt="2026-09-28T20:03:01.342" v="126" actId="478"/>
+          <ac:cxnSpMkLst>
+            <pc:docMk/>
+            <pc:sldMk cId="3340996165" sldId="506"/>
+            <ac:cxnSpMk id="15" creationId="{49A8D07C-EDDC-9F65-66A4-03BCB8DE3A41}"/>
+          </ac:cxnSpMkLst>
+        </pc:cxnChg>
+        <pc:cxnChg chg="add mod">
+          <ac:chgData name="Aleksey Zimin" userId="7f2637d0bc515791" providerId="LiveId" clId="{5F359FD6-B8E9-41DA-90EC-0BA4FD0F3073}" dt="2026-09-28T20:04:04.451" v="144" actId="1076"/>
+          <ac:cxnSpMkLst>
+            <pc:docMk/>
+            <pc:sldMk cId="3340996165" sldId="506"/>
+            <ac:cxnSpMk id="16" creationId="{95AC9189-614F-9868-E50E-29B78E464E22}"/>
+          </ac:cxnSpMkLst>
+        </pc:cxnChg>
       </pc:sldChg>
       <pc:sldChg chg="modSp mod">
         <pc:chgData name="Aleksey Zimin" userId="7f2637d0bc515791" providerId="LiveId" clId="{5F359FD6-B8E9-41DA-90EC-0BA4FD0F3073}" dt="2026-09-28T14:29:28.479" v="2" actId="947"/>
@@ -447,6 +766,45 @@
           <pc:sldMk cId="591985588" sldId="555"/>
         </pc:sldMkLst>
       </pc:sldChg>
+      <pc:sldChg chg="modSp add mod">
+        <pc:chgData name="Aleksey Zimin" userId="7f2637d0bc515791" providerId="LiveId" clId="{5F359FD6-B8E9-41DA-90EC-0BA4FD0F3073}" dt="2026-09-28T20:02:32.526" v="125" actId="13822"/>
+        <pc:sldMkLst>
+          <pc:docMk/>
+          <pc:sldMk cId="62699590" sldId="556"/>
+        </pc:sldMkLst>
+        <pc:cxnChg chg="mod">
+          <ac:chgData name="Aleksey Zimin" userId="7f2637d0bc515791" providerId="LiveId" clId="{5F359FD6-B8E9-41DA-90EC-0BA4FD0F3073}" dt="2026-09-28T20:02:16.749" v="123" actId="13822"/>
+          <ac:cxnSpMkLst>
+            <pc:docMk/>
+            <pc:sldMk cId="62699590" sldId="556"/>
+            <ac:cxnSpMk id="6" creationId="{3FEC71AA-A8D2-2F05-C366-D3D4A92B8C59}"/>
+          </ac:cxnSpMkLst>
+        </pc:cxnChg>
+        <pc:cxnChg chg="mod">
+          <ac:chgData name="Aleksey Zimin" userId="7f2637d0bc515791" providerId="LiveId" clId="{5F359FD6-B8E9-41DA-90EC-0BA4FD0F3073}" dt="2026-09-28T20:02:11.327" v="122" actId="13822"/>
+          <ac:cxnSpMkLst>
+            <pc:docMk/>
+            <pc:sldMk cId="62699590" sldId="556"/>
+            <ac:cxnSpMk id="10" creationId="{3CFC357C-EC3B-A637-656C-116419A8FFB8}"/>
+          </ac:cxnSpMkLst>
+        </pc:cxnChg>
+        <pc:cxnChg chg="mod">
+          <ac:chgData name="Aleksey Zimin" userId="7f2637d0bc515791" providerId="LiveId" clId="{5F359FD6-B8E9-41DA-90EC-0BA4FD0F3073}" dt="2026-09-28T20:02:24.559" v="124" actId="13822"/>
+          <ac:cxnSpMkLst>
+            <pc:docMk/>
+            <pc:sldMk cId="62699590" sldId="556"/>
+            <ac:cxnSpMk id="13" creationId="{D8B5E29A-41A4-C35F-EB75-7C1CCF0E135A}"/>
+          </ac:cxnSpMkLst>
+        </pc:cxnChg>
+        <pc:cxnChg chg="mod">
+          <ac:chgData name="Aleksey Zimin" userId="7f2637d0bc515791" providerId="LiveId" clId="{5F359FD6-B8E9-41DA-90EC-0BA4FD0F3073}" dt="2026-09-28T20:02:32.526" v="125" actId="13822"/>
+          <ac:cxnSpMkLst>
+            <pc:docMk/>
+            <pc:sldMk cId="62699590" sldId="556"/>
+            <ac:cxnSpMk id="15" creationId="{73E8D1A5-70E2-09B8-AD7E-0341DB4C3934}"/>
+          </ac:cxnSpMkLst>
+        </pc:cxnChg>
+      </pc:sldChg>
     </pc:docChg>
   </pc:docChgLst>
 </pc:chgInfo>
@@ -468,15 +826,14 @@
           <inkml:channelProperty channel="F" name="resolution" value="0" units="1/dev"/>
         </inkml:channelProperties>
       </inkml:inkSource>
-      <inkml:timestamp xml:id="ts0" timeString="2025-09-22T13:33:37.900"/>
+      <inkml:timestamp xml:id="ts0" timeString="2026-09-28T17:51:19.048"/>
     </inkml:context>
     <inkml:brush xml:id="br0">
       <inkml:brushProperty name="width" value="0.035" units="cm"/>
       <inkml:brushProperty name="height" value="0.035" units="cm"/>
-      <inkml:brushProperty name="color" value="#FF0066"/>
     </inkml:brush>
   </inkml:definitions>
-  <inkml:trace contextRef="#ctx0" brushRef="#br0">1 36 24575,'15'-1'0,"1"-1"0,-1 0 0,26-8 0,29-4 0,347 7 0,-230 10 0,-128-3 0,0 3 0,87 14 0,5 0 0,-5-1 0,-111-11 0,57-1 0,-65-3 0,1 0 0,0 1 0,46 11 0,-8 0 0,-53-12 0,-1 0 0,0 2 0,0-1 0,0 2 0,0-1 0,0 2 0,20 10 0,11 9 0,1-3 0,0-1 0,88 26 0,-93-36 0,79 10 0,-1-1 0,-31-1 0,198 54 0,-236-58 0,74 9 0,17 5 0,5 22 0,-103-34 0,1-1 0,0-2 0,52 8 0,-55-13 0,0 2 0,-1 1 0,-1 2 0,48 23 0,-28-11 0,4-2 0,-41-17 0,-1 1 0,0 1 0,0 1 0,0 1 0,-1 0 0,-1 1 0,30 25 0,-34-25 0,1 0 0,1-1 0,0 0 0,18 8 0,39 26 0,-57-33 0,0-2 0,0 0 0,1-1 0,0-1 0,30 10 0,88 17 0,70 21 0,-151-39 0,1-2 0,1-3 0,76 6 0,-30-3 0,-55-6 0,71 1 0,-51-10 0,-40 0 0,0 0 0,0 2 0,0 0 0,0 2 0,29 7 0,-26-3 0,0-2 0,0-1 0,1-2 0,37 0 0,24 1 0,0 12 0,-65-10 0,-1 0 0,32 1 0,-9-5 0,-8-1 0,-1 2 0,0 1 0,40 10 0,-51-8 0,0-2 0,1 0 0,32-2 0,-35-2 0,0 2 0,-1 0 0,1 2 0,28 7 0,-14-1 0,0-2 0,59 3 0,32 5 0,-43 2 0,88 14 0,21-1 0,-185-29 0,-1 1 0,1 0 0,-1 0 0,0 1 0,1 1 0,-1 0 0,-1 0 0,1 1 0,-1 1 0,0 0 0,0 0 0,0 1 0,-1 0 0,0 0 0,12 13 0,31 42 0,-23-30 0,-2 2 0,-1 1 0,24 41 0,-32-45 0,-2 1 0,0 0 0,-3 1 0,0 1 0,8 42 0,-9-23 0,-5-25 0,-1 1 0,3 57 0,-7-39 0,-3 0 0,-1 0 0,-18 91 0,18-124 0,-1 0 0,-1 0 0,-1 0 0,0-1 0,0 1 0,-1-1 0,-1-1 0,0 1 0,-15 18 0,9-12 0,0 0 0,0 1 0,-15 38 0,-10 16 0,28-53 0,1 0 0,0 1 0,2 0 0,0 1 0,-5 41 0,3-21 0,-2 19 0,10-48 0,-1 0 0,-1 0 0,0-1 0,0 1 0,-2-1 0,0 0 0,0 0 0,-1 0 0,0-1 0,-1 0 0,-10 13 0,-7 3 0,-1-1 0,-1-1 0,-2-1 0,-30 20 0,-22 9 0,-112 56 0,175-101 0,-2-1 0,0-1 0,0 0 0,0-2 0,-1 0 0,-25 2 0,-6 2 0,24-5 0,-1-1 0,-29 0 0,33-3 0,0 2 0,0 0 0,-30 8 0,2 0 0,0-3 0,0-2 0,-1-2 0,-81-5 0,68-1 0,0 4 0,-78 10 0,59-2 0,-104-1 0,36-3 0,14 10 0,-44 2 0,157-17 0,-210-4 0,192 1 0,0-3 0,0-1 0,-55-17 0,6 1 0,64 18 0,1-2 0,-1-1 0,-43-19 0,57 17 0,1 1 0,0-2 0,0 0 0,1-1 0,0 0 0,1-1 0,1 0 0,0-1 0,1 0 0,0-1 0,1 0 0,-9-21 0,-1 0 0,-26-38 0,25 43 0,-28-57 0,40 71 0,0 0 0,1-1 0,1 0 0,1-1 0,0 1 0,2-1 0,-3-23 0,-9-96 0,8 91 0,-2-64 0,8 43 0,4-127 0,1 175 0,0 1 0,2 0 0,0 0 0,1 1 0,1 0 0,1 0 0,0 1 0,14-19 0,-17 28 0,0 0 0,1 0 0,0 1 0,0 0 0,0 0 0,1 1 0,0 0 0,1 1 0,-1-1 0,17-6 0,-7 4 0,0 2 0,1 0 0,0 0 0,28-3 0,24-4 0,-42 6 0,1 2 0,40-2 0,-29 7 0,-4 0 0,0-2 0,47-8 0,16-3 0,0 5 0,190 7 0,-121 4 0,1777-3 0,-1913-3 0,-1-2 0,0-1 0,0-1 0,-1-1 0,0-2 0,55-26 0,32-10 0,-92 36 0,0-2 0,48-29 0,-51 27 0,0 1 0,1 0 0,44-14 0,-25 14 0,0-1 0,-1-3 0,0-1 0,73-45 0,-88 43 0,42-42 0,-47 40 0,1 2 0,37-27 0,-8 17 0,-35 20 0,1 0 0,-2-1 0,1 0 0,-1-2 0,-1 1 0,23-26 0,-28 26 0,1 1 0,1 1 0,0 0 0,16-10 0,23-20 0,-6 3 0,1 3 0,61-35 0,-69 45 0,-21 14 0,1 2 0,0 0 0,1 1 0,35-9 0,-36 12 0,0-1 0,0-1 0,-1 0 0,0-2 0,28-15 0,-30 14 0,1 1 0,0 1 0,0 1 0,1 0 0,0 1 0,0 1 0,24-3 0,6-2 0,18-6 0,0 4 0,1 2 0,92-1 0,-95 10 0,-1-3 0,74-13 0,-45 5 0,1 5 0,145 7 0,-82 2 0,227-3-1365,-354 0-5461</inkml:trace>
+  <inkml:trace contextRef="#ctx0" brushRef="#br0">1 500 24575,'27'-29'0,"-19"19"0,0 1 0,1 0 0,0 1 0,11-8 0,24-16 0,-25 17 0,1 1 0,0 1 0,0 0 0,1 2 0,1 0 0,0 2 0,42-13 0,75-15 0,-90 22 0,98-17 0,-93 23 0,77-23 0,41-8 0,213-33 0,-331 65 0,1 3 0,0 1 0,93 8 0,-28-1 0,6-1 0,144-5 0,-184-10 0,-56 7 0,52-2 0,791 6 0,-425 4 0,-370-2 0,12-1 0,173 19 0,-201-11 0,123-2 0,-128-6 0,0 2 0,95 15 0,46 12 0,166 43 0,-214-44 0,-94-19 0,-1 3 0,82 26 0,-51-8 0,-46-17 0,0 2 0,70 36 0,-96-44 0,0 0 0,0-1 0,0 0 0,1-1 0,-1-1 0,23 2 0,-20-2 0,0-1 0,-1 2 0,0 0 0,1 1 0,15 8 0,30 20 0,-35-17 0,50 20 0,-63-30-273,0 0 0,0 1 0,-1 1 0,14 9 0,-10-5-6553</inkml:trace>
 </inkml:ink>
 </file>
 
@@ -524,6 +881,34 @@
           <inkml:channelProperty channel="F" name="resolution" value="0" units="1/dev"/>
         </inkml:channelProperties>
       </inkml:inkSource>
+      <inkml:timestamp xml:id="ts0" timeString="2025-09-15T13:50:02.306"/>
+    </inkml:context>
+    <inkml:brush xml:id="br0">
+      <inkml:brushProperty name="width" value="0.035" units="cm"/>
+      <inkml:brushProperty name="height" value="0.035" units="cm"/>
+      <inkml:brushProperty name="color" value="#C00000"/>
+    </inkml:brush>
+  </inkml:definitions>
+  <inkml:trace contextRef="#ctx0" brushRef="#br0">1 185 24575,'12'-1'0,"0"-1"0,0 0 0,19-5 0,22-4 0,80-1 0,178-22 0,-183 19 0,0 6 0,167 10 0,-112 1 0,-106-1 0,73-1 0,156-19 0,-152 6 0,220 11 0,-172 5 0,3138-3 0,-3298 3 0,-1 1 0,1 2 0,51 15 0,22 4 0,76 12 0,-108-13 0,19 5 0,0-6 0,114 43 0,-180-55 0,51 13 0,-66-20 0,1 2 0,-1 0 0,0 1 0,-1 1 0,1 1 0,-2 1 0,25 15 0,35 26 0,3-3 0,1-4 0,104 38 0,-126-56 0,-19-11 0,1-1 0,85 16 0,-62-16 0,113 36 0,-108-25 0,-22-7 0,67 15 0,121 36 0,-201-62 0,-2 1 0,1-2 0,0-1 0,38 0 0,-69-5 0,34-1 0,-1 1 0,1 2 0,-1 1 0,0 3 0,68 17 0,-75-15 0,0-1 0,0-1 0,50 2 0,-49-6 0,1 1 0,-1 2 0,36 10 0,-30-5 0,0-2 0,1-2 0,70 3 0,-89-8 0,106 12 0,-67-5 0,60-1 0,-22-7 0,672-30 0,-574 12 0,116-15 0,-87-9 0,-133 23 0,1 3 0,164-7 0,-226 20 0,0 0 0,-1-2 0,0-1 0,0-1 0,0-2 0,-1-1 0,27-13 0,23-7 0,-50 20 0,6-1 0,43-23 0,-43 16 0,1 2 0,38-13 0,-53 22 0,-1-2 0,0 0 0,-1-1 0,0-1 0,21-17 0,-15 12 0,46-27 0,6 1 0,-44 23 0,55-23 0,44-7 0,98-42 0,-193 79 0,0 0 0,1 2 0,67-9 0,23-7 0,-16-4 0,101-25 0,-168 47 0,1 1 0,86-1 0,-87 6 0,69-11 0,24-2 0,-86 14 0,88-15 0,-91 9 0,-1 3 0,54 2 0,-50 2 0,85-11 0,-42 0 0,96-1 0,30-2 0,-54 2 0,190 11 0,-156 4 0,-143-4 0,-1-3 0,60-10 0,-28 4 0,1 4 0,132 7 0,-85 2 0,1617-3 0,-1562 16 0,-17-1 0,50-15-1365,-198 0-5461</inkml:trace>
+</inkml:ink>
+</file>
+
+<file path=ppt/ink/ink12.xml><?xml version="1.0" encoding="utf-8"?>
+<inkml:ink xmlns:inkml="http://www.w3.org/2003/InkML">
+  <inkml:definitions>
+    <inkml:context xml:id="ctx0">
+      <inkml:inkSource xml:id="inkSrc0">
+        <inkml:traceFormat>
+          <inkml:channel name="X" type="integer" min="-2.14748E9" max="2.14748E9" units="cm"/>
+          <inkml:channel name="Y" type="integer" min="-2.14748E9" max="2.14748E9" units="cm"/>
+          <inkml:channel name="F" type="integer" max="32767" units="dev"/>
+        </inkml:traceFormat>
+        <inkml:channelProperties>
+          <inkml:channelProperty channel="X" name="resolution" value="1000" units="1/cm"/>
+          <inkml:channelProperty channel="Y" name="resolution" value="1000" units="1/cm"/>
+          <inkml:channelProperty channel="F" name="resolution" value="0" units="1/dev"/>
+        </inkml:channelProperties>
+      </inkml:inkSource>
       <inkml:timestamp xml:id="ts0" timeString="2025-09-15T13:50:11.024"/>
     </inkml:context>
     <inkml:brush xml:id="br0">
@@ -536,7 +921,147 @@
 </inkml:ink>
 </file>
 
-<file path=ppt/ink/ink12.xml><?xml version="1.0" encoding="utf-8"?>
+<file path=ppt/ink/ink13.xml><?xml version="1.0" encoding="utf-8"?>
+<inkml:ink xmlns:inkml="http://www.w3.org/2003/InkML">
+  <inkml:definitions>
+    <inkml:context xml:id="ctx0">
+      <inkml:inkSource xml:id="inkSrc0">
+        <inkml:traceFormat>
+          <inkml:channel name="X" type="integer" min="-2.14748E9" max="2.14748E9" units="cm"/>
+          <inkml:channel name="Y" type="integer" min="-2.14748E9" max="2.14748E9" units="cm"/>
+          <inkml:channel name="F" type="integer" max="32767" units="dev"/>
+        </inkml:traceFormat>
+        <inkml:channelProperties>
+          <inkml:channelProperty channel="X" name="resolution" value="1000" units="1/cm"/>
+          <inkml:channelProperty channel="Y" name="resolution" value="1000" units="1/cm"/>
+          <inkml:channelProperty channel="F" name="resolution" value="0" units="1/dev"/>
+        </inkml:channelProperties>
+      </inkml:inkSource>
+      <inkml:timestamp xml:id="ts0" timeString="2025-09-15T13:50:02.306"/>
+    </inkml:context>
+    <inkml:brush xml:id="br0">
+      <inkml:brushProperty name="width" value="0.035" units="cm"/>
+      <inkml:brushProperty name="height" value="0.035" units="cm"/>
+      <inkml:brushProperty name="color" value="#C00000"/>
+    </inkml:brush>
+  </inkml:definitions>
+  <inkml:trace contextRef="#ctx0" brushRef="#br0">1 185 24575,'12'-1'0,"0"-1"0,0 0 0,19-5 0,22-4 0,80-1 0,178-22 0,-183 19 0,0 6 0,167 10 0,-112 1 0,-106-1 0,73-1 0,156-19 0,-152 6 0,220 11 0,-172 5 0,3138-3 0,-3298 3 0,-1 1 0,1 2 0,51 15 0,22 4 0,76 12 0,-108-13 0,19 5 0,0-6 0,114 43 0,-180-55 0,51 13 0,-66-20 0,1 2 0,-1 0 0,0 1 0,-1 1 0,1 1 0,-2 1 0,25 15 0,35 26 0,3-3 0,1-4 0,104 38 0,-126-56 0,-19-11 0,1-1 0,85 16 0,-62-16 0,113 36 0,-108-25 0,-22-7 0,67 15 0,121 36 0,-201-62 0,-2 1 0,1-2 0,0-1 0,38 0 0,-69-5 0,34-1 0,-1 1 0,1 2 0,-1 1 0,0 3 0,68 17 0,-75-15 0,0-1 0,0-1 0,50 2 0,-49-6 0,1 1 0,-1 2 0,36 10 0,-30-5 0,0-2 0,1-2 0,70 3 0,-89-8 0,106 12 0,-67-5 0,60-1 0,-22-7 0,672-30 0,-574 12 0,116-15 0,-87-9 0,-133 23 0,1 3 0,164-7 0,-226 20 0,0 0 0,-1-2 0,0-1 0,0-1 0,0-2 0,-1-1 0,27-13 0,23-7 0,-50 20 0,6-1 0,43-23 0,-43 16 0,1 2 0,38-13 0,-53 22 0,-1-2 0,0 0 0,-1-1 0,0-1 0,21-17 0,-15 12 0,46-27 0,6 1 0,-44 23 0,55-23 0,44-7 0,98-42 0,-193 79 0,0 0 0,1 2 0,67-9 0,23-7 0,-16-4 0,101-25 0,-168 47 0,1 1 0,86-1 0,-87 6 0,69-11 0,24-2 0,-86 14 0,88-15 0,-91 9 0,-1 3 0,54 2 0,-50 2 0,85-11 0,-42 0 0,96-1 0,30-2 0,-54 2 0,190 11 0,-156 4 0,-143-4 0,-1-3 0,60-10 0,-28 4 0,1 4 0,132 7 0,-85 2 0,1617-3 0,-1562 16 0,-17-1 0,50-15-1365,-198 0-5461</inkml:trace>
+</inkml:ink>
+</file>
+
+<file path=ppt/ink/ink14.xml><?xml version="1.0" encoding="utf-8"?>
+<inkml:ink xmlns:inkml="http://www.w3.org/2003/InkML">
+  <inkml:definitions>
+    <inkml:context xml:id="ctx0">
+      <inkml:inkSource xml:id="inkSrc0">
+        <inkml:traceFormat>
+          <inkml:channel name="X" type="integer" min="-2.14748E9" max="2.14748E9" units="cm"/>
+          <inkml:channel name="Y" type="integer" min="-2.14748E9" max="2.14748E9" units="cm"/>
+          <inkml:channel name="F" type="integer" max="32767" units="dev"/>
+        </inkml:traceFormat>
+        <inkml:channelProperties>
+          <inkml:channelProperty channel="X" name="resolution" value="1000" units="1/cm"/>
+          <inkml:channelProperty channel="Y" name="resolution" value="1000" units="1/cm"/>
+          <inkml:channelProperty channel="F" name="resolution" value="0" units="1/dev"/>
+        </inkml:channelProperties>
+      </inkml:inkSource>
+      <inkml:timestamp xml:id="ts0" timeString="2025-09-15T13:50:11.024"/>
+    </inkml:context>
+    <inkml:brush xml:id="br0">
+      <inkml:brushProperty name="width" value="0.035" units="cm"/>
+      <inkml:brushProperty name="height" value="0.035" units="cm"/>
+      <inkml:brushProperty name="color" value="#77933C"/>
+    </inkml:brush>
+  </inkml:definitions>
+  <inkml:trace contextRef="#ctx0" brushRef="#br0">0 778 24575,'804'23'0,"-217"-14"0,-346-11 0,-191 2 0,404-18 0,-283 5 0,211 11 0,-169 5 0,2836-3 0,-3020 2 0,1 1 0,33 7 0,-31-4 0,50 3 0,369-8 0,-216-2 0,-212-1 0,0 0 0,39-9 0,-38 5 0,1 2 0,29-1 0,-23 3 0,-1-2 0,0-1 0,0-1 0,0-1 0,32-13 0,140-66 0,-199 84 0,34-18 0,-1-3 0,-1-1 0,-1-1 0,-2-2 0,0-1 0,38-44 0,11 2 0,-6 19 0,-56 39 0,-1 0 0,28-23 0,-32 25 0,0 0 0,1 1 0,0 1 0,1 1 0,0 0 0,0 1 0,0 0 0,26-4 0,54-22 0,-76 23 0,0 0 0,1 1 0,0 1 0,0 1 0,1 1 0,-1 1 0,44-2 0,-22 3 0,46-8 0,-47 5 0,53-2 0,-68 6 0,0 0 0,32-9 0,37-3 0,44-1 0,-80 7 0,70 0 0,2292 10 0,-1378-3 0,-1035 2 0,-1-1 0,1 2 0,0-1 0,-1 1 0,1 0 0,-1 1 0,1 0 0,-1 0 0,12 7 0,5 6 0,36 27 0,5 4 0,-24-20 0,-1 2 0,-2 1 0,-1 2 0,-1 1 0,44 53 0,-42-39 0,91 81 0,-115-116 0,1 0 0,0 0 0,1-2 0,0 0 0,1-1 0,0-1 0,0 0 0,0-1 0,1-1 0,25 4 0,91 15 0,173 54 0,-42-6 0,-226-67 0,1 0 0,0-3 0,0-1 0,58-6 0,-12 2 0,0 0 0,171 21 0,-163-8 0,0-5 0,128-8 0,-69-1 0,688 4 0,-787 1 0,57 11 0,57 2 0,1928-16 0,-2075 0 0,1-2 0,39-8 0,-38 6 0,1 0 0,32 0 0,24 4 0,-23 2 0,0-3 0,0-3 0,83-16 0,-96 10-341,1 3 0,1 1-1,72 0 1,-93 7-6485</inkml:trace>
+</inkml:ink>
+</file>
+
+<file path=ppt/ink/ink15.xml><?xml version="1.0" encoding="utf-8"?>
+<inkml:ink xmlns:inkml="http://www.w3.org/2003/InkML">
+  <inkml:definitions>
+    <inkml:context xml:id="ctx0">
+      <inkml:inkSource xml:id="inkSrc0">
+        <inkml:traceFormat>
+          <inkml:channel name="X" type="integer" min="-2.14748E9" max="2.14748E9" units="cm"/>
+          <inkml:channel name="Y" type="integer" min="-2.14748E9" max="2.14748E9" units="cm"/>
+          <inkml:channel name="F" type="integer" max="32767" units="dev"/>
+        </inkml:traceFormat>
+        <inkml:channelProperties>
+          <inkml:channelProperty channel="X" name="resolution" value="1000" units="1/cm"/>
+          <inkml:channelProperty channel="Y" name="resolution" value="1000" units="1/cm"/>
+          <inkml:channelProperty channel="F" name="resolution" value="0" units="1/dev"/>
+        </inkml:channelProperties>
+      </inkml:inkSource>
+      <inkml:timestamp xml:id="ts0" timeString="2025-09-15T13:51:37.266"/>
+    </inkml:context>
+    <inkml:brush xml:id="br0">
+      <inkml:brushProperty name="width" value="0.035" units="cm"/>
+      <inkml:brushProperty name="height" value="0.035" units="cm"/>
+      <inkml:brushProperty name="color" value="#0070C0"/>
+    </inkml:brush>
+  </inkml:definitions>
+  <inkml:trace contextRef="#ctx0" brushRef="#br0">1 63 24575,'794'-18'0,"112"5"0,-588 15 0,89-26 0,-286 15 0,158 9 0,-112 2 0,3597-2 0,-3738 3 0,0 1 0,0 1 0,-1 1 0,0 1 0,0 1 0,26 13 0,0-2 0,182 79 0,-218-90 0,1 1 0,-2 1 0,26 22 0,13 8 0,-36-27 0,-1 0 0,0 0 0,-1 2 0,-1 0 0,0 1 0,17 26 0,-10-14 0,135 194 0,-117-164 0,1-6 0,-28-38 0,-1 0 0,0 1 0,11 23 0,11 36 0,14 26 0,-31-67 0,-2 1 0,-1 0 0,10 41 0,5 12 0,1 22 0,-21-76 0,-2 0 0,2-1 0,1 0 0,2 0 0,1-1 0,1 0 0,34 55 0,-7-18 0,-30-50 0,1 1 0,0-1 0,24 28 0,5 6 0,-33-41 0,0 0 0,1-1 0,16 15 0,-20-21 0,0-1 0,1 0 0,-1 0 0,1 0 0,0 0 0,-1-1 0,1 0 0,1 0 0,-1 0 0,0-1 0,0 0 0,9 1 0,27 5 0,60 18 0,27 4 0,81 2 0,-120-18 0,-47-7 0,66 4 0,-59-10 0,0 3 0,62 10 0,-36-3 0,-1-4 0,149-7 0,-83-2 0,306 3 0,-415 1 0,0 2 0,35 8 0,-33-4 0,56 2 0,613-8 0,-338-3 0,-342 4 0,0 0 0,40 9 0,-38-5 0,-1-2 0,30 1 0,-27-3 0,50 11 0,20 2 0,-13-7 0,114 26 0,-110-17 0,-55-10 0,43 17 0,25 5 0,-64-20 0,-1 2 0,0 1 0,-1 2 0,-1 1 0,0 2 0,56 37 0,69 33 0,-132-73 0,164 61 0,-162-61 0,26 14 0,51 34 0,-78-46 0,0-1 0,1-2 0,42 14 0,0 0 0,-28-12 0,1-2 0,1-2 0,85 11 0,-25-5 0,-31 0 0,139 55 0,-149-47 0,0-3 0,1-3 0,69 11 0,40 0 0,50 6 0,4-2 0,-122-11 0,46 7 0,-20-14 0,163-1 0,804-16 0,-606 1 0,-443-2 0,53-9 0,13-2 0,-42 6 0,86-21 0,-32 5 0,78 0 0,-128 13 0,0 5 0,136 6 0,-69 2 0,1407-3 0,-1528 1 43,-1 1 1,37 9-1,12 1-1538,-44-9-5331</inkml:trace>
+</inkml:ink>
+</file>
+
+<file path=ppt/ink/ink16.xml><?xml version="1.0" encoding="utf-8"?>
+<inkml:ink xmlns:inkml="http://www.w3.org/2003/InkML">
+  <inkml:definitions>
+    <inkml:context xml:id="ctx0">
+      <inkml:inkSource xml:id="inkSrc0">
+        <inkml:traceFormat>
+          <inkml:channel name="X" type="integer" min="-2.14748E9" max="2.14748E9" units="cm"/>
+          <inkml:channel name="Y" type="integer" min="-2.14748E9" max="2.14748E9" units="cm"/>
+          <inkml:channel name="F" type="integer" max="32767" units="dev"/>
+        </inkml:traceFormat>
+        <inkml:channelProperties>
+          <inkml:channelProperty channel="X" name="resolution" value="1000" units="1/cm"/>
+          <inkml:channelProperty channel="Y" name="resolution" value="1000" units="1/cm"/>
+          <inkml:channelProperty channel="F" name="resolution" value="0" units="1/dev"/>
+        </inkml:channelProperties>
+      </inkml:inkSource>
+      <inkml:timestamp xml:id="ts0" timeString="2025-09-15T13:50:02.306"/>
+    </inkml:context>
+    <inkml:brush xml:id="br0">
+      <inkml:brushProperty name="width" value="0.035" units="cm"/>
+      <inkml:brushProperty name="height" value="0.035" units="cm"/>
+      <inkml:brushProperty name="color" value="#C00000"/>
+    </inkml:brush>
+  </inkml:definitions>
+  <inkml:trace contextRef="#ctx0" brushRef="#br0">1 185 24575,'12'-1'0,"0"-1"0,0 0 0,19-5 0,22-4 0,80-1 0,178-22 0,-183 19 0,0 6 0,167 10 0,-112 1 0,-106-1 0,73-1 0,156-19 0,-152 6 0,220 11 0,-172 5 0,3138-3 0,-3298 3 0,-1 1 0,1 2 0,51 15 0,22 4 0,76 12 0,-108-13 0,19 5 0,0-6 0,114 43 0,-180-55 0,51 13 0,-66-20 0,1 2 0,-1 0 0,0 1 0,-1 1 0,1 1 0,-2 1 0,25 15 0,35 26 0,3-3 0,1-4 0,104 38 0,-126-56 0,-19-11 0,1-1 0,85 16 0,-62-16 0,113 36 0,-108-25 0,-22-7 0,67 15 0,121 36 0,-201-62 0,-2 1 0,1-2 0,0-1 0,38 0 0,-69-5 0,34-1 0,-1 1 0,1 2 0,-1 1 0,0 3 0,68 17 0,-75-15 0,0-1 0,0-1 0,50 2 0,-49-6 0,1 1 0,-1 2 0,36 10 0,-30-5 0,0-2 0,1-2 0,70 3 0,-89-8 0,106 12 0,-67-5 0,60-1 0,-22-7 0,672-30 0,-574 12 0,116-15 0,-87-9 0,-133 23 0,1 3 0,164-7 0,-226 20 0,0 0 0,-1-2 0,0-1 0,0-1 0,0-2 0,-1-1 0,27-13 0,23-7 0,-50 20 0,6-1 0,43-23 0,-43 16 0,1 2 0,38-13 0,-53 22 0,-1-2 0,0 0 0,-1-1 0,0-1 0,21-17 0,-15 12 0,46-27 0,6 1 0,-44 23 0,55-23 0,44-7 0,98-42 0,-193 79 0,0 0 0,1 2 0,67-9 0,23-7 0,-16-4 0,101-25 0,-168 47 0,1 1 0,86-1 0,-87 6 0,69-11 0,24-2 0,-86 14 0,88-15 0,-91 9 0,-1 3 0,54 2 0,-50 2 0,85-11 0,-42 0 0,96-1 0,30-2 0,-54 2 0,190 11 0,-156 4 0,-143-4 0,-1-3 0,60-10 0,-28 4 0,1 4 0,132 7 0,-85 2 0,1617-3 0,-1562 16 0,-17-1 0,50-15-1365,-198 0-5461</inkml:trace>
+</inkml:ink>
+</file>
+
+<file path=ppt/ink/ink17.xml><?xml version="1.0" encoding="utf-8"?>
+<inkml:ink xmlns:inkml="http://www.w3.org/2003/InkML">
+  <inkml:definitions>
+    <inkml:context xml:id="ctx0">
+      <inkml:inkSource xml:id="inkSrc0">
+        <inkml:traceFormat>
+          <inkml:channel name="X" type="integer" min="-2.14748E9" max="2.14748E9" units="cm"/>
+          <inkml:channel name="Y" type="integer" min="-2.14748E9" max="2.14748E9" units="cm"/>
+          <inkml:channel name="F" type="integer" max="32767" units="dev"/>
+        </inkml:traceFormat>
+        <inkml:channelProperties>
+          <inkml:channelProperty channel="X" name="resolution" value="1000" units="1/cm"/>
+          <inkml:channelProperty channel="Y" name="resolution" value="1000" units="1/cm"/>
+          <inkml:channelProperty channel="F" name="resolution" value="0" units="1/dev"/>
+        </inkml:channelProperties>
+      </inkml:inkSource>
+      <inkml:timestamp xml:id="ts0" timeString="2025-09-15T13:50:11.024"/>
+    </inkml:context>
+    <inkml:brush xml:id="br0">
+      <inkml:brushProperty name="width" value="0.035" units="cm"/>
+      <inkml:brushProperty name="height" value="0.035" units="cm"/>
+      <inkml:brushProperty name="color" value="#77933C"/>
+    </inkml:brush>
+  </inkml:definitions>
+  <inkml:trace contextRef="#ctx0" brushRef="#br0">0 778 24575,'804'23'0,"-217"-14"0,-346-11 0,-191 2 0,404-18 0,-283 5 0,211 11 0,-169 5 0,2836-3 0,-3020 2 0,1 1 0,33 7 0,-31-4 0,50 3 0,369-8 0,-216-2 0,-212-1 0,0 0 0,39-9 0,-38 5 0,1 2 0,29-1 0,-23 3 0,-1-2 0,0-1 0,0-1 0,0-1 0,32-13 0,140-66 0,-199 84 0,34-18 0,-1-3 0,-1-1 0,-1-1 0,-2-2 0,0-1 0,38-44 0,11 2 0,-6 19 0,-56 39 0,-1 0 0,28-23 0,-32 25 0,0 0 0,1 1 0,0 1 0,1 1 0,0 0 0,0 1 0,0 0 0,26-4 0,54-22 0,-76 23 0,0 0 0,1 1 0,0 1 0,0 1 0,1 1 0,-1 1 0,44-2 0,-22 3 0,46-8 0,-47 5 0,53-2 0,-68 6 0,0 0 0,32-9 0,37-3 0,44-1 0,-80 7 0,70 0 0,2292 10 0,-1378-3 0,-1035 2 0,-1-1 0,1 2 0,0-1 0,-1 1 0,1 0 0,-1 1 0,1 0 0,-1 0 0,12 7 0,5 6 0,36 27 0,5 4 0,-24-20 0,-1 2 0,-2 1 0,-1 2 0,-1 1 0,44 53 0,-42-39 0,91 81 0,-115-116 0,1 0 0,0 0 0,1-2 0,0 0 0,1-1 0,0-1 0,0 0 0,0-1 0,1-1 0,25 4 0,91 15 0,173 54 0,-42-6 0,-226-67 0,1 0 0,0-3 0,0-1 0,58-6 0,-12 2 0,0 0 0,171 21 0,-163-8 0,0-5 0,128-8 0,-69-1 0,688 4 0,-787 1 0,57 11 0,57 2 0,1928-16 0,-2075 0 0,1-2 0,39-8 0,-38 6 0,1 0 0,32 0 0,24 4 0,-23 2 0,0-3 0,0-3 0,83-16 0,-96 10-341,1 3 0,1 1-1,72 0 1,-93 7-6485</inkml:trace>
+</inkml:ink>
+</file>
+
+<file path=ppt/ink/ink18.xml><?xml version="1.0" encoding="utf-8"?>
 <inkml:ink xmlns:inkml="http://www.w3.org/2003/InkML">
   <inkml:definitions>
     <inkml:context xml:id="ctx0">
@@ -564,119 +1089,7 @@
 </inkml:ink>
 </file>
 
-<file path=ppt/ink/ink13.xml><?xml version="1.0" encoding="utf-8"?>
-<inkml:ink xmlns:inkml="http://www.w3.org/2003/InkML">
-  <inkml:definitions>
-    <inkml:context xml:id="ctx0">
-      <inkml:inkSource xml:id="inkSrc0">
-        <inkml:traceFormat>
-          <inkml:channel name="X" type="integer" min="-2.14748E9" max="2.14748E9" units="cm"/>
-          <inkml:channel name="Y" type="integer" min="-2.14748E9" max="2.14748E9" units="cm"/>
-          <inkml:channel name="F" type="integer" max="32767" units="dev"/>
-        </inkml:traceFormat>
-        <inkml:channelProperties>
-          <inkml:channelProperty channel="X" name="resolution" value="1000" units="1/cm"/>
-          <inkml:channelProperty channel="Y" name="resolution" value="1000" units="1/cm"/>
-          <inkml:channelProperty channel="F" name="resolution" value="0" units="1/dev"/>
-        </inkml:channelProperties>
-      </inkml:inkSource>
-      <inkml:timestamp xml:id="ts0" timeString="2025-09-15T13:51:37.266"/>
-    </inkml:context>
-    <inkml:brush xml:id="br0">
-      <inkml:brushProperty name="width" value="0.035" units="cm"/>
-      <inkml:brushProperty name="height" value="0.035" units="cm"/>
-      <inkml:brushProperty name="color" value="#0070C0"/>
-    </inkml:brush>
-  </inkml:definitions>
-  <inkml:trace contextRef="#ctx0" brushRef="#br0">1 63 24575,'794'-18'0,"112"5"0,-588 15 0,89-26 0,-286 15 0,158 9 0,-112 2 0,3597-2 0,-3738 3 0,0 1 0,0 1 0,-1 1 0,0 1 0,0 1 0,26 13 0,0-2 0,182 79 0,-218-90 0,1 1 0,-2 1 0,26 22 0,13 8 0,-36-27 0,-1 0 0,0 0 0,-1 2 0,-1 0 0,0 1 0,17 26 0,-10-14 0,135 194 0,-117-164 0,1-6 0,-28-38 0,-1 0 0,0 1 0,11 23 0,11 36 0,14 26 0,-31-67 0,-2 1 0,-1 0 0,10 41 0,5 12 0,1 22 0,-21-76 0,-2 0 0,2-1 0,1 0 0,2 0 0,1-1 0,1 0 0,34 55 0,-7-18 0,-30-50 0,1 1 0,0-1 0,24 28 0,5 6 0,-33-41 0,0 0 0,1-1 0,16 15 0,-20-21 0,0-1 0,1 0 0,-1 0 0,1 0 0,0 0 0,-1-1 0,1 0 0,1 0 0,-1 0 0,0-1 0,0 0 0,9 1 0,27 5 0,60 18 0,27 4 0,81 2 0,-120-18 0,-47-7 0,66 4 0,-59-10 0,0 3 0,62 10 0,-36-3 0,-1-4 0,149-7 0,-83-2 0,306 3 0,-415 1 0,0 2 0,35 8 0,-33-4 0,56 2 0,613-8 0,-338-3 0,-342 4 0,0 0 0,40 9 0,-38-5 0,-1-2 0,30 1 0,-27-3 0,50 11 0,20 2 0,-13-7 0,114 26 0,-110-17 0,-55-10 0,43 17 0,25 5 0,-64-20 0,-1 2 0,0 1 0,-1 2 0,-1 1 0,0 2 0,56 37 0,69 33 0,-132-73 0,164 61 0,-162-61 0,26 14 0,51 34 0,-78-46 0,0-1 0,1-2 0,42 14 0,0 0 0,-28-12 0,1-2 0,1-2 0,85 11 0,-25-5 0,-31 0 0,139 55 0,-149-47 0,0-3 0,1-3 0,69 11 0,40 0 0,50 6 0,4-2 0,-122-11 0,46 7 0,-20-14 0,163-1 0,804-16 0,-606 1 0,-443-2 0,53-9 0,13-2 0,-42 6 0,86-21 0,-32 5 0,78 0 0,-128 13 0,0 5 0,136 6 0,-69 2 0,1407-3 0,-1528 1 43,-1 1 1,37 9-1,12 1-1538,-44-9-5331</inkml:trace>
-</inkml:ink>
-</file>
-
-<file path=ppt/ink/ink14.xml><?xml version="1.0" encoding="utf-8"?>
-<inkml:ink xmlns:inkml="http://www.w3.org/2003/InkML">
-  <inkml:definitions>
-    <inkml:context xml:id="ctx0">
-      <inkml:inkSource xml:id="inkSrc0">
-        <inkml:traceFormat>
-          <inkml:channel name="X" type="integer" min="-2.14748E9" max="2.14748E9" units="cm"/>
-          <inkml:channel name="Y" type="integer" min="-2.14748E9" max="2.14748E9" units="cm"/>
-          <inkml:channel name="F" type="integer" max="32767" units="dev"/>
-        </inkml:traceFormat>
-        <inkml:channelProperties>
-          <inkml:channelProperty channel="X" name="resolution" value="1000" units="1/cm"/>
-          <inkml:channelProperty channel="Y" name="resolution" value="1000" units="1/cm"/>
-          <inkml:channelProperty channel="F" name="resolution" value="0" units="1/dev"/>
-        </inkml:channelProperties>
-      </inkml:inkSource>
-      <inkml:timestamp xml:id="ts0" timeString="2025-09-15T13:50:02.306"/>
-    </inkml:context>
-    <inkml:brush xml:id="br0">
-      <inkml:brushProperty name="width" value="0.035" units="cm"/>
-      <inkml:brushProperty name="height" value="0.035" units="cm"/>
-      <inkml:brushProperty name="color" value="#C00000"/>
-    </inkml:brush>
-  </inkml:definitions>
-  <inkml:trace contextRef="#ctx0" brushRef="#br0">1 185 24575,'12'-1'0,"0"-1"0,0 0 0,19-5 0,22-4 0,80-1 0,178-22 0,-183 19 0,0 6 0,167 10 0,-112 1 0,-106-1 0,73-1 0,156-19 0,-152 6 0,220 11 0,-172 5 0,3138-3 0,-3298 3 0,-1 1 0,1 2 0,51 15 0,22 4 0,76 12 0,-108-13 0,19 5 0,0-6 0,114 43 0,-180-55 0,51 13 0,-66-20 0,1 2 0,-1 0 0,0 1 0,-1 1 0,1 1 0,-2 1 0,25 15 0,35 26 0,3-3 0,1-4 0,104 38 0,-126-56 0,-19-11 0,1-1 0,85 16 0,-62-16 0,113 36 0,-108-25 0,-22-7 0,67 15 0,121 36 0,-201-62 0,-2 1 0,1-2 0,0-1 0,38 0 0,-69-5 0,34-1 0,-1 1 0,1 2 0,-1 1 0,0 3 0,68 17 0,-75-15 0,0-1 0,0-1 0,50 2 0,-49-6 0,1 1 0,-1 2 0,36 10 0,-30-5 0,0-2 0,1-2 0,70 3 0,-89-8 0,106 12 0,-67-5 0,60-1 0,-22-7 0,672-30 0,-574 12 0,116-15 0,-87-9 0,-133 23 0,1 3 0,164-7 0,-226 20 0,0 0 0,-1-2 0,0-1 0,0-1 0,0-2 0,-1-1 0,27-13 0,23-7 0,-50 20 0,6-1 0,43-23 0,-43 16 0,1 2 0,38-13 0,-53 22 0,-1-2 0,0 0 0,-1-1 0,0-1 0,21-17 0,-15 12 0,46-27 0,6 1 0,-44 23 0,55-23 0,44-7 0,98-42 0,-193 79 0,0 0 0,1 2 0,67-9 0,23-7 0,-16-4 0,101-25 0,-168 47 0,1 1 0,86-1 0,-87 6 0,69-11 0,24-2 0,-86 14 0,88-15 0,-91 9 0,-1 3 0,54 2 0,-50 2 0,85-11 0,-42 0 0,96-1 0,30-2 0,-54 2 0,190 11 0,-156 4 0,-143-4 0,-1-3 0,60-10 0,-28 4 0,1 4 0,132 7 0,-85 2 0,1617-3 0,-1562 16 0,-17-1 0,50-15-1365,-198 0-5461</inkml:trace>
-</inkml:ink>
-</file>
-
-<file path=ppt/ink/ink15.xml><?xml version="1.0" encoding="utf-8"?>
-<inkml:ink xmlns:inkml="http://www.w3.org/2003/InkML">
-  <inkml:definitions>
-    <inkml:context xml:id="ctx0">
-      <inkml:inkSource xml:id="inkSrc0">
-        <inkml:traceFormat>
-          <inkml:channel name="X" type="integer" min="-2.14748E9" max="2.14748E9" units="cm"/>
-          <inkml:channel name="Y" type="integer" min="-2.14748E9" max="2.14748E9" units="cm"/>
-          <inkml:channel name="F" type="integer" max="32767" units="dev"/>
-        </inkml:traceFormat>
-        <inkml:channelProperties>
-          <inkml:channelProperty channel="X" name="resolution" value="1000" units="1/cm"/>
-          <inkml:channelProperty channel="Y" name="resolution" value="1000" units="1/cm"/>
-          <inkml:channelProperty channel="F" name="resolution" value="0" units="1/dev"/>
-        </inkml:channelProperties>
-      </inkml:inkSource>
-      <inkml:timestamp xml:id="ts0" timeString="2025-09-15T13:50:11.024"/>
-    </inkml:context>
-    <inkml:brush xml:id="br0">
-      <inkml:brushProperty name="width" value="0.035" units="cm"/>
-      <inkml:brushProperty name="height" value="0.035" units="cm"/>
-      <inkml:brushProperty name="color" value="#77933C"/>
-    </inkml:brush>
-  </inkml:definitions>
-  <inkml:trace contextRef="#ctx0" brushRef="#br0">0 778 24575,'804'23'0,"-217"-14"0,-346-11 0,-191 2 0,404-18 0,-283 5 0,211 11 0,-169 5 0,2836-3 0,-3020 2 0,1 1 0,33 7 0,-31-4 0,50 3 0,369-8 0,-216-2 0,-212-1 0,0 0 0,39-9 0,-38 5 0,1 2 0,29-1 0,-23 3 0,-1-2 0,0-1 0,0-1 0,0-1 0,32-13 0,140-66 0,-199 84 0,34-18 0,-1-3 0,-1-1 0,-1-1 0,-2-2 0,0-1 0,38-44 0,11 2 0,-6 19 0,-56 39 0,-1 0 0,28-23 0,-32 25 0,0 0 0,1 1 0,0 1 0,1 1 0,0 0 0,0 1 0,0 0 0,26-4 0,54-22 0,-76 23 0,0 0 0,1 1 0,0 1 0,0 1 0,1 1 0,-1 1 0,44-2 0,-22 3 0,46-8 0,-47 5 0,53-2 0,-68 6 0,0 0 0,32-9 0,37-3 0,44-1 0,-80 7 0,70 0 0,2292 10 0,-1378-3 0,-1035 2 0,-1-1 0,1 2 0,0-1 0,-1 1 0,1 0 0,-1 1 0,1 0 0,-1 0 0,12 7 0,5 6 0,36 27 0,5 4 0,-24-20 0,-1 2 0,-2 1 0,-1 2 0,-1 1 0,44 53 0,-42-39 0,91 81 0,-115-116 0,1 0 0,0 0 0,1-2 0,0 0 0,1-1 0,0-1 0,0 0 0,0-1 0,1-1 0,25 4 0,91 15 0,173 54 0,-42-6 0,-226-67 0,1 0 0,0-3 0,0-1 0,58-6 0,-12 2 0,0 0 0,171 21 0,-163-8 0,0-5 0,128-8 0,-69-1 0,688 4 0,-787 1 0,57 11 0,57 2 0,1928-16 0,-2075 0 0,1-2 0,39-8 0,-38 6 0,1 0 0,32 0 0,24 4 0,-23 2 0,0-3 0,0-3 0,83-16 0,-96 10-341,1 3 0,1 1-1,72 0 1,-93 7-6485</inkml:trace>
-</inkml:ink>
-</file>
-
-<file path=ppt/ink/ink16.xml><?xml version="1.0" encoding="utf-8"?>
-<inkml:ink xmlns:inkml="http://www.w3.org/2003/InkML">
-  <inkml:definitions>
-    <inkml:context xml:id="ctx0">
-      <inkml:inkSource xml:id="inkSrc0">
-        <inkml:traceFormat>
-          <inkml:channel name="X" type="integer" min="-2.14748E9" max="2.14748E9" units="cm"/>
-          <inkml:channel name="Y" type="integer" min="-2.14748E9" max="2.14748E9" units="cm"/>
-          <inkml:channel name="F" type="integer" max="32767" units="dev"/>
-        </inkml:traceFormat>
-        <inkml:channelProperties>
-          <inkml:channelProperty channel="X" name="resolution" value="1000" units="1/cm"/>
-          <inkml:channelProperty channel="Y" name="resolution" value="1000" units="1/cm"/>
-          <inkml:channelProperty channel="F" name="resolution" value="0" units="1/dev"/>
-        </inkml:channelProperties>
-      </inkml:inkSource>
-      <inkml:timestamp xml:id="ts0" timeString="2025-09-15T13:51:23.978"/>
-    </inkml:context>
-    <inkml:brush xml:id="br0">
-      <inkml:brushProperty name="width" value="0.035" units="cm"/>
-      <inkml:brushProperty name="height" value="0.035" units="cm"/>
-      <inkml:brushProperty name="color" value="#7030A0"/>
-    </inkml:brush>
-  </inkml:definitions>
-  <inkml:trace contextRef="#ctx0" brushRef="#br0">1 3320 24575,'112'1'0,"34"0"0,186-21 0,-267 14 0,66 2 0,13 0 0,-32-9 0,37-3 0,862 15 0,-491 3 0,1666-2 0,-2130 3 0,57 9 0,47 3 0,1015-13 0,-569-5 0,-509 5 0,112-4 0,-61-27 0,-104 20 0,-1-2 0,-1-2 0,47-20 0,116-64 0,-182 83 0,-1-1 0,0-2 0,0 0 0,-2-1 0,28-32 0,27-24 0,-14 19 0,-29 24 0,46-34 0,-52 45 0,-2 0 0,0-2 0,-1-1 0,-1-1 0,-2 0 0,0-2 0,-2 0 0,0-2 0,17-38 0,-17 23 0,-14 31 0,0 2 0,1-1 0,0 0 0,0 1 0,1 0 0,1 0 0,10-11 0,-5 5 0,0 0 0,-1 0 0,13-25 0,-14 23 0,0 1 0,2 0 0,17-21 0,60-81 0,-75 102 0,-1 0 0,-1-2 0,-1 1 0,-1-1 0,14-35 0,-14 31 0,1 0 0,1 0 0,22-31 0,26-34 0,-38 55 0,40-49 0,-43 59 0,6-5 0,43-39 0,-60 60 0,0 0 0,1 1 0,0 0 0,1 1 0,-1 0 0,1 0 0,0 1 0,0 0 0,0 1 0,12-3 0,101-26 0,-14 2 0,-58 18 0,-26 6 0,0 1 0,0 1 0,30-1 0,-29 3 0,52-11 0,-51 8 0,51-4 0,-44 8 0,-1-1 0,62-12 0,106-17 0,-146 23 0,-1 4 0,1 1 0,74 6 0,79-3 0,-125-14 0,-60 9 0,0 0 0,30 0 0,186 7 0,85-4 0,-210-13 0,-66 8 0,65-2 0,-75 6 0,0-1 0,0-2 0,47-14 0,44-7 0,-92 19 0,-1-2 0,0-1 0,-1-1 0,64-34 0,2 1 0,-61 29 0,6-3 0,56-29 0,-72 33 0,1 1 0,56-16 0,23-9 0,-89 30 0,46-21 0,0-2 0,75-50 0,83-54 0,-138 86 0,-50 27 0,-23 14 0,1 0 0,-1 1 0,1 0 0,1 1 0,-1 0 0,1 2 0,0 0 0,20-4 0,33-3 0,79-24 0,42-9 0,140-17 0,-263 50 0,-42 6 0,0 1 0,37-1 0,507 7 0,-532-3 0,63-11 0,-60 6 0,50-1 0,64 10 0,82-4 0,-152-12 0,-56 8 0,45-3 0,142 9 0,45-2 0,-145-11 0,-58 5 0,69-1 0,34 12 0,180-5 0,-221-12 0,43-2 0,422 15 0,-277 2 0,-284-2 0,-1-1 0,40-10 0,-37 7 0,-1 1 0,28-2 0,539 5 82,-286 3-1529,-279-2-5379</inkml:trace>
-</inkml:ink>
-</file>
-
-<file path=ppt/ink/ink17.xml><?xml version="1.0" encoding="utf-8"?>
+<file path=ppt/ink/ink19.xml><?xml version="1.0" encoding="utf-8"?>
 <inkml:ink xmlns:inkml="http://www.w3.org/2003/InkML">
   <inkml:definitions>
     <inkml:context xml:id="ctx0">
@@ -720,47 +1133,18 @@
           <inkml:channelProperty channel="F" name="resolution" value="0" units="1/dev"/>
         </inkml:channelProperties>
       </inkml:inkSource>
-      <inkml:timestamp xml:id="ts0" timeString="2025-09-22T13:33:37.900"/>
+      <inkml:timestamp xml:id="ts0" timeString="2026-09-28T17:51:23.474"/>
     </inkml:context>
     <inkml:brush xml:id="br0">
       <inkml:brushProperty name="width" value="0.035" units="cm"/>
       <inkml:brushProperty name="height" value="0.035" units="cm"/>
-      <inkml:brushProperty name="color" value="#FF0066"/>
     </inkml:brush>
   </inkml:definitions>
-  <inkml:trace contextRef="#ctx0" brushRef="#br0">1 36 24575,'15'-1'0,"1"-1"0,-1 0 0,26-8 0,29-4 0,347 7 0,-230 10 0,-128-3 0,0 3 0,87 14 0,5 0 0,-5-1 0,-111-11 0,57-1 0,-65-3 0,1 0 0,0 1 0,46 11 0,-8 0 0,-53-12 0,-1 0 0,0 2 0,0-1 0,0 2 0,0-1 0,0 2 0,20 10 0,11 9 0,1-3 0,0-1 0,88 26 0,-93-36 0,79 10 0,-1-1 0,-31-1 0,198 54 0,-236-58 0,74 9 0,17 5 0,5 22 0,-103-34 0,1-1 0,0-2 0,52 8 0,-55-13 0,0 2 0,-1 1 0,-1 2 0,48 23 0,-28-11 0,4-2 0,-41-17 0,-1 1 0,0 1 0,0 1 0,0 1 0,-1 0 0,-1 1 0,30 25 0,-34-25 0,1 0 0,1-1 0,0 0 0,18 8 0,39 26 0,-57-33 0,0-2 0,0 0 0,1-1 0,0-1 0,30 10 0,88 17 0,70 21 0,-151-39 0,1-2 0,1-3 0,76 6 0,-30-3 0,-55-6 0,71 1 0,-51-10 0,-40 0 0,0 0 0,0 2 0,0 0 0,0 2 0,29 7 0,-26-3 0,0-2 0,0-1 0,1-2 0,37 0 0,24 1 0,0 12 0,-65-10 0,-1 0 0,32 1 0,-9-5 0,-8-1 0,-1 2 0,0 1 0,40 10 0,-51-8 0,0-2 0,1 0 0,32-2 0,-35-2 0,0 2 0,-1 0 0,1 2 0,28 7 0,-14-1 0,0-2 0,59 3 0,32 5 0,-43 2 0,88 14 0,21-1 0,-185-29 0,-1 1 0,1 0 0,-1 0 0,0 1 0,1 1 0,-1 0 0,-1 0 0,1 1 0,-1 1 0,0 0 0,0 0 0,0 1 0,-1 0 0,0 0 0,12 13 0,31 42 0,-23-30 0,-2 2 0,-1 1 0,24 41 0,-32-45 0,-2 1 0,0 0 0,-3 1 0,0 1 0,8 42 0,-9-23 0,-5-25 0,-1 1 0,3 57 0,-7-39 0,-3 0 0,-1 0 0,-18 91 0,18-124 0,-1 0 0,-1 0 0,-1 0 0,0-1 0,0 1 0,-1-1 0,-1-1 0,0 1 0,-15 18 0,9-12 0,0 0 0,0 1 0,-15 38 0,-10 16 0,28-53 0,1 0 0,0 1 0,2 0 0,0 1 0,-5 41 0,3-21 0,-2 19 0,10-48 0,-1 0 0,-1 0 0,0-1 0,0 1 0,-2-1 0,0 0 0,0 0 0,-1 0 0,0-1 0,-1 0 0,-10 13 0,-7 3 0,-1-1 0,-1-1 0,-2-1 0,-30 20 0,-22 9 0,-112 56 0,175-101 0,-2-1 0,0-1 0,0 0 0,0-2 0,-1 0 0,-25 2 0,-6 2 0,24-5 0,-1-1 0,-29 0 0,33-3 0,0 2 0,0 0 0,-30 8 0,2 0 0,0-3 0,0-2 0,-1-2 0,-81-5 0,68-1 0,0 4 0,-78 10 0,59-2 0,-104-1 0,36-3 0,14 10 0,-44 2 0,157-17 0,-210-4 0,192 1 0,0-3 0,0-1 0,-55-17 0,6 1 0,64 18 0,1-2 0,-1-1 0,-43-19 0,57 17 0,1 1 0,0-2 0,0 0 0,1-1 0,0 0 0,1-1 0,1 0 0,0-1 0,1 0 0,0-1 0,1 0 0,-9-21 0,-1 0 0,-26-38 0,25 43 0,-28-57 0,40 71 0,0 0 0,1-1 0,1 0 0,1-1 0,0 1 0,2-1 0,-3-23 0,-9-96 0,8 91 0,-2-64 0,8 43 0,4-127 0,1 175 0,0 1 0,2 0 0,0 0 0,1 1 0,1 0 0,1 0 0,0 1 0,14-19 0,-17 28 0,0 0 0,1 0 0,0 1 0,0 0 0,0 0 0,1 1 0,0 0 0,1 1 0,-1-1 0,17-6 0,-7 4 0,0 2 0,1 0 0,0 0 0,28-3 0,24-4 0,-42 6 0,1 2 0,40-2 0,-29 7 0,-4 0 0,0-2 0,47-8 0,16-3 0,0 5 0,190 7 0,-121 4 0,1777-3 0,-1913-3 0,-1-2 0,0-1 0,0-1 0,-1-1 0,0-2 0,55-26 0,32-10 0,-92 36 0,0-2 0,48-29 0,-51 27 0,0 1 0,1 0 0,44-14 0,-25 14 0,0-1 0,-1-3 0,0-1 0,73-45 0,-88 43 0,42-42 0,-47 40 0,1 2 0,37-27 0,-8 17 0,-35 20 0,1 0 0,-2-1 0,1 0 0,-1-2 0,-1 1 0,23-26 0,-28 26 0,1 1 0,1 1 0,0 0 0,16-10 0,23-20 0,-6 3 0,1 3 0,61-35 0,-69 45 0,-21 14 0,1 2 0,0 0 0,1 1 0,35-9 0,-36 12 0,0-1 0,0-1 0,-1 0 0,0-2 0,28-15 0,-30 14 0,1 1 0,0 1 0,0 1 0,1 0 0,0 1 0,0 1 0,24-3 0,6-2 0,18-6 0,0 4 0,1 2 0,92-1 0,-95 10 0,-1-3 0,74-13 0,-45 5 0,1 5 0,145 7 0,-82 2 0,227-3-1365,-354 0-5461</inkml:trace>
+  <inkml:trace contextRef="#ctx0" brushRef="#br0">0 1134 24575,'6'-2'0,"-1"0"0,0 0 0,0 0 0,0 0 0,0-1 0,0 0 0,0 0 0,-1 0 0,0-1 0,1 0 0,-1 0 0,0 0 0,5-7 0,0 1 0,70-75 0,-41 42 0,72-63 0,-39 49 0,3 4 0,2 2 0,88-42 0,-102 62 0,197-92 0,-222 109 0,66-14 0,-6 2 0,-34 9 0,72-10 0,-71 16 0,74-23 0,64-26 0,-111 35 0,153-21 0,136-20 0,-307 56 0,145-3 0,-181 12 0,63-12 0,-61 7 0,55-2 0,93-5 0,-10-1 0,425 14 0,-285 1 0,-255 3 0,-1 2 0,113 27 0,5 2 0,195 25 0,-112-5 0,-200-43 0,0 3 0,93 35 0,-44-12 0,-81-27 0,0 2 0,30 17 0,32 14 0,170 71 0,-195-78 0,-2 3 0,78 62 0,139 163 0,-263-246 0,122 95 0,-100-74-1365,-27-29-5461</inkml:trace>
 </inkml:ink>
 </file>
 
-<file path=ppt/ink/ink3.xml><?xml version="1.0" encoding="utf-8"?>
-<inkml:ink xmlns:inkml="http://www.w3.org/2003/InkML">
-  <inkml:definitions>
-    <inkml:context xml:id="ctx0">
-      <inkml:inkSource xml:id="inkSrc0">
-        <inkml:traceFormat>
-          <inkml:channel name="X" type="integer" min="-2.14748E9" max="2.14748E9" units="cm"/>
-          <inkml:channel name="Y" type="integer" min="-2.14748E9" max="2.14748E9" units="cm"/>
-          <inkml:channel name="F" type="integer" max="32767" units="dev"/>
-        </inkml:traceFormat>
-        <inkml:channelProperties>
-          <inkml:channelProperty channel="X" name="resolution" value="1000" units="1/cm"/>
-          <inkml:channelProperty channel="Y" name="resolution" value="1000" units="1/cm"/>
-          <inkml:channelProperty channel="F" name="resolution" value="0" units="1/dev"/>
-        </inkml:channelProperties>
-      </inkml:inkSource>
-      <inkml:timestamp xml:id="ts0" timeString="2025-09-22T13:37:36.793"/>
-    </inkml:context>
-    <inkml:brush xml:id="br0">
-      <inkml:brushProperty name="width" value="0.035" units="cm"/>
-      <inkml:brushProperty name="height" value="0.035" units="cm"/>
-      <inkml:brushProperty name="color" value="#FF0066"/>
-    </inkml:brush>
-  </inkml:definitions>
-  <inkml:trace contextRef="#ctx0" brushRef="#br0">1 70 24575,'400'-34'0,"-273"18"0,116-1 0,261 15 0,-227 5 0,318-3 0,-567 3 0,0 1 0,0 1 0,0 2 0,0 1 0,-1 1 0,44 21 0,6 0 0,185 63 0,-205-69 0,54 32 0,-30-14 0,-66-34 0,-1 2 0,1 0 0,-1 1 0,-1 0 0,16 18 0,34 27 0,-20-28 0,69 35 0,-5-4 0,-64-32 0,-14-7 0,1-3 0,35 17 0,-59-32 0,19 10 0,1-1 0,0-2 0,1 0 0,0-2 0,0-1 0,40 4 0,-34-7 0,44 10 0,-46-6 0,58 3 0,-71-10 0,22 1 0,-1 1 0,75 14 0,104 18 0,-119-23 0,-68-9 0,59 11 0,286 66 0,-288-71 0,22 4 0,-12 0 0,1-3 0,179-9 0,-115-3 0,-123 2 0,0 2 0,0 2 0,72 14 0,-74-9 0,0-3 0,43 2 0,50 7 0,-77-7 0,0-2 0,93-4 0,-92-3 0,0 3 0,85 12 0,36 5 0,-102-13 0,-40 0 0,0 1 0,-1 1 0,0 3 0,0 0 0,-1 2 0,0 1 0,56 33 0,-64-29 0,-1 0 0,-1 2 0,-1 0 0,0 2 0,-1 0 0,30 44 0,-42-53 0,-1 1 0,0 0 0,-1 0 0,-1 1 0,0 0 0,-1 0 0,3 18 0,7 104 0,-5-38 0,31 148 0,-32-185 0,-2-1 0,-3 1 0,-6 72 0,1-22 0,0-87 0,0 1 0,-12 44 0,9-43 0,0 0 0,-2 34 0,6-22 0,-1 1 0,-14 63 0,8-52 0,7-39 0,-1 0 0,0 0 0,0-1 0,-1 1 0,0 0 0,-1-1 0,0 0 0,-7 12 0,-34 66 0,39-73 0,-1 0 0,0-1 0,-1 0 0,0 0 0,-1-1 0,0 0 0,-1-1 0,-22 21 0,-13 8 0,-67 79 0,32-31 0,61-72 0,-2 0 0,0-2 0,-1 0 0,0-1 0,-34 15 0,-6 4 0,43-25 0,0 0 0,0-1 0,-1-1 0,0-1 0,-1-1 0,-32 3 0,-5 2 0,-22 0 0,-1-3 0,-141-7 0,75-2 0,-1405 3 0,1527-2 0,-1-1 0,0-1 0,1-1 0,-45-16 0,-40-9 0,12 11 0,-117-41 0,145 40 0,51 15 0,-1 0 0,0-1 0,1-1 0,0-1 0,1-1 0,0 0 0,0-2 0,-23-17 0,-22-19 0,-13-11 0,71 54 0,-25-24 0,0-1 0,-34-47 0,56 65 0,1 0 0,0 0 0,0-1 0,2 1 0,-1-2 0,2 1 0,-1 0 0,2-1 0,0 0 0,0 0 0,-1-23 0,9-261 0,-3 278 0,2 0 0,0 0 0,1 0 0,1 1 0,0 0 0,2 0 0,0 1 0,20-31 0,-8 17 0,2 1 0,2 2 0,44-44 0,-30 42 0,-29 24 0,0-1 0,0 0 0,15-17 0,47-49 0,4-4 0,-53 52 0,1 1 0,2 2 0,0 0 0,53-34 0,-61 46 0,0 1 0,0 1 0,1 1 0,0 1 0,0 0 0,1 1 0,-1 1 0,37-3 0,13 3 0,79 6 0,-50 1 0,2588-3 0,-2660 1 0,0 2 0,44 10 0,31 3 0,-84-14 0,-2 0 0,1 1 0,0 1 0,-1 1 0,1 0 0,-1 0 0,0 2 0,-1 0 0,0 0 0,0 1 0,17 14 0,14 15 0,67 73 0,-45-43 0,-53-53 0,0 0 0,-1 1 0,0 0 0,-1 0 0,-1 1 0,-1 1 0,0 0 0,11 30 0,-8-6 0,-1-1 0,9 77 0,-6-38 0,-7-52 0,-3 0 0,4 40 0,-8-36 0,-1 125 0,0-134 0,-2-1 0,-1 0 0,0 1 0,-2-1 0,-9 23 0,7-23 0,-1 3 0,-1 1 0,-1-1 0,-1-1 0,-1 0 0,-31 41 0,23-38 0,-31 51 0,34-48 0,-36 46 0,40-61 0,-1-1 0,0-1 0,-1 0 0,-20 12 0,-24 18 0,28-20 0,-1-1 0,0-2 0,-2-2 0,-61 23 0,75-31 0,-50 22 0,50-20 0,-1-1 0,0-1 0,0-1 0,-1-1 0,0-1 0,0-1 0,-1-1 0,-25 1 0,-8-4 0,0 1 0,-61 12 0,38-4 0,1-3 0,-147-8 0,83-2 0,100 4 0,1 2 0,-71 14 0,74-12 0,-1-1 0,-61-2 0,-15 1 0,26 13 0,65-11 0,-1 0 0,-31 1 0,-274-5 0,153-3 0,148 1 0,0-2 0,-38-9 0,33 6 0,-43-4 0,-88 11 0,-42-3 0,96-14 0,68 8 0,-59-2 0,88 10 0,-38-1 0,-57-9 0,90 6 0,1 0 0,0-1 0,0-1 0,0-1 0,1 0 0,-23-14 0,-202-133 0,178 116 0,47 28 0,0 0 0,1-1 0,-27-22 0,28 19 0,-1 1 0,-32-18 0,35 23 0,0 0 0,1-1 0,0-1 0,1 0 0,-1-1 0,-11-14 0,8 3 0,1 0 0,-18-38 0,20 36 0,0 1 0,-24-31 0,18 29 0,1-1 0,2-1 0,0 0 0,2-1 0,0-1 0,3 0 0,0 0 0,-9-44 0,10 28 0,2 15 0,2 1 0,2-2 0,-2-30 0,5 24 0,0 1 0,1 1 0,1-1 0,9-51 0,-8 77 0,1 1 0,-1-1 0,1 1 0,1 0 0,0 0 0,0 0 0,1 0 0,0 1 0,0 0 0,1 0 0,0 0 0,0 1 0,1 0 0,0 0 0,1 0 0,-1 1 0,12-7 0,25-13 0,1 2 0,1 2 0,1 1 0,69-18 0,-74 32 0,0 1 0,0 3 0,0 1 0,70 6 0,-7-1 0,490-3 0,-562 2 0,0 1 0,37 9 0,-34-5 0,54 2 0,-54-8 0,0 2 0,-1 1 0,36 8 0,-21-3 0,1-4 0,-1-1 0,1-2 0,54-6 0,4 1 0,491 3 0,-571 2 0,0 1 0,-1 2 0,0 0 0,41 14 0,-40-10 0,0-1 0,1-1 0,57 4 0,242-12 0,-131-1 0,-174 0 0,1-2 0,-1 0 0,0-2 0,0 0 0,-1-2 0,0-1 0,33-17 0,-4 3 0,-16 6 0,-1-1 0,-1-2 0,48-36 0,-12-8 0,-52 46 0,0 1 0,1 1 0,24-16 0,74-51 0,-52 36 0,-33 21 0,-1 0 0,37-42 0,-37 35 0,56-45 0,-45 41 0,-1-1 0,56-68 0,-11 11 0,-66 77 0,37-27 0,-6 5 0,26-18 0,-48 39 0,34-32 0,9-3 0,-51 39 0,35-30 0,-31 22 0,2 1 0,1 1 0,47-27 0,98-40 0,-161 83 0,1 0 0,-1 1 0,1 1 0,0 0 0,0 0 0,25 0 0,85 5 0,-54 1 0,-27-4 0,0-1 0,73-14 0,-38 6 0,0 4 0,153 6 0,-87 3 0,648-3-1365,-762 0-5461</inkml:trace>
-</inkml:ink>
-</file>
-
-<file path=ppt/ink/ink4.xml><?xml version="1.0" encoding="utf-8"?>
+<file path=ppt/ink/ink20.xml><?xml version="1.0" encoding="utf-8"?>
 <inkml:ink xmlns:inkml="http://www.w3.org/2003/InkML">
   <inkml:definitions>
     <inkml:context xml:id="ctx0">
@@ -788,35 +1172,7 @@
 </inkml:ink>
 </file>
 
-<file path=ppt/ink/ink5.xml><?xml version="1.0" encoding="utf-8"?>
-<inkml:ink xmlns:inkml="http://www.w3.org/2003/InkML">
-  <inkml:definitions>
-    <inkml:context xml:id="ctx0">
-      <inkml:inkSource xml:id="inkSrc0">
-        <inkml:traceFormat>
-          <inkml:channel name="X" type="integer" min="-2.14748E9" max="2.14748E9" units="cm"/>
-          <inkml:channel name="Y" type="integer" min="-2.14748E9" max="2.14748E9" units="cm"/>
-          <inkml:channel name="F" type="integer" max="32767" units="dev"/>
-        </inkml:traceFormat>
-        <inkml:channelProperties>
-          <inkml:channelProperty channel="X" name="resolution" value="1000" units="1/cm"/>
-          <inkml:channelProperty channel="Y" name="resolution" value="1000" units="1/cm"/>
-          <inkml:channelProperty channel="F" name="resolution" value="0" units="1/dev"/>
-        </inkml:channelProperties>
-      </inkml:inkSource>
-      <inkml:timestamp xml:id="ts0" timeString="2025-09-15T13:50:02.306"/>
-    </inkml:context>
-    <inkml:brush xml:id="br0">
-      <inkml:brushProperty name="width" value="0.035" units="cm"/>
-      <inkml:brushProperty name="height" value="0.035" units="cm"/>
-      <inkml:brushProperty name="color" value="#C00000"/>
-    </inkml:brush>
-  </inkml:definitions>
-  <inkml:trace contextRef="#ctx0" brushRef="#br0">1 185 24575,'12'-1'0,"0"-1"0,0 0 0,19-5 0,22-4 0,80-1 0,178-22 0,-183 19 0,0 6 0,167 10 0,-112 1 0,-106-1 0,73-1 0,156-19 0,-152 6 0,220 11 0,-172 5 0,3138-3 0,-3298 3 0,-1 1 0,1 2 0,51 15 0,22 4 0,76 12 0,-108-13 0,19 5 0,0-6 0,114 43 0,-180-55 0,51 13 0,-66-20 0,1 2 0,-1 0 0,0 1 0,-1 1 0,1 1 0,-2 1 0,25 15 0,35 26 0,3-3 0,1-4 0,104 38 0,-126-56 0,-19-11 0,1-1 0,85 16 0,-62-16 0,113 36 0,-108-25 0,-22-7 0,67 15 0,121 36 0,-201-62 0,-2 1 0,1-2 0,0-1 0,38 0 0,-69-5 0,34-1 0,-1 1 0,1 2 0,-1 1 0,0 3 0,68 17 0,-75-15 0,0-1 0,0-1 0,50 2 0,-49-6 0,1 1 0,-1 2 0,36 10 0,-30-5 0,0-2 0,1-2 0,70 3 0,-89-8 0,106 12 0,-67-5 0,60-1 0,-22-7 0,672-30 0,-574 12 0,116-15 0,-87-9 0,-133 23 0,1 3 0,164-7 0,-226 20 0,0 0 0,-1-2 0,0-1 0,0-1 0,0-2 0,-1-1 0,27-13 0,23-7 0,-50 20 0,6-1 0,43-23 0,-43 16 0,1 2 0,38-13 0,-53 22 0,-1-2 0,0 0 0,-1-1 0,0-1 0,21-17 0,-15 12 0,46-27 0,6 1 0,-44 23 0,55-23 0,44-7 0,98-42 0,-193 79 0,0 0 0,1 2 0,67-9 0,23-7 0,-16-4 0,101-25 0,-168 47 0,1 1 0,86-1 0,-87 6 0,69-11 0,24-2 0,-86 14 0,88-15 0,-91 9 0,-1 3 0,54 2 0,-50 2 0,85-11 0,-42 0 0,96-1 0,30-2 0,-54 2 0,190 11 0,-156 4 0,-143-4 0,-1-3 0,60-10 0,-28 4 0,1 4 0,132 7 0,-85 2 0,1617-3 0,-1562 16 0,-17-1 0,50-15-1365,-198 0-5461</inkml:trace>
-</inkml:ink>
-</file>
-
-<file path=ppt/ink/ink6.xml><?xml version="1.0" encoding="utf-8"?>
+<file path=ppt/ink/ink21.xml><?xml version="1.0" encoding="utf-8"?>
 <inkml:ink xmlns:inkml="http://www.w3.org/2003/InkML">
   <inkml:definitions>
     <inkml:context xml:id="ctx0">
@@ -844,7 +1200,7 @@
 </inkml:ink>
 </file>
 
-<file path=ppt/ink/ink7.xml><?xml version="1.0" encoding="utf-8"?>
+<file path=ppt/ink/ink22.xml><?xml version="1.0" encoding="utf-8"?>
 <inkml:ink xmlns:inkml="http://www.w3.org/2003/InkML">
   <inkml:definitions>
     <inkml:context xml:id="ctx0">
@@ -860,47 +1216,19 @@
           <inkml:channelProperty channel="F" name="resolution" value="0" units="1/dev"/>
         </inkml:channelProperties>
       </inkml:inkSource>
-      <inkml:timestamp xml:id="ts0" timeString="2025-09-15T13:50:02.306"/>
+      <inkml:timestamp xml:id="ts0" timeString="2025-09-15T13:51:23.978"/>
     </inkml:context>
     <inkml:brush xml:id="br0">
       <inkml:brushProperty name="width" value="0.035" units="cm"/>
       <inkml:brushProperty name="height" value="0.035" units="cm"/>
-      <inkml:brushProperty name="color" value="#C00000"/>
+      <inkml:brushProperty name="color" value="#7030A0"/>
     </inkml:brush>
   </inkml:definitions>
-  <inkml:trace contextRef="#ctx0" brushRef="#br0">1 185 24575,'12'-1'0,"0"-1"0,0 0 0,19-5 0,22-4 0,80-1 0,178-22 0,-183 19 0,0 6 0,167 10 0,-112 1 0,-106-1 0,73-1 0,156-19 0,-152 6 0,220 11 0,-172 5 0,3138-3 0,-3298 3 0,-1 1 0,1 2 0,51 15 0,22 4 0,76 12 0,-108-13 0,19 5 0,0-6 0,114 43 0,-180-55 0,51 13 0,-66-20 0,1 2 0,-1 0 0,0 1 0,-1 1 0,1 1 0,-2 1 0,25 15 0,35 26 0,3-3 0,1-4 0,104 38 0,-126-56 0,-19-11 0,1-1 0,85 16 0,-62-16 0,113 36 0,-108-25 0,-22-7 0,67 15 0,121 36 0,-201-62 0,-2 1 0,1-2 0,0-1 0,38 0 0,-69-5 0,34-1 0,-1 1 0,1 2 0,-1 1 0,0 3 0,68 17 0,-75-15 0,0-1 0,0-1 0,50 2 0,-49-6 0,1 1 0,-1 2 0,36 10 0,-30-5 0,0-2 0,1-2 0,70 3 0,-89-8 0,106 12 0,-67-5 0,60-1 0,-22-7 0,672-30 0,-574 12 0,116-15 0,-87-9 0,-133 23 0,1 3 0,164-7 0,-226 20 0,0 0 0,-1-2 0,0-1 0,0-1 0,0-2 0,-1-1 0,27-13 0,23-7 0,-50 20 0,6-1 0,43-23 0,-43 16 0,1 2 0,38-13 0,-53 22 0,-1-2 0,0 0 0,-1-1 0,0-1 0,21-17 0,-15 12 0,46-27 0,6 1 0,-44 23 0,55-23 0,44-7 0,98-42 0,-193 79 0,0 0 0,1 2 0,67-9 0,23-7 0,-16-4 0,101-25 0,-168 47 0,1 1 0,86-1 0,-87 6 0,69-11 0,24-2 0,-86 14 0,88-15 0,-91 9 0,-1 3 0,54 2 0,-50 2 0,85-11 0,-42 0 0,96-1 0,30-2 0,-54 2 0,190 11 0,-156 4 0,-143-4 0,-1-3 0,60-10 0,-28 4 0,1 4 0,132 7 0,-85 2 0,1617-3 0,-1562 16 0,-17-1 0,50-15-1365,-198 0-5461</inkml:trace>
+  <inkml:trace contextRef="#ctx0" brushRef="#br0">1 3320 24575,'112'1'0,"34"0"0,186-21 0,-267 14 0,66 2 0,13 0 0,-32-9 0,37-3 0,862 15 0,-491 3 0,1666-2 0,-2130 3 0,57 9 0,47 3 0,1015-13 0,-569-5 0,-509 5 0,112-4 0,-61-27 0,-104 20 0,-1-2 0,-1-2 0,47-20 0,116-64 0,-182 83 0,-1-1 0,0-2 0,0 0 0,-2-1 0,28-32 0,27-24 0,-14 19 0,-29 24 0,46-34 0,-52 45 0,-2 0 0,0-2 0,-1-1 0,-1-1 0,-2 0 0,0-2 0,-2 0 0,0-2 0,17-38 0,-17 23 0,-14 31 0,0 2 0,1-1 0,0 0 0,0 1 0,1 0 0,1 0 0,10-11 0,-5 5 0,0 0 0,-1 0 0,13-25 0,-14 23 0,0 1 0,2 0 0,17-21 0,60-81 0,-75 102 0,-1 0 0,-1-2 0,-1 1 0,-1-1 0,14-35 0,-14 31 0,1 0 0,1 0 0,22-31 0,26-34 0,-38 55 0,40-49 0,-43 59 0,6-5 0,43-39 0,-60 60 0,0 0 0,1 1 0,0 0 0,1 1 0,-1 0 0,1 0 0,0 1 0,0 0 0,0 1 0,12-3 0,101-26 0,-14 2 0,-58 18 0,-26 6 0,0 1 0,0 1 0,30-1 0,-29 3 0,52-11 0,-51 8 0,51-4 0,-44 8 0,-1-1 0,62-12 0,106-17 0,-146 23 0,-1 4 0,1 1 0,74 6 0,79-3 0,-125-14 0,-60 9 0,0 0 0,30 0 0,186 7 0,85-4 0,-210-13 0,-66 8 0,65-2 0,-75 6 0,0-1 0,0-2 0,47-14 0,44-7 0,-92 19 0,-1-2 0,0-1 0,-1-1 0,64-34 0,2 1 0,-61 29 0,6-3 0,56-29 0,-72 33 0,1 1 0,56-16 0,23-9 0,-89 30 0,46-21 0,0-2 0,75-50 0,83-54 0,-138 86 0,-50 27 0,-23 14 0,1 0 0,-1 1 0,1 0 0,1 1 0,-1 0 0,1 2 0,0 0 0,20-4 0,33-3 0,79-24 0,42-9 0,140-17 0,-263 50 0,-42 6 0,0 1 0,37-1 0,507 7 0,-532-3 0,63-11 0,-60 6 0,50-1 0,64 10 0,82-4 0,-152-12 0,-56 8 0,45-3 0,142 9 0,45-2 0,-145-11 0,-58 5 0,69-1 0,34 12 0,180-5 0,-221-12 0,43-2 0,422 15 0,-277 2 0,-284-2 0,-1-1 0,40-10 0,-37 7 0,-1 1 0,28-2 0,539 5 82,-286 3-1529,-279-2-5379</inkml:trace>
 </inkml:ink>
 </file>
 
-<file path=ppt/ink/ink8.xml><?xml version="1.0" encoding="utf-8"?>
-<inkml:ink xmlns:inkml="http://www.w3.org/2003/InkML">
-  <inkml:definitions>
-    <inkml:context xml:id="ctx0">
-      <inkml:inkSource xml:id="inkSrc0">
-        <inkml:traceFormat>
-          <inkml:channel name="X" type="integer" min="-2.14748E9" max="2.14748E9" units="cm"/>
-          <inkml:channel name="Y" type="integer" min="-2.14748E9" max="2.14748E9" units="cm"/>
-          <inkml:channel name="F" type="integer" max="32767" units="dev"/>
-        </inkml:traceFormat>
-        <inkml:channelProperties>
-          <inkml:channelProperty channel="X" name="resolution" value="1000" units="1/cm"/>
-          <inkml:channelProperty channel="Y" name="resolution" value="1000" units="1/cm"/>
-          <inkml:channelProperty channel="F" name="resolution" value="0" units="1/dev"/>
-        </inkml:channelProperties>
-      </inkml:inkSource>
-      <inkml:timestamp xml:id="ts0" timeString="2025-09-15T13:50:11.024"/>
-    </inkml:context>
-    <inkml:brush xml:id="br0">
-      <inkml:brushProperty name="width" value="0.035" units="cm"/>
-      <inkml:brushProperty name="height" value="0.035" units="cm"/>
-      <inkml:brushProperty name="color" value="#77933C"/>
-    </inkml:brush>
-  </inkml:definitions>
-  <inkml:trace contextRef="#ctx0" brushRef="#br0">0 778 24575,'804'23'0,"-217"-14"0,-346-11 0,-191 2 0,404-18 0,-283 5 0,211 11 0,-169 5 0,2836-3 0,-3020 2 0,1 1 0,33 7 0,-31-4 0,50 3 0,369-8 0,-216-2 0,-212-1 0,0 0 0,39-9 0,-38 5 0,1 2 0,29-1 0,-23 3 0,-1-2 0,0-1 0,0-1 0,0-1 0,32-13 0,140-66 0,-199 84 0,34-18 0,-1-3 0,-1-1 0,-1-1 0,-2-2 0,0-1 0,38-44 0,11 2 0,-6 19 0,-56 39 0,-1 0 0,28-23 0,-32 25 0,0 0 0,1 1 0,0 1 0,1 1 0,0 0 0,0 1 0,0 0 0,26-4 0,54-22 0,-76 23 0,0 0 0,1 1 0,0 1 0,0 1 0,1 1 0,-1 1 0,44-2 0,-22 3 0,46-8 0,-47 5 0,53-2 0,-68 6 0,0 0 0,32-9 0,37-3 0,44-1 0,-80 7 0,70 0 0,2292 10 0,-1378-3 0,-1035 2 0,-1-1 0,1 2 0,0-1 0,-1 1 0,1 0 0,-1 1 0,1 0 0,-1 0 0,12 7 0,5 6 0,36 27 0,5 4 0,-24-20 0,-1 2 0,-2 1 0,-1 2 0,-1 1 0,44 53 0,-42-39 0,91 81 0,-115-116 0,1 0 0,0 0 0,1-2 0,0 0 0,1-1 0,0-1 0,0 0 0,0-1 0,1-1 0,25 4 0,91 15 0,173 54 0,-42-6 0,-226-67 0,1 0 0,0-3 0,0-1 0,58-6 0,-12 2 0,0 0 0,171 21 0,-163-8 0,0-5 0,128-8 0,-69-1 0,688 4 0,-787 1 0,57 11 0,57 2 0,1928-16 0,-2075 0 0,1-2 0,39-8 0,-38 6 0,1 0 0,32 0 0,24 4 0,-23 2 0,0-3 0,0-3 0,83-16 0,-96 10-341,1 3 0,1 1-1,72 0 1,-93 7-6485</inkml:trace>
-</inkml:ink>
-</file>
-
-<file path=ppt/ink/ink9.xml><?xml version="1.0" encoding="utf-8"?>
+<file path=ppt/ink/ink23.xml><?xml version="1.0" encoding="utf-8"?>
 <inkml:ink xmlns:inkml="http://www.w3.org/2003/InkML">
   <inkml:definitions>
     <inkml:context xml:id="ctx0">
@@ -925,6 +1253,200 @@
     </inkml:brush>
   </inkml:definitions>
   <inkml:trace contextRef="#ctx0" brushRef="#br0">1 63 24575,'794'-18'0,"112"5"0,-588 15 0,89-26 0,-286 15 0,158 9 0,-112 2 0,3597-2 0,-3738 3 0,0 1 0,0 1 0,-1 1 0,0 1 0,0 1 0,26 13 0,0-2 0,182 79 0,-218-90 0,1 1 0,-2 1 0,26 22 0,13 8 0,-36-27 0,-1 0 0,0 0 0,-1 2 0,-1 0 0,0 1 0,17 26 0,-10-14 0,135 194 0,-117-164 0,1-6 0,-28-38 0,-1 0 0,0 1 0,11 23 0,11 36 0,14 26 0,-31-67 0,-2 1 0,-1 0 0,10 41 0,5 12 0,1 22 0,-21-76 0,-2 0 0,2-1 0,1 0 0,2 0 0,1-1 0,1 0 0,34 55 0,-7-18 0,-30-50 0,1 1 0,0-1 0,24 28 0,5 6 0,-33-41 0,0 0 0,1-1 0,16 15 0,-20-21 0,0-1 0,1 0 0,-1 0 0,1 0 0,0 0 0,-1-1 0,1 0 0,1 0 0,-1 0 0,0-1 0,0 0 0,9 1 0,27 5 0,60 18 0,27 4 0,81 2 0,-120-18 0,-47-7 0,66 4 0,-59-10 0,0 3 0,62 10 0,-36-3 0,-1-4 0,149-7 0,-83-2 0,306 3 0,-415 1 0,0 2 0,35 8 0,-33-4 0,56 2 0,613-8 0,-338-3 0,-342 4 0,0 0 0,40 9 0,-38-5 0,-1-2 0,30 1 0,-27-3 0,50 11 0,20 2 0,-13-7 0,114 26 0,-110-17 0,-55-10 0,43 17 0,25 5 0,-64-20 0,-1 2 0,0 1 0,-1 2 0,-1 1 0,0 2 0,56 37 0,69 33 0,-132-73 0,164 61 0,-162-61 0,26 14 0,51 34 0,-78-46 0,0-1 0,1-2 0,42 14 0,0 0 0,-28-12 0,1-2 0,1-2 0,85 11 0,-25-5 0,-31 0 0,139 55 0,-149-47 0,0-3 0,1-3 0,69 11 0,40 0 0,50 6 0,4-2 0,-122-11 0,46 7 0,-20-14 0,163-1 0,804-16 0,-606 1 0,-443-2 0,53-9 0,13-2 0,-42 6 0,86-21 0,-32 5 0,78 0 0,-128 13 0,0 5 0,136 6 0,-69 2 0,1407-3 0,-1528 1 43,-1 1 1,37 9-1,12 1-1538,-44-9-5331</inkml:trace>
+</inkml:ink>
+</file>
+
+<file path=ppt/ink/ink3.xml><?xml version="1.0" encoding="utf-8"?>
+<inkml:ink xmlns:inkml="http://www.w3.org/2003/InkML">
+  <inkml:definitions>
+    <inkml:context xml:id="ctx0">
+      <inkml:inkSource xml:id="inkSrc0">
+        <inkml:traceFormat>
+          <inkml:channel name="X" type="integer" min="-2.14748E9" max="2.14748E9" units="cm"/>
+          <inkml:channel name="Y" type="integer" min="-2.14748E9" max="2.14748E9" units="cm"/>
+          <inkml:channel name="F" type="integer" max="32767" units="dev"/>
+        </inkml:traceFormat>
+        <inkml:channelProperties>
+          <inkml:channelProperty channel="X" name="resolution" value="1000" units="1/cm"/>
+          <inkml:channelProperty channel="Y" name="resolution" value="1000" units="1/cm"/>
+          <inkml:channelProperty channel="F" name="resolution" value="0" units="1/dev"/>
+        </inkml:channelProperties>
+      </inkml:inkSource>
+      <inkml:timestamp xml:id="ts0" timeString="2026-09-28T17:51:34.021"/>
+    </inkml:context>
+    <inkml:brush xml:id="br0">
+      <inkml:brushProperty name="width" value="0.035" units="cm"/>
+      <inkml:brushProperty name="height" value="0.035" units="cm"/>
+    </inkml:brush>
+  </inkml:definitions>
+  <inkml:trace contextRef="#ctx0" brushRef="#br0">1 500 24575,'27'-29'0,"-19"19"0,0 1 0,1 0 0,0 1 0,11-8 0,24-16 0,-25 17 0,1 1 0,0 1 0,0 0 0,1 2 0,1 0 0,0 2 0,42-13 0,75-15 0,-90 22 0,98-17 0,-93 23 0,77-23 0,41-8 0,213-33 0,-331 65 0,1 3 0,0 1 0,93 8 0,-28-1 0,6-1 0,144-5 0,-184-10 0,-56 7 0,52-2 0,791 6 0,-425 4 0,-370-2 0,12-1 0,173 19 0,-201-11 0,123-2 0,-128-6 0,0 2 0,95 15 0,46 12 0,166 43 0,-214-44 0,-94-19 0,-1 3 0,82 26 0,-51-8 0,-46-17 0,0 2 0,70 36 0,-96-44 0,0 0 0,0-1 0,0 0 0,1-1 0,-1-1 0,23 2 0,-20-2 0,0-1 0,-1 2 0,0 0 0,1 1 0,15 8 0,30 20 0,-35-17 0,50 20 0,-63-30-273,0 0 0,0 1 0,-1 1 0,14 9 0,-10-5-6553</inkml:trace>
+</inkml:ink>
+</file>
+
+<file path=ppt/ink/ink4.xml><?xml version="1.0" encoding="utf-8"?>
+<inkml:ink xmlns:inkml="http://www.w3.org/2003/InkML">
+  <inkml:definitions>
+    <inkml:context xml:id="ctx0">
+      <inkml:inkSource xml:id="inkSrc0">
+        <inkml:traceFormat>
+          <inkml:channel name="X" type="integer" min="-2.14748E9" max="2.14748E9" units="cm"/>
+          <inkml:channel name="Y" type="integer" min="-2.14748E9" max="2.14748E9" units="cm"/>
+          <inkml:channel name="F" type="integer" max="32767" units="dev"/>
+        </inkml:traceFormat>
+        <inkml:channelProperties>
+          <inkml:channelProperty channel="X" name="resolution" value="1000" units="1/cm"/>
+          <inkml:channelProperty channel="Y" name="resolution" value="1000" units="1/cm"/>
+          <inkml:channelProperty channel="F" name="resolution" value="0" units="1/dev"/>
+        </inkml:channelProperties>
+      </inkml:inkSource>
+      <inkml:timestamp xml:id="ts0" timeString="2026-09-28T17:51:34.022"/>
+    </inkml:context>
+    <inkml:brush xml:id="br0">
+      <inkml:brushProperty name="width" value="0.035" units="cm"/>
+      <inkml:brushProperty name="height" value="0.035" units="cm"/>
+    </inkml:brush>
+  </inkml:definitions>
+  <inkml:trace contextRef="#ctx0" brushRef="#br0">0 1134 24575,'6'-2'0,"-1"0"0,0 0 0,0 0 0,0 0 0,0-1 0,0 0 0,0 0 0,-1 0 0,0-1 0,1 0 0,-1 0 0,0 0 0,5-7 0,0 1 0,70-75 0,-41 42 0,72-63 0,-39 49 0,3 4 0,2 2 0,88-42 0,-102 62 0,197-92 0,-222 109 0,66-14 0,-6 2 0,-34 9 0,72-10 0,-71 16 0,74-23 0,64-26 0,-111 35 0,153-21 0,136-20 0,-307 56 0,145-3 0,-181 12 0,63-12 0,-61 7 0,55-2 0,93-5 0,-10-1 0,425 14 0,-285 1 0,-255 3 0,-1 2 0,113 27 0,5 2 0,195 25 0,-112-5 0,-200-43 0,0 3 0,93 35 0,-44-12 0,-81-27 0,0 2 0,30 17 0,32 14 0,170 71 0,-195-78 0,-2 3 0,78 62 0,139 163 0,-263-246 0,122 95 0,-100-74-1365,-27-29-5461</inkml:trace>
+</inkml:ink>
+</file>
+
+<file path=ppt/ink/ink5.xml><?xml version="1.0" encoding="utf-8"?>
+<inkml:ink xmlns:inkml="http://www.w3.org/2003/InkML">
+  <inkml:definitions>
+    <inkml:context xml:id="ctx0">
+      <inkml:inkSource xml:id="inkSrc0">
+        <inkml:traceFormat>
+          <inkml:channel name="X" type="integer" min="-2.14748E9" max="2.14748E9" units="cm"/>
+          <inkml:channel name="Y" type="integer" min="-2.14748E9" max="2.14748E9" units="cm"/>
+          <inkml:channel name="F" type="integer" max="32767" units="dev"/>
+        </inkml:traceFormat>
+        <inkml:channelProperties>
+          <inkml:channelProperty channel="X" name="resolution" value="1000" units="1/cm"/>
+          <inkml:channelProperty channel="Y" name="resolution" value="1000" units="1/cm"/>
+          <inkml:channelProperty channel="F" name="resolution" value="0" units="1/dev"/>
+        </inkml:channelProperties>
+      </inkml:inkSource>
+      <inkml:timestamp xml:id="ts0" timeString="2026-09-28T17:52:05.810"/>
+    </inkml:context>
+    <inkml:brush xml:id="br0">
+      <inkml:brushProperty name="width" value="0.035" units="cm"/>
+      <inkml:brushProperty name="height" value="0.035" units="cm"/>
+      <inkml:brushProperty name="color" value="#CC0066"/>
+    </inkml:brush>
+  </inkml:definitions>
+  <inkml:trace contextRef="#ctx0" brushRef="#br0">1 2018 24575,'2'-1'0,"1"-1"0,-1 1 0,0-1 0,0 0 0,0 0 0,0 0 0,0 0 0,0 0 0,0-1 0,0 1 0,-1-1 0,0 1 0,1-1 0,-1 1 0,0-1 0,0 0 0,1-4 0,2-4 0,23-49 0,-17 36 0,1 0 0,0 1 0,2 0 0,0 1 0,21-25 0,4 0 0,45-75 0,-24 33 0,26-42 0,-46 67 0,78-95 0,-40 68 0,93-100 0,145-67 0,-203 170 0,-40 30 0,103-64 0,-111 83 0,2 4 0,2 2 0,0 3 0,108-31 0,-24 15 0,-104 29 0,1 2 0,0 2 0,1 2 0,0 3 0,73-4 0,1063 15 0,-1141-1 0,0 3 0,71 15 0,46 6 0,-74-18 0,102 22 0,-110-13 0,55 10 0,171 59 0,-193-46 0,-7-5 0,-2 6 0,107 57 0,-56-15 0,157 97 0,-152-55 0,-49-35 0,-81-63 0,-1 1 0,-1 1 0,-2 1 0,-1 1 0,31 50 0,39 50 0,-73-108 0,1 0 0,1-1 0,31 21 0,-22-18 0,30 30 0,-53-44 0,0 0 0,-1 0 0,0 1 0,-1 0 0,0 0 0,11 24 0,-6-3 0,0 0 0,-2 1 0,-2 1 0,-1-1 0,-2 1 0,-1 1 0,0 36 0,-3-51 44,0-1 0,8 28 0,2 29-1541,-10-54-5329</inkml:trace>
+</inkml:ink>
+</file>
+
+<file path=ppt/ink/ink6.xml><?xml version="1.0" encoding="utf-8"?>
+<inkml:ink xmlns:inkml="http://www.w3.org/2003/InkML">
+  <inkml:definitions>
+    <inkml:context xml:id="ctx0">
+      <inkml:inkSource xml:id="inkSrc0">
+        <inkml:traceFormat>
+          <inkml:channel name="X" type="integer" min="-2.14748E9" max="2.14748E9" units="cm"/>
+          <inkml:channel name="Y" type="integer" min="-2.14748E9" max="2.14748E9" units="cm"/>
+          <inkml:channel name="F" type="integer" max="32767" units="dev"/>
+        </inkml:traceFormat>
+        <inkml:channelProperties>
+          <inkml:channelProperty channel="X" name="resolution" value="1000" units="1/cm"/>
+          <inkml:channelProperty channel="Y" name="resolution" value="1000" units="1/cm"/>
+          <inkml:channelProperty channel="F" name="resolution" value="0" units="1/dev"/>
+        </inkml:channelProperties>
+      </inkml:inkSource>
+      <inkml:timestamp xml:id="ts0" timeString="2026-09-28T17:52:11.107"/>
+    </inkml:context>
+    <inkml:brush xml:id="br0">
+      <inkml:brushProperty name="width" value="0.035" units="cm"/>
+      <inkml:brushProperty name="height" value="0.035" units="cm"/>
+      <inkml:brushProperty name="color" value="#CC0066"/>
+    </inkml:brush>
+  </inkml:definitions>
+  <inkml:trace contextRef="#ctx0" brushRef="#br0">1 3150 24575,'12'-1'0,"0"0"0,1-1 0,-1 0 0,0-1 0,0 0 0,18-7 0,71-39 0,-12 7 0,30-6 0,1005-437 0,-184 48 0,-739 352 0,838-341 0,-304 159 0,-556 202 0,1005-348 0,-690 276 0,-204 60 0,-238 63 0,584-146 0,-297 101 0,157-35 0,-444 82 0,352-77 0,7 31 0,-296 48 0,148-6 0,817-12 0,189 0 0,-942 14 0,5 1 0,-57 12 0,668 31 0,73 97 0,-246-47 0,-306-38 0,-304-27 0,247 55 0,-24-5 0,-171-32 0,24 2 0,119 22 0,20-5 0,-114-21 0,-78-9 0,-86-12 0,99 24 0,431 82 0,-521-105 0,247 43 0,-94 4 0,228 41 0,428 88 0,-471-111 0,69 13 0,-15 30 0,-254-56 0,687 239 0,-337-23 0,-484-215 0,188 142 0,-85-25 0,-153-123 0,-47-45 0,0 0 0,0-1 0,1 0 0,0-1 0,29 17 0,-10-9 0,-1 2 0,-1 1 0,41 38 0,19 14 0,-72-60 0,-1 0 0,0 2 0,-1 0 0,-1 1 0,0 1 0,-2 0 0,0 1 0,-1 0 0,11 23 0,-1-4-1365,-11-25-5461</inkml:trace>
+</inkml:ink>
+</file>
+
+<file path=ppt/ink/ink7.xml><?xml version="1.0" encoding="utf-8"?>
+<inkml:ink xmlns:inkml="http://www.w3.org/2003/InkML">
+  <inkml:definitions>
+    <inkml:context xml:id="ctx0">
+      <inkml:inkSource xml:id="inkSrc0">
+        <inkml:traceFormat>
+          <inkml:channel name="X" type="integer" min="-2.14748E9" max="2.14748E9" units="cm"/>
+          <inkml:channel name="Y" type="integer" min="-2.14748E9" max="2.14748E9" units="cm"/>
+          <inkml:channel name="F" type="integer" max="32767" units="dev"/>
+        </inkml:traceFormat>
+        <inkml:channelProperties>
+          <inkml:channelProperty channel="X" name="resolution" value="1000" units="1/cm"/>
+          <inkml:channelProperty channel="Y" name="resolution" value="1000" units="1/cm"/>
+          <inkml:channelProperty channel="F" name="resolution" value="0" units="1/dev"/>
+        </inkml:channelProperties>
+      </inkml:inkSource>
+      <inkml:timestamp xml:id="ts0" timeString="2025-09-22T13:33:37.900"/>
+    </inkml:context>
+    <inkml:brush xml:id="br0">
+      <inkml:brushProperty name="width" value="0.035" units="cm"/>
+      <inkml:brushProperty name="height" value="0.035" units="cm"/>
+      <inkml:brushProperty name="color" value="#FF0066"/>
+    </inkml:brush>
+  </inkml:definitions>
+  <inkml:trace contextRef="#ctx0" brushRef="#br0">1 36 24575,'15'-1'0,"1"-1"0,-1 0 0,26-8 0,29-4 0,347 7 0,-230 10 0,-128-3 0,0 3 0,87 14 0,5 0 0,-5-1 0,-111-11 0,57-1 0,-65-3 0,1 0 0,0 1 0,46 11 0,-8 0 0,-53-12 0,-1 0 0,0 2 0,0-1 0,0 2 0,0-1 0,0 2 0,20 10 0,11 9 0,1-3 0,0-1 0,88 26 0,-93-36 0,79 10 0,-1-1 0,-31-1 0,198 54 0,-236-58 0,74 9 0,17 5 0,5 22 0,-103-34 0,1-1 0,0-2 0,52 8 0,-55-13 0,0 2 0,-1 1 0,-1 2 0,48 23 0,-28-11 0,4-2 0,-41-17 0,-1 1 0,0 1 0,0 1 0,0 1 0,-1 0 0,-1 1 0,30 25 0,-34-25 0,1 0 0,1-1 0,0 0 0,18 8 0,39 26 0,-57-33 0,0-2 0,0 0 0,1-1 0,0-1 0,30 10 0,88 17 0,70 21 0,-151-39 0,1-2 0,1-3 0,76 6 0,-30-3 0,-55-6 0,71 1 0,-51-10 0,-40 0 0,0 0 0,0 2 0,0 0 0,0 2 0,29 7 0,-26-3 0,0-2 0,0-1 0,1-2 0,37 0 0,24 1 0,0 12 0,-65-10 0,-1 0 0,32 1 0,-9-5 0,-8-1 0,-1 2 0,0 1 0,40 10 0,-51-8 0,0-2 0,1 0 0,32-2 0,-35-2 0,0 2 0,-1 0 0,1 2 0,28 7 0,-14-1 0,0-2 0,59 3 0,32 5 0,-43 2 0,88 14 0,21-1 0,-185-29 0,-1 1 0,1 0 0,-1 0 0,0 1 0,1 1 0,-1 0 0,-1 0 0,1 1 0,-1 1 0,0 0 0,0 0 0,0 1 0,-1 0 0,0 0 0,12 13 0,31 42 0,-23-30 0,-2 2 0,-1 1 0,24 41 0,-32-45 0,-2 1 0,0 0 0,-3 1 0,0 1 0,8 42 0,-9-23 0,-5-25 0,-1 1 0,3 57 0,-7-39 0,-3 0 0,-1 0 0,-18 91 0,18-124 0,-1 0 0,-1 0 0,-1 0 0,0-1 0,0 1 0,-1-1 0,-1-1 0,0 1 0,-15 18 0,9-12 0,0 0 0,0 1 0,-15 38 0,-10 16 0,28-53 0,1 0 0,0 1 0,2 0 0,0 1 0,-5 41 0,3-21 0,-2 19 0,10-48 0,-1 0 0,-1 0 0,0-1 0,0 1 0,-2-1 0,0 0 0,0 0 0,-1 0 0,0-1 0,-1 0 0,-10 13 0,-7 3 0,-1-1 0,-1-1 0,-2-1 0,-30 20 0,-22 9 0,-112 56 0,175-101 0,-2-1 0,0-1 0,0 0 0,0-2 0,-1 0 0,-25 2 0,-6 2 0,24-5 0,-1-1 0,-29 0 0,33-3 0,0 2 0,0 0 0,-30 8 0,2 0 0,0-3 0,0-2 0,-1-2 0,-81-5 0,68-1 0,0 4 0,-78 10 0,59-2 0,-104-1 0,36-3 0,14 10 0,-44 2 0,157-17 0,-210-4 0,192 1 0,0-3 0,0-1 0,-55-17 0,6 1 0,64 18 0,1-2 0,-1-1 0,-43-19 0,57 17 0,1 1 0,0-2 0,0 0 0,1-1 0,0 0 0,1-1 0,1 0 0,0-1 0,1 0 0,0-1 0,1 0 0,-9-21 0,-1 0 0,-26-38 0,25 43 0,-28-57 0,40 71 0,0 0 0,1-1 0,1 0 0,1-1 0,0 1 0,2-1 0,-3-23 0,-9-96 0,8 91 0,-2-64 0,8 43 0,4-127 0,1 175 0,0 1 0,2 0 0,0 0 0,1 1 0,1 0 0,1 0 0,0 1 0,14-19 0,-17 28 0,0 0 0,1 0 0,0 1 0,0 0 0,0 0 0,1 1 0,0 0 0,1 1 0,-1-1 0,17-6 0,-7 4 0,0 2 0,1 0 0,0 0 0,28-3 0,24-4 0,-42 6 0,1 2 0,40-2 0,-29 7 0,-4 0 0,0-2 0,47-8 0,16-3 0,0 5 0,190 7 0,-121 4 0,1777-3 0,-1913-3 0,-1-2 0,0-1 0,0-1 0,-1-1 0,0-2 0,55-26 0,32-10 0,-92 36 0,0-2 0,48-29 0,-51 27 0,0 1 0,1 0 0,44-14 0,-25 14 0,0-1 0,-1-3 0,0-1 0,73-45 0,-88 43 0,42-42 0,-47 40 0,1 2 0,37-27 0,-8 17 0,-35 20 0,1 0 0,-2-1 0,1 0 0,-1-2 0,-1 1 0,23-26 0,-28 26 0,1 1 0,1 1 0,0 0 0,16-10 0,23-20 0,-6 3 0,1 3 0,61-35 0,-69 45 0,-21 14 0,1 2 0,0 0 0,1 1 0,35-9 0,-36 12 0,0-1 0,0-1 0,-1 0 0,0-2 0,28-15 0,-30 14 0,1 1 0,0 1 0,0 1 0,1 0 0,0 1 0,0 1 0,24-3 0,6-2 0,18-6 0,0 4 0,1 2 0,92-1 0,-95 10 0,-1-3 0,74-13 0,-45 5 0,1 5 0,145 7 0,-82 2 0,227-3-1365,-354 0-5461</inkml:trace>
+</inkml:ink>
+</file>
+
+<file path=ppt/ink/ink8.xml><?xml version="1.0" encoding="utf-8"?>
+<inkml:ink xmlns:inkml="http://www.w3.org/2003/InkML">
+  <inkml:definitions>
+    <inkml:context xml:id="ctx0">
+      <inkml:inkSource xml:id="inkSrc0">
+        <inkml:traceFormat>
+          <inkml:channel name="X" type="integer" min="-2.14748E9" max="2.14748E9" units="cm"/>
+          <inkml:channel name="Y" type="integer" min="-2.14748E9" max="2.14748E9" units="cm"/>
+          <inkml:channel name="F" type="integer" max="32767" units="dev"/>
+        </inkml:traceFormat>
+        <inkml:channelProperties>
+          <inkml:channelProperty channel="X" name="resolution" value="1000" units="1/cm"/>
+          <inkml:channelProperty channel="Y" name="resolution" value="1000" units="1/cm"/>
+          <inkml:channelProperty channel="F" name="resolution" value="0" units="1/dev"/>
+        </inkml:channelProperties>
+      </inkml:inkSource>
+      <inkml:timestamp xml:id="ts0" timeString="2025-09-22T13:33:37.900"/>
+    </inkml:context>
+    <inkml:brush xml:id="br0">
+      <inkml:brushProperty name="width" value="0.035" units="cm"/>
+      <inkml:brushProperty name="height" value="0.035" units="cm"/>
+      <inkml:brushProperty name="color" value="#FF0066"/>
+    </inkml:brush>
+  </inkml:definitions>
+  <inkml:trace contextRef="#ctx0" brushRef="#br0">1 36 24575,'15'-1'0,"1"-1"0,-1 0 0,26-8 0,29-4 0,347 7 0,-230 10 0,-128-3 0,0 3 0,87 14 0,5 0 0,-5-1 0,-111-11 0,57-1 0,-65-3 0,1 0 0,0 1 0,46 11 0,-8 0 0,-53-12 0,-1 0 0,0 2 0,0-1 0,0 2 0,0-1 0,0 2 0,20 10 0,11 9 0,1-3 0,0-1 0,88 26 0,-93-36 0,79 10 0,-1-1 0,-31-1 0,198 54 0,-236-58 0,74 9 0,17 5 0,5 22 0,-103-34 0,1-1 0,0-2 0,52 8 0,-55-13 0,0 2 0,-1 1 0,-1 2 0,48 23 0,-28-11 0,4-2 0,-41-17 0,-1 1 0,0 1 0,0 1 0,0 1 0,-1 0 0,-1 1 0,30 25 0,-34-25 0,1 0 0,1-1 0,0 0 0,18 8 0,39 26 0,-57-33 0,0-2 0,0 0 0,1-1 0,0-1 0,30 10 0,88 17 0,70 21 0,-151-39 0,1-2 0,1-3 0,76 6 0,-30-3 0,-55-6 0,71 1 0,-51-10 0,-40 0 0,0 0 0,0 2 0,0 0 0,0 2 0,29 7 0,-26-3 0,0-2 0,0-1 0,1-2 0,37 0 0,24 1 0,0 12 0,-65-10 0,-1 0 0,32 1 0,-9-5 0,-8-1 0,-1 2 0,0 1 0,40 10 0,-51-8 0,0-2 0,1 0 0,32-2 0,-35-2 0,0 2 0,-1 0 0,1 2 0,28 7 0,-14-1 0,0-2 0,59 3 0,32 5 0,-43 2 0,88 14 0,21-1 0,-185-29 0,-1 1 0,1 0 0,-1 0 0,0 1 0,1 1 0,-1 0 0,-1 0 0,1 1 0,-1 1 0,0 0 0,0 0 0,0 1 0,-1 0 0,0 0 0,12 13 0,31 42 0,-23-30 0,-2 2 0,-1 1 0,24 41 0,-32-45 0,-2 1 0,0 0 0,-3 1 0,0 1 0,8 42 0,-9-23 0,-5-25 0,-1 1 0,3 57 0,-7-39 0,-3 0 0,-1 0 0,-18 91 0,18-124 0,-1 0 0,-1 0 0,-1 0 0,0-1 0,0 1 0,-1-1 0,-1-1 0,0 1 0,-15 18 0,9-12 0,0 0 0,0 1 0,-15 38 0,-10 16 0,28-53 0,1 0 0,0 1 0,2 0 0,0 1 0,-5 41 0,3-21 0,-2 19 0,10-48 0,-1 0 0,-1 0 0,0-1 0,0 1 0,-2-1 0,0 0 0,0 0 0,-1 0 0,0-1 0,-1 0 0,-10 13 0,-7 3 0,-1-1 0,-1-1 0,-2-1 0,-30 20 0,-22 9 0,-112 56 0,175-101 0,-2-1 0,0-1 0,0 0 0,0-2 0,-1 0 0,-25 2 0,-6 2 0,24-5 0,-1-1 0,-29 0 0,33-3 0,0 2 0,0 0 0,-30 8 0,2 0 0,0-3 0,0-2 0,-1-2 0,-81-5 0,68-1 0,0 4 0,-78 10 0,59-2 0,-104-1 0,36-3 0,14 10 0,-44 2 0,157-17 0,-210-4 0,192 1 0,0-3 0,0-1 0,-55-17 0,6 1 0,64 18 0,1-2 0,-1-1 0,-43-19 0,57 17 0,1 1 0,0-2 0,0 0 0,1-1 0,0 0 0,1-1 0,1 0 0,0-1 0,1 0 0,0-1 0,1 0 0,-9-21 0,-1 0 0,-26-38 0,25 43 0,-28-57 0,40 71 0,0 0 0,1-1 0,1 0 0,1-1 0,0 1 0,2-1 0,-3-23 0,-9-96 0,8 91 0,-2-64 0,8 43 0,4-127 0,1 175 0,0 1 0,2 0 0,0 0 0,1 1 0,1 0 0,1 0 0,0 1 0,14-19 0,-17 28 0,0 0 0,1 0 0,0 1 0,0 0 0,0 0 0,1 1 0,0 0 0,1 1 0,-1-1 0,17-6 0,-7 4 0,0 2 0,1 0 0,0 0 0,28-3 0,24-4 0,-42 6 0,1 2 0,40-2 0,-29 7 0,-4 0 0,0-2 0,47-8 0,16-3 0,0 5 0,190 7 0,-121 4 0,1777-3 0,-1913-3 0,-1-2 0,0-1 0,0-1 0,-1-1 0,0-2 0,55-26 0,32-10 0,-92 36 0,0-2 0,48-29 0,-51 27 0,0 1 0,1 0 0,44-14 0,-25 14 0,0-1 0,-1-3 0,0-1 0,73-45 0,-88 43 0,42-42 0,-47 40 0,1 2 0,37-27 0,-8 17 0,-35 20 0,1 0 0,-2-1 0,1 0 0,-1-2 0,-1 1 0,23-26 0,-28 26 0,1 1 0,1 1 0,0 0 0,16-10 0,23-20 0,-6 3 0,1 3 0,61-35 0,-69 45 0,-21 14 0,1 2 0,0 0 0,1 1 0,35-9 0,-36 12 0,0-1 0,0-1 0,-1 0 0,0-2 0,28-15 0,-30 14 0,1 1 0,0 1 0,0 1 0,1 0 0,0 1 0,0 1 0,24-3 0,6-2 0,18-6 0,0 4 0,1 2 0,92-1 0,-95 10 0,-1-3 0,74-13 0,-45 5 0,1 5 0,145 7 0,-82 2 0,227-3-1365,-354 0-5461</inkml:trace>
+</inkml:ink>
+</file>
+
+<file path=ppt/ink/ink9.xml><?xml version="1.0" encoding="utf-8"?>
+<inkml:ink xmlns:inkml="http://www.w3.org/2003/InkML">
+  <inkml:definitions>
+    <inkml:context xml:id="ctx0">
+      <inkml:inkSource xml:id="inkSrc0">
+        <inkml:traceFormat>
+          <inkml:channel name="X" type="integer" min="-2.14748E9" max="2.14748E9" units="cm"/>
+          <inkml:channel name="Y" type="integer" min="-2.14748E9" max="2.14748E9" units="cm"/>
+          <inkml:channel name="F" type="integer" max="32767" units="dev"/>
+        </inkml:traceFormat>
+        <inkml:channelProperties>
+          <inkml:channelProperty channel="X" name="resolution" value="1000" units="1/cm"/>
+          <inkml:channelProperty channel="Y" name="resolution" value="1000" units="1/cm"/>
+          <inkml:channelProperty channel="F" name="resolution" value="0" units="1/dev"/>
+        </inkml:channelProperties>
+      </inkml:inkSource>
+      <inkml:timestamp xml:id="ts0" timeString="2025-09-22T13:37:36.793"/>
+    </inkml:context>
+    <inkml:brush xml:id="br0">
+      <inkml:brushProperty name="width" value="0.035" units="cm"/>
+      <inkml:brushProperty name="height" value="0.035" units="cm"/>
+      <inkml:brushProperty name="color" value="#FF0066"/>
+    </inkml:brush>
+  </inkml:definitions>
+  <inkml:trace contextRef="#ctx0" brushRef="#br0">1 70 24575,'400'-34'0,"-273"18"0,116-1 0,261 15 0,-227 5 0,318-3 0,-567 3 0,0 1 0,0 1 0,0 2 0,0 1 0,-1 1 0,44 21 0,6 0 0,185 63 0,-205-69 0,54 32 0,-30-14 0,-66-34 0,-1 2 0,1 0 0,-1 1 0,-1 0 0,16 18 0,34 27 0,-20-28 0,69 35 0,-5-4 0,-64-32 0,-14-7 0,1-3 0,35 17 0,-59-32 0,19 10 0,1-1 0,0-2 0,1 0 0,0-2 0,0-1 0,40 4 0,-34-7 0,44 10 0,-46-6 0,58 3 0,-71-10 0,22 1 0,-1 1 0,75 14 0,104 18 0,-119-23 0,-68-9 0,59 11 0,286 66 0,-288-71 0,22 4 0,-12 0 0,1-3 0,179-9 0,-115-3 0,-123 2 0,0 2 0,0 2 0,72 14 0,-74-9 0,0-3 0,43 2 0,50 7 0,-77-7 0,0-2 0,93-4 0,-92-3 0,0 3 0,85 12 0,36 5 0,-102-13 0,-40 0 0,0 1 0,-1 1 0,0 3 0,0 0 0,-1 2 0,0 1 0,56 33 0,-64-29 0,-1 0 0,-1 2 0,-1 0 0,0 2 0,-1 0 0,30 44 0,-42-53 0,-1 1 0,0 0 0,-1 0 0,-1 1 0,0 0 0,-1 0 0,3 18 0,7 104 0,-5-38 0,31 148 0,-32-185 0,-2-1 0,-3 1 0,-6 72 0,1-22 0,0-87 0,0 1 0,-12 44 0,9-43 0,0 0 0,-2 34 0,6-22 0,-1 1 0,-14 63 0,8-52 0,7-39 0,-1 0 0,0 0 0,0-1 0,-1 1 0,0 0 0,-1-1 0,0 0 0,-7 12 0,-34 66 0,39-73 0,-1 0 0,0-1 0,-1 0 0,0 0 0,-1-1 0,0 0 0,-1-1 0,-22 21 0,-13 8 0,-67 79 0,32-31 0,61-72 0,-2 0 0,0-2 0,-1 0 0,0-1 0,-34 15 0,-6 4 0,43-25 0,0 0 0,0-1 0,-1-1 0,0-1 0,-1-1 0,-32 3 0,-5 2 0,-22 0 0,-1-3 0,-141-7 0,75-2 0,-1405 3 0,1527-2 0,-1-1 0,0-1 0,1-1 0,-45-16 0,-40-9 0,12 11 0,-117-41 0,145 40 0,51 15 0,-1 0 0,0-1 0,1-1 0,0-1 0,1-1 0,0 0 0,0-2 0,-23-17 0,-22-19 0,-13-11 0,71 54 0,-25-24 0,0-1 0,-34-47 0,56 65 0,1 0 0,0 0 0,0-1 0,2 1 0,-1-2 0,2 1 0,-1 0 0,2-1 0,0 0 0,0 0 0,-1-23 0,9-261 0,-3 278 0,2 0 0,0 0 0,1 0 0,1 1 0,0 0 0,2 0 0,0 1 0,20-31 0,-8 17 0,2 1 0,2 2 0,44-44 0,-30 42 0,-29 24 0,0-1 0,0 0 0,15-17 0,47-49 0,4-4 0,-53 52 0,1 1 0,2 2 0,0 0 0,53-34 0,-61 46 0,0 1 0,0 1 0,1 1 0,0 1 0,0 0 0,1 1 0,-1 1 0,37-3 0,13 3 0,79 6 0,-50 1 0,2588-3 0,-2660 1 0,0 2 0,44 10 0,31 3 0,-84-14 0,-2 0 0,1 1 0,0 1 0,-1 1 0,1 0 0,-1 0 0,0 2 0,-1 0 0,0 0 0,0 1 0,17 14 0,14 15 0,67 73 0,-45-43 0,-53-53 0,0 0 0,-1 1 0,0 0 0,-1 0 0,-1 1 0,-1 1 0,0 0 0,11 30 0,-8-6 0,-1-1 0,9 77 0,-6-38 0,-7-52 0,-3 0 0,4 40 0,-8-36 0,-1 125 0,0-134 0,-2-1 0,-1 0 0,0 1 0,-2-1 0,-9 23 0,7-23 0,-1 3 0,-1 1 0,-1-1 0,-1-1 0,-1 0 0,-31 41 0,23-38 0,-31 51 0,34-48 0,-36 46 0,40-61 0,-1-1 0,0-1 0,-1 0 0,-20 12 0,-24 18 0,28-20 0,-1-1 0,0-2 0,-2-2 0,-61 23 0,75-31 0,-50 22 0,50-20 0,-1-1 0,0-1 0,0-1 0,-1-1 0,0-1 0,0-1 0,-1-1 0,-25 1 0,-8-4 0,0 1 0,-61 12 0,38-4 0,1-3 0,-147-8 0,83-2 0,100 4 0,1 2 0,-71 14 0,74-12 0,-1-1 0,-61-2 0,-15 1 0,26 13 0,65-11 0,-1 0 0,-31 1 0,-274-5 0,153-3 0,148 1 0,0-2 0,-38-9 0,33 6 0,-43-4 0,-88 11 0,-42-3 0,96-14 0,68 8 0,-59-2 0,88 10 0,-38-1 0,-57-9 0,90 6 0,1 0 0,0-1 0,0-1 0,0-1 0,1 0 0,-23-14 0,-202-133 0,178 116 0,47 28 0,0 0 0,1-1 0,-27-22 0,28 19 0,-1 1 0,-32-18 0,35 23 0,0 0 0,1-1 0,0-1 0,1 0 0,-1-1 0,-11-14 0,8 3 0,1 0 0,-18-38 0,20 36 0,0 1 0,-24-31 0,18 29 0,1-1 0,2-1 0,0 0 0,2-1 0,0-1 0,3 0 0,0 0 0,-9-44 0,10 28 0,2 15 0,2 1 0,2-2 0,-2-30 0,5 24 0,0 1 0,1 1 0,1-1 0,9-51 0,-8 77 0,1 1 0,-1-1 0,1 1 0,1 0 0,0 0 0,0 0 0,1 0 0,0 1 0,0 0 0,1 0 0,0 0 0,0 1 0,1 0 0,0 0 0,1 0 0,-1 1 0,12-7 0,25-13 0,1 2 0,1 2 0,1 1 0,69-18 0,-74 32 0,0 1 0,0 3 0,0 1 0,70 6 0,-7-1 0,490-3 0,-562 2 0,0 1 0,37 9 0,-34-5 0,54 2 0,-54-8 0,0 2 0,-1 1 0,36 8 0,-21-3 0,1-4 0,-1-1 0,1-2 0,54-6 0,4 1 0,491 3 0,-571 2 0,0 1 0,-1 2 0,0 0 0,41 14 0,-40-10 0,0-1 0,1-1 0,57 4 0,242-12 0,-131-1 0,-174 0 0,1-2 0,-1 0 0,0-2 0,0 0 0,-1-2 0,0-1 0,33-17 0,-4 3 0,-16 6 0,-1-1 0,-1-2 0,48-36 0,-12-8 0,-52 46 0,0 1 0,1 1 0,24-16 0,74-51 0,-52 36 0,-33 21 0,-1 0 0,37-42 0,-37 35 0,56-45 0,-45 41 0,-1-1 0,56-68 0,-11 11 0,-66 77 0,37-27 0,-6 5 0,26-18 0,-48 39 0,34-32 0,9-3 0,-51 39 0,35-30 0,-31 22 0,2 1 0,1 1 0,47-27 0,98-40 0,-161 83 0,1 0 0,-1 1 0,1 1 0,0 0 0,0 0 0,25 0 0,85 5 0,-54 1 0,-27-4 0,0-1 0,73-14 0,-38 6 0,0 4 0,153 6 0,-87 3 0,648-3-1365,-762 0-5461</inkml:trace>
 </inkml:ink>
 </file>
 
@@ -12872,12 +13394,198 @@
           </a:p>
         </p:txBody>
       </p:sp>
+      <p:pic>
+        <p:nvPicPr>
+          <p:cNvPr id="7" name="Picture 6">
+            <a:extLst>
+              <a:ext uri="{FF2B5EF4-FFF2-40B4-BE49-F238E27FC236}">
+                <a16:creationId xmlns:a16="http://schemas.microsoft.com/office/drawing/2014/main" id="{65547F82-3FC3-29F3-FDE8-ED01C176C677}"/>
+              </a:ext>
+            </a:extLst>
+          </p:cNvPr>
+          <p:cNvPicPr>
+            <a:picLocks noChangeAspect="1"/>
+          </p:cNvPicPr>
+          <p:nvPr/>
+        </p:nvPicPr>
+        <p:blipFill>
+          <a:blip r:embed="rId2"/>
+          <a:stretch>
+            <a:fillRect/>
+          </a:stretch>
+        </p:blipFill>
+        <p:spPr>
+          <a:xfrm>
+            <a:off x="1580520" y="5371132"/>
+            <a:ext cx="9030960" cy="390580"/>
+          </a:xfrm>
+          <a:prstGeom prst="rect">
+            <a:avLst/>
+          </a:prstGeom>
+        </p:spPr>
+      </p:pic>
+    </p:spTree>
+    <p:extLst>
+      <p:ext uri="{BB962C8B-B14F-4D97-AF65-F5344CB8AC3E}">
+        <p14:creationId xmlns:p14="http://schemas.microsoft.com/office/powerpoint/2010/main" val="1331428061"/>
+      </p:ext>
+    </p:extLst>
+  </p:cSld>
+  <p:clrMapOvr>
+    <a:masterClrMapping/>
+  </p:clrMapOvr>
+</p:sld>
+</file>
+
+<file path=ppt/slides/slide22.xml><?xml version="1.0" encoding="utf-8"?>
+<p:sld xmlns:a="http://schemas.openxmlformats.org/drawingml/2006/main" xmlns:r="http://schemas.openxmlformats.org/officeDocument/2006/relationships" xmlns:p="http://schemas.openxmlformats.org/presentationml/2006/main">
+  <p:cSld>
+    <p:spTree>
+      <p:nvGrpSpPr>
+        <p:cNvPr id="1" name="">
+          <a:extLst>
+            <a:ext uri="{FF2B5EF4-FFF2-40B4-BE49-F238E27FC236}">
+              <a16:creationId xmlns:a16="http://schemas.microsoft.com/office/drawing/2014/main" id="{CB860947-99ED-9203-770E-772FF8D2E636}"/>
+            </a:ext>
+          </a:extLst>
+        </p:cNvPr>
+        <p:cNvGrpSpPr/>
+        <p:nvPr/>
+      </p:nvGrpSpPr>
+      <p:grpSpPr>
+        <a:xfrm>
+          <a:off x="0" y="0"/>
+          <a:ext cx="0" cy="0"/>
+          <a:chOff x="0" y="0"/>
+          <a:chExt cx="0" cy="0"/>
+        </a:xfrm>
+      </p:grpSpPr>
+      <p:sp>
+        <p:nvSpPr>
+          <p:cNvPr id="2" name="Title 1">
+            <a:extLst>
+              <a:ext uri="{FF2B5EF4-FFF2-40B4-BE49-F238E27FC236}">
+                <a16:creationId xmlns:a16="http://schemas.microsoft.com/office/drawing/2014/main" id="{2E36F3AF-C48D-D566-C503-3ED43AF287D5}"/>
+              </a:ext>
+            </a:extLst>
+          </p:cNvPr>
+          <p:cNvSpPr>
+            <a:spLocks noGrp="1"/>
+          </p:cNvSpPr>
+          <p:nvPr>
+            <p:ph type="title"/>
+          </p:nvPr>
+        </p:nvSpPr>
+        <p:spPr/>
+        <p:txBody>
+          <a:bodyPr>
+            <a:normAutofit fontScale="90000"/>
+          </a:bodyPr>
+          <a:lstStyle/>
+          <a:p>
+            <a:r>
+              <a:rPr lang="en-US" dirty="0"/>
+              <a:t>OLC strategies: String graph</a:t>
+            </a:r>
+          </a:p>
+        </p:txBody>
+      </p:sp>
+      <p:sp>
+        <p:nvSpPr>
+          <p:cNvPr id="3" name="Content Placeholder 2">
+            <a:extLst>
+              <a:ext uri="{FF2B5EF4-FFF2-40B4-BE49-F238E27FC236}">
+                <a16:creationId xmlns:a16="http://schemas.microsoft.com/office/drawing/2014/main" id="{E4F2FC3A-D9A8-5AFF-CBE7-333D1D3F4C5A}"/>
+              </a:ext>
+            </a:extLst>
+          </p:cNvPr>
+          <p:cNvSpPr>
+            <a:spLocks noGrp="1"/>
+          </p:cNvSpPr>
+          <p:nvPr>
+            <p:ph idx="1"/>
+          </p:nvPr>
+        </p:nvSpPr>
+        <p:spPr>
+          <a:xfrm>
+            <a:off x="593391" y="1733064"/>
+            <a:ext cx="10972800" cy="5124936"/>
+          </a:xfrm>
+        </p:spPr>
+        <p:txBody>
+          <a:bodyPr>
+            <a:normAutofit/>
+          </a:bodyPr>
+          <a:lstStyle/>
+          <a:p>
+            <a:r>
+              <a:rPr lang="en-US" dirty="0"/>
+              <a:t>String graph: </a:t>
+            </a:r>
+          </a:p>
+          <a:p>
+            <a:pPr lvl="1"/>
+            <a:r>
+              <a:rPr lang="en-US" dirty="0"/>
+              <a:t>Construct a graph where each read is a node and an edge connects two reads if they overlap. </a:t>
+            </a:r>
+          </a:p>
+          <a:p>
+            <a:pPr lvl="1"/>
+            <a:r>
+              <a:rPr lang="en-US" dirty="0"/>
+              <a:t>Merge unique edges/remove transitive edges (e.g. A-&gt;B, B-&gt;C and A-&gt;C, remove B-&gt;C if unique). </a:t>
+            </a:r>
+          </a:p>
+          <a:p>
+            <a:pPr lvl="1"/>
+            <a:r>
+              <a:rPr lang="en-US" dirty="0"/>
+              <a:t>Contigs are a set of linear paths through the graph, split at all intersections</a:t>
+            </a:r>
+            <a:br>
+              <a:rPr lang="en-US" dirty="0"/>
+            </a:br>
+            <a:endParaRPr lang="en-US" dirty="0"/>
+          </a:p>
+        </p:txBody>
+      </p:sp>
+      <p:sp>
+        <p:nvSpPr>
+          <p:cNvPr id="4" name="Slide Number Placeholder 3">
+            <a:extLst>
+              <a:ext uri="{FF2B5EF4-FFF2-40B4-BE49-F238E27FC236}">
+                <a16:creationId xmlns:a16="http://schemas.microsoft.com/office/drawing/2014/main" id="{14C084F0-9CBF-E184-F45D-3402EEED3972}"/>
+              </a:ext>
+            </a:extLst>
+          </p:cNvPr>
+          <p:cNvSpPr>
+            <a:spLocks noGrp="1"/>
+          </p:cNvSpPr>
+          <p:nvPr>
+            <p:ph type="sldNum" sz="quarter" idx="12"/>
+          </p:nvPr>
+        </p:nvSpPr>
+        <p:spPr/>
+        <p:txBody>
+          <a:bodyPr/>
+          <a:lstStyle/>
+          <a:p>
+            <a:fld id="{B82CCC60-E8CD-4174-8B1A-7DF615B22EEF}" type="slidenum">
+              <a:rPr lang="en-US" smtClean="0"/>
+              <a:pPr/>
+              <a:t>22</a:t>
+            </a:fld>
+            <a:endParaRPr lang="en-US"/>
+          </a:p>
+        </p:txBody>
+      </p:sp>
       <p:cxnSp>
         <p:nvCxnSpPr>
           <p:cNvPr id="6" name="Straight Connector 5">
             <a:extLst>
               <a:ext uri="{FF2B5EF4-FFF2-40B4-BE49-F238E27FC236}">
-                <a16:creationId xmlns:a16="http://schemas.microsoft.com/office/drawing/2014/main" id="{34DC410F-7733-5269-0284-008B323E6DE1}"/>
+                <a16:creationId xmlns:a16="http://schemas.microsoft.com/office/drawing/2014/main" id="{3FEC71AA-A8D2-2F05-C366-D3D4A92B8C59}"/>
               </a:ext>
             </a:extLst>
           </p:cNvPr>
@@ -12895,13 +13603,13 @@
         </p:spPr>
         <p:style>
           <a:lnRef idx="2">
-            <a:schemeClr val="accent2"/>
+            <a:schemeClr val="accent5"/>
           </a:lnRef>
           <a:fillRef idx="0">
-            <a:schemeClr val="accent2"/>
+            <a:schemeClr val="accent5"/>
           </a:fillRef>
           <a:effectRef idx="1">
-            <a:schemeClr val="accent2"/>
+            <a:schemeClr val="accent5"/>
           </a:effectRef>
           <a:fontRef idx="minor">
             <a:schemeClr val="tx1"/>
@@ -12913,7 +13621,7 @@
           <p:cNvPr id="8" name="Straight Connector 7">
             <a:extLst>
               <a:ext uri="{FF2B5EF4-FFF2-40B4-BE49-F238E27FC236}">
-                <a16:creationId xmlns:a16="http://schemas.microsoft.com/office/drawing/2014/main" id="{B69AA401-0CBB-86D3-E15D-33411F3FEDF0}"/>
+                <a16:creationId xmlns:a16="http://schemas.microsoft.com/office/drawing/2014/main" id="{FE6F3675-5E9A-B667-8C67-7E88C1025AF4}"/>
               </a:ext>
             </a:extLst>
           </p:cNvPr>
@@ -12951,7 +13659,7 @@
           <p:cNvPr id="10" name="Straight Connector 9">
             <a:extLst>
               <a:ext uri="{FF2B5EF4-FFF2-40B4-BE49-F238E27FC236}">
-                <a16:creationId xmlns:a16="http://schemas.microsoft.com/office/drawing/2014/main" id="{61D4609D-AE0D-CA79-22BD-BCC6C55285AB}"/>
+                <a16:creationId xmlns:a16="http://schemas.microsoft.com/office/drawing/2014/main" id="{3CFC357C-EC3B-A637-656C-116419A8FFB8}"/>
               </a:ext>
             </a:extLst>
           </p:cNvPr>
@@ -12968,14 +13676,14 @@
           </a:prstGeom>
         </p:spPr>
         <p:style>
-          <a:lnRef idx="2">
-            <a:schemeClr val="accent1"/>
+          <a:lnRef idx="3">
+            <a:schemeClr val="accent2"/>
           </a:lnRef>
           <a:fillRef idx="0">
-            <a:schemeClr val="accent1"/>
+            <a:schemeClr val="accent2"/>
           </a:fillRef>
-          <a:effectRef idx="1">
-            <a:schemeClr val="accent1"/>
+          <a:effectRef idx="2">
+            <a:schemeClr val="accent2"/>
           </a:effectRef>
           <a:fontRef idx="minor">
             <a:schemeClr val="tx1"/>
@@ -12987,7 +13695,7 @@
           <p:cNvPr id="13" name="Straight Connector 12">
             <a:extLst>
               <a:ext uri="{FF2B5EF4-FFF2-40B4-BE49-F238E27FC236}">
-                <a16:creationId xmlns:a16="http://schemas.microsoft.com/office/drawing/2014/main" id="{98E03E6D-5D77-11AA-7E97-994DC730AC88}"/>
+                <a16:creationId xmlns:a16="http://schemas.microsoft.com/office/drawing/2014/main" id="{D8B5E29A-41A4-C35F-EB75-7C1CCF0E135A}"/>
               </a:ext>
             </a:extLst>
           </p:cNvPr>
@@ -13004,14 +13712,14 @@
           </a:prstGeom>
         </p:spPr>
         <p:style>
-          <a:lnRef idx="2">
-            <a:schemeClr val="accent6"/>
+          <a:lnRef idx="3">
+            <a:schemeClr val="accent4"/>
           </a:lnRef>
           <a:fillRef idx="0">
-            <a:schemeClr val="accent6"/>
+            <a:schemeClr val="accent4"/>
           </a:fillRef>
-          <a:effectRef idx="1">
-            <a:schemeClr val="accent6"/>
+          <a:effectRef idx="2">
+            <a:schemeClr val="accent4"/>
           </a:effectRef>
           <a:fontRef idx="minor">
             <a:schemeClr val="tx1"/>
@@ -13023,7 +13731,7 @@
           <p:cNvPr id="15" name="Straight Connector 14">
             <a:extLst>
               <a:ext uri="{FF2B5EF4-FFF2-40B4-BE49-F238E27FC236}">
-                <a16:creationId xmlns:a16="http://schemas.microsoft.com/office/drawing/2014/main" id="{EB6D4CC3-8416-6D34-47F3-A1E6FB0ACEB9}"/>
+                <a16:creationId xmlns:a16="http://schemas.microsoft.com/office/drawing/2014/main" id="{73E8D1A5-70E2-09B8-AD7E-0341DB4C3934}"/>
               </a:ext>
             </a:extLst>
           </p:cNvPr>
@@ -13040,14 +13748,14 @@
           </a:prstGeom>
         </p:spPr>
         <p:style>
-          <a:lnRef idx="2">
-            <a:schemeClr val="accent4"/>
+          <a:lnRef idx="3">
+            <a:schemeClr val="accent6"/>
           </a:lnRef>
           <a:fillRef idx="0">
-            <a:schemeClr val="accent4"/>
+            <a:schemeClr val="accent6"/>
           </a:fillRef>
-          <a:effectRef idx="1">
-            <a:schemeClr val="accent4"/>
+          <a:effectRef idx="2">
+            <a:schemeClr val="accent6"/>
           </a:effectRef>
           <a:fontRef idx="minor">
             <a:schemeClr val="tx1"/>
@@ -13057,7 +13765,7 @@
     </p:spTree>
     <p:extLst>
       <p:ext uri="{BB962C8B-B14F-4D97-AF65-F5344CB8AC3E}">
-        <p14:creationId xmlns:p14="http://schemas.microsoft.com/office/powerpoint/2010/main" val="1331428061"/>
+        <p14:creationId xmlns:p14="http://schemas.microsoft.com/office/powerpoint/2010/main" val="62699590"/>
       </p:ext>
     </p:extLst>
   </p:cSld>
@@ -13067,7 +13775,7 @@
 </p:sld>
 </file>
 
-<file path=ppt/slides/slide22.xml><?xml version="1.0" encoding="utf-8"?>
+<file path=ppt/slides/slide23.xml><?xml version="1.0" encoding="utf-8"?>
 <p:sld xmlns:a="http://schemas.openxmlformats.org/drawingml/2006/main" xmlns:r="http://schemas.openxmlformats.org/officeDocument/2006/relationships" xmlns:p="http://schemas.openxmlformats.org/presentationml/2006/main">
   <p:cSld>
     <p:spTree>
@@ -13212,18 +13920,48 @@
             <a:fld id="{B82CCC60-E8CD-4174-8B1A-7DF615B22EEF}" type="slidenum">
               <a:rPr lang="en-US" smtClean="0"/>
               <a:pPr/>
-              <a:t>22</a:t>
+              <a:t>23</a:t>
             </a:fld>
             <a:endParaRPr lang="en-US"/>
           </a:p>
         </p:txBody>
       </p:sp>
+      <p:pic>
+        <p:nvPicPr>
+          <p:cNvPr id="7" name="Picture 6">
+            <a:extLst>
+              <a:ext uri="{FF2B5EF4-FFF2-40B4-BE49-F238E27FC236}">
+                <a16:creationId xmlns:a16="http://schemas.microsoft.com/office/drawing/2014/main" id="{27BE2F5B-D595-98C2-957E-3FD32797B598}"/>
+              </a:ext>
+            </a:extLst>
+          </p:cNvPr>
+          <p:cNvPicPr>
+            <a:picLocks noChangeAspect="1"/>
+          </p:cNvPicPr>
+          <p:nvPr/>
+        </p:nvPicPr>
+        <p:blipFill>
+          <a:blip r:embed="rId2"/>
+          <a:stretch>
+            <a:fillRect/>
+          </a:stretch>
+        </p:blipFill>
+        <p:spPr>
+          <a:xfrm>
+            <a:off x="1421494" y="5251862"/>
+            <a:ext cx="9030960" cy="390580"/>
+          </a:xfrm>
+          <a:prstGeom prst="rect">
+            <a:avLst/>
+          </a:prstGeom>
+        </p:spPr>
+      </p:pic>
       <p:cxnSp>
         <p:nvCxnSpPr>
-          <p:cNvPr id="6" name="Straight Connector 5">
+          <p:cNvPr id="9" name="Straight Connector 8">
             <a:extLst>
               <a:ext uri="{FF2B5EF4-FFF2-40B4-BE49-F238E27FC236}">
-                <a16:creationId xmlns:a16="http://schemas.microsoft.com/office/drawing/2014/main" id="{84ABF028-7B4F-6283-AF57-F6555A2E78F4}"/>
+                <a16:creationId xmlns:a16="http://schemas.microsoft.com/office/drawing/2014/main" id="{E3F21D60-7F81-6C1A-D105-A679C046991D}"/>
               </a:ext>
             </a:extLst>
           </p:cNvPr>
@@ -13234,8 +13972,8 @@
         </p:nvCxnSpPr>
         <p:spPr>
           <a:xfrm>
-            <a:off x="2440127" y="5413787"/>
-            <a:ext cx="963562" cy="550606"/>
+            <a:off x="3742636" y="5993996"/>
+            <a:ext cx="1544981" cy="0"/>
           </a:xfrm>
           <a:prstGeom prst="line">
             <a:avLst/>
@@ -13243,13 +13981,13 @@
         </p:spPr>
         <p:style>
           <a:lnRef idx="2">
-            <a:schemeClr val="accent2"/>
+            <a:schemeClr val="accent5"/>
           </a:lnRef>
           <a:fillRef idx="0">
-            <a:schemeClr val="accent2"/>
+            <a:schemeClr val="accent5"/>
           </a:fillRef>
           <a:effectRef idx="1">
-            <a:schemeClr val="accent2"/>
+            <a:schemeClr val="accent5"/>
           </a:effectRef>
           <a:fontRef idx="minor">
             <a:schemeClr val="tx1"/>
@@ -13258,10 +13996,10 @@
       </p:cxnSp>
       <p:cxnSp>
         <p:nvCxnSpPr>
-          <p:cNvPr id="8" name="Straight Connector 7">
+          <p:cNvPr id="11" name="Straight Connector 10">
             <a:extLst>
               <a:ext uri="{FF2B5EF4-FFF2-40B4-BE49-F238E27FC236}">
-                <a16:creationId xmlns:a16="http://schemas.microsoft.com/office/drawing/2014/main" id="{BBCA5915-F07A-6C67-7D54-15D84EA1AD51}"/>
+                <a16:creationId xmlns:a16="http://schemas.microsoft.com/office/drawing/2014/main" id="{367CC66E-908B-D824-6330-DE3CE8CFA251}"/>
               </a:ext>
             </a:extLst>
           </p:cNvPr>
@@ -13271,9 +14009,9 @@
           <p:nvPr/>
         </p:nvCxnSpPr>
         <p:spPr>
-          <a:xfrm flipV="1">
-            <a:off x="3765755" y="5964393"/>
-            <a:ext cx="766916" cy="707922"/>
+          <a:xfrm>
+            <a:off x="3742636" y="6464180"/>
+            <a:ext cx="1544981" cy="0"/>
           </a:xfrm>
           <a:prstGeom prst="line">
             <a:avLst/>
@@ -13296,46 +14034,10 @@
       </p:cxnSp>
       <p:cxnSp>
         <p:nvCxnSpPr>
-          <p:cNvPr id="10" name="Straight Connector 9">
+          <p:cNvPr id="12" name="Straight Connector 11">
             <a:extLst>
               <a:ext uri="{FF2B5EF4-FFF2-40B4-BE49-F238E27FC236}">
-                <a16:creationId xmlns:a16="http://schemas.microsoft.com/office/drawing/2014/main" id="{28F3B478-5BBD-75C9-21DE-2DA24DB45DDD}"/>
-              </a:ext>
-            </a:extLst>
-          </p:cNvPr>
-          <p:cNvCxnSpPr/>
-          <p:nvPr/>
-        </p:nvCxnSpPr>
-        <p:spPr>
-          <a:xfrm flipH="1">
-            <a:off x="4748981" y="6469627"/>
-            <a:ext cx="1347019" cy="0"/>
-          </a:xfrm>
-          <a:prstGeom prst="line">
-            <a:avLst/>
-          </a:prstGeom>
-        </p:spPr>
-        <p:style>
-          <a:lnRef idx="2">
-            <a:schemeClr val="accent1"/>
-          </a:lnRef>
-          <a:fillRef idx="0">
-            <a:schemeClr val="accent1"/>
-          </a:fillRef>
-          <a:effectRef idx="1">
-            <a:schemeClr val="accent1"/>
-          </a:effectRef>
-          <a:fontRef idx="minor">
-            <a:schemeClr val="tx1"/>
-          </a:fontRef>
-        </p:style>
-      </p:cxnSp>
-      <p:cxnSp>
-        <p:nvCxnSpPr>
-          <p:cNvPr id="13" name="Straight Connector 12">
-            <a:extLst>
-              <a:ext uri="{FF2B5EF4-FFF2-40B4-BE49-F238E27FC236}">
-                <a16:creationId xmlns:a16="http://schemas.microsoft.com/office/drawing/2014/main" id="{C0F7CB0F-0D3B-7B72-04F0-C3074929666D}"/>
+                <a16:creationId xmlns:a16="http://schemas.microsoft.com/office/drawing/2014/main" id="{10B151E6-E37C-FACD-715E-D3F84ED212F7}"/>
               </a:ext>
             </a:extLst>
           </p:cNvPr>
@@ -13345,23 +14047,23 @@
           <p:nvPr/>
         </p:nvCxnSpPr>
         <p:spPr>
-          <a:xfrm flipV="1">
-            <a:off x="5425768" y="5226059"/>
-            <a:ext cx="855407" cy="648929"/>
+          <a:xfrm flipH="1">
+            <a:off x="5287617" y="6232215"/>
+            <a:ext cx="1103244" cy="0"/>
           </a:xfrm>
           <a:prstGeom prst="line">
             <a:avLst/>
           </a:prstGeom>
         </p:spPr>
         <p:style>
-          <a:lnRef idx="2">
-            <a:schemeClr val="accent6"/>
+          <a:lnRef idx="3">
+            <a:schemeClr val="accent2"/>
           </a:lnRef>
           <a:fillRef idx="0">
-            <a:schemeClr val="accent6"/>
+            <a:schemeClr val="accent2"/>
           </a:fillRef>
-          <a:effectRef idx="1">
-            <a:schemeClr val="accent6"/>
+          <a:effectRef idx="2">
+            <a:schemeClr val="accent2"/>
           </a:effectRef>
           <a:fontRef idx="minor">
             <a:schemeClr val="tx1"/>
@@ -13370,34 +14072,74 @@
       </p:cxnSp>
       <p:cxnSp>
         <p:nvCxnSpPr>
-          <p:cNvPr id="15" name="Straight Connector 14">
+          <p:cNvPr id="14" name="Straight Connector 13">
             <a:extLst>
               <a:ext uri="{FF2B5EF4-FFF2-40B4-BE49-F238E27FC236}">
-                <a16:creationId xmlns:a16="http://schemas.microsoft.com/office/drawing/2014/main" id="{49A8D07C-EDDC-9F65-66A4-03BCB8DE3A41}"/>
+                <a16:creationId xmlns:a16="http://schemas.microsoft.com/office/drawing/2014/main" id="{CA55E126-2D19-3824-2D25-E75905221540}"/>
               </a:ext>
             </a:extLst>
           </p:cNvPr>
-          <p:cNvCxnSpPr/>
+          <p:cNvCxnSpPr>
+            <a:cxnSpLocks/>
+          </p:cNvCxnSpPr>
           <p:nvPr/>
         </p:nvCxnSpPr>
         <p:spPr>
-          <a:xfrm flipH="1" flipV="1">
-            <a:off x="6803923" y="5830991"/>
-            <a:ext cx="983226" cy="707922"/>
+          <a:xfrm>
+            <a:off x="6390861" y="5993996"/>
+            <a:ext cx="1230971" cy="0"/>
           </a:xfrm>
           <a:prstGeom prst="line">
             <a:avLst/>
           </a:prstGeom>
         </p:spPr>
         <p:style>
-          <a:lnRef idx="2">
+          <a:lnRef idx="3">
             <a:schemeClr val="accent4"/>
           </a:lnRef>
           <a:fillRef idx="0">
             <a:schemeClr val="accent4"/>
           </a:fillRef>
-          <a:effectRef idx="1">
+          <a:effectRef idx="2">
             <a:schemeClr val="accent4"/>
+          </a:effectRef>
+          <a:fontRef idx="minor">
+            <a:schemeClr val="tx1"/>
+          </a:fontRef>
+        </p:style>
+      </p:cxnSp>
+      <p:cxnSp>
+        <p:nvCxnSpPr>
+          <p:cNvPr id="16" name="Straight Connector 15">
+            <a:extLst>
+              <a:ext uri="{FF2B5EF4-FFF2-40B4-BE49-F238E27FC236}">
+                <a16:creationId xmlns:a16="http://schemas.microsoft.com/office/drawing/2014/main" id="{95AC9189-614F-9868-E50E-29B78E464E22}"/>
+              </a:ext>
+            </a:extLst>
+          </p:cNvPr>
+          <p:cNvCxnSpPr>
+            <a:cxnSpLocks/>
+          </p:cNvCxnSpPr>
+          <p:nvPr/>
+        </p:nvCxnSpPr>
+        <p:spPr>
+          <a:xfrm flipH="1">
+            <a:off x="6390861" y="6552510"/>
+            <a:ext cx="1269075" cy="0"/>
+          </a:xfrm>
+          <a:prstGeom prst="line">
+            <a:avLst/>
+          </a:prstGeom>
+        </p:spPr>
+        <p:style>
+          <a:lnRef idx="3">
+            <a:schemeClr val="accent6"/>
+          </a:lnRef>
+          <a:fillRef idx="0">
+            <a:schemeClr val="accent6"/>
+          </a:fillRef>
+          <a:effectRef idx="2">
+            <a:schemeClr val="accent6"/>
           </a:effectRef>
           <a:fontRef idx="minor">
             <a:schemeClr val="tx1"/>
@@ -13417,7 +14159,7 @@
 </p:sld>
 </file>
 
-<file path=ppt/slides/slide23.xml><?xml version="1.0" encoding="utf-8"?>
+<file path=ppt/slides/slide24.xml><?xml version="1.0" encoding="utf-8"?>
 <p:sld xmlns:a="http://schemas.openxmlformats.org/drawingml/2006/main" xmlns:r="http://schemas.openxmlformats.org/officeDocument/2006/relationships" xmlns:p="http://schemas.openxmlformats.org/presentationml/2006/main">
   <p:cSld>
     <p:spTree>
@@ -13558,7 +14300,7 @@
             <a:fld id="{B82CCC60-E8CD-4174-8B1A-7DF615B22EEF}" type="slidenum">
               <a:rPr lang="en-US" smtClean="0"/>
               <a:pPr/>
-              <a:t>23</a:t>
+              <a:t>24</a:t>
             </a:fld>
             <a:endParaRPr lang="en-US"/>
           </a:p>
@@ -13819,7 +14561,7 @@
 </p:sld>
 </file>
 
-<file path=ppt/slides/slide24.xml><?xml version="1.0" encoding="utf-8"?>
+<file path=ppt/slides/slide25.xml><?xml version="1.0" encoding="utf-8"?>
 <p:sld xmlns:a="http://schemas.openxmlformats.org/drawingml/2006/main" xmlns:r="http://schemas.openxmlformats.org/officeDocument/2006/relationships" xmlns:p="http://schemas.openxmlformats.org/presentationml/2006/main">
   <p:cSld>
     <p:spTree>
@@ -14260,7 +15002,7 @@
             <a:fld id="{B82CCC60-E8CD-4174-8B1A-7DF615B22EEF}" type="slidenum">
               <a:rPr lang="en-US" smtClean="0"/>
               <a:pPr/>
-              <a:t>24</a:t>
+              <a:t>25</a:t>
             </a:fld>
             <a:endParaRPr lang="en-US"/>
           </a:p>
@@ -14383,7 +15125,7 @@
 </p:sld>
 </file>
 
-<file path=ppt/slides/slide25.xml><?xml version="1.0" encoding="utf-8"?>
+<file path=ppt/slides/slide26.xml><?xml version="1.0" encoding="utf-8"?>
 <p:sld xmlns:a="http://schemas.openxmlformats.org/drawingml/2006/main" xmlns:r="http://schemas.openxmlformats.org/officeDocument/2006/relationships" xmlns:p="http://schemas.openxmlformats.org/presentationml/2006/main">
   <p:cSld>
     <p:spTree>
@@ -15133,7 +15875,7 @@
             <a:fld id="{B82CCC60-E8CD-4174-8B1A-7DF615B22EEF}" type="slidenum">
               <a:rPr lang="en-US" smtClean="0"/>
               <a:pPr/>
-              <a:t>25</a:t>
+              <a:t>26</a:t>
             </a:fld>
             <a:endParaRPr lang="en-US"/>
           </a:p>
@@ -15256,7 +15998,7 @@
 </p:sld>
 </file>
 
-<file path=ppt/slides/slide26.xml><?xml version="1.0" encoding="utf-8"?>
+<file path=ppt/slides/slide27.xml><?xml version="1.0" encoding="utf-8"?>
 <p:sld xmlns:a="http://schemas.openxmlformats.org/drawingml/2006/main" xmlns:r="http://schemas.openxmlformats.org/officeDocument/2006/relationships" xmlns:p="http://schemas.openxmlformats.org/presentationml/2006/main">
   <p:cSld>
     <p:spTree>
@@ -16006,7 +16748,7 @@
             <a:fld id="{B82CCC60-E8CD-4174-8B1A-7DF615B22EEF}" type="slidenum">
               <a:rPr lang="en-US" smtClean="0"/>
               <a:pPr/>
-              <a:t>26</a:t>
+              <a:t>27</a:t>
             </a:fld>
             <a:endParaRPr lang="en-US"/>
           </a:p>
@@ -16315,7 +17057,7 @@
 </p:sld>
 </file>
 
-<file path=ppt/slides/slide27.xml><?xml version="1.0" encoding="utf-8"?>
+<file path=ppt/slides/slide28.xml><?xml version="1.0" encoding="utf-8"?>
 <p:sld xmlns:a="http://schemas.openxmlformats.org/drawingml/2006/main" xmlns:r="http://schemas.openxmlformats.org/officeDocument/2006/relationships" xmlns:p="http://schemas.openxmlformats.org/presentationml/2006/main">
   <p:cSld>
     <p:spTree>
@@ -16770,7 +17512,7 @@
             <a:fld id="{B82CCC60-E8CD-4174-8B1A-7DF615B22EEF}" type="slidenum">
               <a:rPr lang="en-US" smtClean="0"/>
               <a:pPr/>
-              <a:t>27</a:t>
+              <a:t>28</a:t>
             </a:fld>
             <a:endParaRPr lang="en-US"/>
           </a:p>
@@ -17204,7 +17946,7 @@
 </p:sld>
 </file>
 
-<file path=ppt/slides/slide28.xml><?xml version="1.0" encoding="utf-8"?>
+<file path=ppt/slides/slide29.xml><?xml version="1.0" encoding="utf-8"?>
 <p:sld xmlns:a="http://schemas.openxmlformats.org/drawingml/2006/main" xmlns:r="http://schemas.openxmlformats.org/officeDocument/2006/relationships" xmlns:p="http://schemas.openxmlformats.org/presentationml/2006/main">
   <p:cSld>
     <p:spTree>
@@ -17659,7 +18401,7 @@
             <a:fld id="{B82CCC60-E8CD-4174-8B1A-7DF615B22EEF}" type="slidenum">
               <a:rPr lang="en-US" smtClean="0"/>
               <a:pPr/>
-              <a:t>28</a:t>
+              <a:t>29</a:t>
             </a:fld>
             <a:endParaRPr lang="en-US"/>
           </a:p>
@@ -18144,7 +18886,797 @@
 </p:sld>
 </file>
 
-<file path=ppt/slides/slide29.xml><?xml version="1.0" encoding="utf-8"?>
+<file path=ppt/slides/slide3.xml><?xml version="1.0" encoding="utf-8"?>
+<p:sld xmlns:a="http://schemas.openxmlformats.org/drawingml/2006/main" xmlns:r="http://schemas.openxmlformats.org/officeDocument/2006/relationships" xmlns:p="http://schemas.openxmlformats.org/presentationml/2006/main">
+  <p:cSld>
+    <p:spTree>
+      <p:nvGrpSpPr>
+        <p:cNvPr id="1" name="">
+          <a:extLst>
+            <a:ext uri="{FF2B5EF4-FFF2-40B4-BE49-F238E27FC236}">
+              <a16:creationId xmlns:a16="http://schemas.microsoft.com/office/drawing/2014/main" id="{5A3FCD40-FF5E-55E1-A042-05E7BD7C66EE}"/>
+            </a:ext>
+          </a:extLst>
+        </p:cNvPr>
+        <p:cNvGrpSpPr/>
+        <p:nvPr/>
+      </p:nvGrpSpPr>
+      <p:grpSpPr>
+        <a:xfrm>
+          <a:off x="0" y="0"/>
+          <a:ext cx="0" cy="0"/>
+          <a:chOff x="0" y="0"/>
+          <a:chExt cx="0" cy="0"/>
+        </a:xfrm>
+      </p:grpSpPr>
+      <p:sp>
+        <p:nvSpPr>
+          <p:cNvPr id="2" name="Title 1">
+            <a:extLst>
+              <a:ext uri="{FF2B5EF4-FFF2-40B4-BE49-F238E27FC236}">
+                <a16:creationId xmlns:a16="http://schemas.microsoft.com/office/drawing/2014/main" id="{1A89D763-3BFE-13BB-1836-D48DA8AE39C2}"/>
+              </a:ext>
+            </a:extLst>
+          </p:cNvPr>
+          <p:cNvSpPr>
+            <a:spLocks noGrp="1"/>
+          </p:cNvSpPr>
+          <p:nvPr>
+            <p:ph type="title"/>
+          </p:nvPr>
+        </p:nvSpPr>
+        <p:spPr/>
+        <p:txBody>
+          <a:bodyPr>
+            <a:normAutofit fontScale="90000"/>
+          </a:bodyPr>
+          <a:lstStyle/>
+          <a:p>
+            <a:r>
+              <a:rPr lang="en-US" dirty="0"/>
+              <a:t>Lab #3: Burrows-Wheeler Alignment</a:t>
+            </a:r>
+          </a:p>
+        </p:txBody>
+      </p:sp>
+      <p:sp>
+        <p:nvSpPr>
+          <p:cNvPr id="3" name="Content Placeholder 2">
+            <a:extLst>
+              <a:ext uri="{FF2B5EF4-FFF2-40B4-BE49-F238E27FC236}">
+                <a16:creationId xmlns:a16="http://schemas.microsoft.com/office/drawing/2014/main" id="{78770EC9-785B-AC9D-4E98-71BDFD958572}"/>
+              </a:ext>
+            </a:extLst>
+          </p:cNvPr>
+          <p:cNvSpPr>
+            <a:spLocks noGrp="1"/>
+          </p:cNvSpPr>
+          <p:nvPr>
+            <p:ph idx="1"/>
+          </p:nvPr>
+        </p:nvSpPr>
+        <p:spPr>
+          <a:xfrm>
+            <a:off x="569028" y="1710735"/>
+            <a:ext cx="7625958" cy="5124936"/>
+          </a:xfrm>
+        </p:spPr>
+        <p:txBody>
+          <a:bodyPr>
+            <a:normAutofit fontScale="70000" lnSpcReduction="20000"/>
+          </a:bodyPr>
+          <a:lstStyle/>
+          <a:p>
+            <a:r>
+              <a:rPr lang="en-US" dirty="0"/>
+              <a:t>Lab #3: Burrows-Wheeler Transform and Search </a:t>
+            </a:r>
+          </a:p>
+          <a:p>
+            <a:r>
+              <a:rPr lang="en-US" dirty="0"/>
+              <a:t>Due </a:t>
+            </a:r>
+            <a:r>
+              <a:rPr lang="en-US" dirty="0">
+                <a:solidFill>
+                  <a:srgbClr val="FF0000"/>
+                </a:solidFill>
+              </a:rPr>
+              <a:t>Friday </a:t>
+            </a:r>
+            <a:r>
+              <a:rPr lang="en-US">
+                <a:solidFill>
+                  <a:srgbClr val="FF0000"/>
+                </a:solidFill>
+              </a:rPr>
+              <a:t>October 9</a:t>
+            </a:r>
+            <a:r>
+              <a:rPr lang="en-US" baseline="30000">
+                <a:solidFill>
+                  <a:srgbClr val="FF0000"/>
+                </a:solidFill>
+              </a:rPr>
+              <a:t>th</a:t>
+            </a:r>
+            <a:r>
+              <a:rPr lang="en-US">
+                <a:solidFill>
+                  <a:srgbClr val="FF0000"/>
+                </a:solidFill>
+              </a:rPr>
+              <a:t> </a:t>
+            </a:r>
+            <a:r>
+              <a:rPr lang="en-US" dirty="0">
+                <a:solidFill>
+                  <a:srgbClr val="FF0000"/>
+                </a:solidFill>
+              </a:rPr>
+              <a:t>at 8:00pm</a:t>
+            </a:r>
+            <a:r>
+              <a:rPr lang="en-US" dirty="0"/>
+              <a:t>.</a:t>
+            </a:r>
+          </a:p>
+          <a:p>
+            <a:r>
+              <a:rPr lang="en-US" dirty="0"/>
+              <a:t>Undergraduate and Graduate: Implement function </a:t>
+            </a:r>
+            <a:r>
+              <a:rPr lang="en-US" i="1" dirty="0" err="1"/>
+              <a:t>burrows_wheeler_transform</a:t>
+            </a:r>
+            <a:r>
+              <a:rPr lang="en-US" i="1" dirty="0"/>
+              <a:t>(string seq) </a:t>
+            </a:r>
+            <a:r>
+              <a:rPr lang="en-US" dirty="0"/>
+              <a:t>that returns three objects:</a:t>
+            </a:r>
+          </a:p>
+          <a:p>
+            <a:pPr lvl="1"/>
+            <a:r>
+              <a:rPr lang="en-US" dirty="0"/>
+              <a:t>(U: 30pt, G: 25pt) BWT string</a:t>
+            </a:r>
+          </a:p>
+          <a:p>
+            <a:pPr lvl="1"/>
+            <a:r>
+              <a:rPr lang="en-US" dirty="0"/>
+              <a:t>(U: 30pt, G: 25pt) Suffix array (zero-based set of integers)</a:t>
+            </a:r>
+          </a:p>
+          <a:p>
+            <a:pPr lvl="1"/>
+            <a:r>
+              <a:rPr lang="en-US" dirty="0"/>
+              <a:t>(U: 40pt, G: 25pt) First letters of the suffix array string</a:t>
+            </a:r>
+          </a:p>
+          <a:p>
+            <a:r>
+              <a:rPr lang="en-US" dirty="0"/>
+              <a:t>Graduate only (25pt): implement function </a:t>
+            </a:r>
+            <a:r>
+              <a:rPr lang="en-US" i="1" dirty="0" err="1"/>
+              <a:t>bwt_search_exact</a:t>
+            </a:r>
+            <a:r>
+              <a:rPr lang="en-US" i="1" dirty="0"/>
+              <a:t>(string pattern, string </a:t>
+            </a:r>
+            <a:r>
+              <a:rPr lang="en-US" i="1" dirty="0" err="1"/>
+              <a:t>bwt</a:t>
+            </a:r>
+            <a:r>
+              <a:rPr lang="en-US" i="1" dirty="0"/>
+              <a:t>, array </a:t>
+            </a:r>
+            <a:r>
+              <a:rPr lang="en-US" i="1" dirty="0" err="1"/>
+              <a:t>suffix_array</a:t>
+            </a:r>
+            <a:r>
+              <a:rPr lang="en-US" i="1" dirty="0"/>
+              <a:t>, string </a:t>
+            </a:r>
+            <a:r>
+              <a:rPr lang="en-US" i="1" dirty="0" err="1"/>
+              <a:t>first_column</a:t>
+            </a:r>
+            <a:r>
+              <a:rPr lang="en-US" i="1" dirty="0"/>
+              <a:t>) </a:t>
+            </a:r>
+            <a:r>
+              <a:rPr lang="en-US" dirty="0"/>
+              <a:t>that returns </a:t>
+            </a:r>
+          </a:p>
+          <a:p>
+            <a:pPr lvl="1"/>
+            <a:r>
+              <a:rPr lang="en-US" dirty="0"/>
+              <a:t>array of zero-based positions of the beginning of the pattern in seq</a:t>
+            </a:r>
+          </a:p>
+          <a:p>
+            <a:pPr lvl="1"/>
+            <a:r>
+              <a:rPr lang="en-US" dirty="0"/>
+              <a:t>Only compute forward matches</a:t>
+            </a:r>
+          </a:p>
+          <a:p>
+            <a:pPr lvl="1"/>
+            <a:r>
+              <a:rPr lang="en-US" dirty="0"/>
+              <a:t>Example output for pattern “CG” is [ 0, 8 ]</a:t>
+            </a:r>
+          </a:p>
+          <a:p>
+            <a:pPr lvl="1"/>
+            <a:r>
+              <a:rPr lang="en-US" dirty="0"/>
+              <a:t>Report matches in any order</a:t>
+            </a:r>
+          </a:p>
+          <a:p>
+            <a:r>
+              <a:rPr lang="en-US" dirty="0"/>
+              <a:t>Name file bwt.py and submit to </a:t>
+            </a:r>
+            <a:r>
+              <a:rPr lang="en-US" dirty="0" err="1"/>
+              <a:t>autograder</a:t>
+            </a:r>
+            <a:r>
+              <a:rPr lang="en-US" dirty="0"/>
+              <a:t> in </a:t>
+            </a:r>
+            <a:r>
+              <a:rPr lang="en-US" dirty="0" err="1"/>
+              <a:t>Gradescope</a:t>
+            </a:r>
+            <a:endParaRPr lang="en-US" dirty="0"/>
+          </a:p>
+        </p:txBody>
+      </p:sp>
+      <p:sp>
+        <p:nvSpPr>
+          <p:cNvPr id="4" name="Slide Number Placeholder 3">
+            <a:extLst>
+              <a:ext uri="{FF2B5EF4-FFF2-40B4-BE49-F238E27FC236}">
+                <a16:creationId xmlns:a16="http://schemas.microsoft.com/office/drawing/2014/main" id="{15EF743D-60A9-18B2-5AD8-7B17DB0CF57E}"/>
+              </a:ext>
+            </a:extLst>
+          </p:cNvPr>
+          <p:cNvSpPr>
+            <a:spLocks noGrp="1"/>
+          </p:cNvSpPr>
+          <p:nvPr>
+            <p:ph type="sldNum" sz="quarter" idx="12"/>
+          </p:nvPr>
+        </p:nvSpPr>
+        <p:spPr/>
+        <p:txBody>
+          <a:bodyPr/>
+          <a:lstStyle/>
+          <a:p>
+            <a:fld id="{B82CCC60-E8CD-4174-8B1A-7DF615B22EEF}" type="slidenum">
+              <a:rPr lang="en-US" smtClean="0"/>
+              <a:pPr/>
+              <a:t>3</a:t>
+            </a:fld>
+            <a:endParaRPr lang="en-US" dirty="0"/>
+          </a:p>
+        </p:txBody>
+      </p:sp>
+      <p:pic>
+        <p:nvPicPr>
+          <p:cNvPr id="6" name="Picture 5">
+            <a:extLst>
+              <a:ext uri="{FF2B5EF4-FFF2-40B4-BE49-F238E27FC236}">
+                <a16:creationId xmlns:a16="http://schemas.microsoft.com/office/drawing/2014/main" id="{C509CC58-5BBD-2489-A074-6A4B1C8EC530}"/>
+              </a:ext>
+            </a:extLst>
+          </p:cNvPr>
+          <p:cNvPicPr>
+            <a:picLocks noChangeAspect="1"/>
+          </p:cNvPicPr>
+          <p:nvPr/>
+        </p:nvPicPr>
+        <p:blipFill>
+          <a:blip r:embed="rId2"/>
+          <a:srcRect l="71567" r="1" b="21101"/>
+          <a:stretch>
+            <a:fillRect/>
+          </a:stretch>
+        </p:blipFill>
+        <p:spPr>
+          <a:xfrm>
+            <a:off x="9388366" y="1759481"/>
+            <a:ext cx="2707055" cy="3498320"/>
+          </a:xfrm>
+          <a:prstGeom prst="rect">
+            <a:avLst/>
+          </a:prstGeom>
+        </p:spPr>
+      </p:pic>
+      <p:cxnSp>
+        <p:nvCxnSpPr>
+          <p:cNvPr id="9" name="Straight Arrow Connector 8">
+            <a:extLst>
+              <a:ext uri="{FF2B5EF4-FFF2-40B4-BE49-F238E27FC236}">
+                <a16:creationId xmlns:a16="http://schemas.microsoft.com/office/drawing/2014/main" id="{F2D85C6A-9655-0C1F-B08A-0D6D9F0F1D18}"/>
+              </a:ext>
+            </a:extLst>
+          </p:cNvPr>
+          <p:cNvCxnSpPr>
+            <a:cxnSpLocks/>
+            <a:endCxn id="10" idx="0"/>
+          </p:cNvCxnSpPr>
+          <p:nvPr/>
+        </p:nvCxnSpPr>
+        <p:spPr>
+          <a:xfrm flipH="1">
+            <a:off x="10011102" y="5202621"/>
+            <a:ext cx="1" cy="794684"/>
+          </a:xfrm>
+          <a:prstGeom prst="straightConnector1">
+            <a:avLst/>
+          </a:prstGeom>
+          <a:ln>
+            <a:tailEnd type="triangle"/>
+          </a:ln>
+        </p:spPr>
+        <p:style>
+          <a:lnRef idx="1">
+            <a:schemeClr val="accent1"/>
+          </a:lnRef>
+          <a:fillRef idx="0">
+            <a:schemeClr val="accent1"/>
+          </a:fillRef>
+          <a:effectRef idx="0">
+            <a:schemeClr val="accent1"/>
+          </a:effectRef>
+          <a:fontRef idx="minor">
+            <a:schemeClr val="tx1"/>
+          </a:fontRef>
+        </p:style>
+      </p:cxnSp>
+      <p:sp>
+        <p:nvSpPr>
+          <p:cNvPr id="10" name="TextBox 9">
+            <a:extLst>
+              <a:ext uri="{FF2B5EF4-FFF2-40B4-BE49-F238E27FC236}">
+                <a16:creationId xmlns:a16="http://schemas.microsoft.com/office/drawing/2014/main" id="{06D1E701-ADF0-9C8E-4BCA-B15343892461}"/>
+              </a:ext>
+            </a:extLst>
+          </p:cNvPr>
+          <p:cNvSpPr txBox="1"/>
+          <p:nvPr/>
+        </p:nvSpPr>
+        <p:spPr>
+          <a:xfrm>
+            <a:off x="9159971" y="5997305"/>
+            <a:ext cx="1702261" cy="369332"/>
+          </a:xfrm>
+          <a:prstGeom prst="rect">
+            <a:avLst/>
+          </a:prstGeom>
+          <a:noFill/>
+          <a:ln>
+            <a:solidFill>
+              <a:schemeClr val="tx1"/>
+            </a:solidFill>
+          </a:ln>
+        </p:spPr>
+        <p:txBody>
+          <a:bodyPr wrap="none" rtlCol="0">
+            <a:spAutoFit/>
+          </a:bodyPr>
+          <a:lstStyle/>
+          <a:p>
+            <a:r>
+              <a:rPr lang="en-US" dirty="0"/>
+              <a:t>The first column</a:t>
+            </a:r>
+          </a:p>
+        </p:txBody>
+      </p:sp>
+      <p:cxnSp>
+        <p:nvCxnSpPr>
+          <p:cNvPr id="13" name="Straight Arrow Connector 12">
+            <a:extLst>
+              <a:ext uri="{FF2B5EF4-FFF2-40B4-BE49-F238E27FC236}">
+                <a16:creationId xmlns:a16="http://schemas.microsoft.com/office/drawing/2014/main" id="{8F5D73E2-7136-A83C-FD9A-1303A47D52DE}"/>
+              </a:ext>
+            </a:extLst>
+          </p:cNvPr>
+          <p:cNvCxnSpPr>
+            <a:cxnSpLocks/>
+            <a:endCxn id="14" idx="0"/>
+          </p:cNvCxnSpPr>
+          <p:nvPr/>
+        </p:nvCxnSpPr>
+        <p:spPr>
+          <a:xfrm>
+            <a:off x="11500945" y="5235774"/>
+            <a:ext cx="15767" cy="273751"/>
+          </a:xfrm>
+          <a:prstGeom prst="straightConnector1">
+            <a:avLst/>
+          </a:prstGeom>
+          <a:ln>
+            <a:tailEnd type="triangle"/>
+          </a:ln>
+        </p:spPr>
+        <p:style>
+          <a:lnRef idx="1">
+            <a:schemeClr val="accent1"/>
+          </a:lnRef>
+          <a:fillRef idx="0">
+            <a:schemeClr val="accent1"/>
+          </a:fillRef>
+          <a:effectRef idx="0">
+            <a:schemeClr val="accent1"/>
+          </a:effectRef>
+          <a:fontRef idx="minor">
+            <a:schemeClr val="tx1"/>
+          </a:fontRef>
+        </p:style>
+      </p:cxnSp>
+      <p:sp>
+        <p:nvSpPr>
+          <p:cNvPr id="14" name="TextBox 13">
+            <a:extLst>
+              <a:ext uri="{FF2B5EF4-FFF2-40B4-BE49-F238E27FC236}">
+                <a16:creationId xmlns:a16="http://schemas.microsoft.com/office/drawing/2014/main" id="{AABF93C9-FF89-6F8B-A1C6-17E6BF84FF01}"/>
+              </a:ext>
+            </a:extLst>
+          </p:cNvPr>
+          <p:cNvSpPr txBox="1"/>
+          <p:nvPr/>
+        </p:nvSpPr>
+        <p:spPr>
+          <a:xfrm>
+            <a:off x="11177754" y="5509525"/>
+            <a:ext cx="677915" cy="369332"/>
+          </a:xfrm>
+          <a:prstGeom prst="rect">
+            <a:avLst/>
+          </a:prstGeom>
+          <a:noFill/>
+          <a:ln>
+            <a:solidFill>
+              <a:schemeClr val="tx1"/>
+            </a:solidFill>
+          </a:ln>
+        </p:spPr>
+        <p:txBody>
+          <a:bodyPr wrap="square" rtlCol="0">
+            <a:spAutoFit/>
+          </a:bodyPr>
+          <a:lstStyle/>
+          <a:p>
+            <a:r>
+              <a:rPr lang="en-US" dirty="0"/>
+              <a:t>BWT</a:t>
+            </a:r>
+          </a:p>
+        </p:txBody>
+      </p:sp>
+      <p:cxnSp>
+        <p:nvCxnSpPr>
+          <p:cNvPr id="18" name="Straight Arrow Connector 17">
+            <a:extLst>
+              <a:ext uri="{FF2B5EF4-FFF2-40B4-BE49-F238E27FC236}">
+                <a16:creationId xmlns:a16="http://schemas.microsoft.com/office/drawing/2014/main" id="{AC482F83-C83D-BB1E-64C0-4F83BB8CED58}"/>
+              </a:ext>
+            </a:extLst>
+          </p:cNvPr>
+          <p:cNvCxnSpPr>
+            <a:cxnSpLocks/>
+            <a:endCxn id="19" idx="0"/>
+          </p:cNvCxnSpPr>
+          <p:nvPr/>
+        </p:nvCxnSpPr>
+        <p:spPr>
+          <a:xfrm flipH="1">
+            <a:off x="9149911" y="5225068"/>
+            <a:ext cx="451290" cy="284457"/>
+          </a:xfrm>
+          <a:prstGeom prst="straightConnector1">
+            <a:avLst/>
+          </a:prstGeom>
+          <a:ln>
+            <a:tailEnd type="triangle"/>
+          </a:ln>
+        </p:spPr>
+        <p:style>
+          <a:lnRef idx="1">
+            <a:schemeClr val="accent1"/>
+          </a:lnRef>
+          <a:fillRef idx="0">
+            <a:schemeClr val="accent1"/>
+          </a:fillRef>
+          <a:effectRef idx="0">
+            <a:schemeClr val="accent1"/>
+          </a:effectRef>
+          <a:fontRef idx="minor">
+            <a:schemeClr val="tx1"/>
+          </a:fontRef>
+        </p:style>
+      </p:cxnSp>
+      <p:sp>
+        <p:nvSpPr>
+          <p:cNvPr id="19" name="TextBox 18">
+            <a:extLst>
+              <a:ext uri="{FF2B5EF4-FFF2-40B4-BE49-F238E27FC236}">
+                <a16:creationId xmlns:a16="http://schemas.microsoft.com/office/drawing/2014/main" id="{C0FD0A88-004D-1836-0FE4-4288EBCAD1BE}"/>
+              </a:ext>
+            </a:extLst>
+          </p:cNvPr>
+          <p:cNvSpPr txBox="1"/>
+          <p:nvPr/>
+        </p:nvSpPr>
+        <p:spPr>
+          <a:xfrm>
+            <a:off x="8521260" y="5509525"/>
+            <a:ext cx="1257302" cy="369332"/>
+          </a:xfrm>
+          <a:prstGeom prst="rect">
+            <a:avLst/>
+          </a:prstGeom>
+          <a:noFill/>
+          <a:ln>
+            <a:solidFill>
+              <a:schemeClr val="tx1"/>
+            </a:solidFill>
+          </a:ln>
+        </p:spPr>
+        <p:txBody>
+          <a:bodyPr wrap="square" rtlCol="0">
+            <a:spAutoFit/>
+          </a:bodyPr>
+          <a:lstStyle/>
+          <a:p>
+            <a:r>
+              <a:rPr lang="en-US" dirty="0"/>
+              <a:t>Suffix array</a:t>
+            </a:r>
+          </a:p>
+        </p:txBody>
+      </p:sp>
+      <p:sp>
+        <p:nvSpPr>
+          <p:cNvPr id="23" name="TextBox 22">
+            <a:extLst>
+              <a:ext uri="{FF2B5EF4-FFF2-40B4-BE49-F238E27FC236}">
+                <a16:creationId xmlns:a16="http://schemas.microsoft.com/office/drawing/2014/main" id="{E9C07FFC-EB65-2035-CA95-5D868ABC89C8}"/>
+              </a:ext>
+            </a:extLst>
+          </p:cNvPr>
+          <p:cNvSpPr txBox="1"/>
+          <p:nvPr/>
+        </p:nvSpPr>
+        <p:spPr>
+          <a:xfrm>
+            <a:off x="9137416" y="1337426"/>
+            <a:ext cx="2958005" cy="646331"/>
+          </a:xfrm>
+          <a:prstGeom prst="rect">
+            <a:avLst/>
+          </a:prstGeom>
+          <a:noFill/>
+        </p:spPr>
+        <p:txBody>
+          <a:bodyPr wrap="square">
+            <a:spAutoFit/>
+          </a:bodyPr>
+          <a:lstStyle/>
+          <a:p>
+            <a:r>
+              <a:rPr lang="en-US" dirty="0"/>
+              <a:t>sequence: CGATGCACCGGT</a:t>
+            </a:r>
+            <a:br>
+              <a:rPr lang="en-US" dirty="0"/>
+            </a:br>
+            <a:endParaRPr lang="en-US" dirty="0"/>
+          </a:p>
+        </p:txBody>
+      </p:sp>
+      <p:sp>
+        <p:nvSpPr>
+          <p:cNvPr id="5" name="Rectangle 4">
+            <a:extLst>
+              <a:ext uri="{FF2B5EF4-FFF2-40B4-BE49-F238E27FC236}">
+                <a16:creationId xmlns:a16="http://schemas.microsoft.com/office/drawing/2014/main" id="{546CB4CA-0C91-6CF3-EDE3-4685CA2C9A74}"/>
+              </a:ext>
+            </a:extLst>
+          </p:cNvPr>
+          <p:cNvSpPr/>
+          <p:nvPr/>
+        </p:nvSpPr>
+        <p:spPr>
+          <a:xfrm>
+            <a:off x="10249556" y="1434531"/>
+            <a:ext cx="266043" cy="195557"/>
+          </a:xfrm>
+          <a:prstGeom prst="rect">
+            <a:avLst/>
+          </a:prstGeom>
+          <a:noFill/>
+          <a:ln>
+            <a:solidFill>
+              <a:schemeClr val="tx2">
+                <a:lumMod val="60000"/>
+                <a:lumOff val="40000"/>
+              </a:schemeClr>
+            </a:solidFill>
+          </a:ln>
+        </p:spPr>
+        <p:style>
+          <a:lnRef idx="2">
+            <a:schemeClr val="accent1">
+              <a:shade val="15000"/>
+            </a:schemeClr>
+          </a:lnRef>
+          <a:fillRef idx="1">
+            <a:schemeClr val="accent1"/>
+          </a:fillRef>
+          <a:effectRef idx="0">
+            <a:schemeClr val="accent1"/>
+          </a:effectRef>
+          <a:fontRef idx="minor">
+            <a:schemeClr val="lt1"/>
+          </a:fontRef>
+        </p:style>
+        <p:txBody>
+          <a:bodyPr rtlCol="0" anchor="ctr"/>
+          <a:lstStyle/>
+          <a:p>
+            <a:pPr algn="ctr"/>
+            <a:endParaRPr lang="en-US"/>
+          </a:p>
+        </p:txBody>
+      </p:sp>
+      <p:sp>
+        <p:nvSpPr>
+          <p:cNvPr id="8" name="Rectangle 7">
+            <a:extLst>
+              <a:ext uri="{FF2B5EF4-FFF2-40B4-BE49-F238E27FC236}">
+                <a16:creationId xmlns:a16="http://schemas.microsoft.com/office/drawing/2014/main" id="{BC30523D-470D-8393-34A3-EBD7E0C987B1}"/>
+              </a:ext>
+            </a:extLst>
+          </p:cNvPr>
+          <p:cNvSpPr/>
+          <p:nvPr/>
+        </p:nvSpPr>
+        <p:spPr>
+          <a:xfrm>
+            <a:off x="9427780" y="3186240"/>
+            <a:ext cx="821776" cy="463477"/>
+          </a:xfrm>
+          <a:prstGeom prst="rect">
+            <a:avLst/>
+          </a:prstGeom>
+          <a:noFill/>
+          <a:ln>
+            <a:solidFill>
+              <a:schemeClr val="tx2">
+                <a:lumMod val="60000"/>
+                <a:lumOff val="40000"/>
+              </a:schemeClr>
+            </a:solidFill>
+          </a:ln>
+        </p:spPr>
+        <p:style>
+          <a:lnRef idx="2">
+            <a:schemeClr val="accent1">
+              <a:shade val="15000"/>
+            </a:schemeClr>
+          </a:lnRef>
+          <a:fillRef idx="1">
+            <a:schemeClr val="accent1"/>
+          </a:fillRef>
+          <a:effectRef idx="0">
+            <a:schemeClr val="accent1"/>
+          </a:effectRef>
+          <a:fontRef idx="minor">
+            <a:schemeClr val="lt1"/>
+          </a:fontRef>
+        </p:style>
+        <p:txBody>
+          <a:bodyPr rtlCol="0" anchor="ctr"/>
+          <a:lstStyle/>
+          <a:p>
+            <a:pPr algn="ctr"/>
+            <a:endParaRPr lang="en-US"/>
+          </a:p>
+        </p:txBody>
+      </p:sp>
+      <p:sp>
+        <p:nvSpPr>
+          <p:cNvPr id="15" name="Rectangle 14">
+            <a:extLst>
+              <a:ext uri="{FF2B5EF4-FFF2-40B4-BE49-F238E27FC236}">
+                <a16:creationId xmlns:a16="http://schemas.microsoft.com/office/drawing/2014/main" id="{DEAF287A-B5EC-4A5E-93B6-966FC0A1C9C0}"/>
+              </a:ext>
+            </a:extLst>
+          </p:cNvPr>
+          <p:cNvSpPr/>
+          <p:nvPr/>
+        </p:nvSpPr>
+        <p:spPr>
+          <a:xfrm>
+            <a:off x="11234902" y="1438062"/>
+            <a:ext cx="266043" cy="195557"/>
+          </a:xfrm>
+          <a:prstGeom prst="rect">
+            <a:avLst/>
+          </a:prstGeom>
+          <a:noFill/>
+          <a:ln>
+            <a:solidFill>
+              <a:schemeClr val="tx2">
+                <a:lumMod val="60000"/>
+                <a:lumOff val="40000"/>
+              </a:schemeClr>
+            </a:solidFill>
+          </a:ln>
+        </p:spPr>
+        <p:style>
+          <a:lnRef idx="2">
+            <a:schemeClr val="accent1">
+              <a:shade val="15000"/>
+            </a:schemeClr>
+          </a:lnRef>
+          <a:fillRef idx="1">
+            <a:schemeClr val="accent1"/>
+          </a:fillRef>
+          <a:effectRef idx="0">
+            <a:schemeClr val="accent1"/>
+          </a:effectRef>
+          <a:fontRef idx="minor">
+            <a:schemeClr val="lt1"/>
+          </a:fontRef>
+        </p:style>
+        <p:txBody>
+          <a:bodyPr rtlCol="0" anchor="ctr"/>
+          <a:lstStyle/>
+          <a:p>
+            <a:pPr algn="ctr"/>
+            <a:endParaRPr lang="en-US"/>
+          </a:p>
+        </p:txBody>
+      </p:sp>
+    </p:spTree>
+    <p:extLst>
+      <p:ext uri="{BB962C8B-B14F-4D97-AF65-F5344CB8AC3E}">
+        <p14:creationId xmlns:p14="http://schemas.microsoft.com/office/powerpoint/2010/main" val="3703700114"/>
+      </p:ext>
+    </p:extLst>
+  </p:cSld>
+  <p:clrMapOvr>
+    <a:masterClrMapping/>
+  </p:clrMapOvr>
+</p:sld>
+</file>
+
+<file path=ppt/slides/slide30.xml><?xml version="1.0" encoding="utf-8"?>
 <p:sld xmlns:a="http://schemas.openxmlformats.org/drawingml/2006/main" xmlns:r="http://schemas.openxmlformats.org/officeDocument/2006/relationships" xmlns:p="http://schemas.openxmlformats.org/presentationml/2006/main">
   <p:cSld>
     <p:spTree>
@@ -18407,7 +19939,7 @@
             <a:fld id="{B82CCC60-E8CD-4174-8B1A-7DF615B22EEF}" type="slidenum">
               <a:rPr lang="en-US" smtClean="0"/>
               <a:pPr/>
-              <a:t>29</a:t>
+              <a:t>30</a:t>
             </a:fld>
             <a:endParaRPr lang="en-US"/>
           </a:p>
@@ -19577,797 +21109,7 @@
 </p:sld>
 </file>
 
-<file path=ppt/slides/slide3.xml><?xml version="1.0" encoding="utf-8"?>
-<p:sld xmlns:a="http://schemas.openxmlformats.org/drawingml/2006/main" xmlns:r="http://schemas.openxmlformats.org/officeDocument/2006/relationships" xmlns:p="http://schemas.openxmlformats.org/presentationml/2006/main">
-  <p:cSld>
-    <p:spTree>
-      <p:nvGrpSpPr>
-        <p:cNvPr id="1" name="">
-          <a:extLst>
-            <a:ext uri="{FF2B5EF4-FFF2-40B4-BE49-F238E27FC236}">
-              <a16:creationId xmlns:a16="http://schemas.microsoft.com/office/drawing/2014/main" id="{5A3FCD40-FF5E-55E1-A042-05E7BD7C66EE}"/>
-            </a:ext>
-          </a:extLst>
-        </p:cNvPr>
-        <p:cNvGrpSpPr/>
-        <p:nvPr/>
-      </p:nvGrpSpPr>
-      <p:grpSpPr>
-        <a:xfrm>
-          <a:off x="0" y="0"/>
-          <a:ext cx="0" cy="0"/>
-          <a:chOff x="0" y="0"/>
-          <a:chExt cx="0" cy="0"/>
-        </a:xfrm>
-      </p:grpSpPr>
-      <p:sp>
-        <p:nvSpPr>
-          <p:cNvPr id="2" name="Title 1">
-            <a:extLst>
-              <a:ext uri="{FF2B5EF4-FFF2-40B4-BE49-F238E27FC236}">
-                <a16:creationId xmlns:a16="http://schemas.microsoft.com/office/drawing/2014/main" id="{1A89D763-3BFE-13BB-1836-D48DA8AE39C2}"/>
-              </a:ext>
-            </a:extLst>
-          </p:cNvPr>
-          <p:cNvSpPr>
-            <a:spLocks noGrp="1"/>
-          </p:cNvSpPr>
-          <p:nvPr>
-            <p:ph type="title"/>
-          </p:nvPr>
-        </p:nvSpPr>
-        <p:spPr/>
-        <p:txBody>
-          <a:bodyPr>
-            <a:normAutofit fontScale="90000"/>
-          </a:bodyPr>
-          <a:lstStyle/>
-          <a:p>
-            <a:r>
-              <a:rPr lang="en-US" dirty="0"/>
-              <a:t>Lab #3: Burrows-Wheeler Alignment</a:t>
-            </a:r>
-          </a:p>
-        </p:txBody>
-      </p:sp>
-      <p:sp>
-        <p:nvSpPr>
-          <p:cNvPr id="3" name="Content Placeholder 2">
-            <a:extLst>
-              <a:ext uri="{FF2B5EF4-FFF2-40B4-BE49-F238E27FC236}">
-                <a16:creationId xmlns:a16="http://schemas.microsoft.com/office/drawing/2014/main" id="{78770EC9-785B-AC9D-4E98-71BDFD958572}"/>
-              </a:ext>
-            </a:extLst>
-          </p:cNvPr>
-          <p:cNvSpPr>
-            <a:spLocks noGrp="1"/>
-          </p:cNvSpPr>
-          <p:nvPr>
-            <p:ph idx="1"/>
-          </p:nvPr>
-        </p:nvSpPr>
-        <p:spPr>
-          <a:xfrm>
-            <a:off x="569028" y="1710735"/>
-            <a:ext cx="7625958" cy="5124936"/>
-          </a:xfrm>
-        </p:spPr>
-        <p:txBody>
-          <a:bodyPr>
-            <a:normAutofit fontScale="70000" lnSpcReduction="20000"/>
-          </a:bodyPr>
-          <a:lstStyle/>
-          <a:p>
-            <a:r>
-              <a:rPr lang="en-US" dirty="0"/>
-              <a:t>Lab #3: Burrows-Wheeler Transform and Search </a:t>
-            </a:r>
-          </a:p>
-          <a:p>
-            <a:r>
-              <a:rPr lang="en-US" dirty="0"/>
-              <a:t>Due </a:t>
-            </a:r>
-            <a:r>
-              <a:rPr lang="en-US" dirty="0">
-                <a:solidFill>
-                  <a:srgbClr val="FF0000"/>
-                </a:solidFill>
-              </a:rPr>
-              <a:t>Friday </a:t>
-            </a:r>
-            <a:r>
-              <a:rPr lang="en-US">
-                <a:solidFill>
-                  <a:srgbClr val="FF0000"/>
-                </a:solidFill>
-              </a:rPr>
-              <a:t>October 9</a:t>
-            </a:r>
-            <a:r>
-              <a:rPr lang="en-US" baseline="30000">
-                <a:solidFill>
-                  <a:srgbClr val="FF0000"/>
-                </a:solidFill>
-              </a:rPr>
-              <a:t>th</a:t>
-            </a:r>
-            <a:r>
-              <a:rPr lang="en-US">
-                <a:solidFill>
-                  <a:srgbClr val="FF0000"/>
-                </a:solidFill>
-              </a:rPr>
-              <a:t> </a:t>
-            </a:r>
-            <a:r>
-              <a:rPr lang="en-US" dirty="0">
-                <a:solidFill>
-                  <a:srgbClr val="FF0000"/>
-                </a:solidFill>
-              </a:rPr>
-              <a:t>at 8:00pm</a:t>
-            </a:r>
-            <a:r>
-              <a:rPr lang="en-US" dirty="0"/>
-              <a:t>.</a:t>
-            </a:r>
-          </a:p>
-          <a:p>
-            <a:r>
-              <a:rPr lang="en-US" dirty="0"/>
-              <a:t>Undergraduate and Graduate: Implement function </a:t>
-            </a:r>
-            <a:r>
-              <a:rPr lang="en-US" i="1" dirty="0" err="1"/>
-              <a:t>burrows_wheeler_transform</a:t>
-            </a:r>
-            <a:r>
-              <a:rPr lang="en-US" i="1" dirty="0"/>
-              <a:t>(string seq) </a:t>
-            </a:r>
-            <a:r>
-              <a:rPr lang="en-US" dirty="0"/>
-              <a:t>that returns three objects:</a:t>
-            </a:r>
-          </a:p>
-          <a:p>
-            <a:pPr lvl="1"/>
-            <a:r>
-              <a:rPr lang="en-US" dirty="0"/>
-              <a:t>(U: 30pt, G: 25pt) BWT string</a:t>
-            </a:r>
-          </a:p>
-          <a:p>
-            <a:pPr lvl="1"/>
-            <a:r>
-              <a:rPr lang="en-US" dirty="0"/>
-              <a:t>(U: 30pt, G: 25pt) Suffix array (zero-based set of integers)</a:t>
-            </a:r>
-          </a:p>
-          <a:p>
-            <a:pPr lvl="1"/>
-            <a:r>
-              <a:rPr lang="en-US" dirty="0"/>
-              <a:t>(U: 40pt, G: 25pt) First letters of the suffix array string</a:t>
-            </a:r>
-          </a:p>
-          <a:p>
-            <a:r>
-              <a:rPr lang="en-US" dirty="0"/>
-              <a:t>Graduate only (25pt): implement function </a:t>
-            </a:r>
-            <a:r>
-              <a:rPr lang="en-US" i="1" dirty="0" err="1"/>
-              <a:t>bwt_search_exact</a:t>
-            </a:r>
-            <a:r>
-              <a:rPr lang="en-US" i="1" dirty="0"/>
-              <a:t>(string pattern, string </a:t>
-            </a:r>
-            <a:r>
-              <a:rPr lang="en-US" i="1" dirty="0" err="1"/>
-              <a:t>bwt</a:t>
-            </a:r>
-            <a:r>
-              <a:rPr lang="en-US" i="1" dirty="0"/>
-              <a:t>, array </a:t>
-            </a:r>
-            <a:r>
-              <a:rPr lang="en-US" i="1" dirty="0" err="1"/>
-              <a:t>suffix_array</a:t>
-            </a:r>
-            <a:r>
-              <a:rPr lang="en-US" i="1" dirty="0"/>
-              <a:t>, string </a:t>
-            </a:r>
-            <a:r>
-              <a:rPr lang="en-US" i="1" dirty="0" err="1"/>
-              <a:t>first_column</a:t>
-            </a:r>
-            <a:r>
-              <a:rPr lang="en-US" i="1" dirty="0"/>
-              <a:t>) </a:t>
-            </a:r>
-            <a:r>
-              <a:rPr lang="en-US" dirty="0"/>
-              <a:t>that returns </a:t>
-            </a:r>
-          </a:p>
-          <a:p>
-            <a:pPr lvl="1"/>
-            <a:r>
-              <a:rPr lang="en-US" dirty="0"/>
-              <a:t>array of zero-based positions of the beginning of the pattern in seq</a:t>
-            </a:r>
-          </a:p>
-          <a:p>
-            <a:pPr lvl="1"/>
-            <a:r>
-              <a:rPr lang="en-US" dirty="0"/>
-              <a:t>Only compute forward matches</a:t>
-            </a:r>
-          </a:p>
-          <a:p>
-            <a:pPr lvl="1"/>
-            <a:r>
-              <a:rPr lang="en-US" dirty="0"/>
-              <a:t>Example output for pattern “CG” is [ 0, 8 ]</a:t>
-            </a:r>
-          </a:p>
-          <a:p>
-            <a:pPr lvl="1"/>
-            <a:r>
-              <a:rPr lang="en-US" dirty="0"/>
-              <a:t>Report matches in any order</a:t>
-            </a:r>
-          </a:p>
-          <a:p>
-            <a:r>
-              <a:rPr lang="en-US" dirty="0"/>
-              <a:t>Name file bwt.py and submit to </a:t>
-            </a:r>
-            <a:r>
-              <a:rPr lang="en-US" dirty="0" err="1"/>
-              <a:t>autograder</a:t>
-            </a:r>
-            <a:r>
-              <a:rPr lang="en-US" dirty="0"/>
-              <a:t> in </a:t>
-            </a:r>
-            <a:r>
-              <a:rPr lang="en-US" dirty="0" err="1"/>
-              <a:t>Gradescope</a:t>
-            </a:r>
-            <a:endParaRPr lang="en-US" dirty="0"/>
-          </a:p>
-        </p:txBody>
-      </p:sp>
-      <p:sp>
-        <p:nvSpPr>
-          <p:cNvPr id="4" name="Slide Number Placeholder 3">
-            <a:extLst>
-              <a:ext uri="{FF2B5EF4-FFF2-40B4-BE49-F238E27FC236}">
-                <a16:creationId xmlns:a16="http://schemas.microsoft.com/office/drawing/2014/main" id="{15EF743D-60A9-18B2-5AD8-7B17DB0CF57E}"/>
-              </a:ext>
-            </a:extLst>
-          </p:cNvPr>
-          <p:cNvSpPr>
-            <a:spLocks noGrp="1"/>
-          </p:cNvSpPr>
-          <p:nvPr>
-            <p:ph type="sldNum" sz="quarter" idx="12"/>
-          </p:nvPr>
-        </p:nvSpPr>
-        <p:spPr/>
-        <p:txBody>
-          <a:bodyPr/>
-          <a:lstStyle/>
-          <a:p>
-            <a:fld id="{B82CCC60-E8CD-4174-8B1A-7DF615B22EEF}" type="slidenum">
-              <a:rPr lang="en-US" smtClean="0"/>
-              <a:pPr/>
-              <a:t>3</a:t>
-            </a:fld>
-            <a:endParaRPr lang="en-US" dirty="0"/>
-          </a:p>
-        </p:txBody>
-      </p:sp>
-      <p:pic>
-        <p:nvPicPr>
-          <p:cNvPr id="6" name="Picture 5">
-            <a:extLst>
-              <a:ext uri="{FF2B5EF4-FFF2-40B4-BE49-F238E27FC236}">
-                <a16:creationId xmlns:a16="http://schemas.microsoft.com/office/drawing/2014/main" id="{C509CC58-5BBD-2489-A074-6A4B1C8EC530}"/>
-              </a:ext>
-            </a:extLst>
-          </p:cNvPr>
-          <p:cNvPicPr>
-            <a:picLocks noChangeAspect="1"/>
-          </p:cNvPicPr>
-          <p:nvPr/>
-        </p:nvPicPr>
-        <p:blipFill>
-          <a:blip r:embed="rId2"/>
-          <a:srcRect l="71567" r="1" b="21101"/>
-          <a:stretch>
-            <a:fillRect/>
-          </a:stretch>
-        </p:blipFill>
-        <p:spPr>
-          <a:xfrm>
-            <a:off x="9388366" y="1759481"/>
-            <a:ext cx="2707055" cy="3498320"/>
-          </a:xfrm>
-          <a:prstGeom prst="rect">
-            <a:avLst/>
-          </a:prstGeom>
-        </p:spPr>
-      </p:pic>
-      <p:cxnSp>
-        <p:nvCxnSpPr>
-          <p:cNvPr id="9" name="Straight Arrow Connector 8">
-            <a:extLst>
-              <a:ext uri="{FF2B5EF4-FFF2-40B4-BE49-F238E27FC236}">
-                <a16:creationId xmlns:a16="http://schemas.microsoft.com/office/drawing/2014/main" id="{F2D85C6A-9655-0C1F-B08A-0D6D9F0F1D18}"/>
-              </a:ext>
-            </a:extLst>
-          </p:cNvPr>
-          <p:cNvCxnSpPr>
-            <a:cxnSpLocks/>
-            <a:endCxn id="10" idx="0"/>
-          </p:cNvCxnSpPr>
-          <p:nvPr/>
-        </p:nvCxnSpPr>
-        <p:spPr>
-          <a:xfrm flipH="1">
-            <a:off x="10011102" y="5202621"/>
-            <a:ext cx="1" cy="794684"/>
-          </a:xfrm>
-          <a:prstGeom prst="straightConnector1">
-            <a:avLst/>
-          </a:prstGeom>
-          <a:ln>
-            <a:tailEnd type="triangle"/>
-          </a:ln>
-        </p:spPr>
-        <p:style>
-          <a:lnRef idx="1">
-            <a:schemeClr val="accent1"/>
-          </a:lnRef>
-          <a:fillRef idx="0">
-            <a:schemeClr val="accent1"/>
-          </a:fillRef>
-          <a:effectRef idx="0">
-            <a:schemeClr val="accent1"/>
-          </a:effectRef>
-          <a:fontRef idx="minor">
-            <a:schemeClr val="tx1"/>
-          </a:fontRef>
-        </p:style>
-      </p:cxnSp>
-      <p:sp>
-        <p:nvSpPr>
-          <p:cNvPr id="10" name="TextBox 9">
-            <a:extLst>
-              <a:ext uri="{FF2B5EF4-FFF2-40B4-BE49-F238E27FC236}">
-                <a16:creationId xmlns:a16="http://schemas.microsoft.com/office/drawing/2014/main" id="{06D1E701-ADF0-9C8E-4BCA-B15343892461}"/>
-              </a:ext>
-            </a:extLst>
-          </p:cNvPr>
-          <p:cNvSpPr txBox="1"/>
-          <p:nvPr/>
-        </p:nvSpPr>
-        <p:spPr>
-          <a:xfrm>
-            <a:off x="9159971" y="5997305"/>
-            <a:ext cx="1702261" cy="369332"/>
-          </a:xfrm>
-          <a:prstGeom prst="rect">
-            <a:avLst/>
-          </a:prstGeom>
-          <a:noFill/>
-          <a:ln>
-            <a:solidFill>
-              <a:schemeClr val="tx1"/>
-            </a:solidFill>
-          </a:ln>
-        </p:spPr>
-        <p:txBody>
-          <a:bodyPr wrap="none" rtlCol="0">
-            <a:spAutoFit/>
-          </a:bodyPr>
-          <a:lstStyle/>
-          <a:p>
-            <a:r>
-              <a:rPr lang="en-US" dirty="0"/>
-              <a:t>The first column</a:t>
-            </a:r>
-          </a:p>
-        </p:txBody>
-      </p:sp>
-      <p:cxnSp>
-        <p:nvCxnSpPr>
-          <p:cNvPr id="13" name="Straight Arrow Connector 12">
-            <a:extLst>
-              <a:ext uri="{FF2B5EF4-FFF2-40B4-BE49-F238E27FC236}">
-                <a16:creationId xmlns:a16="http://schemas.microsoft.com/office/drawing/2014/main" id="{8F5D73E2-7136-A83C-FD9A-1303A47D52DE}"/>
-              </a:ext>
-            </a:extLst>
-          </p:cNvPr>
-          <p:cNvCxnSpPr>
-            <a:cxnSpLocks/>
-            <a:endCxn id="14" idx="0"/>
-          </p:cNvCxnSpPr>
-          <p:nvPr/>
-        </p:nvCxnSpPr>
-        <p:spPr>
-          <a:xfrm>
-            <a:off x="11500945" y="5235774"/>
-            <a:ext cx="15767" cy="273751"/>
-          </a:xfrm>
-          <a:prstGeom prst="straightConnector1">
-            <a:avLst/>
-          </a:prstGeom>
-          <a:ln>
-            <a:tailEnd type="triangle"/>
-          </a:ln>
-        </p:spPr>
-        <p:style>
-          <a:lnRef idx="1">
-            <a:schemeClr val="accent1"/>
-          </a:lnRef>
-          <a:fillRef idx="0">
-            <a:schemeClr val="accent1"/>
-          </a:fillRef>
-          <a:effectRef idx="0">
-            <a:schemeClr val="accent1"/>
-          </a:effectRef>
-          <a:fontRef idx="minor">
-            <a:schemeClr val="tx1"/>
-          </a:fontRef>
-        </p:style>
-      </p:cxnSp>
-      <p:sp>
-        <p:nvSpPr>
-          <p:cNvPr id="14" name="TextBox 13">
-            <a:extLst>
-              <a:ext uri="{FF2B5EF4-FFF2-40B4-BE49-F238E27FC236}">
-                <a16:creationId xmlns:a16="http://schemas.microsoft.com/office/drawing/2014/main" id="{AABF93C9-FF89-6F8B-A1C6-17E6BF84FF01}"/>
-              </a:ext>
-            </a:extLst>
-          </p:cNvPr>
-          <p:cNvSpPr txBox="1"/>
-          <p:nvPr/>
-        </p:nvSpPr>
-        <p:spPr>
-          <a:xfrm>
-            <a:off x="11177754" y="5509525"/>
-            <a:ext cx="677915" cy="369332"/>
-          </a:xfrm>
-          <a:prstGeom prst="rect">
-            <a:avLst/>
-          </a:prstGeom>
-          <a:noFill/>
-          <a:ln>
-            <a:solidFill>
-              <a:schemeClr val="tx1"/>
-            </a:solidFill>
-          </a:ln>
-        </p:spPr>
-        <p:txBody>
-          <a:bodyPr wrap="square" rtlCol="0">
-            <a:spAutoFit/>
-          </a:bodyPr>
-          <a:lstStyle/>
-          <a:p>
-            <a:r>
-              <a:rPr lang="en-US" dirty="0"/>
-              <a:t>BWT</a:t>
-            </a:r>
-          </a:p>
-        </p:txBody>
-      </p:sp>
-      <p:cxnSp>
-        <p:nvCxnSpPr>
-          <p:cNvPr id="18" name="Straight Arrow Connector 17">
-            <a:extLst>
-              <a:ext uri="{FF2B5EF4-FFF2-40B4-BE49-F238E27FC236}">
-                <a16:creationId xmlns:a16="http://schemas.microsoft.com/office/drawing/2014/main" id="{AC482F83-C83D-BB1E-64C0-4F83BB8CED58}"/>
-              </a:ext>
-            </a:extLst>
-          </p:cNvPr>
-          <p:cNvCxnSpPr>
-            <a:cxnSpLocks/>
-            <a:endCxn id="19" idx="0"/>
-          </p:cNvCxnSpPr>
-          <p:nvPr/>
-        </p:nvCxnSpPr>
-        <p:spPr>
-          <a:xfrm flipH="1">
-            <a:off x="9149911" y="5225068"/>
-            <a:ext cx="451290" cy="284457"/>
-          </a:xfrm>
-          <a:prstGeom prst="straightConnector1">
-            <a:avLst/>
-          </a:prstGeom>
-          <a:ln>
-            <a:tailEnd type="triangle"/>
-          </a:ln>
-        </p:spPr>
-        <p:style>
-          <a:lnRef idx="1">
-            <a:schemeClr val="accent1"/>
-          </a:lnRef>
-          <a:fillRef idx="0">
-            <a:schemeClr val="accent1"/>
-          </a:fillRef>
-          <a:effectRef idx="0">
-            <a:schemeClr val="accent1"/>
-          </a:effectRef>
-          <a:fontRef idx="minor">
-            <a:schemeClr val="tx1"/>
-          </a:fontRef>
-        </p:style>
-      </p:cxnSp>
-      <p:sp>
-        <p:nvSpPr>
-          <p:cNvPr id="19" name="TextBox 18">
-            <a:extLst>
-              <a:ext uri="{FF2B5EF4-FFF2-40B4-BE49-F238E27FC236}">
-                <a16:creationId xmlns:a16="http://schemas.microsoft.com/office/drawing/2014/main" id="{C0FD0A88-004D-1836-0FE4-4288EBCAD1BE}"/>
-              </a:ext>
-            </a:extLst>
-          </p:cNvPr>
-          <p:cNvSpPr txBox="1"/>
-          <p:nvPr/>
-        </p:nvSpPr>
-        <p:spPr>
-          <a:xfrm>
-            <a:off x="8521260" y="5509525"/>
-            <a:ext cx="1257302" cy="369332"/>
-          </a:xfrm>
-          <a:prstGeom prst="rect">
-            <a:avLst/>
-          </a:prstGeom>
-          <a:noFill/>
-          <a:ln>
-            <a:solidFill>
-              <a:schemeClr val="tx1"/>
-            </a:solidFill>
-          </a:ln>
-        </p:spPr>
-        <p:txBody>
-          <a:bodyPr wrap="square" rtlCol="0">
-            <a:spAutoFit/>
-          </a:bodyPr>
-          <a:lstStyle/>
-          <a:p>
-            <a:r>
-              <a:rPr lang="en-US" dirty="0"/>
-              <a:t>Suffix array</a:t>
-            </a:r>
-          </a:p>
-        </p:txBody>
-      </p:sp>
-      <p:sp>
-        <p:nvSpPr>
-          <p:cNvPr id="23" name="TextBox 22">
-            <a:extLst>
-              <a:ext uri="{FF2B5EF4-FFF2-40B4-BE49-F238E27FC236}">
-                <a16:creationId xmlns:a16="http://schemas.microsoft.com/office/drawing/2014/main" id="{E9C07FFC-EB65-2035-CA95-5D868ABC89C8}"/>
-              </a:ext>
-            </a:extLst>
-          </p:cNvPr>
-          <p:cNvSpPr txBox="1"/>
-          <p:nvPr/>
-        </p:nvSpPr>
-        <p:spPr>
-          <a:xfrm>
-            <a:off x="9137416" y="1337426"/>
-            <a:ext cx="2958005" cy="646331"/>
-          </a:xfrm>
-          <a:prstGeom prst="rect">
-            <a:avLst/>
-          </a:prstGeom>
-          <a:noFill/>
-        </p:spPr>
-        <p:txBody>
-          <a:bodyPr wrap="square">
-            <a:spAutoFit/>
-          </a:bodyPr>
-          <a:lstStyle/>
-          <a:p>
-            <a:r>
-              <a:rPr lang="en-US" dirty="0"/>
-              <a:t>sequence: CGATGCACCGGT</a:t>
-            </a:r>
-            <a:br>
-              <a:rPr lang="en-US" dirty="0"/>
-            </a:br>
-            <a:endParaRPr lang="en-US" dirty="0"/>
-          </a:p>
-        </p:txBody>
-      </p:sp>
-      <p:sp>
-        <p:nvSpPr>
-          <p:cNvPr id="5" name="Rectangle 4">
-            <a:extLst>
-              <a:ext uri="{FF2B5EF4-FFF2-40B4-BE49-F238E27FC236}">
-                <a16:creationId xmlns:a16="http://schemas.microsoft.com/office/drawing/2014/main" id="{546CB4CA-0C91-6CF3-EDE3-4685CA2C9A74}"/>
-              </a:ext>
-            </a:extLst>
-          </p:cNvPr>
-          <p:cNvSpPr/>
-          <p:nvPr/>
-        </p:nvSpPr>
-        <p:spPr>
-          <a:xfrm>
-            <a:off x="10249556" y="1434531"/>
-            <a:ext cx="266043" cy="195557"/>
-          </a:xfrm>
-          <a:prstGeom prst="rect">
-            <a:avLst/>
-          </a:prstGeom>
-          <a:noFill/>
-          <a:ln>
-            <a:solidFill>
-              <a:schemeClr val="tx2">
-                <a:lumMod val="60000"/>
-                <a:lumOff val="40000"/>
-              </a:schemeClr>
-            </a:solidFill>
-          </a:ln>
-        </p:spPr>
-        <p:style>
-          <a:lnRef idx="2">
-            <a:schemeClr val="accent1">
-              <a:shade val="15000"/>
-            </a:schemeClr>
-          </a:lnRef>
-          <a:fillRef idx="1">
-            <a:schemeClr val="accent1"/>
-          </a:fillRef>
-          <a:effectRef idx="0">
-            <a:schemeClr val="accent1"/>
-          </a:effectRef>
-          <a:fontRef idx="minor">
-            <a:schemeClr val="lt1"/>
-          </a:fontRef>
-        </p:style>
-        <p:txBody>
-          <a:bodyPr rtlCol="0" anchor="ctr"/>
-          <a:lstStyle/>
-          <a:p>
-            <a:pPr algn="ctr"/>
-            <a:endParaRPr lang="en-US"/>
-          </a:p>
-        </p:txBody>
-      </p:sp>
-      <p:sp>
-        <p:nvSpPr>
-          <p:cNvPr id="8" name="Rectangle 7">
-            <a:extLst>
-              <a:ext uri="{FF2B5EF4-FFF2-40B4-BE49-F238E27FC236}">
-                <a16:creationId xmlns:a16="http://schemas.microsoft.com/office/drawing/2014/main" id="{BC30523D-470D-8393-34A3-EBD7E0C987B1}"/>
-              </a:ext>
-            </a:extLst>
-          </p:cNvPr>
-          <p:cNvSpPr/>
-          <p:nvPr/>
-        </p:nvSpPr>
-        <p:spPr>
-          <a:xfrm>
-            <a:off x="9427780" y="3186240"/>
-            <a:ext cx="821776" cy="463477"/>
-          </a:xfrm>
-          <a:prstGeom prst="rect">
-            <a:avLst/>
-          </a:prstGeom>
-          <a:noFill/>
-          <a:ln>
-            <a:solidFill>
-              <a:schemeClr val="tx2">
-                <a:lumMod val="60000"/>
-                <a:lumOff val="40000"/>
-              </a:schemeClr>
-            </a:solidFill>
-          </a:ln>
-        </p:spPr>
-        <p:style>
-          <a:lnRef idx="2">
-            <a:schemeClr val="accent1">
-              <a:shade val="15000"/>
-            </a:schemeClr>
-          </a:lnRef>
-          <a:fillRef idx="1">
-            <a:schemeClr val="accent1"/>
-          </a:fillRef>
-          <a:effectRef idx="0">
-            <a:schemeClr val="accent1"/>
-          </a:effectRef>
-          <a:fontRef idx="minor">
-            <a:schemeClr val="lt1"/>
-          </a:fontRef>
-        </p:style>
-        <p:txBody>
-          <a:bodyPr rtlCol="0" anchor="ctr"/>
-          <a:lstStyle/>
-          <a:p>
-            <a:pPr algn="ctr"/>
-            <a:endParaRPr lang="en-US"/>
-          </a:p>
-        </p:txBody>
-      </p:sp>
-      <p:sp>
-        <p:nvSpPr>
-          <p:cNvPr id="15" name="Rectangle 14">
-            <a:extLst>
-              <a:ext uri="{FF2B5EF4-FFF2-40B4-BE49-F238E27FC236}">
-                <a16:creationId xmlns:a16="http://schemas.microsoft.com/office/drawing/2014/main" id="{DEAF287A-B5EC-4A5E-93B6-966FC0A1C9C0}"/>
-              </a:ext>
-            </a:extLst>
-          </p:cNvPr>
-          <p:cNvSpPr/>
-          <p:nvPr/>
-        </p:nvSpPr>
-        <p:spPr>
-          <a:xfrm>
-            <a:off x="11234902" y="1438062"/>
-            <a:ext cx="266043" cy="195557"/>
-          </a:xfrm>
-          <a:prstGeom prst="rect">
-            <a:avLst/>
-          </a:prstGeom>
-          <a:noFill/>
-          <a:ln>
-            <a:solidFill>
-              <a:schemeClr val="tx2">
-                <a:lumMod val="60000"/>
-                <a:lumOff val="40000"/>
-              </a:schemeClr>
-            </a:solidFill>
-          </a:ln>
-        </p:spPr>
-        <p:style>
-          <a:lnRef idx="2">
-            <a:schemeClr val="accent1">
-              <a:shade val="15000"/>
-            </a:schemeClr>
-          </a:lnRef>
-          <a:fillRef idx="1">
-            <a:schemeClr val="accent1"/>
-          </a:fillRef>
-          <a:effectRef idx="0">
-            <a:schemeClr val="accent1"/>
-          </a:effectRef>
-          <a:fontRef idx="minor">
-            <a:schemeClr val="lt1"/>
-          </a:fontRef>
-        </p:style>
-        <p:txBody>
-          <a:bodyPr rtlCol="0" anchor="ctr"/>
-          <a:lstStyle/>
-          <a:p>
-            <a:pPr algn="ctr"/>
-            <a:endParaRPr lang="en-US"/>
-          </a:p>
-        </p:txBody>
-      </p:sp>
-    </p:spTree>
-    <p:extLst>
-      <p:ext uri="{BB962C8B-B14F-4D97-AF65-F5344CB8AC3E}">
-        <p14:creationId xmlns:p14="http://schemas.microsoft.com/office/powerpoint/2010/main" val="3703700114"/>
-      </p:ext>
-    </p:extLst>
-  </p:cSld>
-  <p:clrMapOvr>
-    <a:masterClrMapping/>
-  </p:clrMapOvr>
-</p:sld>
-</file>
-
-<file path=ppt/slides/slide30.xml><?xml version="1.0" encoding="utf-8"?>
+<file path=ppt/slides/slide31.xml><?xml version="1.0" encoding="utf-8"?>
 <p:sld xmlns:a="http://schemas.openxmlformats.org/drawingml/2006/main" xmlns:r="http://schemas.openxmlformats.org/officeDocument/2006/relationships" xmlns:p="http://schemas.openxmlformats.org/presentationml/2006/main">
   <p:cSld>
     <p:spTree>
@@ -20574,7 +21316,7 @@
             <a:fld id="{B82CCC60-E8CD-4174-8B1A-7DF615B22EEF}" type="slidenum">
               <a:rPr lang="en-US" smtClean="0"/>
               <a:pPr/>
-              <a:t>30</a:t>
+              <a:t>31</a:t>
             </a:fld>
             <a:endParaRPr lang="en-US"/>
           </a:p>
@@ -20593,7 +21335,7 @@
 </p:sld>
 </file>
 
-<file path=ppt/slides/slide31.xml><?xml version="1.0" encoding="utf-8"?>
+<file path=ppt/slides/slide32.xml><?xml version="1.0" encoding="utf-8"?>
 <p:sld xmlns:a="http://schemas.openxmlformats.org/drawingml/2006/main" xmlns:r="http://schemas.openxmlformats.org/officeDocument/2006/relationships" xmlns:p="http://schemas.openxmlformats.org/presentationml/2006/main">
   <p:cSld>
     <p:spTree>
@@ -20829,7 +21571,7 @@
             <a:fld id="{B82CCC60-E8CD-4174-8B1A-7DF615B22EEF}" type="slidenum">
               <a:rPr lang="en-US" smtClean="0"/>
               <a:pPr/>
-              <a:t>31</a:t>
+              <a:t>32</a:t>
             </a:fld>
             <a:endParaRPr lang="en-US"/>
           </a:p>
@@ -20848,7 +21590,7 @@
 </p:sld>
 </file>
 
-<file path=ppt/slides/slide32.xml><?xml version="1.0" encoding="utf-8"?>
+<file path=ppt/slides/slide33.xml><?xml version="1.0" encoding="utf-8"?>
 <p:sld xmlns:a="http://schemas.openxmlformats.org/drawingml/2006/main" xmlns:r="http://schemas.openxmlformats.org/officeDocument/2006/relationships" xmlns:p="http://schemas.openxmlformats.org/presentationml/2006/main">
   <p:cSld>
     <p:spTree>
@@ -21483,7 +22225,7 @@
             <a:fld id="{B82CCC60-E8CD-4174-8B1A-7DF615B22EEF}" type="slidenum">
               <a:rPr lang="en-US" smtClean="0"/>
               <a:pPr/>
-              <a:t>32</a:t>
+              <a:t>33</a:t>
             </a:fld>
             <a:endParaRPr lang="en-US"/>
           </a:p>
@@ -21502,7 +22244,7 @@
 </p:sld>
 </file>
 
-<file path=ppt/slides/slide33.xml><?xml version="1.0" encoding="utf-8"?>
+<file path=ppt/slides/slide34.xml><?xml version="1.0" encoding="utf-8"?>
 <p:sld xmlns:a="http://schemas.openxmlformats.org/drawingml/2006/main" xmlns:r="http://schemas.openxmlformats.org/officeDocument/2006/relationships" xmlns:p="http://schemas.openxmlformats.org/presentationml/2006/main">
   <p:cSld>
     <p:spTree>
@@ -22229,7 +22971,7 @@
             <a:fld id="{B82CCC60-E8CD-4174-8B1A-7DF615B22EEF}" type="slidenum">
               <a:rPr lang="en-US" smtClean="0"/>
               <a:pPr/>
-              <a:t>33</a:t>
+              <a:t>34</a:t>
             </a:fld>
             <a:endParaRPr lang="en-US"/>
           </a:p>
@@ -22248,7 +22990,7 @@
 </p:sld>
 </file>
 
-<file path=ppt/slides/slide34.xml><?xml version="1.0" encoding="utf-8"?>
+<file path=ppt/slides/slide35.xml><?xml version="1.0" encoding="utf-8"?>
 <p:sld xmlns:a="http://schemas.openxmlformats.org/drawingml/2006/main" xmlns:r="http://schemas.openxmlformats.org/officeDocument/2006/relationships" xmlns:p="http://schemas.openxmlformats.org/presentationml/2006/main">
   <p:cSld>
     <p:spTree>
@@ -22635,7 +23377,7 @@
             <a:fld id="{B82CCC60-E8CD-4174-8B1A-7DF615B22EEF}" type="slidenum">
               <a:rPr lang="en-US" smtClean="0"/>
               <a:pPr/>
-              <a:t>34</a:t>
+              <a:t>35</a:t>
             </a:fld>
             <a:endParaRPr lang="en-US"/>
           </a:p>
@@ -22654,7 +23396,7 @@
 </p:sld>
 </file>
 
-<file path=ppt/slides/slide35.xml><?xml version="1.0" encoding="utf-8"?>
+<file path=ppt/slides/slide36.xml><?xml version="1.0" encoding="utf-8"?>
 <p:sld xmlns:a="http://schemas.openxmlformats.org/drawingml/2006/main" xmlns:r="http://schemas.openxmlformats.org/officeDocument/2006/relationships" xmlns:p="http://schemas.openxmlformats.org/presentationml/2006/main">
   <p:cSld>
     <p:spTree>
@@ -23028,7 +23770,7 @@
             <a:fld id="{B82CCC60-E8CD-4174-8B1A-7DF615B22EEF}" type="slidenum">
               <a:rPr lang="en-US" smtClean="0"/>
               <a:pPr/>
-              <a:t>35</a:t>
+              <a:t>36</a:t>
             </a:fld>
             <a:endParaRPr lang="en-US"/>
           </a:p>
@@ -23101,7 +23843,7 @@
 </p:sld>
 </file>
 
-<file path=ppt/slides/slide36.xml><?xml version="1.0" encoding="utf-8"?>
+<file path=ppt/slides/slide37.xml><?xml version="1.0" encoding="utf-8"?>
 <p:sld xmlns:a="http://schemas.openxmlformats.org/drawingml/2006/main" xmlns:r="http://schemas.openxmlformats.org/officeDocument/2006/relationships" xmlns:p="http://schemas.openxmlformats.org/presentationml/2006/main">
   <p:cSld>
     <p:spTree>
@@ -23383,7 +24125,7 @@
             <a:fld id="{B82CCC60-E8CD-4174-8B1A-7DF615B22EEF}" type="slidenum">
               <a:rPr lang="en-US" smtClean="0"/>
               <a:pPr/>
-              <a:t>36</a:t>
+              <a:t>37</a:t>
             </a:fld>
             <a:endParaRPr lang="en-US"/>
           </a:p>
@@ -23536,7 +24278,7 @@
 </p:sld>
 </file>
 
-<file path=ppt/slides/slide37.xml><?xml version="1.0" encoding="utf-8"?>
+<file path=ppt/slides/slide38.xml><?xml version="1.0" encoding="utf-8"?>
 <p:sld xmlns:a="http://schemas.openxmlformats.org/drawingml/2006/main" xmlns:r="http://schemas.openxmlformats.org/officeDocument/2006/relationships" xmlns:p="http://schemas.openxmlformats.org/presentationml/2006/main">
   <p:cSld>
     <p:spTree>
@@ -23892,7 +24634,7 @@
             <a:fld id="{B82CCC60-E8CD-4174-8B1A-7DF615B22EEF}" type="slidenum">
               <a:rPr lang="en-US" smtClean="0"/>
               <a:pPr/>
-              <a:t>37</a:t>
+              <a:t>38</a:t>
             </a:fld>
             <a:endParaRPr lang="en-US"/>
           </a:p>
@@ -24085,7 +24827,7 @@
 </p:sld>
 </file>
 
-<file path=ppt/slides/slide38.xml><?xml version="1.0" encoding="utf-8"?>
+<file path=ppt/slides/slide39.xml><?xml version="1.0" encoding="utf-8"?>
 <p:sld xmlns:a="http://schemas.openxmlformats.org/drawingml/2006/main" xmlns:r="http://schemas.openxmlformats.org/officeDocument/2006/relationships" xmlns:p="http://schemas.openxmlformats.org/presentationml/2006/main">
   <p:cSld>
     <p:spTree>
@@ -24418,7 +25160,7 @@
             <a:fld id="{B82CCC60-E8CD-4174-8B1A-7DF615B22EEF}" type="slidenum">
               <a:rPr lang="en-US" smtClean="0"/>
               <a:pPr/>
-              <a:t>38</a:t>
+              <a:t>39</a:t>
             </a:fld>
             <a:endParaRPr lang="en-US"/>
           </a:p>
@@ -24602,546 +25344,6 @@
     <p:extLst>
       <p:ext uri="{BB962C8B-B14F-4D97-AF65-F5344CB8AC3E}">
         <p14:creationId xmlns:p14="http://schemas.microsoft.com/office/powerpoint/2010/main" val="3458580164"/>
-      </p:ext>
-    </p:extLst>
-  </p:cSld>
-  <p:clrMapOvr>
-    <a:masterClrMapping/>
-  </p:clrMapOvr>
-</p:sld>
-</file>
-
-<file path=ppt/slides/slide39.xml><?xml version="1.0" encoding="utf-8"?>
-<p:sld xmlns:a="http://schemas.openxmlformats.org/drawingml/2006/main" xmlns:r="http://schemas.openxmlformats.org/officeDocument/2006/relationships" xmlns:p="http://schemas.openxmlformats.org/presentationml/2006/main">
-  <p:cSld>
-    <p:spTree>
-      <p:nvGrpSpPr>
-        <p:cNvPr id="1" name="">
-          <a:extLst>
-            <a:ext uri="{FF2B5EF4-FFF2-40B4-BE49-F238E27FC236}">
-              <a16:creationId xmlns:a16="http://schemas.microsoft.com/office/drawing/2014/main" id="{9DDF409B-B440-83AB-9D34-0731574381D8}"/>
-            </a:ext>
-          </a:extLst>
-        </p:cNvPr>
-        <p:cNvGrpSpPr/>
-        <p:nvPr/>
-      </p:nvGrpSpPr>
-      <p:grpSpPr>
-        <a:xfrm>
-          <a:off x="0" y="0"/>
-          <a:ext cx="0" cy="0"/>
-          <a:chOff x="0" y="0"/>
-          <a:chExt cx="0" cy="0"/>
-        </a:xfrm>
-      </p:grpSpPr>
-      <p:sp>
-        <p:nvSpPr>
-          <p:cNvPr id="2" name="Title 1">
-            <a:extLst>
-              <a:ext uri="{FF2B5EF4-FFF2-40B4-BE49-F238E27FC236}">
-                <a16:creationId xmlns:a16="http://schemas.microsoft.com/office/drawing/2014/main" id="{9FF19279-E907-E930-7F32-127F7BF6E26A}"/>
-              </a:ext>
-            </a:extLst>
-          </p:cNvPr>
-          <p:cNvSpPr>
-            <a:spLocks noGrp="1"/>
-          </p:cNvSpPr>
-          <p:nvPr>
-            <p:ph type="title"/>
-          </p:nvPr>
-        </p:nvSpPr>
-        <p:spPr/>
-        <p:txBody>
-          <a:bodyPr>
-            <a:normAutofit fontScale="90000"/>
-          </a:bodyPr>
-          <a:lstStyle/>
-          <a:p>
-            <a:r>
-              <a:rPr lang="en-US" dirty="0"/>
-              <a:t>K-mer graph</a:t>
-            </a:r>
-          </a:p>
-        </p:txBody>
-      </p:sp>
-      <p:sp>
-        <p:nvSpPr>
-          <p:cNvPr id="3" name="Content Placeholder 2">
-            <a:extLst>
-              <a:ext uri="{FF2B5EF4-FFF2-40B4-BE49-F238E27FC236}">
-                <a16:creationId xmlns:a16="http://schemas.microsoft.com/office/drawing/2014/main" id="{2B05828E-9EB0-DD79-B3C9-EF7675D67A1D}"/>
-              </a:ext>
-            </a:extLst>
-          </p:cNvPr>
-          <p:cNvSpPr>
-            <a:spLocks noGrp="1"/>
-          </p:cNvSpPr>
-          <p:nvPr>
-            <p:ph idx="1"/>
-          </p:nvPr>
-        </p:nvSpPr>
-        <p:spPr>
-          <a:xfrm>
-            <a:off x="598620" y="1787986"/>
-            <a:ext cx="10972800" cy="4389704"/>
-          </a:xfrm>
-        </p:spPr>
-        <p:txBody>
-          <a:bodyPr>
-            <a:normAutofit/>
-          </a:bodyPr>
-          <a:lstStyle/>
-          <a:p>
-            <a:r>
-              <a:rPr lang="en-US" dirty="0">
-                <a:cs typeface="Courier New" panose="02070309020205020404" pitchFamily="49" charset="0"/>
-              </a:rPr>
-              <a:t>Build k-mer graph, k-</a:t>
-            </a:r>
-            <a:r>
-              <a:rPr lang="en-US" dirty="0" err="1">
-                <a:cs typeface="Courier New" panose="02070309020205020404" pitchFamily="49" charset="0"/>
-              </a:rPr>
-              <a:t>mers</a:t>
-            </a:r>
-            <a:r>
-              <a:rPr lang="en-US" dirty="0">
-                <a:cs typeface="Courier New" panose="02070309020205020404" pitchFamily="49" charset="0"/>
-              </a:rPr>
-              <a:t> are nodes and k-1 exact overlaps are edges</a:t>
-            </a:r>
-            <a:br>
-              <a:rPr lang="en-US" dirty="0">
-                <a:cs typeface="Courier New" panose="02070309020205020404" pitchFamily="49" charset="0"/>
-              </a:rPr>
-            </a:br>
-            <a:r>
-              <a:rPr lang="en-US" b="1" dirty="0">
-                <a:latin typeface="Courier New" panose="02070309020205020404" pitchFamily="49" charset="0"/>
-                <a:cs typeface="Courier New" panose="02070309020205020404" pitchFamily="49" charset="0"/>
-              </a:rPr>
-              <a:t>AGACA </a:t>
-            </a:r>
-            <a:r>
-              <a:rPr lang="en-US" dirty="0">
-                <a:cs typeface="Courier New" panose="02070309020205020404" pitchFamily="49" charset="0"/>
-              </a:rPr>
-              <a:t>check continuations in both directions</a:t>
-            </a:r>
-            <a:br>
-              <a:rPr lang="en-US" b="1" dirty="0">
-                <a:latin typeface="Courier New" panose="02070309020205020404" pitchFamily="49" charset="0"/>
-                <a:cs typeface="Courier New" panose="02070309020205020404" pitchFamily="49" charset="0"/>
-              </a:rPr>
-            </a:br>
-            <a:r>
-              <a:rPr lang="en-US" b="1" dirty="0">
-                <a:latin typeface="Courier New" panose="02070309020205020404" pitchFamily="49" charset="0"/>
-                <a:cs typeface="Courier New" panose="02070309020205020404" pitchFamily="49" charset="0"/>
-              </a:rPr>
-              <a:t>                      </a:t>
-            </a:r>
-            <a:br>
-              <a:rPr lang="en-US" b="1" dirty="0">
-                <a:latin typeface="Courier New" panose="02070309020205020404" pitchFamily="49" charset="0"/>
-                <a:cs typeface="Courier New" panose="02070309020205020404" pitchFamily="49" charset="0"/>
-              </a:rPr>
-            </a:br>
-            <a:r>
-              <a:rPr lang="en-US" b="1" dirty="0">
-                <a:latin typeface="Courier New" panose="02070309020205020404" pitchFamily="49" charset="0"/>
-                <a:cs typeface="Courier New" panose="02070309020205020404" pitchFamily="49" charset="0"/>
-              </a:rPr>
-              <a:t>                           </a:t>
-            </a:r>
-            <a:r>
-              <a:rPr lang="en-US" b="1" dirty="0">
-                <a:solidFill>
-                  <a:schemeClr val="tx1"/>
-                </a:solidFill>
-                <a:latin typeface="Courier New" panose="02070309020205020404" pitchFamily="49" charset="0"/>
-                <a:cs typeface="Courier New" panose="02070309020205020404" pitchFamily="49" charset="0"/>
-              </a:rPr>
-              <a:t>GACAC</a:t>
-            </a:r>
-            <a:br>
-              <a:rPr lang="en-US" b="1" dirty="0">
-                <a:solidFill>
-                  <a:schemeClr val="tx1"/>
-                </a:solidFill>
-                <a:latin typeface="Courier New" panose="02070309020205020404" pitchFamily="49" charset="0"/>
-                <a:cs typeface="Courier New" panose="02070309020205020404" pitchFamily="49" charset="0"/>
-              </a:rPr>
-            </a:br>
-            <a:r>
-              <a:rPr lang="en-US" b="1" dirty="0">
-                <a:solidFill>
-                  <a:schemeClr val="tx1"/>
-                </a:solidFill>
-                <a:latin typeface="Courier New" panose="02070309020205020404" pitchFamily="49" charset="0"/>
-                <a:cs typeface="Courier New" panose="02070309020205020404" pitchFamily="49" charset="0"/>
-              </a:rPr>
-              <a:t>                 T</a:t>
-            </a:r>
-            <a:r>
-              <a:rPr lang="en-US" b="1" dirty="0">
-                <a:solidFill>
-                  <a:srgbClr val="FF0000"/>
-                </a:solidFill>
-                <a:latin typeface="Courier New" panose="02070309020205020404" pitchFamily="49" charset="0"/>
-                <a:cs typeface="Courier New" panose="02070309020205020404" pitchFamily="49" charset="0"/>
-              </a:rPr>
-              <a:t>AGAC</a:t>
-            </a:r>
-            <a:r>
-              <a:rPr lang="en-US" b="1" dirty="0">
-                <a:solidFill>
-                  <a:schemeClr val="tx1"/>
-                </a:solidFill>
-                <a:latin typeface="Courier New" panose="02070309020205020404" pitchFamily="49" charset="0"/>
-                <a:cs typeface="Courier New" panose="02070309020205020404" pitchFamily="49" charset="0"/>
-              </a:rPr>
-              <a:t>A</a:t>
-            </a:r>
-            <a:br>
-              <a:rPr lang="en-US" b="1" dirty="0">
-                <a:solidFill>
-                  <a:schemeClr val="tx1"/>
-                </a:solidFill>
-                <a:latin typeface="Courier New" panose="02070309020205020404" pitchFamily="49" charset="0"/>
-                <a:cs typeface="Courier New" panose="02070309020205020404" pitchFamily="49" charset="0"/>
-              </a:rPr>
-            </a:br>
-            <a:r>
-              <a:rPr lang="en-US" b="1" dirty="0">
-                <a:latin typeface="Courier New" panose="02070309020205020404" pitchFamily="49" charset="0"/>
-                <a:cs typeface="Courier New" panose="02070309020205020404" pitchFamily="49" charset="0"/>
-              </a:rPr>
-              <a:t>                 </a:t>
-            </a:r>
-            <a:r>
-              <a:rPr lang="en-US" b="1">
-                <a:latin typeface="Courier New" panose="02070309020205020404" pitchFamily="49" charset="0"/>
-                <a:cs typeface="Courier New" panose="02070309020205020404" pitchFamily="49" charset="0"/>
-              </a:rPr>
-              <a:t>none </a:t>
-            </a:r>
-            <a:r>
-              <a:rPr lang="en-US" b="1">
-                <a:solidFill>
-                  <a:srgbClr val="00B050"/>
-                </a:solidFill>
-                <a:latin typeface="Courier New" panose="02070309020205020404" pitchFamily="49" charset="0"/>
-                <a:cs typeface="Courier New" panose="02070309020205020404" pitchFamily="49" charset="0"/>
-              </a:rPr>
-              <a:t>C</a:t>
-            </a:r>
-            <a:r>
-              <a:rPr lang="en-US" b="1">
-                <a:latin typeface="Courier New" panose="02070309020205020404" pitchFamily="49" charset="0"/>
-                <a:cs typeface="Courier New" panose="02070309020205020404" pitchFamily="49" charset="0"/>
-              </a:rPr>
-              <a:t>    </a:t>
-            </a:r>
-            <a:r>
-              <a:rPr lang="en-US" b="1" dirty="0">
-                <a:latin typeface="Courier New" panose="02070309020205020404" pitchFamily="49" charset="0"/>
-                <a:cs typeface="Courier New" panose="02070309020205020404" pitchFamily="49" charset="0"/>
-              </a:rPr>
-              <a:t>GACAG</a:t>
-            </a:r>
-            <a:br>
-              <a:rPr lang="en-US" b="1" dirty="0">
-                <a:latin typeface="Courier New" panose="02070309020205020404" pitchFamily="49" charset="0"/>
-                <a:cs typeface="Courier New" panose="02070309020205020404" pitchFamily="49" charset="0"/>
-              </a:rPr>
-            </a:br>
-            <a:r>
-              <a:rPr lang="en-US" b="1" dirty="0">
-                <a:latin typeface="Courier New" panose="02070309020205020404" pitchFamily="49" charset="0"/>
-                <a:cs typeface="Courier New" panose="02070309020205020404" pitchFamily="49" charset="0"/>
-              </a:rPr>
-              <a:t>                 none </a:t>
-            </a:r>
-            <a:r>
-              <a:rPr lang="en-US" b="1" dirty="0">
-                <a:solidFill>
-                  <a:srgbClr val="00B050"/>
-                </a:solidFill>
-                <a:latin typeface="Courier New" panose="02070309020205020404" pitchFamily="49" charset="0"/>
-                <a:cs typeface="Courier New" panose="02070309020205020404" pitchFamily="49" charset="0"/>
-              </a:rPr>
-              <a:t>G</a:t>
-            </a:r>
-            <a:br>
-              <a:rPr lang="en-US" b="1" dirty="0">
-                <a:latin typeface="Courier New" panose="02070309020205020404" pitchFamily="49" charset="0"/>
-                <a:cs typeface="Courier New" panose="02070309020205020404" pitchFamily="49" charset="0"/>
-              </a:rPr>
-            </a:br>
-            <a:r>
-              <a:rPr lang="en-US" b="1" dirty="0">
-                <a:latin typeface="Courier New" panose="02070309020205020404" pitchFamily="49" charset="0"/>
-                <a:cs typeface="Courier New" panose="02070309020205020404" pitchFamily="49" charset="0"/>
-              </a:rPr>
-              <a:t>                 none </a:t>
-            </a:r>
-            <a:r>
-              <a:rPr lang="en-US" b="1" dirty="0">
-                <a:solidFill>
-                  <a:srgbClr val="00B050"/>
-                </a:solidFill>
-                <a:latin typeface="Courier New" panose="02070309020205020404" pitchFamily="49" charset="0"/>
-                <a:cs typeface="Courier New" panose="02070309020205020404" pitchFamily="49" charset="0"/>
-              </a:rPr>
-              <a:t>T</a:t>
-            </a:r>
-            <a:r>
-              <a:rPr lang="en-US" b="1" dirty="0">
-                <a:latin typeface="Courier New" panose="02070309020205020404" pitchFamily="49" charset="0"/>
-                <a:cs typeface="Courier New" panose="02070309020205020404" pitchFamily="49" charset="0"/>
-              </a:rPr>
-              <a:t> </a:t>
-            </a:r>
-            <a:r>
-              <a:rPr lang="en-US" b="1" dirty="0">
-                <a:solidFill>
-                  <a:schemeClr val="bg1"/>
-                </a:solidFill>
-                <a:latin typeface="Courier New" panose="02070309020205020404" pitchFamily="49" charset="0"/>
-                <a:cs typeface="Courier New" panose="02070309020205020404" pitchFamily="49" charset="0"/>
-              </a:rPr>
-              <a:t>none A</a:t>
-            </a:r>
-            <a:endParaRPr lang="en-US" b="1" dirty="0">
-              <a:latin typeface="Courier New" panose="02070309020205020404" pitchFamily="49" charset="0"/>
-              <a:cs typeface="Courier New" panose="02070309020205020404" pitchFamily="49" charset="0"/>
-            </a:endParaRPr>
-          </a:p>
-          <a:p>
-            <a:pPr marL="0" indent="0">
-              <a:buNone/>
-            </a:pPr>
-            <a:endParaRPr lang="en-US" dirty="0">
-              <a:cs typeface="Courier New" panose="02070309020205020404" pitchFamily="49" charset="0"/>
-            </a:endParaRPr>
-          </a:p>
-          <a:p>
-            <a:pPr marL="457200" lvl="1" indent="0">
-              <a:buNone/>
-            </a:pPr>
-            <a:endParaRPr lang="en-US" dirty="0"/>
-          </a:p>
-        </p:txBody>
-      </p:sp>
-      <p:sp>
-        <p:nvSpPr>
-          <p:cNvPr id="4" name="Slide Number Placeholder 3">
-            <a:extLst>
-              <a:ext uri="{FF2B5EF4-FFF2-40B4-BE49-F238E27FC236}">
-                <a16:creationId xmlns:a16="http://schemas.microsoft.com/office/drawing/2014/main" id="{0D7E4A93-7E52-12B6-8E11-AB61D0D5B49D}"/>
-              </a:ext>
-            </a:extLst>
-          </p:cNvPr>
-          <p:cNvSpPr>
-            <a:spLocks noGrp="1"/>
-          </p:cNvSpPr>
-          <p:nvPr>
-            <p:ph type="sldNum" sz="quarter" idx="12"/>
-          </p:nvPr>
-        </p:nvSpPr>
-        <p:spPr/>
-        <p:txBody>
-          <a:bodyPr/>
-          <a:lstStyle/>
-          <a:p>
-            <a:fld id="{B82CCC60-E8CD-4174-8B1A-7DF615B22EEF}" type="slidenum">
-              <a:rPr lang="en-US" smtClean="0"/>
-              <a:pPr/>
-              <a:t>39</a:t>
-            </a:fld>
-            <a:endParaRPr lang="en-US"/>
-          </a:p>
-        </p:txBody>
-      </p:sp>
-      <p:sp>
-        <p:nvSpPr>
-          <p:cNvPr id="8" name="Rectangle 7">
-            <a:extLst>
-              <a:ext uri="{FF2B5EF4-FFF2-40B4-BE49-F238E27FC236}">
-                <a16:creationId xmlns:a16="http://schemas.microsoft.com/office/drawing/2014/main" id="{18134FD4-2EE5-5774-53CF-A827782CF033}"/>
-              </a:ext>
-            </a:extLst>
-          </p:cNvPr>
-          <p:cNvSpPr/>
-          <p:nvPr/>
-        </p:nvSpPr>
-        <p:spPr>
-          <a:xfrm>
-            <a:off x="904100" y="6602350"/>
-            <a:ext cx="1221570" cy="305410"/>
-          </a:xfrm>
-          <a:prstGeom prst="rect">
-            <a:avLst/>
-          </a:prstGeom>
-          <a:solidFill>
-            <a:schemeClr val="bg1"/>
-          </a:solidFill>
-          <a:ln>
-            <a:solidFill>
-              <a:schemeClr val="bg1"/>
-            </a:solidFill>
-          </a:ln>
-        </p:spPr>
-        <p:style>
-          <a:lnRef idx="2">
-            <a:schemeClr val="accent1">
-              <a:shade val="15000"/>
-            </a:schemeClr>
-          </a:lnRef>
-          <a:fillRef idx="1">
-            <a:schemeClr val="accent1"/>
-          </a:fillRef>
-          <a:effectRef idx="0">
-            <a:schemeClr val="accent1"/>
-          </a:effectRef>
-          <a:fontRef idx="minor">
-            <a:schemeClr val="lt1"/>
-          </a:fontRef>
-        </p:style>
-        <p:txBody>
-          <a:bodyPr rtlCol="0" anchor="ctr"/>
-          <a:lstStyle/>
-          <a:p>
-            <a:pPr algn="ctr"/>
-            <a:endParaRPr lang="en-US"/>
-          </a:p>
-        </p:txBody>
-      </p:sp>
-      <p:cxnSp>
-        <p:nvCxnSpPr>
-          <p:cNvPr id="6" name="Straight Arrow Connector 5">
-            <a:extLst>
-              <a:ext uri="{FF2B5EF4-FFF2-40B4-BE49-F238E27FC236}">
-                <a16:creationId xmlns:a16="http://schemas.microsoft.com/office/drawing/2014/main" id="{9308DE59-74C7-A996-43D7-B6E78E612B13}"/>
-              </a:ext>
-            </a:extLst>
-          </p:cNvPr>
-          <p:cNvCxnSpPr/>
-          <p:nvPr/>
-        </p:nvCxnSpPr>
-        <p:spPr>
-          <a:xfrm flipV="1">
-            <a:off x="6096000" y="3432629"/>
-            <a:ext cx="610820" cy="305410"/>
-          </a:xfrm>
-          <a:prstGeom prst="straightConnector1">
-            <a:avLst/>
-          </a:prstGeom>
-          <a:ln>
-            <a:tailEnd type="triangle"/>
-          </a:ln>
-        </p:spPr>
-        <p:style>
-          <a:lnRef idx="1">
-            <a:schemeClr val="accent1"/>
-          </a:lnRef>
-          <a:fillRef idx="0">
-            <a:schemeClr val="accent1"/>
-          </a:fillRef>
-          <a:effectRef idx="0">
-            <a:schemeClr val="accent1"/>
-          </a:effectRef>
-          <a:fontRef idx="minor">
-            <a:schemeClr val="tx1"/>
-          </a:fontRef>
-        </p:style>
-      </p:cxnSp>
-      <p:cxnSp>
-        <p:nvCxnSpPr>
-          <p:cNvPr id="7" name="Straight Arrow Connector 6">
-            <a:extLst>
-              <a:ext uri="{FF2B5EF4-FFF2-40B4-BE49-F238E27FC236}">
-                <a16:creationId xmlns:a16="http://schemas.microsoft.com/office/drawing/2014/main" id="{57AA0E0C-5E41-0ABE-DF3A-41FA6438B346}"/>
-              </a:ext>
-            </a:extLst>
-          </p:cNvPr>
-          <p:cNvCxnSpPr>
-            <a:cxnSpLocks/>
-          </p:cNvCxnSpPr>
-          <p:nvPr/>
-        </p:nvCxnSpPr>
-        <p:spPr>
-          <a:xfrm>
-            <a:off x="6085020" y="3734410"/>
-            <a:ext cx="610820" cy="305410"/>
-          </a:xfrm>
-          <a:prstGeom prst="straightConnector1">
-            <a:avLst/>
-          </a:prstGeom>
-          <a:ln>
-            <a:tailEnd type="triangle"/>
-          </a:ln>
-        </p:spPr>
-        <p:style>
-          <a:lnRef idx="1">
-            <a:schemeClr val="accent1"/>
-          </a:lnRef>
-          <a:fillRef idx="0">
-            <a:schemeClr val="accent1"/>
-          </a:fillRef>
-          <a:effectRef idx="0">
-            <a:schemeClr val="accent1"/>
-          </a:effectRef>
-          <a:fontRef idx="minor">
-            <a:schemeClr val="tx1"/>
-          </a:fontRef>
-        </p:style>
-      </p:cxnSp>
-      <p:sp>
-        <p:nvSpPr>
-          <p:cNvPr id="5" name="TextBox 4">
-            <a:extLst>
-              <a:ext uri="{FF2B5EF4-FFF2-40B4-BE49-F238E27FC236}">
-                <a16:creationId xmlns:a16="http://schemas.microsoft.com/office/drawing/2014/main" id="{0D1B11BB-ECC8-C497-BE6C-FD43378B5F84}"/>
-              </a:ext>
-            </a:extLst>
-          </p:cNvPr>
-          <p:cNvSpPr txBox="1"/>
-          <p:nvPr/>
-        </p:nvSpPr>
-        <p:spPr>
-          <a:xfrm>
-            <a:off x="1108037" y="5843743"/>
-            <a:ext cx="8896574" cy="800219"/>
-          </a:xfrm>
-          <a:prstGeom prst="rect">
-            <a:avLst/>
-          </a:prstGeom>
-          <a:noFill/>
-        </p:spPr>
-        <p:txBody>
-          <a:bodyPr wrap="square" rtlCol="0">
-            <a:spAutoFit/>
-          </a:bodyPr>
-          <a:lstStyle/>
-          <a:p>
-            <a:r>
-              <a:rPr lang="en-US" sz="2800" dirty="0">
-                <a:cs typeface="Courier New" panose="02070309020205020404" pitchFamily="49" charset="0"/>
-              </a:rPr>
-              <a:t>No backward branch -- continue</a:t>
-            </a:r>
-          </a:p>
-          <a:p>
-            <a:endParaRPr lang="en-US" dirty="0"/>
-          </a:p>
-        </p:txBody>
-      </p:sp>
-    </p:spTree>
-    <p:extLst>
-      <p:ext uri="{BB962C8B-B14F-4D97-AF65-F5344CB8AC3E}">
-        <p14:creationId xmlns:p14="http://schemas.microsoft.com/office/powerpoint/2010/main" val="1342632659"/>
       </p:ext>
     </p:extLst>
   </p:cSld>
@@ -25563,6 +25765,546 @@
         <p:cNvPr id="1" name="">
           <a:extLst>
             <a:ext uri="{FF2B5EF4-FFF2-40B4-BE49-F238E27FC236}">
+              <a16:creationId xmlns:a16="http://schemas.microsoft.com/office/drawing/2014/main" id="{9DDF409B-B440-83AB-9D34-0731574381D8}"/>
+            </a:ext>
+          </a:extLst>
+        </p:cNvPr>
+        <p:cNvGrpSpPr/>
+        <p:nvPr/>
+      </p:nvGrpSpPr>
+      <p:grpSpPr>
+        <a:xfrm>
+          <a:off x="0" y="0"/>
+          <a:ext cx="0" cy="0"/>
+          <a:chOff x="0" y="0"/>
+          <a:chExt cx="0" cy="0"/>
+        </a:xfrm>
+      </p:grpSpPr>
+      <p:sp>
+        <p:nvSpPr>
+          <p:cNvPr id="2" name="Title 1">
+            <a:extLst>
+              <a:ext uri="{FF2B5EF4-FFF2-40B4-BE49-F238E27FC236}">
+                <a16:creationId xmlns:a16="http://schemas.microsoft.com/office/drawing/2014/main" id="{9FF19279-E907-E930-7F32-127F7BF6E26A}"/>
+              </a:ext>
+            </a:extLst>
+          </p:cNvPr>
+          <p:cNvSpPr>
+            <a:spLocks noGrp="1"/>
+          </p:cNvSpPr>
+          <p:nvPr>
+            <p:ph type="title"/>
+          </p:nvPr>
+        </p:nvSpPr>
+        <p:spPr/>
+        <p:txBody>
+          <a:bodyPr>
+            <a:normAutofit fontScale="90000"/>
+          </a:bodyPr>
+          <a:lstStyle/>
+          <a:p>
+            <a:r>
+              <a:rPr lang="en-US" dirty="0"/>
+              <a:t>K-mer graph</a:t>
+            </a:r>
+          </a:p>
+        </p:txBody>
+      </p:sp>
+      <p:sp>
+        <p:nvSpPr>
+          <p:cNvPr id="3" name="Content Placeholder 2">
+            <a:extLst>
+              <a:ext uri="{FF2B5EF4-FFF2-40B4-BE49-F238E27FC236}">
+                <a16:creationId xmlns:a16="http://schemas.microsoft.com/office/drawing/2014/main" id="{2B05828E-9EB0-DD79-B3C9-EF7675D67A1D}"/>
+              </a:ext>
+            </a:extLst>
+          </p:cNvPr>
+          <p:cNvSpPr>
+            <a:spLocks noGrp="1"/>
+          </p:cNvSpPr>
+          <p:nvPr>
+            <p:ph idx="1"/>
+          </p:nvPr>
+        </p:nvSpPr>
+        <p:spPr>
+          <a:xfrm>
+            <a:off x="598620" y="1787986"/>
+            <a:ext cx="10972800" cy="4389704"/>
+          </a:xfrm>
+        </p:spPr>
+        <p:txBody>
+          <a:bodyPr>
+            <a:normAutofit/>
+          </a:bodyPr>
+          <a:lstStyle/>
+          <a:p>
+            <a:r>
+              <a:rPr lang="en-US" dirty="0">
+                <a:cs typeface="Courier New" panose="02070309020205020404" pitchFamily="49" charset="0"/>
+              </a:rPr>
+              <a:t>Build k-mer graph, k-</a:t>
+            </a:r>
+            <a:r>
+              <a:rPr lang="en-US" dirty="0" err="1">
+                <a:cs typeface="Courier New" panose="02070309020205020404" pitchFamily="49" charset="0"/>
+              </a:rPr>
+              <a:t>mers</a:t>
+            </a:r>
+            <a:r>
+              <a:rPr lang="en-US" dirty="0">
+                <a:cs typeface="Courier New" panose="02070309020205020404" pitchFamily="49" charset="0"/>
+              </a:rPr>
+              <a:t> are nodes and k-1 exact overlaps are edges</a:t>
+            </a:r>
+            <a:br>
+              <a:rPr lang="en-US" dirty="0">
+                <a:cs typeface="Courier New" panose="02070309020205020404" pitchFamily="49" charset="0"/>
+              </a:rPr>
+            </a:br>
+            <a:r>
+              <a:rPr lang="en-US" b="1" dirty="0">
+                <a:latin typeface="Courier New" panose="02070309020205020404" pitchFamily="49" charset="0"/>
+                <a:cs typeface="Courier New" panose="02070309020205020404" pitchFamily="49" charset="0"/>
+              </a:rPr>
+              <a:t>AGACA </a:t>
+            </a:r>
+            <a:r>
+              <a:rPr lang="en-US" dirty="0">
+                <a:cs typeface="Courier New" panose="02070309020205020404" pitchFamily="49" charset="0"/>
+              </a:rPr>
+              <a:t>check continuations in both directions</a:t>
+            </a:r>
+            <a:br>
+              <a:rPr lang="en-US" b="1" dirty="0">
+                <a:latin typeface="Courier New" panose="02070309020205020404" pitchFamily="49" charset="0"/>
+                <a:cs typeface="Courier New" panose="02070309020205020404" pitchFamily="49" charset="0"/>
+              </a:rPr>
+            </a:br>
+            <a:r>
+              <a:rPr lang="en-US" b="1" dirty="0">
+                <a:latin typeface="Courier New" panose="02070309020205020404" pitchFamily="49" charset="0"/>
+                <a:cs typeface="Courier New" panose="02070309020205020404" pitchFamily="49" charset="0"/>
+              </a:rPr>
+              <a:t>                      </a:t>
+            </a:r>
+            <a:br>
+              <a:rPr lang="en-US" b="1" dirty="0">
+                <a:latin typeface="Courier New" panose="02070309020205020404" pitchFamily="49" charset="0"/>
+                <a:cs typeface="Courier New" panose="02070309020205020404" pitchFamily="49" charset="0"/>
+              </a:rPr>
+            </a:br>
+            <a:r>
+              <a:rPr lang="en-US" b="1" dirty="0">
+                <a:latin typeface="Courier New" panose="02070309020205020404" pitchFamily="49" charset="0"/>
+                <a:cs typeface="Courier New" panose="02070309020205020404" pitchFamily="49" charset="0"/>
+              </a:rPr>
+              <a:t>                           </a:t>
+            </a:r>
+            <a:r>
+              <a:rPr lang="en-US" b="1" dirty="0">
+                <a:solidFill>
+                  <a:schemeClr val="tx1"/>
+                </a:solidFill>
+                <a:latin typeface="Courier New" panose="02070309020205020404" pitchFamily="49" charset="0"/>
+                <a:cs typeface="Courier New" panose="02070309020205020404" pitchFamily="49" charset="0"/>
+              </a:rPr>
+              <a:t>GACAC</a:t>
+            </a:r>
+            <a:br>
+              <a:rPr lang="en-US" b="1" dirty="0">
+                <a:solidFill>
+                  <a:schemeClr val="tx1"/>
+                </a:solidFill>
+                <a:latin typeface="Courier New" panose="02070309020205020404" pitchFamily="49" charset="0"/>
+                <a:cs typeface="Courier New" panose="02070309020205020404" pitchFamily="49" charset="0"/>
+              </a:rPr>
+            </a:br>
+            <a:r>
+              <a:rPr lang="en-US" b="1" dirty="0">
+                <a:solidFill>
+                  <a:schemeClr val="tx1"/>
+                </a:solidFill>
+                <a:latin typeface="Courier New" panose="02070309020205020404" pitchFamily="49" charset="0"/>
+                <a:cs typeface="Courier New" panose="02070309020205020404" pitchFamily="49" charset="0"/>
+              </a:rPr>
+              <a:t>                 T</a:t>
+            </a:r>
+            <a:r>
+              <a:rPr lang="en-US" b="1" dirty="0">
+                <a:solidFill>
+                  <a:srgbClr val="FF0000"/>
+                </a:solidFill>
+                <a:latin typeface="Courier New" panose="02070309020205020404" pitchFamily="49" charset="0"/>
+                <a:cs typeface="Courier New" panose="02070309020205020404" pitchFamily="49" charset="0"/>
+              </a:rPr>
+              <a:t>AGAC</a:t>
+            </a:r>
+            <a:r>
+              <a:rPr lang="en-US" b="1" dirty="0">
+                <a:solidFill>
+                  <a:schemeClr val="tx1"/>
+                </a:solidFill>
+                <a:latin typeface="Courier New" panose="02070309020205020404" pitchFamily="49" charset="0"/>
+                <a:cs typeface="Courier New" panose="02070309020205020404" pitchFamily="49" charset="0"/>
+              </a:rPr>
+              <a:t>A</a:t>
+            </a:r>
+            <a:br>
+              <a:rPr lang="en-US" b="1" dirty="0">
+                <a:solidFill>
+                  <a:schemeClr val="tx1"/>
+                </a:solidFill>
+                <a:latin typeface="Courier New" panose="02070309020205020404" pitchFamily="49" charset="0"/>
+                <a:cs typeface="Courier New" panose="02070309020205020404" pitchFamily="49" charset="0"/>
+              </a:rPr>
+            </a:br>
+            <a:r>
+              <a:rPr lang="en-US" b="1" dirty="0">
+                <a:latin typeface="Courier New" panose="02070309020205020404" pitchFamily="49" charset="0"/>
+                <a:cs typeface="Courier New" panose="02070309020205020404" pitchFamily="49" charset="0"/>
+              </a:rPr>
+              <a:t>                 </a:t>
+            </a:r>
+            <a:r>
+              <a:rPr lang="en-US" b="1">
+                <a:latin typeface="Courier New" panose="02070309020205020404" pitchFamily="49" charset="0"/>
+                <a:cs typeface="Courier New" panose="02070309020205020404" pitchFamily="49" charset="0"/>
+              </a:rPr>
+              <a:t>none </a:t>
+            </a:r>
+            <a:r>
+              <a:rPr lang="en-US" b="1">
+                <a:solidFill>
+                  <a:srgbClr val="00B050"/>
+                </a:solidFill>
+                <a:latin typeface="Courier New" panose="02070309020205020404" pitchFamily="49" charset="0"/>
+                <a:cs typeface="Courier New" panose="02070309020205020404" pitchFamily="49" charset="0"/>
+              </a:rPr>
+              <a:t>C</a:t>
+            </a:r>
+            <a:r>
+              <a:rPr lang="en-US" b="1">
+                <a:latin typeface="Courier New" panose="02070309020205020404" pitchFamily="49" charset="0"/>
+                <a:cs typeface="Courier New" panose="02070309020205020404" pitchFamily="49" charset="0"/>
+              </a:rPr>
+              <a:t>    </a:t>
+            </a:r>
+            <a:r>
+              <a:rPr lang="en-US" b="1" dirty="0">
+                <a:latin typeface="Courier New" panose="02070309020205020404" pitchFamily="49" charset="0"/>
+                <a:cs typeface="Courier New" panose="02070309020205020404" pitchFamily="49" charset="0"/>
+              </a:rPr>
+              <a:t>GACAG</a:t>
+            </a:r>
+            <a:br>
+              <a:rPr lang="en-US" b="1" dirty="0">
+                <a:latin typeface="Courier New" panose="02070309020205020404" pitchFamily="49" charset="0"/>
+                <a:cs typeface="Courier New" panose="02070309020205020404" pitchFamily="49" charset="0"/>
+              </a:rPr>
+            </a:br>
+            <a:r>
+              <a:rPr lang="en-US" b="1" dirty="0">
+                <a:latin typeface="Courier New" panose="02070309020205020404" pitchFamily="49" charset="0"/>
+                <a:cs typeface="Courier New" panose="02070309020205020404" pitchFamily="49" charset="0"/>
+              </a:rPr>
+              <a:t>                 none </a:t>
+            </a:r>
+            <a:r>
+              <a:rPr lang="en-US" b="1" dirty="0">
+                <a:solidFill>
+                  <a:srgbClr val="00B050"/>
+                </a:solidFill>
+                <a:latin typeface="Courier New" panose="02070309020205020404" pitchFamily="49" charset="0"/>
+                <a:cs typeface="Courier New" panose="02070309020205020404" pitchFamily="49" charset="0"/>
+              </a:rPr>
+              <a:t>G</a:t>
+            </a:r>
+            <a:br>
+              <a:rPr lang="en-US" b="1" dirty="0">
+                <a:latin typeface="Courier New" panose="02070309020205020404" pitchFamily="49" charset="0"/>
+                <a:cs typeface="Courier New" panose="02070309020205020404" pitchFamily="49" charset="0"/>
+              </a:rPr>
+            </a:br>
+            <a:r>
+              <a:rPr lang="en-US" b="1" dirty="0">
+                <a:latin typeface="Courier New" panose="02070309020205020404" pitchFamily="49" charset="0"/>
+                <a:cs typeface="Courier New" panose="02070309020205020404" pitchFamily="49" charset="0"/>
+              </a:rPr>
+              <a:t>                 none </a:t>
+            </a:r>
+            <a:r>
+              <a:rPr lang="en-US" b="1" dirty="0">
+                <a:solidFill>
+                  <a:srgbClr val="00B050"/>
+                </a:solidFill>
+                <a:latin typeface="Courier New" panose="02070309020205020404" pitchFamily="49" charset="0"/>
+                <a:cs typeface="Courier New" panose="02070309020205020404" pitchFamily="49" charset="0"/>
+              </a:rPr>
+              <a:t>T</a:t>
+            </a:r>
+            <a:r>
+              <a:rPr lang="en-US" b="1" dirty="0">
+                <a:latin typeface="Courier New" panose="02070309020205020404" pitchFamily="49" charset="0"/>
+                <a:cs typeface="Courier New" panose="02070309020205020404" pitchFamily="49" charset="0"/>
+              </a:rPr>
+              <a:t> </a:t>
+            </a:r>
+            <a:r>
+              <a:rPr lang="en-US" b="1" dirty="0">
+                <a:solidFill>
+                  <a:schemeClr val="bg1"/>
+                </a:solidFill>
+                <a:latin typeface="Courier New" panose="02070309020205020404" pitchFamily="49" charset="0"/>
+                <a:cs typeface="Courier New" panose="02070309020205020404" pitchFamily="49" charset="0"/>
+              </a:rPr>
+              <a:t>none A</a:t>
+            </a:r>
+            <a:endParaRPr lang="en-US" b="1" dirty="0">
+              <a:latin typeface="Courier New" panose="02070309020205020404" pitchFamily="49" charset="0"/>
+              <a:cs typeface="Courier New" panose="02070309020205020404" pitchFamily="49" charset="0"/>
+            </a:endParaRPr>
+          </a:p>
+          <a:p>
+            <a:pPr marL="0" indent="0">
+              <a:buNone/>
+            </a:pPr>
+            <a:endParaRPr lang="en-US" dirty="0">
+              <a:cs typeface="Courier New" panose="02070309020205020404" pitchFamily="49" charset="0"/>
+            </a:endParaRPr>
+          </a:p>
+          <a:p>
+            <a:pPr marL="457200" lvl="1" indent="0">
+              <a:buNone/>
+            </a:pPr>
+            <a:endParaRPr lang="en-US" dirty="0"/>
+          </a:p>
+        </p:txBody>
+      </p:sp>
+      <p:sp>
+        <p:nvSpPr>
+          <p:cNvPr id="4" name="Slide Number Placeholder 3">
+            <a:extLst>
+              <a:ext uri="{FF2B5EF4-FFF2-40B4-BE49-F238E27FC236}">
+                <a16:creationId xmlns:a16="http://schemas.microsoft.com/office/drawing/2014/main" id="{0D7E4A93-7E52-12B6-8E11-AB61D0D5B49D}"/>
+              </a:ext>
+            </a:extLst>
+          </p:cNvPr>
+          <p:cNvSpPr>
+            <a:spLocks noGrp="1"/>
+          </p:cNvSpPr>
+          <p:nvPr>
+            <p:ph type="sldNum" sz="quarter" idx="12"/>
+          </p:nvPr>
+        </p:nvSpPr>
+        <p:spPr/>
+        <p:txBody>
+          <a:bodyPr/>
+          <a:lstStyle/>
+          <a:p>
+            <a:fld id="{B82CCC60-E8CD-4174-8B1A-7DF615B22EEF}" type="slidenum">
+              <a:rPr lang="en-US" smtClean="0"/>
+              <a:pPr/>
+              <a:t>40</a:t>
+            </a:fld>
+            <a:endParaRPr lang="en-US"/>
+          </a:p>
+        </p:txBody>
+      </p:sp>
+      <p:sp>
+        <p:nvSpPr>
+          <p:cNvPr id="8" name="Rectangle 7">
+            <a:extLst>
+              <a:ext uri="{FF2B5EF4-FFF2-40B4-BE49-F238E27FC236}">
+                <a16:creationId xmlns:a16="http://schemas.microsoft.com/office/drawing/2014/main" id="{18134FD4-2EE5-5774-53CF-A827782CF033}"/>
+              </a:ext>
+            </a:extLst>
+          </p:cNvPr>
+          <p:cNvSpPr/>
+          <p:nvPr/>
+        </p:nvSpPr>
+        <p:spPr>
+          <a:xfrm>
+            <a:off x="904100" y="6602350"/>
+            <a:ext cx="1221570" cy="305410"/>
+          </a:xfrm>
+          <a:prstGeom prst="rect">
+            <a:avLst/>
+          </a:prstGeom>
+          <a:solidFill>
+            <a:schemeClr val="bg1"/>
+          </a:solidFill>
+          <a:ln>
+            <a:solidFill>
+              <a:schemeClr val="bg1"/>
+            </a:solidFill>
+          </a:ln>
+        </p:spPr>
+        <p:style>
+          <a:lnRef idx="2">
+            <a:schemeClr val="accent1">
+              <a:shade val="15000"/>
+            </a:schemeClr>
+          </a:lnRef>
+          <a:fillRef idx="1">
+            <a:schemeClr val="accent1"/>
+          </a:fillRef>
+          <a:effectRef idx="0">
+            <a:schemeClr val="accent1"/>
+          </a:effectRef>
+          <a:fontRef idx="minor">
+            <a:schemeClr val="lt1"/>
+          </a:fontRef>
+        </p:style>
+        <p:txBody>
+          <a:bodyPr rtlCol="0" anchor="ctr"/>
+          <a:lstStyle/>
+          <a:p>
+            <a:pPr algn="ctr"/>
+            <a:endParaRPr lang="en-US"/>
+          </a:p>
+        </p:txBody>
+      </p:sp>
+      <p:cxnSp>
+        <p:nvCxnSpPr>
+          <p:cNvPr id="6" name="Straight Arrow Connector 5">
+            <a:extLst>
+              <a:ext uri="{FF2B5EF4-FFF2-40B4-BE49-F238E27FC236}">
+                <a16:creationId xmlns:a16="http://schemas.microsoft.com/office/drawing/2014/main" id="{9308DE59-74C7-A996-43D7-B6E78E612B13}"/>
+              </a:ext>
+            </a:extLst>
+          </p:cNvPr>
+          <p:cNvCxnSpPr/>
+          <p:nvPr/>
+        </p:nvCxnSpPr>
+        <p:spPr>
+          <a:xfrm flipV="1">
+            <a:off x="6096000" y="3432629"/>
+            <a:ext cx="610820" cy="305410"/>
+          </a:xfrm>
+          <a:prstGeom prst="straightConnector1">
+            <a:avLst/>
+          </a:prstGeom>
+          <a:ln>
+            <a:tailEnd type="triangle"/>
+          </a:ln>
+        </p:spPr>
+        <p:style>
+          <a:lnRef idx="1">
+            <a:schemeClr val="accent1"/>
+          </a:lnRef>
+          <a:fillRef idx="0">
+            <a:schemeClr val="accent1"/>
+          </a:fillRef>
+          <a:effectRef idx="0">
+            <a:schemeClr val="accent1"/>
+          </a:effectRef>
+          <a:fontRef idx="minor">
+            <a:schemeClr val="tx1"/>
+          </a:fontRef>
+        </p:style>
+      </p:cxnSp>
+      <p:cxnSp>
+        <p:nvCxnSpPr>
+          <p:cNvPr id="7" name="Straight Arrow Connector 6">
+            <a:extLst>
+              <a:ext uri="{FF2B5EF4-FFF2-40B4-BE49-F238E27FC236}">
+                <a16:creationId xmlns:a16="http://schemas.microsoft.com/office/drawing/2014/main" id="{57AA0E0C-5E41-0ABE-DF3A-41FA6438B346}"/>
+              </a:ext>
+            </a:extLst>
+          </p:cNvPr>
+          <p:cNvCxnSpPr>
+            <a:cxnSpLocks/>
+          </p:cNvCxnSpPr>
+          <p:nvPr/>
+        </p:nvCxnSpPr>
+        <p:spPr>
+          <a:xfrm>
+            <a:off x="6085020" y="3734410"/>
+            <a:ext cx="610820" cy="305410"/>
+          </a:xfrm>
+          <a:prstGeom prst="straightConnector1">
+            <a:avLst/>
+          </a:prstGeom>
+          <a:ln>
+            <a:tailEnd type="triangle"/>
+          </a:ln>
+        </p:spPr>
+        <p:style>
+          <a:lnRef idx="1">
+            <a:schemeClr val="accent1"/>
+          </a:lnRef>
+          <a:fillRef idx="0">
+            <a:schemeClr val="accent1"/>
+          </a:fillRef>
+          <a:effectRef idx="0">
+            <a:schemeClr val="accent1"/>
+          </a:effectRef>
+          <a:fontRef idx="minor">
+            <a:schemeClr val="tx1"/>
+          </a:fontRef>
+        </p:style>
+      </p:cxnSp>
+      <p:sp>
+        <p:nvSpPr>
+          <p:cNvPr id="5" name="TextBox 4">
+            <a:extLst>
+              <a:ext uri="{FF2B5EF4-FFF2-40B4-BE49-F238E27FC236}">
+                <a16:creationId xmlns:a16="http://schemas.microsoft.com/office/drawing/2014/main" id="{0D1B11BB-ECC8-C497-BE6C-FD43378B5F84}"/>
+              </a:ext>
+            </a:extLst>
+          </p:cNvPr>
+          <p:cNvSpPr txBox="1"/>
+          <p:nvPr/>
+        </p:nvSpPr>
+        <p:spPr>
+          <a:xfrm>
+            <a:off x="1108037" y="5843743"/>
+            <a:ext cx="8896574" cy="800219"/>
+          </a:xfrm>
+          <a:prstGeom prst="rect">
+            <a:avLst/>
+          </a:prstGeom>
+          <a:noFill/>
+        </p:spPr>
+        <p:txBody>
+          <a:bodyPr wrap="square" rtlCol="0">
+            <a:spAutoFit/>
+          </a:bodyPr>
+          <a:lstStyle/>
+          <a:p>
+            <a:r>
+              <a:rPr lang="en-US" sz="2800" dirty="0">
+                <a:cs typeface="Courier New" panose="02070309020205020404" pitchFamily="49" charset="0"/>
+              </a:rPr>
+              <a:t>No backward branch -- continue</a:t>
+            </a:r>
+          </a:p>
+          <a:p>
+            <a:endParaRPr lang="en-US" dirty="0"/>
+          </a:p>
+        </p:txBody>
+      </p:sp>
+    </p:spTree>
+    <p:extLst>
+      <p:ext uri="{BB962C8B-B14F-4D97-AF65-F5344CB8AC3E}">
+        <p14:creationId xmlns:p14="http://schemas.microsoft.com/office/powerpoint/2010/main" val="1342632659"/>
+      </p:ext>
+    </p:extLst>
+  </p:cSld>
+  <p:clrMapOvr>
+    <a:masterClrMapping/>
+  </p:clrMapOvr>
+</p:sld>
+</file>
+
+<file path=ppt/slides/slide41.xml><?xml version="1.0" encoding="utf-8"?>
+<p:sld xmlns:a="http://schemas.openxmlformats.org/drawingml/2006/main" xmlns:r="http://schemas.openxmlformats.org/officeDocument/2006/relationships" xmlns:p="http://schemas.openxmlformats.org/presentationml/2006/main">
+  <p:cSld>
+    <p:spTree>
+      <p:nvGrpSpPr>
+        <p:cNvPr id="1" name="">
+          <a:extLst>
+            <a:ext uri="{FF2B5EF4-FFF2-40B4-BE49-F238E27FC236}">
               <a16:creationId xmlns:a16="http://schemas.microsoft.com/office/drawing/2014/main" id="{55AC0EA3-3246-3BCD-E7F0-A18DD18746EF}"/>
             </a:ext>
           </a:extLst>
@@ -25868,7 +26610,7 @@
             <a:fld id="{B82CCC60-E8CD-4174-8B1A-7DF615B22EEF}" type="slidenum">
               <a:rPr lang="en-US" smtClean="0"/>
               <a:pPr/>
-              <a:t>40</a:t>
+              <a:t>41</a:t>
             </a:fld>
             <a:endParaRPr lang="en-US"/>
           </a:p>
@@ -26062,7 +26804,7 @@
 </p:sld>
 </file>
 
-<file path=ppt/slides/slide41.xml><?xml version="1.0" encoding="utf-8"?>
+<file path=ppt/slides/slide42.xml><?xml version="1.0" encoding="utf-8"?>
 <p:sld xmlns:a="http://schemas.openxmlformats.org/drawingml/2006/main" xmlns:r="http://schemas.openxmlformats.org/officeDocument/2006/relationships" xmlns:p="http://schemas.openxmlformats.org/presentationml/2006/main">
   <p:cSld>
     <p:spTree>
@@ -26355,7 +27097,7 @@
             <a:fld id="{B82CCC60-E8CD-4174-8B1A-7DF615B22EEF}" type="slidenum">
               <a:rPr lang="en-US" smtClean="0"/>
               <a:pPr/>
-              <a:t>41</a:t>
+              <a:t>42</a:t>
             </a:fld>
             <a:endParaRPr lang="en-US"/>
           </a:p>
@@ -26508,7 +27250,7 @@
 </p:sld>
 </file>
 
-<file path=ppt/slides/slide42.xml><?xml version="1.0" encoding="utf-8"?>
+<file path=ppt/slides/slide43.xml><?xml version="1.0" encoding="utf-8"?>
 <p:sld xmlns:a="http://schemas.openxmlformats.org/drawingml/2006/main" xmlns:r="http://schemas.openxmlformats.org/officeDocument/2006/relationships" xmlns:p="http://schemas.openxmlformats.org/presentationml/2006/main">
   <p:cSld>
     <p:spTree>
@@ -26809,7 +27551,7 @@
             <a:fld id="{B82CCC60-E8CD-4174-8B1A-7DF615B22EEF}" type="slidenum">
               <a:rPr lang="en-US" smtClean="0"/>
               <a:pPr/>
-              <a:t>42</a:t>
+              <a:t>43</a:t>
             </a:fld>
             <a:endParaRPr lang="en-US"/>
           </a:p>
@@ -26962,7 +27704,7 @@
 </p:sld>
 </file>
 
-<file path=ppt/slides/slide43.xml><?xml version="1.0" encoding="utf-8"?>
+<file path=ppt/slides/slide44.xml><?xml version="1.0" encoding="utf-8"?>
 <p:sld xmlns:a="http://schemas.openxmlformats.org/drawingml/2006/main" xmlns:r="http://schemas.openxmlformats.org/officeDocument/2006/relationships" xmlns:p="http://schemas.openxmlformats.org/presentationml/2006/main">
   <p:cSld>
     <p:spTree>
@@ -27093,7 +27835,7 @@
             <a:fld id="{B82CCC60-E8CD-4174-8B1A-7DF615B22EEF}" type="slidenum">
               <a:rPr lang="en-US" smtClean="0"/>
               <a:pPr/>
-              <a:t>43</a:t>
+              <a:t>44</a:t>
             </a:fld>
             <a:endParaRPr lang="en-US"/>
           </a:p>
@@ -27112,7 +27854,7 @@
 </p:sld>
 </file>
 
-<file path=ppt/slides/slide44.xml><?xml version="1.0" encoding="utf-8"?>
+<file path=ppt/slides/slide45.xml><?xml version="1.0" encoding="utf-8"?>
 <p:sld xmlns:a="http://schemas.openxmlformats.org/drawingml/2006/main" xmlns:r="http://schemas.openxmlformats.org/officeDocument/2006/relationships" xmlns:p="http://schemas.openxmlformats.org/presentationml/2006/main">
   <p:cSld>
     <p:spTree>
@@ -27267,7 +28009,7 @@
             <a:fld id="{B82CCC60-E8CD-4174-8B1A-7DF615B22EEF}" type="slidenum">
               <a:rPr lang="en-US" smtClean="0"/>
               <a:pPr/>
-              <a:t>44</a:t>
+              <a:t>45</a:t>
             </a:fld>
             <a:endParaRPr lang="en-US"/>
           </a:p>
@@ -27538,7 +28280,7 @@
 </p:sld>
 </file>
 
-<file path=ppt/slides/slide45.xml><?xml version="1.0" encoding="utf-8"?>
+<file path=ppt/slides/slide46.xml><?xml version="1.0" encoding="utf-8"?>
 <p:sld xmlns:a="http://schemas.openxmlformats.org/drawingml/2006/main" xmlns:r="http://schemas.openxmlformats.org/officeDocument/2006/relationships" xmlns:p="http://schemas.openxmlformats.org/presentationml/2006/main">
   <p:cSld>
     <p:spTree>
@@ -27615,7 +28357,7 @@
             <a:fld id="{B82CCC60-E8CD-4174-8B1A-7DF615B22EEF}" type="slidenum">
               <a:rPr lang="en-US" smtClean="0"/>
               <a:pPr/>
-              <a:t>45</a:t>
+              <a:t>46</a:t>
             </a:fld>
             <a:endParaRPr lang="en-US"/>
           </a:p>
@@ -27819,7 +28561,7 @@
 </p:sld>
 </file>
 
-<file path=ppt/slides/slide46.xml><?xml version="1.0" encoding="utf-8"?>
+<file path=ppt/slides/slide47.xml><?xml version="1.0" encoding="utf-8"?>
 <p:sld xmlns:a="http://schemas.openxmlformats.org/drawingml/2006/main" xmlns:r="http://schemas.openxmlformats.org/officeDocument/2006/relationships" xmlns:p="http://schemas.openxmlformats.org/presentationml/2006/main">
   <p:cSld>
     <p:spTree>
@@ -27896,7 +28638,7 @@
             <a:fld id="{B82CCC60-E8CD-4174-8B1A-7DF615B22EEF}" type="slidenum">
               <a:rPr lang="en-US" smtClean="0"/>
               <a:pPr/>
-              <a:t>46</a:t>
+              <a:t>47</a:t>
             </a:fld>
             <a:endParaRPr lang="en-US"/>
           </a:p>
@@ -28092,7 +28834,7 @@
 </p:sld>
 </file>
 
-<file path=ppt/slides/slide47.xml><?xml version="1.0" encoding="utf-8"?>
+<file path=ppt/slides/slide48.xml><?xml version="1.0" encoding="utf-8"?>
 <p:sld xmlns:a="http://schemas.openxmlformats.org/drawingml/2006/main" xmlns:r="http://schemas.openxmlformats.org/officeDocument/2006/relationships" xmlns:p="http://schemas.openxmlformats.org/presentationml/2006/main">
   <p:cSld>
     <p:spTree>
@@ -28169,7 +28911,7 @@
             <a:fld id="{B82CCC60-E8CD-4174-8B1A-7DF615B22EEF}" type="slidenum">
               <a:rPr lang="en-US" smtClean="0"/>
               <a:pPr/>
-              <a:t>47</a:t>
+              <a:t>48</a:t>
             </a:fld>
             <a:endParaRPr lang="en-US"/>
           </a:p>
@@ -28416,7 +29158,7 @@
 </p:sld>
 </file>
 
-<file path=ppt/slides/slide48.xml><?xml version="1.0" encoding="utf-8"?>
+<file path=ppt/slides/slide49.xml><?xml version="1.0" encoding="utf-8"?>
 <p:sld xmlns:a="http://schemas.openxmlformats.org/drawingml/2006/main" xmlns:r="http://schemas.openxmlformats.org/officeDocument/2006/relationships" xmlns:p="http://schemas.openxmlformats.org/presentationml/2006/main">
   <p:cSld>
     <p:spTree>
@@ -28493,7 +29235,7 @@
             <a:fld id="{B82CCC60-E8CD-4174-8B1A-7DF615B22EEF}" type="slidenum">
               <a:rPr lang="en-US" smtClean="0"/>
               <a:pPr/>
-              <a:t>48</a:t>
+              <a:t>49</a:t>
             </a:fld>
             <a:endParaRPr lang="en-US"/>
           </a:p>
@@ -28791,7 +29533,901 @@
 </p:sld>
 </file>
 
-<file path=ppt/slides/slide49.xml><?xml version="1.0" encoding="utf-8"?>
+<file path=ppt/slides/slide5.xml><?xml version="1.0" encoding="utf-8"?>
+<p:sld xmlns:a="http://schemas.openxmlformats.org/drawingml/2006/main" xmlns:r="http://schemas.openxmlformats.org/officeDocument/2006/relationships" xmlns:p="http://schemas.openxmlformats.org/presentationml/2006/main">
+  <p:cSld>
+    <p:spTree>
+      <p:nvGrpSpPr>
+        <p:cNvPr id="1" name=""/>
+        <p:cNvGrpSpPr/>
+        <p:nvPr/>
+      </p:nvGrpSpPr>
+      <p:grpSpPr>
+        <a:xfrm>
+          <a:off x="0" y="0"/>
+          <a:ext cx="0" cy="0"/>
+          <a:chOff x="0" y="0"/>
+          <a:chExt cx="0" cy="0"/>
+        </a:xfrm>
+      </p:grpSpPr>
+      <p:sp>
+        <p:nvSpPr>
+          <p:cNvPr id="2" name="Title 1">
+            <a:extLst>
+              <a:ext uri="{FF2B5EF4-FFF2-40B4-BE49-F238E27FC236}">
+                <a16:creationId xmlns:a16="http://schemas.microsoft.com/office/drawing/2014/main" id="{86E50DFB-D256-E157-4073-248A5BE2EA9D}"/>
+              </a:ext>
+            </a:extLst>
+          </p:cNvPr>
+          <p:cNvSpPr>
+            <a:spLocks noGrp="1"/>
+          </p:cNvSpPr>
+          <p:nvPr>
+            <p:ph type="title"/>
+          </p:nvPr>
+        </p:nvSpPr>
+        <p:spPr/>
+        <p:txBody>
+          <a:bodyPr>
+            <a:normAutofit fontScale="90000"/>
+          </a:bodyPr>
+          <a:lstStyle/>
+          <a:p>
+            <a:r>
+              <a:rPr lang="en-US" dirty="0"/>
+              <a:t>Assembly levels</a:t>
+            </a:r>
+          </a:p>
+        </p:txBody>
+      </p:sp>
+      <p:sp>
+        <p:nvSpPr>
+          <p:cNvPr id="3" name="Content Placeholder 2">
+            <a:extLst>
+              <a:ext uri="{FF2B5EF4-FFF2-40B4-BE49-F238E27FC236}">
+                <a16:creationId xmlns:a16="http://schemas.microsoft.com/office/drawing/2014/main" id="{3EB21EAC-C3B9-51FD-3047-F3648FE7069E}"/>
+              </a:ext>
+            </a:extLst>
+          </p:cNvPr>
+          <p:cNvSpPr>
+            <a:spLocks noGrp="1"/>
+          </p:cNvSpPr>
+          <p:nvPr>
+            <p:ph idx="1"/>
+          </p:nvPr>
+        </p:nvSpPr>
+        <p:spPr/>
+        <p:txBody>
+          <a:bodyPr/>
+          <a:lstStyle/>
+          <a:p>
+            <a:r>
+              <a:rPr lang="en-US" i="1" dirty="0"/>
+              <a:t>Contigs </a:t>
+            </a:r>
+            <a:r>
+              <a:rPr lang="en-US" dirty="0"/>
+              <a:t>are contiguous genome sequences where all letters are known</a:t>
+            </a:r>
+          </a:p>
+          <a:p>
+            <a:endParaRPr lang="en-US" dirty="0"/>
+          </a:p>
+          <a:p>
+            <a:r>
+              <a:rPr lang="en-US" i="1" dirty="0"/>
+              <a:t>Scaffolds </a:t>
+            </a:r>
+            <a:r>
+              <a:rPr lang="en-US" dirty="0"/>
+              <a:t>are ordered and oriented sets of contigs, gaps between contigs are of estimated size or set to a default value</a:t>
+            </a:r>
+          </a:p>
+          <a:p>
+            <a:endParaRPr lang="en-US" dirty="0"/>
+          </a:p>
+          <a:p>
+            <a:r>
+              <a:rPr lang="en-US" i="1" dirty="0"/>
+              <a:t>Super-scaffolds </a:t>
+            </a:r>
+            <a:r>
+              <a:rPr lang="en-US" dirty="0"/>
+              <a:t>or </a:t>
+            </a:r>
+            <a:r>
+              <a:rPr lang="en-US" i="1" dirty="0"/>
+              <a:t>pseudo-chromosomes</a:t>
+            </a:r>
+            <a:r>
+              <a:rPr lang="en-US" dirty="0"/>
+              <a:t> are ordered and mostly oriented sets of scaffolds, gaps between scaffolds are typically not estimated </a:t>
+            </a:r>
+          </a:p>
+        </p:txBody>
+      </p:sp>
+      <p:sp>
+        <p:nvSpPr>
+          <p:cNvPr id="4" name="Slide Number Placeholder 3">
+            <a:extLst>
+              <a:ext uri="{FF2B5EF4-FFF2-40B4-BE49-F238E27FC236}">
+                <a16:creationId xmlns:a16="http://schemas.microsoft.com/office/drawing/2014/main" id="{7C33FD4D-A828-0054-F7AB-9728B63FFE45}"/>
+              </a:ext>
+            </a:extLst>
+          </p:cNvPr>
+          <p:cNvSpPr>
+            <a:spLocks noGrp="1"/>
+          </p:cNvSpPr>
+          <p:nvPr>
+            <p:ph type="sldNum" sz="quarter" idx="12"/>
+          </p:nvPr>
+        </p:nvSpPr>
+        <p:spPr/>
+        <p:txBody>
+          <a:bodyPr/>
+          <a:lstStyle/>
+          <a:p>
+            <a:fld id="{B82CCC60-E8CD-4174-8B1A-7DF615B22EEF}" type="slidenum">
+              <a:rPr lang="en-US" smtClean="0"/>
+              <a:pPr/>
+              <a:t>5</a:t>
+            </a:fld>
+            <a:endParaRPr lang="en-US"/>
+          </a:p>
+        </p:txBody>
+      </p:sp>
+      <p:cxnSp>
+        <p:nvCxnSpPr>
+          <p:cNvPr id="6" name="Straight Connector 5">
+            <a:extLst>
+              <a:ext uri="{FF2B5EF4-FFF2-40B4-BE49-F238E27FC236}">
+                <a16:creationId xmlns:a16="http://schemas.microsoft.com/office/drawing/2014/main" id="{04BA9DA3-F53F-6406-98B7-A7D57AAACA3A}"/>
+              </a:ext>
+            </a:extLst>
+          </p:cNvPr>
+          <p:cNvCxnSpPr/>
+          <p:nvPr/>
+        </p:nvCxnSpPr>
+        <p:spPr>
+          <a:xfrm>
+            <a:off x="1719470" y="2454965"/>
+            <a:ext cx="2176669" cy="0"/>
+          </a:xfrm>
+          <a:prstGeom prst="line">
+            <a:avLst/>
+          </a:prstGeom>
+        </p:spPr>
+        <p:style>
+          <a:lnRef idx="3">
+            <a:schemeClr val="accent4"/>
+          </a:lnRef>
+          <a:fillRef idx="0">
+            <a:schemeClr val="accent4"/>
+          </a:fillRef>
+          <a:effectRef idx="2">
+            <a:schemeClr val="accent4"/>
+          </a:effectRef>
+          <a:fontRef idx="minor">
+            <a:schemeClr val="tx1"/>
+          </a:fontRef>
+        </p:style>
+      </p:cxnSp>
+      <p:cxnSp>
+        <p:nvCxnSpPr>
+          <p:cNvPr id="7" name="Straight Connector 6">
+            <a:extLst>
+              <a:ext uri="{FF2B5EF4-FFF2-40B4-BE49-F238E27FC236}">
+                <a16:creationId xmlns:a16="http://schemas.microsoft.com/office/drawing/2014/main" id="{FA509E3C-2A69-AE9F-337B-D9258C063796}"/>
+              </a:ext>
+            </a:extLst>
+          </p:cNvPr>
+          <p:cNvCxnSpPr/>
+          <p:nvPr/>
+        </p:nvCxnSpPr>
+        <p:spPr>
+          <a:xfrm>
+            <a:off x="4525618" y="2454965"/>
+            <a:ext cx="2176669" cy="0"/>
+          </a:xfrm>
+          <a:prstGeom prst="line">
+            <a:avLst/>
+          </a:prstGeom>
+        </p:spPr>
+        <p:style>
+          <a:lnRef idx="3">
+            <a:schemeClr val="accent4"/>
+          </a:lnRef>
+          <a:fillRef idx="0">
+            <a:schemeClr val="accent4"/>
+          </a:fillRef>
+          <a:effectRef idx="2">
+            <a:schemeClr val="accent4"/>
+          </a:effectRef>
+          <a:fontRef idx="minor">
+            <a:schemeClr val="tx1"/>
+          </a:fontRef>
+        </p:style>
+      </p:cxnSp>
+      <p:cxnSp>
+        <p:nvCxnSpPr>
+          <p:cNvPr id="8" name="Straight Connector 7">
+            <a:extLst>
+              <a:ext uri="{FF2B5EF4-FFF2-40B4-BE49-F238E27FC236}">
+                <a16:creationId xmlns:a16="http://schemas.microsoft.com/office/drawing/2014/main" id="{75ECEEFF-5F26-29D4-F2C1-4EFB02ACEF28}"/>
+              </a:ext>
+            </a:extLst>
+          </p:cNvPr>
+          <p:cNvCxnSpPr/>
+          <p:nvPr/>
+        </p:nvCxnSpPr>
+        <p:spPr>
+          <a:xfrm>
+            <a:off x="6911009" y="2454965"/>
+            <a:ext cx="2176669" cy="0"/>
+          </a:xfrm>
+          <a:prstGeom prst="line">
+            <a:avLst/>
+          </a:prstGeom>
+        </p:spPr>
+        <p:style>
+          <a:lnRef idx="3">
+            <a:schemeClr val="accent4"/>
+          </a:lnRef>
+          <a:fillRef idx="0">
+            <a:schemeClr val="accent4"/>
+          </a:fillRef>
+          <a:effectRef idx="2">
+            <a:schemeClr val="accent4"/>
+          </a:effectRef>
+          <a:fontRef idx="minor">
+            <a:schemeClr val="tx1"/>
+          </a:fontRef>
+        </p:style>
+      </p:cxnSp>
+      <p:cxnSp>
+        <p:nvCxnSpPr>
+          <p:cNvPr id="9" name="Straight Connector 8">
+            <a:extLst>
+              <a:ext uri="{FF2B5EF4-FFF2-40B4-BE49-F238E27FC236}">
+                <a16:creationId xmlns:a16="http://schemas.microsoft.com/office/drawing/2014/main" id="{45884D49-E9BC-822C-D1D9-73C50086011C}"/>
+              </a:ext>
+            </a:extLst>
+          </p:cNvPr>
+          <p:cNvCxnSpPr/>
+          <p:nvPr/>
+        </p:nvCxnSpPr>
+        <p:spPr>
+          <a:xfrm>
+            <a:off x="9717157" y="2454965"/>
+            <a:ext cx="2176669" cy="0"/>
+          </a:xfrm>
+          <a:prstGeom prst="line">
+            <a:avLst/>
+          </a:prstGeom>
+        </p:spPr>
+        <p:style>
+          <a:lnRef idx="3">
+            <a:schemeClr val="accent4"/>
+          </a:lnRef>
+          <a:fillRef idx="0">
+            <a:schemeClr val="accent4"/>
+          </a:fillRef>
+          <a:effectRef idx="2">
+            <a:schemeClr val="accent4"/>
+          </a:effectRef>
+          <a:fontRef idx="minor">
+            <a:schemeClr val="tx1"/>
+          </a:fontRef>
+        </p:style>
+      </p:cxnSp>
+      <p:cxnSp>
+        <p:nvCxnSpPr>
+          <p:cNvPr id="10" name="Straight Connector 9">
+            <a:extLst>
+              <a:ext uri="{FF2B5EF4-FFF2-40B4-BE49-F238E27FC236}">
+                <a16:creationId xmlns:a16="http://schemas.microsoft.com/office/drawing/2014/main" id="{9D500E48-2112-B041-D082-F1AB300C9A63}"/>
+              </a:ext>
+            </a:extLst>
+          </p:cNvPr>
+          <p:cNvCxnSpPr/>
+          <p:nvPr/>
+        </p:nvCxnSpPr>
+        <p:spPr>
+          <a:xfrm>
+            <a:off x="1583635" y="3899452"/>
+            <a:ext cx="2176669" cy="0"/>
+          </a:xfrm>
+          <a:prstGeom prst="line">
+            <a:avLst/>
+          </a:prstGeom>
+        </p:spPr>
+        <p:style>
+          <a:lnRef idx="3">
+            <a:schemeClr val="accent4"/>
+          </a:lnRef>
+          <a:fillRef idx="0">
+            <a:schemeClr val="accent4"/>
+          </a:fillRef>
+          <a:effectRef idx="2">
+            <a:schemeClr val="accent4"/>
+          </a:effectRef>
+          <a:fontRef idx="minor">
+            <a:schemeClr val="tx1"/>
+          </a:fontRef>
+        </p:style>
+      </p:cxnSp>
+      <p:cxnSp>
+        <p:nvCxnSpPr>
+          <p:cNvPr id="11" name="Straight Connector 10">
+            <a:extLst>
+              <a:ext uri="{FF2B5EF4-FFF2-40B4-BE49-F238E27FC236}">
+                <a16:creationId xmlns:a16="http://schemas.microsoft.com/office/drawing/2014/main" id="{88B2650F-FFC7-2DE4-8A1D-8A7CDA8FDBD7}"/>
+              </a:ext>
+            </a:extLst>
+          </p:cNvPr>
+          <p:cNvCxnSpPr/>
+          <p:nvPr/>
+        </p:nvCxnSpPr>
+        <p:spPr>
+          <a:xfrm>
+            <a:off x="4389783" y="3899452"/>
+            <a:ext cx="2176669" cy="0"/>
+          </a:xfrm>
+          <a:prstGeom prst="line">
+            <a:avLst/>
+          </a:prstGeom>
+        </p:spPr>
+        <p:style>
+          <a:lnRef idx="3">
+            <a:schemeClr val="accent4"/>
+          </a:lnRef>
+          <a:fillRef idx="0">
+            <a:schemeClr val="accent4"/>
+          </a:fillRef>
+          <a:effectRef idx="2">
+            <a:schemeClr val="accent4"/>
+          </a:effectRef>
+          <a:fontRef idx="minor">
+            <a:schemeClr val="tx1"/>
+          </a:fontRef>
+        </p:style>
+      </p:cxnSp>
+      <p:cxnSp>
+        <p:nvCxnSpPr>
+          <p:cNvPr id="12" name="Straight Connector 11">
+            <a:extLst>
+              <a:ext uri="{FF2B5EF4-FFF2-40B4-BE49-F238E27FC236}">
+                <a16:creationId xmlns:a16="http://schemas.microsoft.com/office/drawing/2014/main" id="{5C430535-8680-1AC7-C202-D8F7A384CBEA}"/>
+              </a:ext>
+            </a:extLst>
+          </p:cNvPr>
+          <p:cNvCxnSpPr/>
+          <p:nvPr/>
+        </p:nvCxnSpPr>
+        <p:spPr>
+          <a:xfrm>
+            <a:off x="7073348" y="3899452"/>
+            <a:ext cx="2176669" cy="0"/>
+          </a:xfrm>
+          <a:prstGeom prst="line">
+            <a:avLst/>
+          </a:prstGeom>
+        </p:spPr>
+        <p:style>
+          <a:lnRef idx="3">
+            <a:schemeClr val="accent4"/>
+          </a:lnRef>
+          <a:fillRef idx="0">
+            <a:schemeClr val="accent4"/>
+          </a:fillRef>
+          <a:effectRef idx="2">
+            <a:schemeClr val="accent4"/>
+          </a:effectRef>
+          <a:fontRef idx="minor">
+            <a:schemeClr val="tx1"/>
+          </a:fontRef>
+        </p:style>
+      </p:cxnSp>
+      <p:cxnSp>
+        <p:nvCxnSpPr>
+          <p:cNvPr id="13" name="Straight Connector 12">
+            <a:extLst>
+              <a:ext uri="{FF2B5EF4-FFF2-40B4-BE49-F238E27FC236}">
+                <a16:creationId xmlns:a16="http://schemas.microsoft.com/office/drawing/2014/main" id="{553C039B-2ED9-0516-49B3-04DBA23184BE}"/>
+              </a:ext>
+            </a:extLst>
+          </p:cNvPr>
+          <p:cNvCxnSpPr/>
+          <p:nvPr/>
+        </p:nvCxnSpPr>
+        <p:spPr>
+          <a:xfrm>
+            <a:off x="9581322" y="3899452"/>
+            <a:ext cx="2176669" cy="0"/>
+          </a:xfrm>
+          <a:prstGeom prst="line">
+            <a:avLst/>
+          </a:prstGeom>
+        </p:spPr>
+        <p:style>
+          <a:lnRef idx="3">
+            <a:schemeClr val="accent4"/>
+          </a:lnRef>
+          <a:fillRef idx="0">
+            <a:schemeClr val="accent4"/>
+          </a:fillRef>
+          <a:effectRef idx="2">
+            <a:schemeClr val="accent4"/>
+          </a:effectRef>
+          <a:fontRef idx="minor">
+            <a:schemeClr val="tx1"/>
+          </a:fontRef>
+        </p:style>
+      </p:cxnSp>
+      <mc:AlternateContent xmlns:mc="http://schemas.openxmlformats.org/markup-compatibility/2006" xmlns:p14="http://schemas.microsoft.com/office/powerpoint/2010/main">
+        <mc:Choice Requires="p14">
+          <p:contentPart p14:bwMode="auto" r:id="rId2">
+            <p14:nvContentPartPr>
+              <p14:cNvPr id="16" name="Ink 15">
+                <a:extLst>
+                  <a:ext uri="{FF2B5EF4-FFF2-40B4-BE49-F238E27FC236}">
+                    <a16:creationId xmlns:a16="http://schemas.microsoft.com/office/drawing/2014/main" id="{30886686-FE92-5C5D-BEF3-EDDFD5E36E08}"/>
+                  </a:ext>
+                </a:extLst>
+              </p14:cNvPr>
+              <p14:cNvContentPartPr/>
+              <p14:nvPr/>
+            </p14:nvContentPartPr>
+            <p14:xfrm>
+              <a:off x="2643496" y="3696151"/>
+              <a:ext cx="2318400" cy="194760"/>
+            </p14:xfrm>
+          </p:contentPart>
+        </mc:Choice>
+        <mc:Fallback xmlns="">
+          <p:pic>
+            <p:nvPicPr>
+              <p:cNvPr id="16" name="Ink 15">
+                <a:extLst>
+                  <a:ext uri="{FF2B5EF4-FFF2-40B4-BE49-F238E27FC236}">
+                    <a16:creationId xmlns:a16="http://schemas.microsoft.com/office/drawing/2014/main" id="{30886686-FE92-5C5D-BEF3-EDDFD5E36E08}"/>
+                  </a:ext>
+                </a:extLst>
+              </p:cNvPr>
+              <p:cNvPicPr/>
+              <p:nvPr/>
+            </p:nvPicPr>
+            <p:blipFill>
+              <a:blip r:embed="rId3"/>
+              <a:stretch>
+                <a:fillRect/>
+              </a:stretch>
+            </p:blipFill>
+            <p:spPr>
+              <a:xfrm>
+                <a:off x="2637376" y="3690031"/>
+                <a:ext cx="2330640" cy="207000"/>
+              </a:xfrm>
+              <a:prstGeom prst="rect">
+                <a:avLst/>
+              </a:prstGeom>
+            </p:spPr>
+          </p:pic>
+        </mc:Fallback>
+      </mc:AlternateContent>
+      <mc:AlternateContent xmlns:mc="http://schemas.openxmlformats.org/markup-compatibility/2006" xmlns:p14="http://schemas.microsoft.com/office/powerpoint/2010/main">
+        <mc:Choice Requires="p14">
+          <p:contentPart p14:bwMode="auto" r:id="rId4">
+            <p14:nvContentPartPr>
+              <p14:cNvPr id="17" name="Ink 16">
+                <a:extLst>
+                  <a:ext uri="{FF2B5EF4-FFF2-40B4-BE49-F238E27FC236}">
+                    <a16:creationId xmlns:a16="http://schemas.microsoft.com/office/drawing/2014/main" id="{4202475A-F840-2E0D-6B81-E9F9776B7135}"/>
+                  </a:ext>
+                </a:extLst>
+              </p14:cNvPr>
+              <p14:cNvContentPartPr/>
+              <p14:nvPr/>
+            </p14:nvContentPartPr>
+            <p14:xfrm>
+              <a:off x="8139976" y="3477991"/>
+              <a:ext cx="2577240" cy="414360"/>
+            </p14:xfrm>
+          </p:contentPart>
+        </mc:Choice>
+        <mc:Fallback xmlns="">
+          <p:pic>
+            <p:nvPicPr>
+              <p:cNvPr id="17" name="Ink 16">
+                <a:extLst>
+                  <a:ext uri="{FF2B5EF4-FFF2-40B4-BE49-F238E27FC236}">
+                    <a16:creationId xmlns:a16="http://schemas.microsoft.com/office/drawing/2014/main" id="{4202475A-F840-2E0D-6B81-E9F9776B7135}"/>
+                  </a:ext>
+                </a:extLst>
+              </p:cNvPr>
+              <p:cNvPicPr/>
+              <p:nvPr/>
+            </p:nvPicPr>
+            <p:blipFill>
+              <a:blip r:embed="rId5"/>
+              <a:stretch>
+                <a:fillRect/>
+              </a:stretch>
+            </p:blipFill>
+            <p:spPr>
+              <a:xfrm>
+                <a:off x="8133856" y="3471871"/>
+                <a:ext cx="2589480" cy="426600"/>
+              </a:xfrm>
+              <a:prstGeom prst="rect">
+                <a:avLst/>
+              </a:prstGeom>
+            </p:spPr>
+          </p:pic>
+        </mc:Fallback>
+      </mc:AlternateContent>
+      <p:cxnSp>
+        <p:nvCxnSpPr>
+          <p:cNvPr id="18" name="Straight Connector 17">
+            <a:extLst>
+              <a:ext uri="{FF2B5EF4-FFF2-40B4-BE49-F238E27FC236}">
+                <a16:creationId xmlns:a16="http://schemas.microsoft.com/office/drawing/2014/main" id="{919BA0C4-1ECA-AFD2-C4EA-E1C0EFDC0F65}"/>
+              </a:ext>
+            </a:extLst>
+          </p:cNvPr>
+          <p:cNvCxnSpPr/>
+          <p:nvPr/>
+        </p:nvCxnSpPr>
+        <p:spPr>
+          <a:xfrm>
+            <a:off x="762000" y="6354765"/>
+            <a:ext cx="2176669" cy="0"/>
+          </a:xfrm>
+          <a:prstGeom prst="line">
+            <a:avLst/>
+          </a:prstGeom>
+        </p:spPr>
+        <p:style>
+          <a:lnRef idx="3">
+            <a:schemeClr val="accent4"/>
+          </a:lnRef>
+          <a:fillRef idx="0">
+            <a:schemeClr val="accent4"/>
+          </a:fillRef>
+          <a:effectRef idx="2">
+            <a:schemeClr val="accent4"/>
+          </a:effectRef>
+          <a:fontRef idx="minor">
+            <a:schemeClr val="tx1"/>
+          </a:fontRef>
+        </p:style>
+      </p:cxnSp>
+      <p:cxnSp>
+        <p:nvCxnSpPr>
+          <p:cNvPr id="19" name="Straight Connector 18">
+            <a:extLst>
+              <a:ext uri="{FF2B5EF4-FFF2-40B4-BE49-F238E27FC236}">
+                <a16:creationId xmlns:a16="http://schemas.microsoft.com/office/drawing/2014/main" id="{18460F0B-74D6-B1DF-7A6F-576C6373DF12}"/>
+              </a:ext>
+            </a:extLst>
+          </p:cNvPr>
+          <p:cNvCxnSpPr/>
+          <p:nvPr/>
+        </p:nvCxnSpPr>
+        <p:spPr>
+          <a:xfrm>
+            <a:off x="3568148" y="6354765"/>
+            <a:ext cx="2176669" cy="0"/>
+          </a:xfrm>
+          <a:prstGeom prst="line">
+            <a:avLst/>
+          </a:prstGeom>
+        </p:spPr>
+        <p:style>
+          <a:lnRef idx="3">
+            <a:schemeClr val="accent4"/>
+          </a:lnRef>
+          <a:fillRef idx="0">
+            <a:schemeClr val="accent4"/>
+          </a:fillRef>
+          <a:effectRef idx="2">
+            <a:schemeClr val="accent4"/>
+          </a:effectRef>
+          <a:fontRef idx="minor">
+            <a:schemeClr val="tx1"/>
+          </a:fontRef>
+        </p:style>
+      </p:cxnSp>
+      <p:cxnSp>
+        <p:nvCxnSpPr>
+          <p:cNvPr id="20" name="Straight Connector 19">
+            <a:extLst>
+              <a:ext uri="{FF2B5EF4-FFF2-40B4-BE49-F238E27FC236}">
+                <a16:creationId xmlns:a16="http://schemas.microsoft.com/office/drawing/2014/main" id="{8226B477-C047-A09E-D7E4-8267B5E97E8D}"/>
+              </a:ext>
+            </a:extLst>
+          </p:cNvPr>
+          <p:cNvCxnSpPr/>
+          <p:nvPr/>
+        </p:nvCxnSpPr>
+        <p:spPr>
+          <a:xfrm>
+            <a:off x="6251713" y="6354765"/>
+            <a:ext cx="2176669" cy="0"/>
+          </a:xfrm>
+          <a:prstGeom prst="line">
+            <a:avLst/>
+          </a:prstGeom>
+        </p:spPr>
+        <p:style>
+          <a:lnRef idx="3">
+            <a:schemeClr val="accent4"/>
+          </a:lnRef>
+          <a:fillRef idx="0">
+            <a:schemeClr val="accent4"/>
+          </a:fillRef>
+          <a:effectRef idx="2">
+            <a:schemeClr val="accent4"/>
+          </a:effectRef>
+          <a:fontRef idx="minor">
+            <a:schemeClr val="tx1"/>
+          </a:fontRef>
+        </p:style>
+      </p:cxnSp>
+      <p:cxnSp>
+        <p:nvCxnSpPr>
+          <p:cNvPr id="21" name="Straight Connector 20">
+            <a:extLst>
+              <a:ext uri="{FF2B5EF4-FFF2-40B4-BE49-F238E27FC236}">
+                <a16:creationId xmlns:a16="http://schemas.microsoft.com/office/drawing/2014/main" id="{86141C11-6EEA-617D-CBF3-58A88777AE22}"/>
+              </a:ext>
+            </a:extLst>
+          </p:cNvPr>
+          <p:cNvCxnSpPr/>
+          <p:nvPr/>
+        </p:nvCxnSpPr>
+        <p:spPr>
+          <a:xfrm>
+            <a:off x="8759687" y="6354765"/>
+            <a:ext cx="2176669" cy="0"/>
+          </a:xfrm>
+          <a:prstGeom prst="line">
+            <a:avLst/>
+          </a:prstGeom>
+        </p:spPr>
+        <p:style>
+          <a:lnRef idx="3">
+            <a:schemeClr val="accent4"/>
+          </a:lnRef>
+          <a:fillRef idx="0">
+            <a:schemeClr val="accent4"/>
+          </a:fillRef>
+          <a:effectRef idx="2">
+            <a:schemeClr val="accent4"/>
+          </a:effectRef>
+          <a:fontRef idx="minor">
+            <a:schemeClr val="tx1"/>
+          </a:fontRef>
+        </p:style>
+      </p:cxnSp>
+      <mc:AlternateContent xmlns:mc="http://schemas.openxmlformats.org/markup-compatibility/2006" xmlns:p14="http://schemas.microsoft.com/office/powerpoint/2010/main">
+        <mc:Choice Requires="p14">
+          <p:contentPart p14:bwMode="auto" r:id="rId6">
+            <p14:nvContentPartPr>
+              <p14:cNvPr id="22" name="Ink 21">
+                <a:extLst>
+                  <a:ext uri="{FF2B5EF4-FFF2-40B4-BE49-F238E27FC236}">
+                    <a16:creationId xmlns:a16="http://schemas.microsoft.com/office/drawing/2014/main" id="{4BFA8BCF-683F-3430-7B88-6005F23124BF}"/>
+                  </a:ext>
+                </a:extLst>
+              </p14:cNvPr>
+              <p14:cNvContentPartPr/>
+              <p14:nvPr/>
+            </p14:nvContentPartPr>
+            <p14:xfrm>
+              <a:off x="1821861" y="6151464"/>
+              <a:ext cx="2318400" cy="194760"/>
+            </p14:xfrm>
+          </p:contentPart>
+        </mc:Choice>
+        <mc:Fallback xmlns="">
+          <p:pic>
+            <p:nvPicPr>
+              <p:cNvPr id="22" name="Ink 21">
+                <a:extLst>
+                  <a:ext uri="{FF2B5EF4-FFF2-40B4-BE49-F238E27FC236}">
+                    <a16:creationId xmlns:a16="http://schemas.microsoft.com/office/drawing/2014/main" id="{4BFA8BCF-683F-3430-7B88-6005F23124BF}"/>
+                  </a:ext>
+                </a:extLst>
+              </p:cNvPr>
+              <p:cNvPicPr/>
+              <p:nvPr/>
+            </p:nvPicPr>
+            <p:blipFill>
+              <a:blip r:embed="rId3"/>
+              <a:stretch>
+                <a:fillRect/>
+              </a:stretch>
+            </p:blipFill>
+            <p:spPr>
+              <a:xfrm>
+                <a:off x="1815741" y="6145344"/>
+                <a:ext cx="2330640" cy="207000"/>
+              </a:xfrm>
+              <a:prstGeom prst="rect">
+                <a:avLst/>
+              </a:prstGeom>
+            </p:spPr>
+          </p:pic>
+        </mc:Fallback>
+      </mc:AlternateContent>
+      <mc:AlternateContent xmlns:mc="http://schemas.openxmlformats.org/markup-compatibility/2006" xmlns:p14="http://schemas.microsoft.com/office/powerpoint/2010/main">
+        <mc:Choice Requires="p14">
+          <p:contentPart p14:bwMode="auto" r:id="rId7">
+            <p14:nvContentPartPr>
+              <p14:cNvPr id="23" name="Ink 22">
+                <a:extLst>
+                  <a:ext uri="{FF2B5EF4-FFF2-40B4-BE49-F238E27FC236}">
+                    <a16:creationId xmlns:a16="http://schemas.microsoft.com/office/drawing/2014/main" id="{355D84FB-919C-E434-CEB7-67F9D864E701}"/>
+                  </a:ext>
+                </a:extLst>
+              </p14:cNvPr>
+              <p14:cNvContentPartPr/>
+              <p14:nvPr/>
+            </p14:nvContentPartPr>
+            <p14:xfrm>
+              <a:off x="7318341" y="5933304"/>
+              <a:ext cx="2577240" cy="414360"/>
+            </p14:xfrm>
+          </p:contentPart>
+        </mc:Choice>
+        <mc:Fallback xmlns="">
+          <p:pic>
+            <p:nvPicPr>
+              <p:cNvPr id="23" name="Ink 22">
+                <a:extLst>
+                  <a:ext uri="{FF2B5EF4-FFF2-40B4-BE49-F238E27FC236}">
+                    <a16:creationId xmlns:a16="http://schemas.microsoft.com/office/drawing/2014/main" id="{355D84FB-919C-E434-CEB7-67F9D864E701}"/>
+                  </a:ext>
+                </a:extLst>
+              </p:cNvPr>
+              <p:cNvPicPr/>
+              <p:nvPr/>
+            </p:nvPicPr>
+            <p:blipFill>
+              <a:blip r:embed="rId5"/>
+              <a:stretch>
+                <a:fillRect/>
+              </a:stretch>
+            </p:blipFill>
+            <p:spPr>
+              <a:xfrm>
+                <a:off x="7312221" y="5927184"/>
+                <a:ext cx="2589480" cy="426600"/>
+              </a:xfrm>
+              <a:prstGeom prst="rect">
+                <a:avLst/>
+              </a:prstGeom>
+            </p:spPr>
+          </p:pic>
+        </mc:Fallback>
+      </mc:AlternateContent>
+      <mc:AlternateContent xmlns:mc="http://schemas.openxmlformats.org/markup-compatibility/2006" xmlns:p14="http://schemas.microsoft.com/office/powerpoint/2010/main">
+        <mc:Choice Requires="p14">
+          <p:contentPart p14:bwMode="auto" r:id="rId8">
+            <p14:nvContentPartPr>
+              <p14:cNvPr id="25" name="Ink 24">
+                <a:extLst>
+                  <a:ext uri="{FF2B5EF4-FFF2-40B4-BE49-F238E27FC236}">
+                    <a16:creationId xmlns:a16="http://schemas.microsoft.com/office/drawing/2014/main" id="{CF193435-9698-43DC-6C92-C221CF2BC018}"/>
+                  </a:ext>
+                </a:extLst>
+              </p14:cNvPr>
+              <p14:cNvContentPartPr/>
+              <p14:nvPr/>
+            </p14:nvContentPartPr>
+            <p14:xfrm>
+              <a:off x="4323256" y="5614591"/>
+              <a:ext cx="2435760" cy="745200"/>
+            </p14:xfrm>
+          </p:contentPart>
+        </mc:Choice>
+        <mc:Fallback xmlns="">
+          <p:pic>
+            <p:nvPicPr>
+              <p:cNvPr id="25" name="Ink 24">
+                <a:extLst>
+                  <a:ext uri="{FF2B5EF4-FFF2-40B4-BE49-F238E27FC236}">
+                    <a16:creationId xmlns:a16="http://schemas.microsoft.com/office/drawing/2014/main" id="{CF193435-9698-43DC-6C92-C221CF2BC018}"/>
+                  </a:ext>
+                </a:extLst>
+              </p:cNvPr>
+              <p:cNvPicPr/>
+              <p:nvPr/>
+            </p:nvPicPr>
+            <p:blipFill>
+              <a:blip r:embed="rId9"/>
+              <a:stretch>
+                <a:fillRect/>
+              </a:stretch>
+            </p:blipFill>
+            <p:spPr>
+              <a:xfrm>
+                <a:off x="4317136" y="5608471"/>
+                <a:ext cx="2448000" cy="757440"/>
+              </a:xfrm>
+              <a:prstGeom prst="rect">
+                <a:avLst/>
+              </a:prstGeom>
+            </p:spPr>
+          </p:pic>
+        </mc:Fallback>
+      </mc:AlternateContent>
+      <mc:AlternateContent xmlns:mc="http://schemas.openxmlformats.org/markup-compatibility/2006" xmlns:p14="http://schemas.microsoft.com/office/powerpoint/2010/main">
+        <mc:Choice Requires="p14">
+          <p:contentPart p14:bwMode="auto" r:id="rId10">
+            <p14:nvContentPartPr>
+              <p14:cNvPr id="26" name="Ink 25">
+                <a:extLst>
+                  <a:ext uri="{FF2B5EF4-FFF2-40B4-BE49-F238E27FC236}">
+                    <a16:creationId xmlns:a16="http://schemas.microsoft.com/office/drawing/2014/main" id="{B05AE4FB-32D6-09CF-F0B0-F846BDE4414E}"/>
+                  </a:ext>
+                </a:extLst>
+              </p14:cNvPr>
+              <p14:cNvContentPartPr/>
+              <p14:nvPr/>
+            </p14:nvContentPartPr>
+            <p14:xfrm>
+              <a:off x="1331656" y="5217151"/>
+              <a:ext cx="9335880" cy="1150200"/>
+            </p14:xfrm>
+          </p:contentPart>
+        </mc:Choice>
+        <mc:Fallback xmlns="">
+          <p:pic>
+            <p:nvPicPr>
+              <p:cNvPr id="26" name="Ink 25">
+                <a:extLst>
+                  <a:ext uri="{FF2B5EF4-FFF2-40B4-BE49-F238E27FC236}">
+                    <a16:creationId xmlns:a16="http://schemas.microsoft.com/office/drawing/2014/main" id="{B05AE4FB-32D6-09CF-F0B0-F846BDE4414E}"/>
+                  </a:ext>
+                </a:extLst>
+              </p:cNvPr>
+              <p:cNvPicPr/>
+              <p:nvPr/>
+            </p:nvPicPr>
+            <p:blipFill>
+              <a:blip r:embed="rId11"/>
+              <a:stretch>
+                <a:fillRect/>
+              </a:stretch>
+            </p:blipFill>
+            <p:spPr>
+              <a:xfrm>
+                <a:off x="1325536" y="5211031"/>
+                <a:ext cx="9348120" cy="1162440"/>
+              </a:xfrm>
+              <a:prstGeom prst="rect">
+                <a:avLst/>
+              </a:prstGeom>
+            </p:spPr>
+          </p:pic>
+        </mc:Fallback>
+      </mc:AlternateContent>
+    </p:spTree>
+    <p:extLst>
+      <p:ext uri="{BB962C8B-B14F-4D97-AF65-F5344CB8AC3E}">
+        <p14:creationId xmlns:p14="http://schemas.microsoft.com/office/powerpoint/2010/main" val="963822541"/>
+      </p:ext>
+    </p:extLst>
+  </p:cSld>
+  <p:clrMapOvr>
+    <a:masterClrMapping/>
+  </p:clrMapOvr>
+</p:sld>
+</file>
+
+<file path=ppt/slides/slide50.xml><?xml version="1.0" encoding="utf-8"?>
 <p:sld xmlns:a="http://schemas.openxmlformats.org/drawingml/2006/main" xmlns:r="http://schemas.openxmlformats.org/officeDocument/2006/relationships" xmlns:p="http://schemas.openxmlformats.org/presentationml/2006/main">
   <p:cSld>
     <p:spTree>
@@ -28868,7 +30504,7 @@
             <a:fld id="{B82CCC60-E8CD-4174-8B1A-7DF615B22EEF}" type="slidenum">
               <a:rPr lang="en-US" smtClean="0"/>
               <a:pPr/>
-              <a:t>49</a:t>
+              <a:t>50</a:t>
             </a:fld>
             <a:endParaRPr lang="en-US"/>
           </a:p>
@@ -29217,163 +30853,7 @@
 </p:sld>
 </file>
 
-<file path=ppt/slides/slide5.xml><?xml version="1.0" encoding="utf-8"?>
-<p:sld xmlns:a="http://schemas.openxmlformats.org/drawingml/2006/main" xmlns:r="http://schemas.openxmlformats.org/officeDocument/2006/relationships" xmlns:p="http://schemas.openxmlformats.org/presentationml/2006/main">
-  <p:cSld>
-    <p:spTree>
-      <p:nvGrpSpPr>
-        <p:cNvPr id="1" name=""/>
-        <p:cNvGrpSpPr/>
-        <p:nvPr/>
-      </p:nvGrpSpPr>
-      <p:grpSpPr>
-        <a:xfrm>
-          <a:off x="0" y="0"/>
-          <a:ext cx="0" cy="0"/>
-          <a:chOff x="0" y="0"/>
-          <a:chExt cx="0" cy="0"/>
-        </a:xfrm>
-      </p:grpSpPr>
-      <p:sp>
-        <p:nvSpPr>
-          <p:cNvPr id="2" name="Title 1">
-            <a:extLst>
-              <a:ext uri="{FF2B5EF4-FFF2-40B4-BE49-F238E27FC236}">
-                <a16:creationId xmlns:a16="http://schemas.microsoft.com/office/drawing/2014/main" id="{86E50DFB-D256-E157-4073-248A5BE2EA9D}"/>
-              </a:ext>
-            </a:extLst>
-          </p:cNvPr>
-          <p:cNvSpPr>
-            <a:spLocks noGrp="1"/>
-          </p:cNvSpPr>
-          <p:nvPr>
-            <p:ph type="title"/>
-          </p:nvPr>
-        </p:nvSpPr>
-        <p:spPr/>
-        <p:txBody>
-          <a:bodyPr>
-            <a:normAutofit fontScale="90000"/>
-          </a:bodyPr>
-          <a:lstStyle/>
-          <a:p>
-            <a:r>
-              <a:rPr lang="en-US" dirty="0"/>
-              <a:t>Assembly levels</a:t>
-            </a:r>
-          </a:p>
-        </p:txBody>
-      </p:sp>
-      <p:sp>
-        <p:nvSpPr>
-          <p:cNvPr id="3" name="Content Placeholder 2">
-            <a:extLst>
-              <a:ext uri="{FF2B5EF4-FFF2-40B4-BE49-F238E27FC236}">
-                <a16:creationId xmlns:a16="http://schemas.microsoft.com/office/drawing/2014/main" id="{3EB21EAC-C3B9-51FD-3047-F3648FE7069E}"/>
-              </a:ext>
-            </a:extLst>
-          </p:cNvPr>
-          <p:cNvSpPr>
-            <a:spLocks noGrp="1"/>
-          </p:cNvSpPr>
-          <p:nvPr>
-            <p:ph idx="1"/>
-          </p:nvPr>
-        </p:nvSpPr>
-        <p:spPr/>
-        <p:txBody>
-          <a:bodyPr/>
-          <a:lstStyle/>
-          <a:p>
-            <a:r>
-              <a:rPr lang="en-US" i="1" dirty="0"/>
-              <a:t>Contigs </a:t>
-            </a:r>
-            <a:r>
-              <a:rPr lang="en-US" dirty="0"/>
-              <a:t>are contiguous genome sequences where all letters are known</a:t>
-            </a:r>
-          </a:p>
-          <a:p>
-            <a:endParaRPr lang="en-US" dirty="0"/>
-          </a:p>
-          <a:p>
-            <a:r>
-              <a:rPr lang="en-US" i="1" dirty="0"/>
-              <a:t>Scaffolds </a:t>
-            </a:r>
-            <a:r>
-              <a:rPr lang="en-US" dirty="0"/>
-              <a:t>are ordered and oriented sets of contigs, gaps between contigs are of estimated size or set to a default value</a:t>
-            </a:r>
-          </a:p>
-          <a:p>
-            <a:endParaRPr lang="en-US" dirty="0"/>
-          </a:p>
-          <a:p>
-            <a:r>
-              <a:rPr lang="en-US" i="1" dirty="0"/>
-              <a:t>Super-scaffolds </a:t>
-            </a:r>
-            <a:r>
-              <a:rPr lang="en-US" dirty="0"/>
-              <a:t>or </a:t>
-            </a:r>
-            <a:r>
-              <a:rPr lang="en-US" i="1" dirty="0"/>
-              <a:t>pseudo-chromosomes</a:t>
-            </a:r>
-            <a:r>
-              <a:rPr lang="en-US" dirty="0"/>
-              <a:t> are ordered and mostly oriented sets of scaffolds, gaps between scaffolds are typically not estimated </a:t>
-            </a:r>
-          </a:p>
-        </p:txBody>
-      </p:sp>
-      <p:sp>
-        <p:nvSpPr>
-          <p:cNvPr id="4" name="Slide Number Placeholder 3">
-            <a:extLst>
-              <a:ext uri="{FF2B5EF4-FFF2-40B4-BE49-F238E27FC236}">
-                <a16:creationId xmlns:a16="http://schemas.microsoft.com/office/drawing/2014/main" id="{7C33FD4D-A828-0054-F7AB-9728B63FFE45}"/>
-              </a:ext>
-            </a:extLst>
-          </p:cNvPr>
-          <p:cNvSpPr>
-            <a:spLocks noGrp="1"/>
-          </p:cNvSpPr>
-          <p:nvPr>
-            <p:ph type="sldNum" sz="quarter" idx="12"/>
-          </p:nvPr>
-        </p:nvSpPr>
-        <p:spPr/>
-        <p:txBody>
-          <a:bodyPr/>
-          <a:lstStyle/>
-          <a:p>
-            <a:fld id="{B82CCC60-E8CD-4174-8B1A-7DF615B22EEF}" type="slidenum">
-              <a:rPr lang="en-US" smtClean="0"/>
-              <a:pPr/>
-              <a:t>5</a:t>
-            </a:fld>
-            <a:endParaRPr lang="en-US"/>
-          </a:p>
-        </p:txBody>
-      </p:sp>
-    </p:spTree>
-    <p:extLst>
-      <p:ext uri="{BB962C8B-B14F-4D97-AF65-F5344CB8AC3E}">
-        <p14:creationId xmlns:p14="http://schemas.microsoft.com/office/powerpoint/2010/main" val="963822541"/>
-      </p:ext>
-    </p:extLst>
-  </p:cSld>
-  <p:clrMapOvr>
-    <a:masterClrMapping/>
-  </p:clrMapOvr>
-</p:sld>
-</file>
-
-<file path=ppt/slides/slide50.xml><?xml version="1.0" encoding="utf-8"?>
+<file path=ppt/slides/slide51.xml><?xml version="1.0" encoding="utf-8"?>
 <p:sld xmlns:a="http://schemas.openxmlformats.org/drawingml/2006/main" xmlns:r="http://schemas.openxmlformats.org/officeDocument/2006/relationships" xmlns:p="http://schemas.openxmlformats.org/presentationml/2006/main">
   <p:cSld>
     <p:spTree>
@@ -29450,7 +30930,7 @@
             <a:fld id="{B82CCC60-E8CD-4174-8B1A-7DF615B22EEF}" type="slidenum">
               <a:rPr lang="en-US" smtClean="0"/>
               <a:pPr/>
-              <a:t>50</a:t>
+              <a:t>51</a:t>
             </a:fld>
             <a:endParaRPr lang="en-US"/>
           </a:p>
@@ -30117,7 +31597,7 @@
 </p:sld>
 </file>
 
-<file path=ppt/slides/slide51.xml><?xml version="1.0" encoding="utf-8"?>
+<file path=ppt/slides/slide52.xml><?xml version="1.0" encoding="utf-8"?>
 <p:sld xmlns:a="http://schemas.openxmlformats.org/drawingml/2006/main" xmlns:r="http://schemas.openxmlformats.org/officeDocument/2006/relationships" xmlns:p="http://schemas.openxmlformats.org/presentationml/2006/main">
   <p:cSld>
     <p:spTree>
@@ -30326,7 +31806,7 @@
             <a:fld id="{B82CCC60-E8CD-4174-8B1A-7DF615B22EEF}" type="slidenum">
               <a:rPr lang="en-US" smtClean="0"/>
               <a:pPr/>
-              <a:t>51</a:t>
+              <a:t>52</a:t>
             </a:fld>
             <a:endParaRPr lang="en-US"/>
           </a:p>
@@ -30345,7 +31825,7 @@
 </p:sld>
 </file>
 
-<file path=ppt/slides/slide52.xml><?xml version="1.0" encoding="utf-8"?>
+<file path=ppt/slides/slide53.xml><?xml version="1.0" encoding="utf-8"?>
 <p:sld xmlns:a="http://schemas.openxmlformats.org/drawingml/2006/main" xmlns:r="http://schemas.openxmlformats.org/officeDocument/2006/relationships" xmlns:p="http://schemas.openxmlformats.org/presentationml/2006/main">
   <p:cSld>
     <p:spTree>
@@ -30654,7 +32134,7 @@
             <a:fld id="{B82CCC60-E8CD-4174-8B1A-7DF615B22EEF}" type="slidenum">
               <a:rPr lang="en-US" smtClean="0"/>
               <a:pPr/>
-              <a:t>52</a:t>
+              <a:t>53</a:t>
             </a:fld>
             <a:endParaRPr lang="en-US"/>
           </a:p>
@@ -31305,7 +32785,7 @@
 </p:sld>
 </file>
 
-<file path=ppt/slides/slide53.xml><?xml version="1.0" encoding="utf-8"?>
+<file path=ppt/slides/slide54.xml><?xml version="1.0" encoding="utf-8"?>
 <p:sld xmlns:a="http://schemas.openxmlformats.org/drawingml/2006/main" xmlns:r="http://schemas.openxmlformats.org/officeDocument/2006/relationships" xmlns:p="http://schemas.openxmlformats.org/presentationml/2006/main">
   <p:cSld>
     <p:spTree>
@@ -31382,7 +32862,7 @@
             <a:fld id="{B82CCC60-E8CD-4174-8B1A-7DF615B22EEF}" type="slidenum">
               <a:rPr lang="en-US" smtClean="0"/>
               <a:pPr/>
-              <a:t>53</a:t>
+              <a:t>54</a:t>
             </a:fld>
             <a:endParaRPr lang="en-US"/>
           </a:p>
@@ -31585,7 +33065,7 @@
 </p:sld>
 </file>
 
-<file path=ppt/slides/slide54.xml><?xml version="1.0" encoding="utf-8"?>
+<file path=ppt/slides/slide55.xml><?xml version="1.0" encoding="utf-8"?>
 <p:sld xmlns:a="http://schemas.openxmlformats.org/drawingml/2006/main" xmlns:r="http://schemas.openxmlformats.org/officeDocument/2006/relationships" xmlns:p="http://schemas.openxmlformats.org/presentationml/2006/main">
   <p:cSld>
     <p:spTree>
@@ -31736,7 +33216,7 @@
             <a:fld id="{B82CCC60-E8CD-4174-8B1A-7DF615B22EEF}" type="slidenum">
               <a:rPr lang="en-US" smtClean="0"/>
               <a:pPr/>
-              <a:t>54</a:t>
+              <a:t>55</a:t>
             </a:fld>
             <a:endParaRPr lang="en-US"/>
           </a:p>
@@ -31746,479 +33226,6 @@
     <p:extLst>
       <p:ext uri="{BB962C8B-B14F-4D97-AF65-F5344CB8AC3E}">
         <p14:creationId xmlns:p14="http://schemas.microsoft.com/office/powerpoint/2010/main" val="598604316"/>
-      </p:ext>
-    </p:extLst>
-  </p:cSld>
-  <p:clrMapOvr>
-    <a:masterClrMapping/>
-  </p:clrMapOvr>
-</p:sld>
-</file>
-
-<file path=ppt/slides/slide55.xml><?xml version="1.0" encoding="utf-8"?>
-<p:sld xmlns:a="http://schemas.openxmlformats.org/drawingml/2006/main" xmlns:r="http://schemas.openxmlformats.org/officeDocument/2006/relationships" xmlns:p="http://schemas.openxmlformats.org/presentationml/2006/main">
-  <p:cSld>
-    <p:spTree>
-      <p:nvGrpSpPr>
-        <p:cNvPr id="1" name=""/>
-        <p:cNvGrpSpPr/>
-        <p:nvPr/>
-      </p:nvGrpSpPr>
-      <p:grpSpPr>
-        <a:xfrm>
-          <a:off x="0" y="0"/>
-          <a:ext cx="0" cy="0"/>
-          <a:chOff x="0" y="0"/>
-          <a:chExt cx="0" cy="0"/>
-        </a:xfrm>
-      </p:grpSpPr>
-      <p:sp>
-        <p:nvSpPr>
-          <p:cNvPr id="2" name="Title 1"/>
-          <p:cNvSpPr>
-            <a:spLocks noGrp="1"/>
-          </p:cNvSpPr>
-          <p:nvPr>
-            <p:ph type="title"/>
-          </p:nvPr>
-        </p:nvSpPr>
-        <p:spPr/>
-        <p:txBody>
-          <a:bodyPr>
-            <a:normAutofit fontScale="90000"/>
-          </a:bodyPr>
-          <a:lstStyle/>
-          <a:p>
-            <a:r>
-              <a:rPr lang="en-US"/>
-              <a:t>Super-reads</a:t>
-            </a:r>
-          </a:p>
-        </p:txBody>
-      </p:sp>
-      <p:sp>
-        <p:nvSpPr>
-          <p:cNvPr id="4" name="Slide Number Placeholder 3">
-            <a:extLst>
-              <a:ext uri="{FF2B5EF4-FFF2-40B4-BE49-F238E27FC236}">
-                <a16:creationId xmlns:a16="http://schemas.microsoft.com/office/drawing/2014/main" id="{BCA34BE0-BD77-4B6B-9720-35840D9D8317}"/>
-              </a:ext>
-            </a:extLst>
-          </p:cNvPr>
-          <p:cNvSpPr>
-            <a:spLocks noGrp="1"/>
-          </p:cNvSpPr>
-          <p:nvPr>
-            <p:ph type="sldNum" sz="quarter" idx="12"/>
-          </p:nvPr>
-        </p:nvSpPr>
-        <p:spPr/>
-        <p:txBody>
-          <a:bodyPr/>
-          <a:lstStyle/>
-          <a:p>
-            <a:fld id="{B82CCC60-E8CD-4174-8B1A-7DF615B22EEF}" type="slidenum">
-              <a:rPr lang="en-US" smtClean="0"/>
-              <a:pPr/>
-              <a:t>55</a:t>
-            </a:fld>
-            <a:endParaRPr lang="en-US"/>
-          </a:p>
-        </p:txBody>
-      </p:sp>
-      <p:sp>
-        <p:nvSpPr>
-          <p:cNvPr id="7" name="Rectangle 3">
-            <a:extLst>
-              <a:ext uri="{FF2B5EF4-FFF2-40B4-BE49-F238E27FC236}">
-                <a16:creationId xmlns:a16="http://schemas.microsoft.com/office/drawing/2014/main" id="{63CC3267-8713-4997-9CAA-BBB2CF4B50A4}"/>
-              </a:ext>
-            </a:extLst>
-          </p:cNvPr>
-          <p:cNvSpPr>
-            <a:spLocks noGrp="1" noChangeArrowheads="1"/>
-          </p:cNvSpPr>
-          <p:nvPr>
-            <p:ph idx="1"/>
-          </p:nvPr>
-        </p:nvSpPr>
-        <p:spPr>
-          <a:xfrm>
-            <a:off x="1056735" y="1749245"/>
-            <a:ext cx="10689350" cy="4956050"/>
-          </a:xfrm>
-        </p:spPr>
-        <p:txBody>
-          <a:bodyPr>
-            <a:normAutofit/>
-          </a:bodyPr>
-          <a:lstStyle/>
-          <a:p>
-            <a:pPr eaLnBrk="1" hangingPunct="1">
-              <a:lnSpc>
-                <a:spcPct val="90000"/>
-              </a:lnSpc>
-              <a:defRPr/>
-            </a:pPr>
-            <a:r>
-              <a:rPr lang="en-US"/>
-              <a:t>Count all k-</a:t>
-            </a:r>
-            <a:r>
-              <a:rPr lang="en-US" err="1"/>
-              <a:t>mers</a:t>
-            </a:r>
-            <a:r>
-              <a:rPr lang="en-US"/>
-              <a:t> in the input reads, create hash count{</a:t>
-            </a:r>
-            <a:r>
-              <a:rPr lang="en-US" err="1"/>
-              <a:t>kmer</a:t>
-            </a:r>
-            <a:r>
-              <a:rPr lang="en-US"/>
-              <a:t>}</a:t>
-            </a:r>
-          </a:p>
-          <a:p>
-            <a:pPr>
-              <a:lnSpc>
-                <a:spcPct val="90000"/>
-              </a:lnSpc>
-              <a:defRPr/>
-            </a:pPr>
-            <a:r>
-              <a:rPr lang="en-US">
-                <a:solidFill>
-                  <a:schemeClr val="bg1"/>
-                </a:solidFill>
-              </a:rPr>
-              <a:t>For read</a:t>
-            </a:r>
-            <a:r>
-              <a:rPr lang="en-US">
-                <a:solidFill>
-                  <a:schemeClr val="bg1"/>
-                </a:solidFill>
-                <a:latin typeface="Courier New" panose="02070309020205020404" pitchFamily="49" charset="0"/>
-                <a:cs typeface="Courier New" panose="02070309020205020404" pitchFamily="49" charset="0"/>
-              </a:rPr>
-              <a:t> </a:t>
-            </a:r>
-            <a:br>
-              <a:rPr lang="en-US">
-                <a:solidFill>
-                  <a:schemeClr val="bg1"/>
-                </a:solidFill>
-                <a:latin typeface="Courier New" panose="02070309020205020404" pitchFamily="49" charset="0"/>
-                <a:cs typeface="Courier New" panose="02070309020205020404" pitchFamily="49" charset="0"/>
-              </a:rPr>
-            </a:br>
-            <a:r>
-              <a:rPr lang="en-US">
-                <a:solidFill>
-                  <a:schemeClr val="bg1"/>
-                </a:solidFill>
-                <a:latin typeface="Courier New" panose="02070309020205020404" pitchFamily="49" charset="0"/>
-                <a:cs typeface="Courier New" panose="02070309020205020404" pitchFamily="49" charset="0"/>
-              </a:rPr>
-              <a:t>        AGATGACAGATCAGATGCAT</a:t>
-            </a:r>
-            <a:br>
-              <a:rPr lang="en-US">
-                <a:solidFill>
-                  <a:schemeClr val="bg1"/>
-                </a:solidFill>
-                <a:latin typeface="Courier New" panose="02070309020205020404" pitchFamily="49" charset="0"/>
-                <a:cs typeface="Courier New" panose="02070309020205020404" pitchFamily="49" charset="0"/>
-              </a:rPr>
-            </a:br>
-            <a:r>
-              <a:rPr lang="en-US">
-                <a:solidFill>
-                  <a:schemeClr val="bg1"/>
-                </a:solidFill>
-                <a:latin typeface="Courier New" panose="02070309020205020404" pitchFamily="49" charset="0"/>
-                <a:cs typeface="Courier New" panose="02070309020205020404" pitchFamily="49" charset="0"/>
-              </a:rPr>
-              <a:t>       </a:t>
-            </a:r>
-            <a:r>
-              <a:rPr lang="en-US" b="1">
-                <a:solidFill>
-                  <a:schemeClr val="bg1"/>
-                </a:solidFill>
-                <a:latin typeface="Courier New" panose="02070309020205020404" pitchFamily="49" charset="0"/>
-                <a:cs typeface="Courier New" panose="02070309020205020404" pitchFamily="49" charset="0"/>
-              </a:rPr>
-              <a:t>G</a:t>
-            </a:r>
-            <a:r>
-              <a:rPr lang="en-US">
-                <a:solidFill>
-                  <a:schemeClr val="bg1"/>
-                </a:solidFill>
-                <a:latin typeface="Courier New" panose="02070309020205020404" pitchFamily="49" charset="0"/>
-                <a:cs typeface="Courier New" panose="02070309020205020404" pitchFamily="49" charset="0"/>
-              </a:rPr>
-              <a:t>AGATGA        ATGCAT</a:t>
-            </a:r>
-            <a:r>
-              <a:rPr lang="en-US" b="1">
-                <a:solidFill>
-                  <a:schemeClr val="bg1"/>
-                </a:solidFill>
-                <a:latin typeface="Courier New" panose="02070309020205020404" pitchFamily="49" charset="0"/>
-                <a:cs typeface="Courier New" panose="02070309020205020404" pitchFamily="49" charset="0"/>
-              </a:rPr>
-              <a:t>G</a:t>
-            </a:r>
-            <a:br>
-              <a:rPr lang="en-US">
-                <a:solidFill>
-                  <a:schemeClr val="bg1"/>
-                </a:solidFill>
-                <a:latin typeface="Courier New" panose="02070309020205020404" pitchFamily="49" charset="0"/>
-                <a:cs typeface="Courier New" panose="02070309020205020404" pitchFamily="49" charset="0"/>
-              </a:rPr>
-            </a:br>
-            <a:r>
-              <a:rPr lang="en-US">
-                <a:solidFill>
-                  <a:schemeClr val="bg1"/>
-                </a:solidFill>
-                <a:latin typeface="Courier New" panose="02070309020205020404" pitchFamily="49" charset="0"/>
-                <a:cs typeface="Courier New" panose="02070309020205020404" pitchFamily="49" charset="0"/>
-              </a:rPr>
-              <a:t>      </a:t>
-            </a:r>
-            <a:r>
-              <a:rPr lang="en-US" b="1">
-                <a:solidFill>
-                  <a:schemeClr val="bg1"/>
-                </a:solidFill>
-                <a:latin typeface="Courier New" panose="02070309020205020404" pitchFamily="49" charset="0"/>
-                <a:cs typeface="Courier New" panose="02070309020205020404" pitchFamily="49" charset="0"/>
-              </a:rPr>
-              <a:t>T</a:t>
-            </a:r>
-            <a:r>
-              <a:rPr lang="en-US">
-                <a:solidFill>
-                  <a:schemeClr val="bg1"/>
-                </a:solidFill>
-                <a:latin typeface="Courier New" panose="02070309020205020404" pitchFamily="49" charset="0"/>
-                <a:cs typeface="Courier New" panose="02070309020205020404" pitchFamily="49" charset="0"/>
-              </a:rPr>
-              <a:t>GAGATGA         TGCATG</a:t>
-            </a:r>
-            <a:r>
-              <a:rPr lang="en-US" b="1">
-                <a:solidFill>
-                  <a:schemeClr val="bg1"/>
-                </a:solidFill>
-                <a:latin typeface="Courier New" panose="02070309020205020404" pitchFamily="49" charset="0"/>
-                <a:cs typeface="Courier New" panose="02070309020205020404" pitchFamily="49" charset="0"/>
-              </a:rPr>
-              <a:t>C</a:t>
-            </a:r>
-            <a:br>
-              <a:rPr lang="en-US">
-                <a:solidFill>
-                  <a:schemeClr val="bg1"/>
-                </a:solidFill>
-                <a:latin typeface="Courier New" panose="02070309020205020404" pitchFamily="49" charset="0"/>
-                <a:cs typeface="Courier New" panose="02070309020205020404" pitchFamily="49" charset="0"/>
-              </a:rPr>
-            </a:br>
-            <a:r>
-              <a:rPr lang="en-US">
-                <a:solidFill>
-                  <a:schemeClr val="bg1"/>
-                </a:solidFill>
-                <a:latin typeface="Courier New" panose="02070309020205020404" pitchFamily="49" charset="0"/>
-                <a:cs typeface="Courier New" panose="02070309020205020404" pitchFamily="49" charset="0"/>
-              </a:rPr>
-              <a:t>      </a:t>
-            </a:r>
-            <a:r>
-              <a:rPr lang="en-US" b="1">
-                <a:solidFill>
-                  <a:schemeClr val="bg1"/>
-                </a:solidFill>
-                <a:latin typeface="Courier New" panose="02070309020205020404" pitchFamily="49" charset="0"/>
-                <a:cs typeface="Courier New" panose="02070309020205020404" pitchFamily="49" charset="0"/>
-              </a:rPr>
-              <a:t>A</a:t>
-            </a:r>
-            <a:r>
-              <a:rPr lang="en-US">
-                <a:solidFill>
-                  <a:schemeClr val="bg1"/>
-                </a:solidFill>
-                <a:latin typeface="Courier New" panose="02070309020205020404" pitchFamily="49" charset="0"/>
-                <a:cs typeface="Courier New" panose="02070309020205020404" pitchFamily="49" charset="0"/>
-              </a:rPr>
-              <a:t>GAGATGA          GCATGC</a:t>
-            </a:r>
-            <a:r>
-              <a:rPr lang="en-US" b="1">
-                <a:solidFill>
-                  <a:schemeClr val="bg1"/>
-                </a:solidFill>
-                <a:latin typeface="Courier New" panose="02070309020205020404" pitchFamily="49" charset="0"/>
-                <a:cs typeface="Courier New" panose="02070309020205020404" pitchFamily="49" charset="0"/>
-              </a:rPr>
-              <a:t>A</a:t>
-            </a:r>
-            <a:br>
-              <a:rPr lang="en-US">
-                <a:solidFill>
-                  <a:schemeClr val="bg1"/>
-                </a:solidFill>
-                <a:latin typeface="Courier New" panose="02070309020205020404" pitchFamily="49" charset="0"/>
-                <a:cs typeface="Courier New" panose="02070309020205020404" pitchFamily="49" charset="0"/>
-              </a:rPr>
-            </a:br>
-            <a:r>
-              <a:rPr lang="en-US">
-                <a:solidFill>
-                  <a:schemeClr val="bg1"/>
-                </a:solidFill>
-                <a:latin typeface="Courier New" panose="02070309020205020404" pitchFamily="49" charset="0"/>
-                <a:cs typeface="Courier New" panose="02070309020205020404" pitchFamily="49" charset="0"/>
-              </a:rPr>
-              <a:t>          </a:t>
-            </a:r>
-            <a:r>
-              <a:rPr lang="en-US">
-                <a:solidFill>
-                  <a:schemeClr val="bg1"/>
-                </a:solidFill>
-                <a:cs typeface="Courier New" panose="02070309020205020404" pitchFamily="49" charset="0"/>
-              </a:rPr>
-              <a:t>stop</a:t>
-            </a:r>
-            <a:r>
-              <a:rPr lang="en-US">
-                <a:solidFill>
-                  <a:schemeClr val="bg1"/>
-                </a:solidFill>
-                <a:latin typeface="Courier New" panose="02070309020205020404" pitchFamily="49" charset="0"/>
-                <a:cs typeface="Courier New" panose="02070309020205020404" pitchFamily="49" charset="0"/>
-              </a:rPr>
-              <a:t>           GCATGC</a:t>
-            </a:r>
-            <a:r>
-              <a:rPr lang="en-US" b="1">
-                <a:solidFill>
-                  <a:schemeClr val="bg1"/>
-                </a:solidFill>
-                <a:latin typeface="Courier New" panose="02070309020205020404" pitchFamily="49" charset="0"/>
-                <a:cs typeface="Courier New" panose="02070309020205020404" pitchFamily="49" charset="0"/>
-              </a:rPr>
-              <a:t>T</a:t>
-            </a:r>
-            <a:br>
-              <a:rPr lang="en-US">
-                <a:solidFill>
-                  <a:schemeClr val="bg1"/>
-                </a:solidFill>
-                <a:latin typeface="Courier New" panose="02070309020205020404" pitchFamily="49" charset="0"/>
-                <a:cs typeface="Courier New" panose="02070309020205020404" pitchFamily="49" charset="0"/>
-              </a:rPr>
-            </a:br>
-            <a:r>
-              <a:rPr lang="en-US">
-                <a:solidFill>
-                  <a:schemeClr val="bg1"/>
-                </a:solidFill>
-                <a:latin typeface="Courier New" panose="02070309020205020404" pitchFamily="49" charset="0"/>
-                <a:cs typeface="Courier New" panose="02070309020205020404" pitchFamily="49" charset="0"/>
-              </a:rPr>
-              <a:t>                         </a:t>
-            </a:r>
-            <a:r>
-              <a:rPr lang="en-US">
-                <a:solidFill>
-                  <a:schemeClr val="bg1"/>
-                </a:solidFill>
-                <a:cs typeface="Courier New" panose="02070309020205020404" pitchFamily="49" charset="0"/>
-              </a:rPr>
-              <a:t>stop</a:t>
-            </a:r>
-          </a:p>
-          <a:p>
-            <a:pPr>
-              <a:lnSpc>
-                <a:spcPct val="90000"/>
-              </a:lnSpc>
-              <a:defRPr/>
-            </a:pPr>
-            <a:r>
-              <a:rPr lang="en-US">
-                <a:solidFill>
-                  <a:schemeClr val="bg1"/>
-                </a:solidFill>
-                <a:cs typeface="Courier New" panose="02070309020205020404" pitchFamily="49" charset="0"/>
-              </a:rPr>
-              <a:t>Produce super-read </a:t>
-            </a:r>
-            <a:r>
-              <a:rPr lang="en-US" b="1">
-                <a:solidFill>
-                  <a:schemeClr val="bg1"/>
-                </a:solidFill>
-                <a:latin typeface="Courier New" panose="02070309020205020404" pitchFamily="49" charset="0"/>
-                <a:cs typeface="Courier New" panose="02070309020205020404" pitchFamily="49" charset="0"/>
-              </a:rPr>
-              <a:t>G</a:t>
-            </a:r>
-            <a:r>
-              <a:rPr lang="en-US">
-                <a:solidFill>
-                  <a:schemeClr val="bg1"/>
-                </a:solidFill>
-                <a:latin typeface="Courier New" panose="02070309020205020404" pitchFamily="49" charset="0"/>
-                <a:cs typeface="Courier New" panose="02070309020205020404" pitchFamily="49" charset="0"/>
-              </a:rPr>
-              <a:t>AGATGACAGATCAGATGCAT</a:t>
-            </a:r>
-            <a:r>
-              <a:rPr lang="en-US" b="1">
-                <a:solidFill>
-                  <a:schemeClr val="bg1"/>
-                </a:solidFill>
-                <a:latin typeface="Courier New" panose="02070309020205020404" pitchFamily="49" charset="0"/>
-                <a:cs typeface="Courier New" panose="02070309020205020404" pitchFamily="49" charset="0"/>
-              </a:rPr>
-              <a:t>GC</a:t>
-            </a:r>
-          </a:p>
-          <a:p>
-            <a:pPr>
-              <a:lnSpc>
-                <a:spcPct val="90000"/>
-              </a:lnSpc>
-              <a:defRPr/>
-            </a:pPr>
-            <a:r>
-              <a:rPr lang="en-US">
-                <a:solidFill>
-                  <a:schemeClr val="bg1"/>
-                </a:solidFill>
-                <a:cs typeface="Courier New" panose="02070309020205020404" pitchFamily="49" charset="0"/>
-              </a:rPr>
-              <a:t>Many short reads extend to the same super-read!!!</a:t>
-            </a:r>
-          </a:p>
-        </p:txBody>
-      </p:sp>
-    </p:spTree>
-    <p:extLst>
-      <p:ext uri="{BB962C8B-B14F-4D97-AF65-F5344CB8AC3E}">
-        <p14:creationId xmlns:p14="http://schemas.microsoft.com/office/powerpoint/2010/main" val="453548371"/>
       </p:ext>
     </p:extLst>
   </p:cSld>
@@ -32362,11 +33369,18 @@
               <a:defRPr/>
             </a:pPr>
             <a:r>
-              <a:rPr lang="en-US"/>
+              <a:rPr lang="en-US">
+                <a:solidFill>
+                  <a:schemeClr val="bg1"/>
+                </a:solidFill>
+              </a:rPr>
               <a:t>For read</a:t>
             </a:r>
             <a:r>
               <a:rPr lang="en-US">
+                <a:solidFill>
+                  <a:schemeClr val="bg1"/>
+                </a:solidFill>
                 <a:latin typeface="Courier New" panose="02070309020205020404" pitchFamily="49" charset="0"/>
                 <a:cs typeface="Courier New" panose="02070309020205020404" pitchFamily="49" charset="0"/>
               </a:rPr>
@@ -32374,12 +33388,18 @@
             </a:r>
             <a:br>
               <a:rPr lang="en-US">
+                <a:solidFill>
+                  <a:schemeClr val="bg1"/>
+                </a:solidFill>
                 <a:latin typeface="Courier New" panose="02070309020205020404" pitchFamily="49" charset="0"/>
                 <a:cs typeface="Courier New" panose="02070309020205020404" pitchFamily="49" charset="0"/>
               </a:rPr>
             </a:br>
             <a:r>
               <a:rPr lang="en-US">
+                <a:solidFill>
+                  <a:schemeClr val="bg1"/>
+                </a:solidFill>
                 <a:latin typeface="Courier New" panose="02070309020205020404" pitchFamily="49" charset="0"/>
                 <a:cs typeface="Courier New" panose="02070309020205020404" pitchFamily="49" charset="0"/>
               </a:rPr>
@@ -32387,12 +33407,18 @@
             </a:r>
             <a:br>
               <a:rPr lang="en-US">
+                <a:solidFill>
+                  <a:schemeClr val="bg1"/>
+                </a:solidFill>
                 <a:latin typeface="Courier New" panose="02070309020205020404" pitchFamily="49" charset="0"/>
                 <a:cs typeface="Courier New" panose="02070309020205020404" pitchFamily="49" charset="0"/>
               </a:rPr>
             </a:br>
             <a:r>
               <a:rPr lang="en-US">
+                <a:solidFill>
+                  <a:schemeClr val="bg1"/>
+                </a:solidFill>
                 <a:latin typeface="Courier New" panose="02070309020205020404" pitchFamily="49" charset="0"/>
                 <a:cs typeface="Courier New" panose="02070309020205020404" pitchFamily="49" charset="0"/>
               </a:rPr>
@@ -32672,7 +33698,7 @@
     </p:spTree>
     <p:extLst>
       <p:ext uri="{BB962C8B-B14F-4D97-AF65-F5344CB8AC3E}">
-        <p14:creationId xmlns:p14="http://schemas.microsoft.com/office/powerpoint/2010/main" val="3184623871"/>
+        <p14:creationId xmlns:p14="http://schemas.microsoft.com/office/powerpoint/2010/main" val="453548371"/>
       </p:ext>
     </p:extLst>
   </p:cSld>
@@ -32855,9 +33881,7 @@
             <a:r>
               <a:rPr lang="en-US" b="1">
                 <a:solidFill>
-                  <a:schemeClr val="accent3">
-                    <a:lumMod val="50000"/>
-                  </a:schemeClr>
+                  <a:schemeClr val="bg1"/>
                 </a:solidFill>
                 <a:latin typeface="Courier New" panose="02070309020205020404" pitchFamily="49" charset="0"/>
                 <a:cs typeface="Courier New" panose="02070309020205020404" pitchFamily="49" charset="0"/>
@@ -32866,6 +33890,9 @@
             </a:r>
             <a:r>
               <a:rPr lang="en-US">
+                <a:solidFill>
+                  <a:schemeClr val="bg1"/>
+                </a:solidFill>
                 <a:latin typeface="Courier New" panose="02070309020205020404" pitchFamily="49" charset="0"/>
                 <a:cs typeface="Courier New" panose="02070309020205020404" pitchFamily="49" charset="0"/>
               </a:rPr>
@@ -32874,9 +33901,7 @@
             <a:r>
               <a:rPr lang="en-US" b="1">
                 <a:solidFill>
-                  <a:schemeClr val="accent3">
-                    <a:lumMod val="50000"/>
-                  </a:schemeClr>
+                  <a:schemeClr val="bg1"/>
                 </a:solidFill>
                 <a:latin typeface="Courier New" panose="02070309020205020404" pitchFamily="49" charset="0"/>
                 <a:cs typeface="Courier New" panose="02070309020205020404" pitchFamily="49" charset="0"/>
@@ -32885,6 +33910,9 @@
             </a:r>
             <a:br>
               <a:rPr lang="en-US">
+                <a:solidFill>
+                  <a:schemeClr val="bg1"/>
+                </a:solidFill>
                 <a:latin typeface="Courier New" panose="02070309020205020404" pitchFamily="49" charset="0"/>
                 <a:cs typeface="Courier New" panose="02070309020205020404" pitchFamily="49" charset="0"/>
               </a:rPr>
@@ -33124,7 +34152,7 @@
     </p:spTree>
     <p:extLst>
       <p:ext uri="{BB962C8B-B14F-4D97-AF65-F5344CB8AC3E}">
-        <p14:creationId xmlns:p14="http://schemas.microsoft.com/office/powerpoint/2010/main" val="2267207498"/>
+        <p14:creationId xmlns:p14="http://schemas.microsoft.com/office/powerpoint/2010/main" val="3184623871"/>
       </p:ext>
     </p:extLst>
   </p:cSld>
@@ -33343,6 +34371,9 @@
             </a:br>
             <a:r>
               <a:rPr lang="en-US">
+                <a:solidFill>
+                  <a:schemeClr val="bg1"/>
+                </a:solidFill>
                 <a:latin typeface="Courier New" panose="02070309020205020404" pitchFamily="49" charset="0"/>
                 <a:cs typeface="Courier New" panose="02070309020205020404" pitchFamily="49" charset="0"/>
               </a:rPr>
@@ -33351,7 +34382,7 @@
             <a:r>
               <a:rPr lang="en-US" b="1">
                 <a:solidFill>
-                  <a:srgbClr val="C00000"/>
+                  <a:schemeClr val="bg1"/>
                 </a:solidFill>
                 <a:latin typeface="Courier New" panose="02070309020205020404" pitchFamily="49" charset="0"/>
                 <a:cs typeface="Courier New" panose="02070309020205020404" pitchFamily="49" charset="0"/>
@@ -33361,26 +34392,17 @@
             <a:r>
               <a:rPr lang="en-US">
                 <a:solidFill>
-                  <a:schemeClr val="tx1"/>
-                </a:solidFill>
-                <a:latin typeface="Courier New" panose="02070309020205020404" pitchFamily="49" charset="0"/>
-                <a:cs typeface="Courier New" panose="02070309020205020404" pitchFamily="49" charset="0"/>
-              </a:rPr>
-              <a:t>G</a:t>
-            </a:r>
-            <a:r>
-              <a:rPr lang="en-US">
-                <a:latin typeface="Courier New" panose="02070309020205020404" pitchFamily="49" charset="0"/>
-                <a:cs typeface="Courier New" panose="02070309020205020404" pitchFamily="49" charset="0"/>
-              </a:rPr>
-              <a:t>AGATGA         TGCATG</a:t>
+                  <a:schemeClr val="bg1"/>
+                </a:solidFill>
+                <a:latin typeface="Courier New" panose="02070309020205020404" pitchFamily="49" charset="0"/>
+                <a:cs typeface="Courier New" panose="02070309020205020404" pitchFamily="49" charset="0"/>
+              </a:rPr>
+              <a:t>GAGATGA         TGCATG</a:t>
             </a:r>
             <a:r>
               <a:rPr lang="en-US" b="1">
                 <a:solidFill>
-                  <a:schemeClr val="accent3">
-                    <a:lumMod val="50000"/>
-                  </a:schemeClr>
+                  <a:schemeClr val="bg1"/>
                 </a:solidFill>
                 <a:latin typeface="Courier New" panose="02070309020205020404" pitchFamily="49" charset="0"/>
                 <a:cs typeface="Courier New" panose="02070309020205020404" pitchFamily="49" charset="0"/>
@@ -33389,12 +34411,18 @@
             </a:r>
             <a:br>
               <a:rPr lang="en-US">
+                <a:solidFill>
+                  <a:schemeClr val="bg1"/>
+                </a:solidFill>
                 <a:latin typeface="Courier New" panose="02070309020205020404" pitchFamily="49" charset="0"/>
                 <a:cs typeface="Courier New" panose="02070309020205020404" pitchFamily="49" charset="0"/>
               </a:rPr>
             </a:br>
             <a:r>
               <a:rPr lang="en-US">
+                <a:solidFill>
+                  <a:schemeClr val="bg1"/>
+                </a:solidFill>
                 <a:latin typeface="Courier New" panose="02070309020205020404" pitchFamily="49" charset="0"/>
                 <a:cs typeface="Courier New" panose="02070309020205020404" pitchFamily="49" charset="0"/>
               </a:rPr>
@@ -33403,7 +34431,7 @@
             <a:r>
               <a:rPr lang="en-US" b="1">
                 <a:solidFill>
-                  <a:srgbClr val="C00000"/>
+                  <a:schemeClr val="bg1"/>
                 </a:solidFill>
                 <a:latin typeface="Courier New" panose="02070309020205020404" pitchFamily="49" charset="0"/>
                 <a:cs typeface="Courier New" panose="02070309020205020404" pitchFamily="49" charset="0"/>
@@ -33413,29 +34441,12 @@
             <a:r>
               <a:rPr lang="en-US">
                 <a:solidFill>
-                  <a:schemeClr val="tx1"/>
-                </a:solidFill>
-                <a:latin typeface="Courier New" panose="02070309020205020404" pitchFamily="49" charset="0"/>
-                <a:cs typeface="Courier New" panose="02070309020205020404" pitchFamily="49" charset="0"/>
-              </a:rPr>
-              <a:t>G</a:t>
-            </a:r>
-            <a:r>
-              <a:rPr lang="en-US">
-                <a:latin typeface="Courier New" panose="02070309020205020404" pitchFamily="49" charset="0"/>
-                <a:cs typeface="Courier New" panose="02070309020205020404" pitchFamily="49" charset="0"/>
-              </a:rPr>
-              <a:t>AGATGA          </a:t>
-            </a:r>
-            <a:r>
-              <a:rPr lang="en-US">
-                <a:solidFill>
                   <a:schemeClr val="bg1"/>
                 </a:solidFill>
                 <a:latin typeface="Courier New" panose="02070309020205020404" pitchFamily="49" charset="0"/>
                 <a:cs typeface="Courier New" panose="02070309020205020404" pitchFamily="49" charset="0"/>
               </a:rPr>
-              <a:t>GCATGC</a:t>
+              <a:t>GAGATGA          GCATGC</a:t>
             </a:r>
             <a:r>
               <a:rPr lang="en-US" b="1">
@@ -33458,6 +34469,9 @@
             </a:br>
             <a:r>
               <a:rPr lang="en-US">
+                <a:solidFill>
+                  <a:schemeClr val="bg1"/>
+                </a:solidFill>
                 <a:latin typeface="Courier New" panose="02070309020205020404" pitchFamily="49" charset="0"/>
                 <a:cs typeface="Courier New" panose="02070309020205020404" pitchFamily="49" charset="0"/>
               </a:rPr>
@@ -33465,26 +34479,22 @@
             </a:r>
             <a:r>
               <a:rPr lang="en-US">
+                <a:solidFill>
+                  <a:schemeClr val="bg1"/>
+                </a:solidFill>
                 <a:cs typeface="Courier New" panose="02070309020205020404" pitchFamily="49" charset="0"/>
               </a:rPr>
               <a:t>stop</a:t>
             </a:r>
             <a:r>
               <a:rPr lang="en-US">
-                <a:latin typeface="Courier New" panose="02070309020205020404" pitchFamily="49" charset="0"/>
-                <a:cs typeface="Courier New" panose="02070309020205020404" pitchFamily="49" charset="0"/>
-              </a:rPr>
-              <a:t>           </a:t>
-            </a:r>
-            <a:r>
-              <a:rPr lang="en-US">
                 <a:solidFill>
                   <a:schemeClr val="bg1"/>
                 </a:solidFill>
                 <a:latin typeface="Courier New" panose="02070309020205020404" pitchFamily="49" charset="0"/>
                 <a:cs typeface="Courier New" panose="02070309020205020404" pitchFamily="49" charset="0"/>
               </a:rPr>
-              <a:t>GCATGC</a:t>
+              <a:t>           GCATGC</a:t>
             </a:r>
             <a:r>
               <a:rPr lang="en-US" b="1">
@@ -33498,12 +34508,18 @@
             </a:r>
             <a:br>
               <a:rPr lang="en-US">
+                <a:solidFill>
+                  <a:schemeClr val="bg1"/>
+                </a:solidFill>
                 <a:latin typeface="Courier New" panose="02070309020205020404" pitchFamily="49" charset="0"/>
                 <a:cs typeface="Courier New" panose="02070309020205020404" pitchFamily="49" charset="0"/>
               </a:rPr>
             </a:br>
             <a:r>
               <a:rPr lang="en-US">
+                <a:solidFill>
+                  <a:schemeClr val="bg1"/>
+                </a:solidFill>
                 <a:latin typeface="Courier New" panose="02070309020205020404" pitchFamily="49" charset="0"/>
                 <a:cs typeface="Courier New" panose="02070309020205020404" pitchFamily="49" charset="0"/>
               </a:rPr>
@@ -33588,7 +34604,7 @@
     </p:spTree>
     <p:extLst>
       <p:ext uri="{BB962C8B-B14F-4D97-AF65-F5344CB8AC3E}">
-        <p14:creationId xmlns:p14="http://schemas.microsoft.com/office/powerpoint/2010/main" val="3998872157"/>
+        <p14:creationId xmlns:p14="http://schemas.microsoft.com/office/powerpoint/2010/main" val="2267207498"/>
       </p:ext>
     </p:extLst>
   </p:cSld>
@@ -33889,12 +34905,22 @@
                 <a:latin typeface="Courier New" panose="02070309020205020404" pitchFamily="49" charset="0"/>
                 <a:cs typeface="Courier New" panose="02070309020205020404" pitchFamily="49" charset="0"/>
               </a:rPr>
-              <a:t>AGATGA          GCATGC</a:t>
+              <a:t>AGATGA          </a:t>
+            </a:r>
+            <a:r>
+              <a:rPr lang="en-US">
+                <a:solidFill>
+                  <a:schemeClr val="bg1"/>
+                </a:solidFill>
+                <a:latin typeface="Courier New" panose="02070309020205020404" pitchFamily="49" charset="0"/>
+                <a:cs typeface="Courier New" panose="02070309020205020404" pitchFamily="49" charset="0"/>
+              </a:rPr>
+              <a:t>GCATGC</a:t>
             </a:r>
             <a:r>
               <a:rPr lang="en-US" b="1">
                 <a:solidFill>
-                  <a:srgbClr val="C00000"/>
+                  <a:schemeClr val="bg1"/>
                 </a:solidFill>
                 <a:latin typeface="Courier New" panose="02070309020205020404" pitchFamily="49" charset="0"/>
                 <a:cs typeface="Courier New" panose="02070309020205020404" pitchFamily="49" charset="0"/>
@@ -33903,6 +34929,9 @@
             </a:r>
             <a:br>
               <a:rPr lang="en-US">
+                <a:solidFill>
+                  <a:schemeClr val="bg1"/>
+                </a:solidFill>
                 <a:latin typeface="Courier New" panose="02070309020205020404" pitchFamily="49" charset="0"/>
                 <a:cs typeface="Courier New" panose="02070309020205020404" pitchFamily="49" charset="0"/>
               </a:rPr>
@@ -33925,12 +34954,22 @@
                 <a:latin typeface="Courier New" panose="02070309020205020404" pitchFamily="49" charset="0"/>
                 <a:cs typeface="Courier New" panose="02070309020205020404" pitchFamily="49" charset="0"/>
               </a:rPr>
-              <a:t>           GCATGC</a:t>
+              <a:t>           </a:t>
+            </a:r>
+            <a:r>
+              <a:rPr lang="en-US">
+                <a:solidFill>
+                  <a:schemeClr val="bg1"/>
+                </a:solidFill>
+                <a:latin typeface="Courier New" panose="02070309020205020404" pitchFamily="49" charset="0"/>
+                <a:cs typeface="Courier New" panose="02070309020205020404" pitchFamily="49" charset="0"/>
+              </a:rPr>
+              <a:t>GCATGC</a:t>
             </a:r>
             <a:r>
               <a:rPr lang="en-US" b="1">
                 <a:solidFill>
-                  <a:srgbClr val="C00000"/>
+                  <a:schemeClr val="bg1"/>
                 </a:solidFill>
                 <a:latin typeface="Courier New" panose="02070309020205020404" pitchFamily="49" charset="0"/>
                 <a:cs typeface="Courier New" panose="02070309020205020404" pitchFamily="49" charset="0"/>
@@ -33952,6 +34991,9 @@
             </a:r>
             <a:r>
               <a:rPr lang="en-US">
+                <a:solidFill>
+                  <a:schemeClr val="bg1"/>
+                </a:solidFill>
                 <a:cs typeface="Courier New" panose="02070309020205020404" pitchFamily="49" charset="0"/>
               </a:rPr>
               <a:t>stop</a:t>
@@ -33966,6 +35008,9 @@
             </a:pPr>
             <a:r>
               <a:rPr lang="en-US">
+                <a:solidFill>
+                  <a:schemeClr val="bg1"/>
+                </a:solidFill>
                 <a:cs typeface="Courier New" panose="02070309020205020404" pitchFamily="49" charset="0"/>
               </a:rPr>
               <a:t>Produce super-read </a:t>
@@ -33973,9 +35018,7 @@
             <a:r>
               <a:rPr lang="en-US" b="1">
                 <a:solidFill>
-                  <a:schemeClr val="accent3">
-                    <a:lumMod val="50000"/>
-                  </a:schemeClr>
+                  <a:schemeClr val="bg1"/>
                 </a:solidFill>
                 <a:latin typeface="Courier New" panose="02070309020205020404" pitchFamily="49" charset="0"/>
                 <a:cs typeface="Courier New" panose="02070309020205020404" pitchFamily="49" charset="0"/>
@@ -33984,6 +35027,9 @@
             </a:r>
             <a:r>
               <a:rPr lang="en-US">
+                <a:solidFill>
+                  <a:schemeClr val="bg1"/>
+                </a:solidFill>
                 <a:latin typeface="Courier New" panose="02070309020205020404" pitchFamily="49" charset="0"/>
                 <a:cs typeface="Courier New" panose="02070309020205020404" pitchFamily="49" charset="0"/>
               </a:rPr>
@@ -33992,9 +35038,7 @@
             <a:r>
               <a:rPr lang="en-US" b="1">
                 <a:solidFill>
-                  <a:schemeClr val="accent3">
-                    <a:lumMod val="50000"/>
-                  </a:schemeClr>
+                  <a:schemeClr val="bg1"/>
                 </a:solidFill>
                 <a:latin typeface="Courier New" panose="02070309020205020404" pitchFamily="49" charset="0"/>
                 <a:cs typeface="Courier New" panose="02070309020205020404" pitchFamily="49" charset="0"/>
@@ -34024,7 +35068,7 @@
     </p:spTree>
     <p:extLst>
       <p:ext uri="{BB962C8B-B14F-4D97-AF65-F5344CB8AC3E}">
-        <p14:creationId xmlns:p14="http://schemas.microsoft.com/office/powerpoint/2010/main" val="217046075"/>
+        <p14:creationId xmlns:p14="http://schemas.microsoft.com/office/powerpoint/2010/main" val="3998872157"/>
       </p:ext>
     </p:extLst>
   </p:cSld>
@@ -34618,6 +35662,442 @@
             <a:r>
               <a:rPr lang="en-US">
                 <a:solidFill>
+                  <a:schemeClr val="bg1"/>
+                </a:solidFill>
+                <a:cs typeface="Courier New" panose="02070309020205020404" pitchFamily="49" charset="0"/>
+              </a:rPr>
+              <a:t>Many short reads extend to the same super-read!!!</a:t>
+            </a:r>
+          </a:p>
+        </p:txBody>
+      </p:sp>
+    </p:spTree>
+    <p:extLst>
+      <p:ext uri="{BB962C8B-B14F-4D97-AF65-F5344CB8AC3E}">
+        <p14:creationId xmlns:p14="http://schemas.microsoft.com/office/powerpoint/2010/main" val="217046075"/>
+      </p:ext>
+    </p:extLst>
+  </p:cSld>
+  <p:clrMapOvr>
+    <a:masterClrMapping/>
+  </p:clrMapOvr>
+</p:sld>
+</file>
+
+<file path=ppt/slides/slide61.xml><?xml version="1.0" encoding="utf-8"?>
+<p:sld xmlns:a="http://schemas.openxmlformats.org/drawingml/2006/main" xmlns:r="http://schemas.openxmlformats.org/officeDocument/2006/relationships" xmlns:p="http://schemas.openxmlformats.org/presentationml/2006/main">
+  <p:cSld>
+    <p:spTree>
+      <p:nvGrpSpPr>
+        <p:cNvPr id="1" name=""/>
+        <p:cNvGrpSpPr/>
+        <p:nvPr/>
+      </p:nvGrpSpPr>
+      <p:grpSpPr>
+        <a:xfrm>
+          <a:off x="0" y="0"/>
+          <a:ext cx="0" cy="0"/>
+          <a:chOff x="0" y="0"/>
+          <a:chExt cx="0" cy="0"/>
+        </a:xfrm>
+      </p:grpSpPr>
+      <p:sp>
+        <p:nvSpPr>
+          <p:cNvPr id="2" name="Title 1"/>
+          <p:cNvSpPr>
+            <a:spLocks noGrp="1"/>
+          </p:cNvSpPr>
+          <p:nvPr>
+            <p:ph type="title"/>
+          </p:nvPr>
+        </p:nvSpPr>
+        <p:spPr/>
+        <p:txBody>
+          <a:bodyPr>
+            <a:normAutofit fontScale="90000"/>
+          </a:bodyPr>
+          <a:lstStyle/>
+          <a:p>
+            <a:r>
+              <a:rPr lang="en-US"/>
+              <a:t>Super-reads</a:t>
+            </a:r>
+          </a:p>
+        </p:txBody>
+      </p:sp>
+      <p:sp>
+        <p:nvSpPr>
+          <p:cNvPr id="4" name="Slide Number Placeholder 3">
+            <a:extLst>
+              <a:ext uri="{FF2B5EF4-FFF2-40B4-BE49-F238E27FC236}">
+                <a16:creationId xmlns:a16="http://schemas.microsoft.com/office/drawing/2014/main" id="{BCA34BE0-BD77-4B6B-9720-35840D9D8317}"/>
+              </a:ext>
+            </a:extLst>
+          </p:cNvPr>
+          <p:cNvSpPr>
+            <a:spLocks noGrp="1"/>
+          </p:cNvSpPr>
+          <p:nvPr>
+            <p:ph type="sldNum" sz="quarter" idx="12"/>
+          </p:nvPr>
+        </p:nvSpPr>
+        <p:spPr/>
+        <p:txBody>
+          <a:bodyPr/>
+          <a:lstStyle/>
+          <a:p>
+            <a:fld id="{B82CCC60-E8CD-4174-8B1A-7DF615B22EEF}" type="slidenum">
+              <a:rPr lang="en-US" smtClean="0"/>
+              <a:pPr/>
+              <a:t>61</a:t>
+            </a:fld>
+            <a:endParaRPr lang="en-US"/>
+          </a:p>
+        </p:txBody>
+      </p:sp>
+      <p:sp>
+        <p:nvSpPr>
+          <p:cNvPr id="7" name="Rectangle 3">
+            <a:extLst>
+              <a:ext uri="{FF2B5EF4-FFF2-40B4-BE49-F238E27FC236}">
+                <a16:creationId xmlns:a16="http://schemas.microsoft.com/office/drawing/2014/main" id="{63CC3267-8713-4997-9CAA-BBB2CF4B50A4}"/>
+              </a:ext>
+            </a:extLst>
+          </p:cNvPr>
+          <p:cNvSpPr>
+            <a:spLocks noGrp="1" noChangeArrowheads="1"/>
+          </p:cNvSpPr>
+          <p:nvPr>
+            <p:ph idx="1"/>
+          </p:nvPr>
+        </p:nvSpPr>
+        <p:spPr>
+          <a:xfrm>
+            <a:off x="1056735" y="1749245"/>
+            <a:ext cx="10689350" cy="4956050"/>
+          </a:xfrm>
+        </p:spPr>
+        <p:txBody>
+          <a:bodyPr>
+            <a:normAutofit/>
+          </a:bodyPr>
+          <a:lstStyle/>
+          <a:p>
+            <a:pPr eaLnBrk="1" hangingPunct="1">
+              <a:lnSpc>
+                <a:spcPct val="90000"/>
+              </a:lnSpc>
+              <a:defRPr/>
+            </a:pPr>
+            <a:r>
+              <a:rPr lang="en-US"/>
+              <a:t>Count all k-</a:t>
+            </a:r>
+            <a:r>
+              <a:rPr lang="en-US" err="1"/>
+              <a:t>mers</a:t>
+            </a:r>
+            <a:r>
+              <a:rPr lang="en-US"/>
+              <a:t> in the input reads, create hash count{</a:t>
+            </a:r>
+            <a:r>
+              <a:rPr lang="en-US" err="1"/>
+              <a:t>kmer</a:t>
+            </a:r>
+            <a:r>
+              <a:rPr lang="en-US"/>
+              <a:t>}</a:t>
+            </a:r>
+          </a:p>
+          <a:p>
+            <a:pPr>
+              <a:lnSpc>
+                <a:spcPct val="90000"/>
+              </a:lnSpc>
+              <a:defRPr/>
+            </a:pPr>
+            <a:r>
+              <a:rPr lang="en-US"/>
+              <a:t>For read</a:t>
+            </a:r>
+            <a:r>
+              <a:rPr lang="en-US">
+                <a:latin typeface="Courier New" panose="02070309020205020404" pitchFamily="49" charset="0"/>
+                <a:cs typeface="Courier New" panose="02070309020205020404" pitchFamily="49" charset="0"/>
+              </a:rPr>
+              <a:t> </a:t>
+            </a:r>
+            <a:br>
+              <a:rPr lang="en-US">
+                <a:latin typeface="Courier New" panose="02070309020205020404" pitchFamily="49" charset="0"/>
+                <a:cs typeface="Courier New" panose="02070309020205020404" pitchFamily="49" charset="0"/>
+              </a:rPr>
+            </a:br>
+            <a:r>
+              <a:rPr lang="en-US">
+                <a:latin typeface="Courier New" panose="02070309020205020404" pitchFamily="49" charset="0"/>
+                <a:cs typeface="Courier New" panose="02070309020205020404" pitchFamily="49" charset="0"/>
+              </a:rPr>
+              <a:t>        AGATGACAGATCAGATGCAT</a:t>
+            </a:r>
+            <a:br>
+              <a:rPr lang="en-US">
+                <a:latin typeface="Courier New" panose="02070309020205020404" pitchFamily="49" charset="0"/>
+                <a:cs typeface="Courier New" panose="02070309020205020404" pitchFamily="49" charset="0"/>
+              </a:rPr>
+            </a:br>
+            <a:r>
+              <a:rPr lang="en-US">
+                <a:latin typeface="Courier New" panose="02070309020205020404" pitchFamily="49" charset="0"/>
+                <a:cs typeface="Courier New" panose="02070309020205020404" pitchFamily="49" charset="0"/>
+              </a:rPr>
+              <a:t>       </a:t>
+            </a:r>
+            <a:r>
+              <a:rPr lang="en-US" b="1">
+                <a:solidFill>
+                  <a:schemeClr val="accent3">
+                    <a:lumMod val="50000"/>
+                  </a:schemeClr>
+                </a:solidFill>
+                <a:latin typeface="Courier New" panose="02070309020205020404" pitchFamily="49" charset="0"/>
+                <a:cs typeface="Courier New" panose="02070309020205020404" pitchFamily="49" charset="0"/>
+              </a:rPr>
+              <a:t>G</a:t>
+            </a:r>
+            <a:r>
+              <a:rPr lang="en-US">
+                <a:latin typeface="Courier New" panose="02070309020205020404" pitchFamily="49" charset="0"/>
+                <a:cs typeface="Courier New" panose="02070309020205020404" pitchFamily="49" charset="0"/>
+              </a:rPr>
+              <a:t>AGATGA        ATGCAT</a:t>
+            </a:r>
+            <a:r>
+              <a:rPr lang="en-US" b="1">
+                <a:solidFill>
+                  <a:schemeClr val="accent3">
+                    <a:lumMod val="50000"/>
+                  </a:schemeClr>
+                </a:solidFill>
+                <a:latin typeface="Courier New" panose="02070309020205020404" pitchFamily="49" charset="0"/>
+                <a:cs typeface="Courier New" panose="02070309020205020404" pitchFamily="49" charset="0"/>
+              </a:rPr>
+              <a:t>G</a:t>
+            </a:r>
+            <a:br>
+              <a:rPr lang="en-US">
+                <a:latin typeface="Courier New" panose="02070309020205020404" pitchFamily="49" charset="0"/>
+                <a:cs typeface="Courier New" panose="02070309020205020404" pitchFamily="49" charset="0"/>
+              </a:rPr>
+            </a:br>
+            <a:r>
+              <a:rPr lang="en-US">
+                <a:latin typeface="Courier New" panose="02070309020205020404" pitchFamily="49" charset="0"/>
+                <a:cs typeface="Courier New" panose="02070309020205020404" pitchFamily="49" charset="0"/>
+              </a:rPr>
+              <a:t>      </a:t>
+            </a:r>
+            <a:r>
+              <a:rPr lang="en-US" b="1">
+                <a:solidFill>
+                  <a:srgbClr val="C00000"/>
+                </a:solidFill>
+                <a:latin typeface="Courier New" panose="02070309020205020404" pitchFamily="49" charset="0"/>
+                <a:cs typeface="Courier New" panose="02070309020205020404" pitchFamily="49" charset="0"/>
+              </a:rPr>
+              <a:t>T</a:t>
+            </a:r>
+            <a:r>
+              <a:rPr lang="en-US">
+                <a:solidFill>
+                  <a:schemeClr val="tx1"/>
+                </a:solidFill>
+                <a:latin typeface="Courier New" panose="02070309020205020404" pitchFamily="49" charset="0"/>
+                <a:cs typeface="Courier New" panose="02070309020205020404" pitchFamily="49" charset="0"/>
+              </a:rPr>
+              <a:t>G</a:t>
+            </a:r>
+            <a:r>
+              <a:rPr lang="en-US">
+                <a:latin typeface="Courier New" panose="02070309020205020404" pitchFamily="49" charset="0"/>
+                <a:cs typeface="Courier New" panose="02070309020205020404" pitchFamily="49" charset="0"/>
+              </a:rPr>
+              <a:t>AGATGA         TGCATG</a:t>
+            </a:r>
+            <a:r>
+              <a:rPr lang="en-US" b="1">
+                <a:solidFill>
+                  <a:schemeClr val="accent3">
+                    <a:lumMod val="50000"/>
+                  </a:schemeClr>
+                </a:solidFill>
+                <a:latin typeface="Courier New" panose="02070309020205020404" pitchFamily="49" charset="0"/>
+                <a:cs typeface="Courier New" panose="02070309020205020404" pitchFamily="49" charset="0"/>
+              </a:rPr>
+              <a:t>C</a:t>
+            </a:r>
+            <a:br>
+              <a:rPr lang="en-US">
+                <a:latin typeface="Courier New" panose="02070309020205020404" pitchFamily="49" charset="0"/>
+                <a:cs typeface="Courier New" panose="02070309020205020404" pitchFamily="49" charset="0"/>
+              </a:rPr>
+            </a:br>
+            <a:r>
+              <a:rPr lang="en-US">
+                <a:latin typeface="Courier New" panose="02070309020205020404" pitchFamily="49" charset="0"/>
+                <a:cs typeface="Courier New" panose="02070309020205020404" pitchFamily="49" charset="0"/>
+              </a:rPr>
+              <a:t>      </a:t>
+            </a:r>
+            <a:r>
+              <a:rPr lang="en-US" b="1">
+                <a:solidFill>
+                  <a:srgbClr val="C00000"/>
+                </a:solidFill>
+                <a:latin typeface="Courier New" panose="02070309020205020404" pitchFamily="49" charset="0"/>
+                <a:cs typeface="Courier New" panose="02070309020205020404" pitchFamily="49" charset="0"/>
+              </a:rPr>
+              <a:t>A</a:t>
+            </a:r>
+            <a:r>
+              <a:rPr lang="en-US">
+                <a:solidFill>
+                  <a:schemeClr val="tx1"/>
+                </a:solidFill>
+                <a:latin typeface="Courier New" panose="02070309020205020404" pitchFamily="49" charset="0"/>
+                <a:cs typeface="Courier New" panose="02070309020205020404" pitchFamily="49" charset="0"/>
+              </a:rPr>
+              <a:t>G</a:t>
+            </a:r>
+            <a:r>
+              <a:rPr lang="en-US">
+                <a:latin typeface="Courier New" panose="02070309020205020404" pitchFamily="49" charset="0"/>
+                <a:cs typeface="Courier New" panose="02070309020205020404" pitchFamily="49" charset="0"/>
+              </a:rPr>
+              <a:t>AGATGA          GCATGC</a:t>
+            </a:r>
+            <a:r>
+              <a:rPr lang="en-US" b="1">
+                <a:solidFill>
+                  <a:srgbClr val="C00000"/>
+                </a:solidFill>
+                <a:latin typeface="Courier New" panose="02070309020205020404" pitchFamily="49" charset="0"/>
+                <a:cs typeface="Courier New" panose="02070309020205020404" pitchFamily="49" charset="0"/>
+              </a:rPr>
+              <a:t>A</a:t>
+            </a:r>
+            <a:br>
+              <a:rPr lang="en-US">
+                <a:latin typeface="Courier New" panose="02070309020205020404" pitchFamily="49" charset="0"/>
+                <a:cs typeface="Courier New" panose="02070309020205020404" pitchFamily="49" charset="0"/>
+              </a:rPr>
+            </a:br>
+            <a:r>
+              <a:rPr lang="en-US">
+                <a:latin typeface="Courier New" panose="02070309020205020404" pitchFamily="49" charset="0"/>
+                <a:cs typeface="Courier New" panose="02070309020205020404" pitchFamily="49" charset="0"/>
+              </a:rPr>
+              <a:t>          </a:t>
+            </a:r>
+            <a:r>
+              <a:rPr lang="en-US">
+                <a:cs typeface="Courier New" panose="02070309020205020404" pitchFamily="49" charset="0"/>
+              </a:rPr>
+              <a:t>stop</a:t>
+            </a:r>
+            <a:r>
+              <a:rPr lang="en-US">
+                <a:latin typeface="Courier New" panose="02070309020205020404" pitchFamily="49" charset="0"/>
+                <a:cs typeface="Courier New" panose="02070309020205020404" pitchFamily="49" charset="0"/>
+              </a:rPr>
+              <a:t>           GCATGC</a:t>
+            </a:r>
+            <a:r>
+              <a:rPr lang="en-US" b="1">
+                <a:solidFill>
+                  <a:srgbClr val="C00000"/>
+                </a:solidFill>
+                <a:latin typeface="Courier New" panose="02070309020205020404" pitchFamily="49" charset="0"/>
+                <a:cs typeface="Courier New" panose="02070309020205020404" pitchFamily="49" charset="0"/>
+              </a:rPr>
+              <a:t>T</a:t>
+            </a:r>
+            <a:br>
+              <a:rPr lang="en-US">
+                <a:latin typeface="Courier New" panose="02070309020205020404" pitchFamily="49" charset="0"/>
+                <a:cs typeface="Courier New" panose="02070309020205020404" pitchFamily="49" charset="0"/>
+              </a:rPr>
+            </a:br>
+            <a:r>
+              <a:rPr lang="en-US">
+                <a:latin typeface="Courier New" panose="02070309020205020404" pitchFamily="49" charset="0"/>
+                <a:cs typeface="Courier New" panose="02070309020205020404" pitchFamily="49" charset="0"/>
+              </a:rPr>
+              <a:t>                         </a:t>
+            </a:r>
+            <a:r>
+              <a:rPr lang="en-US">
+                <a:cs typeface="Courier New" panose="02070309020205020404" pitchFamily="49" charset="0"/>
+              </a:rPr>
+              <a:t>stop</a:t>
+            </a:r>
+          </a:p>
+          <a:p>
+            <a:pPr>
+              <a:lnSpc>
+                <a:spcPct val="90000"/>
+              </a:lnSpc>
+              <a:defRPr/>
+            </a:pPr>
+            <a:r>
+              <a:rPr lang="en-US">
+                <a:cs typeface="Courier New" panose="02070309020205020404" pitchFamily="49" charset="0"/>
+              </a:rPr>
+              <a:t>Produce super-read </a:t>
+            </a:r>
+            <a:r>
+              <a:rPr lang="en-US" b="1">
+                <a:solidFill>
+                  <a:schemeClr val="accent3">
+                    <a:lumMod val="50000"/>
+                  </a:schemeClr>
+                </a:solidFill>
+                <a:latin typeface="Courier New" panose="02070309020205020404" pitchFamily="49" charset="0"/>
+                <a:cs typeface="Courier New" panose="02070309020205020404" pitchFamily="49" charset="0"/>
+              </a:rPr>
+              <a:t>G</a:t>
+            </a:r>
+            <a:r>
+              <a:rPr lang="en-US">
+                <a:latin typeface="Courier New" panose="02070309020205020404" pitchFamily="49" charset="0"/>
+                <a:cs typeface="Courier New" panose="02070309020205020404" pitchFamily="49" charset="0"/>
+              </a:rPr>
+              <a:t>AGATGACAGATCAGATGCAT</a:t>
+            </a:r>
+            <a:r>
+              <a:rPr lang="en-US" b="1">
+                <a:solidFill>
+                  <a:schemeClr val="accent3">
+                    <a:lumMod val="50000"/>
+                  </a:schemeClr>
+                </a:solidFill>
+                <a:latin typeface="Courier New" panose="02070309020205020404" pitchFamily="49" charset="0"/>
+                <a:cs typeface="Courier New" panose="02070309020205020404" pitchFamily="49" charset="0"/>
+              </a:rPr>
+              <a:t>GC</a:t>
+            </a:r>
+          </a:p>
+          <a:p>
+            <a:pPr>
+              <a:lnSpc>
+                <a:spcPct val="90000"/>
+              </a:lnSpc>
+              <a:defRPr/>
+            </a:pPr>
+            <a:r>
+              <a:rPr lang="en-US">
+                <a:solidFill>
                   <a:schemeClr val="tx1"/>
                 </a:solidFill>
                 <a:cs typeface="Courier New" panose="02070309020205020404" pitchFamily="49" charset="0"/>
@@ -34640,7 +36120,7 @@
 </p:sld>
 </file>
 
-<file path=ppt/slides/slide61.xml><?xml version="1.0" encoding="utf-8"?>
+<file path=ppt/slides/slide62.xml><?xml version="1.0" encoding="utf-8"?>
 <p:sld xmlns:a="http://schemas.openxmlformats.org/drawingml/2006/main" xmlns:r="http://schemas.openxmlformats.org/officeDocument/2006/relationships" xmlns:p="http://schemas.openxmlformats.org/presentationml/2006/main">
   <p:cSld>
     <p:spTree>
@@ -35081,7 +36561,7 @@
             <a:fld id="{B82CCC60-E8CD-4174-8B1A-7DF615B22EEF}" type="slidenum">
               <a:rPr lang="en-US" smtClean="0"/>
               <a:pPr/>
-              <a:t>61</a:t>
+              <a:t>62</a:t>
             </a:fld>
             <a:endParaRPr lang="en-US"/>
           </a:p>
@@ -35100,7 +36580,7 @@
 </p:sld>
 </file>
 
-<file path=ppt/slides/slide62.xml><?xml version="1.0" encoding="utf-8"?>
+<file path=ppt/slides/slide63.xml><?xml version="1.0" encoding="utf-8"?>
 <p:sld xmlns:a="http://schemas.openxmlformats.org/drawingml/2006/main" xmlns:r="http://schemas.openxmlformats.org/officeDocument/2006/relationships" xmlns:p="http://schemas.openxmlformats.org/presentationml/2006/main">
   <p:cSld>
     <p:spTree>
@@ -35305,7 +36785,7 @@
             <a:fld id="{B82CCC60-E8CD-4174-8B1A-7DF615B22EEF}" type="slidenum">
               <a:rPr lang="en-US" smtClean="0"/>
               <a:pPr/>
-              <a:t>62</a:t>
+              <a:t>63</a:t>
             </a:fld>
             <a:endParaRPr lang="en-US"/>
           </a:p>
@@ -35512,7 +36992,7 @@
 </p:sld>
 </file>
 
-<file path=ppt/slides/slide63.xml><?xml version="1.0" encoding="utf-8"?>
+<file path=ppt/slides/slide64.xml><?xml version="1.0" encoding="utf-8"?>
 <p:sld xmlns:a="http://schemas.openxmlformats.org/drawingml/2006/main" xmlns:r="http://schemas.openxmlformats.org/officeDocument/2006/relationships" xmlns:p="http://schemas.openxmlformats.org/presentationml/2006/main">
   <p:cSld>
     <p:spTree>
@@ -35734,7 +37214,7 @@
             <a:fld id="{B82CCC60-E8CD-4174-8B1A-7DF615B22EEF}" type="slidenum">
               <a:rPr lang="en-US" smtClean="0"/>
               <a:pPr/>
-              <a:t>63</a:t>
+              <a:t>64</a:t>
             </a:fld>
             <a:endParaRPr lang="en-US"/>
           </a:p>
@@ -35941,7 +37421,7 @@
 </p:sld>
 </file>
 
-<file path=ppt/slides/slide64.xml><?xml version="1.0" encoding="utf-8"?>
+<file path=ppt/slides/slide65.xml><?xml version="1.0" encoding="utf-8"?>
 <p:sld xmlns:a="http://schemas.openxmlformats.org/drawingml/2006/main" xmlns:r="http://schemas.openxmlformats.org/officeDocument/2006/relationships" xmlns:p="http://schemas.openxmlformats.org/presentationml/2006/main">
   <p:cSld>
     <p:spTree>
@@ -36209,7 +37689,7 @@
             <a:fld id="{B82CCC60-E8CD-4174-8B1A-7DF615B22EEF}" type="slidenum">
               <a:rPr lang="en-US" smtClean="0"/>
               <a:pPr/>
-              <a:t>64</a:t>
+              <a:t>65</a:t>
             </a:fld>
             <a:endParaRPr lang="en-US"/>
           </a:p>
@@ -36416,7 +37896,7 @@
 </p:sld>
 </file>
 
-<file path=ppt/slides/slide65.xml><?xml version="1.0" encoding="utf-8"?>
+<file path=ppt/slides/slide66.xml><?xml version="1.0" encoding="utf-8"?>
 <p:sld xmlns:a="http://schemas.openxmlformats.org/drawingml/2006/main" xmlns:r="http://schemas.openxmlformats.org/officeDocument/2006/relationships" xmlns:p="http://schemas.openxmlformats.org/presentationml/2006/main">
   <p:cSld>
     <p:spTree>
@@ -36704,7 +38184,7 @@
             <a:fld id="{B82CCC60-E8CD-4174-8B1A-7DF615B22EEF}" type="slidenum">
               <a:rPr lang="en-US" smtClean="0"/>
               <a:pPr/>
-              <a:t>65</a:t>
+              <a:t>66</a:t>
             </a:fld>
             <a:endParaRPr lang="en-US"/>
           </a:p>
@@ -36911,7 +38391,7 @@
 </p:sld>
 </file>
 
-<file path=ppt/slides/slide66.xml><?xml version="1.0" encoding="utf-8"?>
+<file path=ppt/slides/slide67.xml><?xml version="1.0" encoding="utf-8"?>
 <p:sld xmlns:a="http://schemas.openxmlformats.org/drawingml/2006/main" xmlns:r="http://schemas.openxmlformats.org/officeDocument/2006/relationships" xmlns:p="http://schemas.openxmlformats.org/presentationml/2006/main">
   <p:cSld>
     <p:spTree>
@@ -37248,7 +38728,7 @@
             <a:fld id="{B82CCC60-E8CD-4174-8B1A-7DF615B22EEF}" type="slidenum">
               <a:rPr lang="en-US" smtClean="0"/>
               <a:pPr/>
-              <a:t>66</a:t>
+              <a:t>67</a:t>
             </a:fld>
             <a:endParaRPr lang="en-US"/>
           </a:p>
@@ -37455,7 +38935,7 @@
 </p:sld>
 </file>
 
-<file path=ppt/slides/slide67.xml><?xml version="1.0" encoding="utf-8"?>
+<file path=ppt/slides/slide68.xml><?xml version="1.0" encoding="utf-8"?>
 <p:sld xmlns:a="http://schemas.openxmlformats.org/drawingml/2006/main" xmlns:r="http://schemas.openxmlformats.org/officeDocument/2006/relationships" xmlns:p="http://schemas.openxmlformats.org/presentationml/2006/main">
   <p:cSld>
     <p:spTree>
@@ -37802,7 +39282,7 @@
             <a:fld id="{B82CCC60-E8CD-4174-8B1A-7DF615B22EEF}" type="slidenum">
               <a:rPr lang="en-US" smtClean="0"/>
               <a:pPr/>
-              <a:t>67</a:t>
+              <a:t>68</a:t>
             </a:fld>
             <a:endParaRPr lang="en-US"/>
           </a:p>
@@ -38009,7 +39489,7 @@
 </p:sld>
 </file>
 
-<file path=ppt/slides/slide68.xml><?xml version="1.0" encoding="utf-8"?>
+<file path=ppt/slides/slide69.xml><?xml version="1.0" encoding="utf-8"?>
 <p:sld xmlns:a="http://schemas.openxmlformats.org/drawingml/2006/main" xmlns:r="http://schemas.openxmlformats.org/officeDocument/2006/relationships" xmlns:p="http://schemas.openxmlformats.org/presentationml/2006/main">
   <p:cSld>
     <p:spTree>
@@ -38402,7 +39882,7 @@
             <a:fld id="{B82CCC60-E8CD-4174-8B1A-7DF615B22EEF}" type="slidenum">
               <a:rPr lang="en-US" smtClean="0"/>
               <a:pPr/>
-              <a:t>68</a:t>
+              <a:t>69</a:t>
             </a:fld>
             <a:endParaRPr lang="en-US"/>
           </a:p>
@@ -38600,606 +40080,6 @@
     <p:extLst>
       <p:ext uri="{BB962C8B-B14F-4D97-AF65-F5344CB8AC3E}">
         <p14:creationId xmlns:p14="http://schemas.microsoft.com/office/powerpoint/2010/main" val="1377660912"/>
-      </p:ext>
-    </p:extLst>
-  </p:cSld>
-  <p:clrMapOvr>
-    <a:masterClrMapping/>
-  </p:clrMapOvr>
-</p:sld>
-</file>
-
-<file path=ppt/slides/slide69.xml><?xml version="1.0" encoding="utf-8"?>
-<p:sld xmlns:a="http://schemas.openxmlformats.org/drawingml/2006/main" xmlns:r="http://schemas.openxmlformats.org/officeDocument/2006/relationships" xmlns:p="http://schemas.openxmlformats.org/presentationml/2006/main">
-  <p:cSld>
-    <p:spTree>
-      <p:nvGrpSpPr>
-        <p:cNvPr id="1" name="">
-          <a:extLst>
-            <a:ext uri="{FF2B5EF4-FFF2-40B4-BE49-F238E27FC236}">
-              <a16:creationId xmlns:a16="http://schemas.microsoft.com/office/drawing/2014/main" id="{86B57180-4AC9-CB36-0992-DB6961D7C57B}"/>
-            </a:ext>
-          </a:extLst>
-        </p:cNvPr>
-        <p:cNvGrpSpPr/>
-        <p:nvPr/>
-      </p:nvGrpSpPr>
-      <p:grpSpPr>
-        <a:xfrm>
-          <a:off x="0" y="0"/>
-          <a:ext cx="0" cy="0"/>
-          <a:chOff x="0" y="0"/>
-          <a:chExt cx="0" cy="0"/>
-        </a:xfrm>
-      </p:grpSpPr>
-      <p:sp>
-        <p:nvSpPr>
-          <p:cNvPr id="2" name="Title 1">
-            <a:extLst>
-              <a:ext uri="{FF2B5EF4-FFF2-40B4-BE49-F238E27FC236}">
-                <a16:creationId xmlns:a16="http://schemas.microsoft.com/office/drawing/2014/main" id="{BCB69F4D-2AEF-E97D-DA67-9F50CC0728F3}"/>
-              </a:ext>
-            </a:extLst>
-          </p:cNvPr>
-          <p:cNvSpPr>
-            <a:spLocks noGrp="1"/>
-          </p:cNvSpPr>
-          <p:nvPr>
-            <p:ph type="title"/>
-          </p:nvPr>
-        </p:nvSpPr>
-        <p:spPr/>
-        <p:txBody>
-          <a:bodyPr>
-            <a:normAutofit fontScale="90000"/>
-          </a:bodyPr>
-          <a:lstStyle/>
-          <a:p>
-            <a:r>
-              <a:rPr lang="en-US" dirty="0"/>
-              <a:t>Example of a super-read assembly</a:t>
-            </a:r>
-          </a:p>
-        </p:txBody>
-      </p:sp>
-      <p:sp>
-        <p:nvSpPr>
-          <p:cNvPr id="3" name="Content Placeholder 2">
-            <a:extLst>
-              <a:ext uri="{FF2B5EF4-FFF2-40B4-BE49-F238E27FC236}">
-                <a16:creationId xmlns:a16="http://schemas.microsoft.com/office/drawing/2014/main" id="{E4FEE0A0-4398-10B0-26E8-4EA16339A227}"/>
-              </a:ext>
-            </a:extLst>
-          </p:cNvPr>
-          <p:cNvSpPr>
-            <a:spLocks noGrp="1"/>
-          </p:cNvSpPr>
-          <p:nvPr>
-            <p:ph idx="1"/>
-          </p:nvPr>
-        </p:nvSpPr>
-        <p:spPr>
-          <a:xfrm>
-            <a:off x="598619" y="1596540"/>
-            <a:ext cx="7970194" cy="4936995"/>
-          </a:xfrm>
-        </p:spPr>
-        <p:txBody>
-          <a:bodyPr>
-            <a:normAutofit/>
-          </a:bodyPr>
-          <a:lstStyle/>
-          <a:p>
-            <a:r>
-              <a:rPr lang="en-US" dirty="0"/>
-              <a:t>Genome </a:t>
-            </a:r>
-            <a:r>
-              <a:rPr lang="en-US" dirty="0">
-                <a:latin typeface="Courier New" panose="02070309020205020404" pitchFamily="49" charset="0"/>
-                <a:cs typeface="Courier New" panose="02070309020205020404" pitchFamily="49" charset="0"/>
-              </a:rPr>
-              <a:t>AACAT</a:t>
-            </a:r>
-            <a:r>
-              <a:rPr lang="en-US" dirty="0">
-                <a:solidFill>
-                  <a:srgbClr val="FF0000"/>
-                </a:solidFill>
-                <a:latin typeface="Courier New" panose="02070309020205020404" pitchFamily="49" charset="0"/>
-                <a:cs typeface="Courier New" panose="02070309020205020404" pitchFamily="49" charset="0"/>
-              </a:rPr>
-              <a:t>AAAAAAA</a:t>
-            </a:r>
-            <a:r>
-              <a:rPr lang="en-US" dirty="0">
-                <a:latin typeface="Courier New" panose="02070309020205020404" pitchFamily="49" charset="0"/>
-                <a:cs typeface="Courier New" panose="02070309020205020404" pitchFamily="49" charset="0"/>
-              </a:rPr>
-              <a:t>GACG</a:t>
-            </a:r>
-            <a:r>
-              <a:rPr lang="en-US" dirty="0">
-                <a:solidFill>
-                  <a:srgbClr val="FF0000"/>
-                </a:solidFill>
-                <a:latin typeface="Courier New" panose="02070309020205020404" pitchFamily="49" charset="0"/>
-                <a:cs typeface="Courier New" panose="02070309020205020404" pitchFamily="49" charset="0"/>
-              </a:rPr>
-              <a:t>AAAAAAA</a:t>
-            </a:r>
-            <a:r>
-              <a:rPr lang="en-US" dirty="0">
-                <a:latin typeface="Courier New" panose="02070309020205020404" pitchFamily="49" charset="0"/>
-                <a:cs typeface="Courier New" panose="02070309020205020404" pitchFamily="49" charset="0"/>
-              </a:rPr>
-              <a:t>CGTC</a:t>
-            </a:r>
-          </a:p>
-          <a:p>
-            <a:r>
-              <a:rPr lang="en-US" dirty="0"/>
-              <a:t>Reads</a:t>
-            </a:r>
-            <a:br>
-              <a:rPr lang="en-US" dirty="0">
-                <a:latin typeface="Courier New" panose="02070309020205020404" pitchFamily="49" charset="0"/>
-                <a:cs typeface="Courier New" panose="02070309020205020404" pitchFamily="49" charset="0"/>
-              </a:rPr>
-            </a:br>
-            <a:r>
-              <a:rPr lang="en-US" dirty="0">
-                <a:latin typeface="Courier New" panose="02070309020205020404" pitchFamily="49" charset="0"/>
-                <a:cs typeface="Courier New" panose="02070309020205020404" pitchFamily="49" charset="0"/>
-              </a:rPr>
-              <a:t> ER1:</a:t>
-            </a:r>
-            <a:r>
-              <a:rPr lang="en-US" dirty="0">
-                <a:solidFill>
-                  <a:srgbClr val="FF0000"/>
-                </a:solidFill>
-                <a:latin typeface="Courier New" panose="02070309020205020404" pitchFamily="49" charset="0"/>
-                <a:cs typeface="Courier New" panose="02070309020205020404" pitchFamily="49" charset="0"/>
-              </a:rPr>
-              <a:t>A</a:t>
-            </a:r>
-            <a:r>
-              <a:rPr lang="en-US" dirty="0">
-                <a:latin typeface="Courier New" panose="02070309020205020404" pitchFamily="49" charset="0"/>
-                <a:cs typeface="Courier New" panose="02070309020205020404" pitchFamily="49" charset="0"/>
-              </a:rPr>
-              <a:t>AACAT</a:t>
-            </a:r>
-            <a:r>
-              <a:rPr lang="en-US" dirty="0">
-                <a:solidFill>
-                  <a:srgbClr val="FF0000"/>
-                </a:solidFill>
-                <a:latin typeface="Courier New" panose="02070309020205020404" pitchFamily="49" charset="0"/>
-                <a:cs typeface="Courier New" panose="02070309020205020404" pitchFamily="49" charset="0"/>
-              </a:rPr>
-              <a:t>AAA</a:t>
-            </a:r>
-            <a:br>
-              <a:rPr lang="en-US" dirty="0">
-                <a:solidFill>
-                  <a:srgbClr val="FF0000"/>
-                </a:solidFill>
-                <a:latin typeface="Courier New" panose="02070309020205020404" pitchFamily="49" charset="0"/>
-                <a:cs typeface="Courier New" panose="02070309020205020404" pitchFamily="49" charset="0"/>
-              </a:rPr>
-            </a:br>
-            <a:r>
-              <a:rPr lang="en-US" dirty="0">
-                <a:solidFill>
-                  <a:srgbClr val="FF0000"/>
-                </a:solidFill>
-                <a:latin typeface="Courier New" panose="02070309020205020404" pitchFamily="49" charset="0"/>
-                <a:cs typeface="Courier New" panose="02070309020205020404" pitchFamily="49" charset="0"/>
-              </a:rPr>
-              <a:t> </a:t>
-            </a:r>
-            <a:r>
-              <a:rPr lang="en-US" dirty="0">
-                <a:solidFill>
-                  <a:schemeClr val="tx1"/>
-                </a:solidFill>
-                <a:latin typeface="Courier New" panose="02070309020205020404" pitchFamily="49" charset="0"/>
-                <a:cs typeface="Courier New" panose="02070309020205020404" pitchFamily="49" charset="0"/>
-              </a:rPr>
-              <a:t>ER2:</a:t>
-            </a:r>
-            <a:r>
-              <a:rPr lang="en-US" dirty="0">
-                <a:solidFill>
-                  <a:srgbClr val="FF0000"/>
-                </a:solidFill>
-                <a:latin typeface="Courier New" panose="02070309020205020404" pitchFamily="49" charset="0"/>
-                <a:cs typeface="Courier New" panose="02070309020205020404" pitchFamily="49" charset="0"/>
-              </a:rPr>
-              <a:t>A</a:t>
-            </a:r>
-            <a:r>
-              <a:rPr lang="en-US" dirty="0">
-                <a:solidFill>
-                  <a:schemeClr val="tx1"/>
-                </a:solidFill>
-                <a:latin typeface="Courier New" panose="02070309020205020404" pitchFamily="49" charset="0"/>
-                <a:cs typeface="Courier New" panose="02070309020205020404" pitchFamily="49" charset="0"/>
-              </a:rPr>
-              <a:t>AAC</a:t>
-            </a:r>
-            <a:r>
-              <a:rPr lang="en-US" dirty="0">
-                <a:latin typeface="Courier New" panose="02070309020205020404" pitchFamily="49" charset="0"/>
-                <a:cs typeface="Courier New" panose="02070309020205020404" pitchFamily="49" charset="0"/>
-              </a:rPr>
-              <a:t>AT</a:t>
-            </a:r>
-            <a:r>
-              <a:rPr lang="en-US" dirty="0">
-                <a:solidFill>
-                  <a:srgbClr val="FF0000"/>
-                </a:solidFill>
-                <a:latin typeface="Courier New" panose="02070309020205020404" pitchFamily="49" charset="0"/>
-                <a:cs typeface="Courier New" panose="02070309020205020404" pitchFamily="49" charset="0"/>
-              </a:rPr>
-              <a:t>AAAAA</a:t>
-            </a:r>
-            <a:br>
-              <a:rPr lang="en-US" dirty="0">
-                <a:solidFill>
-                  <a:srgbClr val="FF0000"/>
-                </a:solidFill>
-                <a:latin typeface="Courier New" panose="02070309020205020404" pitchFamily="49" charset="0"/>
-                <a:cs typeface="Courier New" panose="02070309020205020404" pitchFamily="49" charset="0"/>
-              </a:rPr>
-            </a:br>
-            <a:r>
-              <a:rPr lang="en-US" dirty="0">
-                <a:solidFill>
-                  <a:srgbClr val="FF0000"/>
-                </a:solidFill>
-                <a:latin typeface="Courier New" panose="02070309020205020404" pitchFamily="49" charset="0"/>
-                <a:cs typeface="Courier New" panose="02070309020205020404" pitchFamily="49" charset="0"/>
-              </a:rPr>
-              <a:t>        </a:t>
-            </a:r>
-            <a:r>
-              <a:rPr lang="en-US" dirty="0">
-                <a:solidFill>
-                  <a:schemeClr val="tx1"/>
-                </a:solidFill>
-                <a:latin typeface="Courier New" panose="02070309020205020404" pitchFamily="49" charset="0"/>
-                <a:cs typeface="Courier New" panose="02070309020205020404" pitchFamily="49" charset="0"/>
-              </a:rPr>
-              <a:t>ER3:</a:t>
-            </a:r>
-            <a:r>
-              <a:rPr lang="en-US" dirty="0">
-                <a:solidFill>
-                  <a:srgbClr val="FF0000"/>
-                </a:solidFill>
-                <a:latin typeface="Courier New" panose="02070309020205020404" pitchFamily="49" charset="0"/>
-                <a:cs typeface="Courier New" panose="02070309020205020404" pitchFamily="49" charset="0"/>
-              </a:rPr>
-              <a:t>AAAAAA</a:t>
-            </a:r>
-            <a:r>
-              <a:rPr lang="en-US" dirty="0">
-                <a:solidFill>
-                  <a:schemeClr val="tx1"/>
-                </a:solidFill>
-                <a:latin typeface="Courier New" panose="02070309020205020404" pitchFamily="49" charset="0"/>
-                <a:cs typeface="Courier New" panose="02070309020205020404" pitchFamily="49" charset="0"/>
-              </a:rPr>
-              <a:t>GACG</a:t>
-            </a:r>
-            <a:r>
-              <a:rPr lang="en-US" dirty="0">
-                <a:solidFill>
-                  <a:srgbClr val="FF0000"/>
-                </a:solidFill>
-                <a:latin typeface="Courier New" panose="02070309020205020404" pitchFamily="49" charset="0"/>
-                <a:cs typeface="Courier New" panose="02070309020205020404" pitchFamily="49" charset="0"/>
-              </a:rPr>
-              <a:t>AAA</a:t>
-            </a:r>
-            <a:br>
-              <a:rPr lang="en-US" dirty="0">
-                <a:solidFill>
-                  <a:srgbClr val="FF0000"/>
-                </a:solidFill>
-                <a:latin typeface="Courier New" panose="02070309020205020404" pitchFamily="49" charset="0"/>
-                <a:cs typeface="Courier New" panose="02070309020205020404" pitchFamily="49" charset="0"/>
-              </a:rPr>
-            </a:br>
-            <a:r>
-              <a:rPr lang="en-US" dirty="0">
-                <a:solidFill>
-                  <a:srgbClr val="FF0000"/>
-                </a:solidFill>
-                <a:latin typeface="Courier New" panose="02070309020205020404" pitchFamily="49" charset="0"/>
-                <a:cs typeface="Courier New" panose="02070309020205020404" pitchFamily="49" charset="0"/>
-              </a:rPr>
-              <a:t>           </a:t>
-            </a:r>
-            <a:r>
-              <a:rPr lang="en-US" dirty="0">
-                <a:solidFill>
-                  <a:schemeClr val="tx1"/>
-                </a:solidFill>
-                <a:latin typeface="Courier New" panose="02070309020205020404" pitchFamily="49" charset="0"/>
-                <a:cs typeface="Courier New" panose="02070309020205020404" pitchFamily="49" charset="0"/>
-              </a:rPr>
-              <a:t>ER4:</a:t>
-            </a:r>
-            <a:r>
-              <a:rPr lang="en-US" dirty="0">
-                <a:solidFill>
-                  <a:srgbClr val="FF0000"/>
-                </a:solidFill>
-                <a:latin typeface="Courier New" panose="02070309020205020404" pitchFamily="49" charset="0"/>
-                <a:cs typeface="Courier New" panose="02070309020205020404" pitchFamily="49" charset="0"/>
-              </a:rPr>
-              <a:t>AAA</a:t>
-            </a:r>
-            <a:r>
-              <a:rPr lang="en-US" dirty="0">
-                <a:latin typeface="Courier New" panose="02070309020205020404" pitchFamily="49" charset="0"/>
-                <a:cs typeface="Courier New" panose="02070309020205020404" pitchFamily="49" charset="0"/>
-              </a:rPr>
-              <a:t>GACG</a:t>
-            </a:r>
-            <a:r>
-              <a:rPr lang="en-US" dirty="0">
-                <a:solidFill>
-                  <a:srgbClr val="FF0000"/>
-                </a:solidFill>
-                <a:latin typeface="Courier New" panose="02070309020205020404" pitchFamily="49" charset="0"/>
-                <a:cs typeface="Courier New" panose="02070309020205020404" pitchFamily="49" charset="0"/>
-              </a:rPr>
-              <a:t>AAA</a:t>
-            </a:r>
-            <a:br>
-              <a:rPr lang="en-US" dirty="0">
-                <a:latin typeface="Courier New" panose="02070309020205020404" pitchFamily="49" charset="0"/>
-                <a:cs typeface="Courier New" panose="02070309020205020404" pitchFamily="49" charset="0"/>
-              </a:rPr>
-            </a:br>
-            <a:r>
-              <a:rPr lang="en-US" dirty="0">
-                <a:latin typeface="Courier New" panose="02070309020205020404" pitchFamily="49" charset="0"/>
-                <a:cs typeface="Courier New" panose="02070309020205020404" pitchFamily="49" charset="0"/>
-              </a:rPr>
-              <a:t>               </a:t>
-            </a:r>
-          </a:p>
-        </p:txBody>
-      </p:sp>
-      <p:sp>
-        <p:nvSpPr>
-          <p:cNvPr id="4" name="Slide Number Placeholder 3">
-            <a:extLst>
-              <a:ext uri="{FF2B5EF4-FFF2-40B4-BE49-F238E27FC236}">
-                <a16:creationId xmlns:a16="http://schemas.microsoft.com/office/drawing/2014/main" id="{92DA24FA-05B9-289C-6C14-2CA6446DE229}"/>
-              </a:ext>
-            </a:extLst>
-          </p:cNvPr>
-          <p:cNvSpPr>
-            <a:spLocks noGrp="1"/>
-          </p:cNvSpPr>
-          <p:nvPr>
-            <p:ph type="sldNum" sz="quarter" idx="12"/>
-          </p:nvPr>
-        </p:nvSpPr>
-        <p:spPr/>
-        <p:txBody>
-          <a:bodyPr/>
-          <a:lstStyle/>
-          <a:p>
-            <a:fld id="{B82CCC60-E8CD-4174-8B1A-7DF615B22EEF}" type="slidenum">
-              <a:rPr lang="en-US" smtClean="0"/>
-              <a:pPr/>
-              <a:t>69</a:t>
-            </a:fld>
-            <a:endParaRPr lang="en-US"/>
-          </a:p>
-        </p:txBody>
-      </p:sp>
-      <p:sp>
-        <p:nvSpPr>
-          <p:cNvPr id="8" name="TextBox 7">
-            <a:extLst>
-              <a:ext uri="{FF2B5EF4-FFF2-40B4-BE49-F238E27FC236}">
-                <a16:creationId xmlns:a16="http://schemas.microsoft.com/office/drawing/2014/main" id="{8C9E0BCE-2B2D-5A33-C77B-D6A85B29569E}"/>
-              </a:ext>
-            </a:extLst>
-          </p:cNvPr>
-          <p:cNvSpPr txBox="1"/>
-          <p:nvPr/>
-        </p:nvSpPr>
-        <p:spPr>
-          <a:xfrm>
-            <a:off x="10160000" y="1124149"/>
-            <a:ext cx="1834413" cy="5232202"/>
-          </a:xfrm>
-          <a:prstGeom prst="rect">
-            <a:avLst/>
-          </a:prstGeom>
-          <a:noFill/>
-        </p:spPr>
-        <p:txBody>
-          <a:bodyPr wrap="none" rtlCol="0">
-            <a:spAutoFit/>
-          </a:bodyPr>
-          <a:lstStyle/>
-          <a:p>
-            <a:r>
-              <a:rPr lang="en-US" sz="2800" dirty="0"/>
-              <a:t>Use 4-mers</a:t>
-            </a:r>
-          </a:p>
-          <a:p>
-            <a:r>
-              <a:rPr lang="en-US" b="1" dirty="0">
-                <a:latin typeface="Courier New" panose="02070309020205020404" pitchFamily="49" charset="0"/>
-                <a:cs typeface="Courier New" panose="02070309020205020404" pitchFamily="49" charset="0"/>
-              </a:rPr>
-              <a:t>AAAA 9</a:t>
-            </a:r>
-          </a:p>
-          <a:p>
-            <a:r>
-              <a:rPr lang="en-US" b="1" dirty="0">
-                <a:latin typeface="Courier New" panose="02070309020205020404" pitchFamily="49" charset="0"/>
-                <a:cs typeface="Courier New" panose="02070309020205020404" pitchFamily="49" charset="0"/>
-              </a:rPr>
-              <a:t>AAAC 1</a:t>
-            </a:r>
-          </a:p>
-          <a:p>
-            <a:r>
-              <a:rPr lang="en-US" b="1" dirty="0">
-                <a:latin typeface="Courier New" panose="02070309020205020404" pitchFamily="49" charset="0"/>
-                <a:cs typeface="Courier New" panose="02070309020205020404" pitchFamily="49" charset="0"/>
-              </a:rPr>
-              <a:t>AAAG 1</a:t>
-            </a:r>
-          </a:p>
-          <a:p>
-            <a:r>
-              <a:rPr lang="en-US" b="1" dirty="0">
-                <a:latin typeface="Courier New" panose="02070309020205020404" pitchFamily="49" charset="0"/>
-                <a:cs typeface="Courier New" panose="02070309020205020404" pitchFamily="49" charset="0"/>
-              </a:rPr>
-              <a:t>AACA 1</a:t>
-            </a:r>
-          </a:p>
-          <a:p>
-            <a:r>
-              <a:rPr lang="en-US" b="1" dirty="0">
-                <a:latin typeface="Courier New" panose="02070309020205020404" pitchFamily="49" charset="0"/>
-                <a:cs typeface="Courier New" panose="02070309020205020404" pitchFamily="49" charset="0"/>
-              </a:rPr>
-              <a:t>AACG 1</a:t>
-            </a:r>
-          </a:p>
-          <a:p>
-            <a:r>
-              <a:rPr lang="en-US" b="1" dirty="0">
-                <a:latin typeface="Courier New" panose="02070309020205020404" pitchFamily="49" charset="0"/>
-                <a:cs typeface="Courier New" panose="02070309020205020404" pitchFamily="49" charset="0"/>
-              </a:rPr>
-              <a:t>AAGA 1</a:t>
-            </a:r>
-          </a:p>
-          <a:p>
-            <a:r>
-              <a:rPr lang="en-US" b="1" dirty="0">
-                <a:latin typeface="Courier New" panose="02070309020205020404" pitchFamily="49" charset="0"/>
-                <a:cs typeface="Courier New" panose="02070309020205020404" pitchFamily="49" charset="0"/>
-              </a:rPr>
-              <a:t>ACAT 1</a:t>
-            </a:r>
-          </a:p>
-          <a:p>
-            <a:r>
-              <a:rPr lang="en-US" b="1" dirty="0">
-                <a:latin typeface="Courier New" panose="02070309020205020404" pitchFamily="49" charset="0"/>
-                <a:cs typeface="Courier New" panose="02070309020205020404" pitchFamily="49" charset="0"/>
-              </a:rPr>
-              <a:t>ACGA 2</a:t>
-            </a:r>
-          </a:p>
-          <a:p>
-            <a:r>
-              <a:rPr lang="en-US" b="1" dirty="0">
-                <a:latin typeface="Courier New" panose="02070309020205020404" pitchFamily="49" charset="0"/>
-                <a:cs typeface="Courier New" panose="02070309020205020404" pitchFamily="49" charset="0"/>
-              </a:rPr>
-              <a:t>ACGT 1</a:t>
-            </a:r>
-          </a:p>
-          <a:p>
-            <a:r>
-              <a:rPr lang="en-US" b="1" dirty="0">
-                <a:latin typeface="Courier New" panose="02070309020205020404" pitchFamily="49" charset="0"/>
-                <a:cs typeface="Courier New" panose="02070309020205020404" pitchFamily="49" charset="0"/>
-              </a:rPr>
-              <a:t>AGAC 1</a:t>
-            </a:r>
-          </a:p>
-          <a:p>
-            <a:r>
-              <a:rPr lang="en-US" b="1" dirty="0">
-                <a:latin typeface="Courier New" panose="02070309020205020404" pitchFamily="49" charset="0"/>
-                <a:cs typeface="Courier New" panose="02070309020205020404" pitchFamily="49" charset="0"/>
-              </a:rPr>
-              <a:t>ATAA 2</a:t>
-            </a:r>
-          </a:p>
-          <a:p>
-            <a:r>
-              <a:rPr lang="en-US" b="1" dirty="0">
-                <a:latin typeface="Courier New" panose="02070309020205020404" pitchFamily="49" charset="0"/>
-                <a:cs typeface="Courier New" panose="02070309020205020404" pitchFamily="49" charset="0"/>
-              </a:rPr>
-              <a:t>CATA 1</a:t>
-            </a:r>
-          </a:p>
-          <a:p>
-            <a:r>
-              <a:rPr lang="en-US" b="1" dirty="0">
-                <a:latin typeface="Courier New" panose="02070309020205020404" pitchFamily="49" charset="0"/>
-                <a:cs typeface="Courier New" panose="02070309020205020404" pitchFamily="49" charset="0"/>
-              </a:rPr>
-              <a:t>CGAA 1</a:t>
-            </a:r>
-          </a:p>
-          <a:p>
-            <a:r>
-              <a:rPr lang="en-US" b="1" dirty="0">
-                <a:latin typeface="Courier New" panose="02070309020205020404" pitchFamily="49" charset="0"/>
-                <a:cs typeface="Courier New" panose="02070309020205020404" pitchFamily="49" charset="0"/>
-              </a:rPr>
-              <a:t>CGTC 1</a:t>
-            </a:r>
-          </a:p>
-          <a:p>
-            <a:r>
-              <a:rPr lang="en-US" b="1" dirty="0">
-                <a:latin typeface="Courier New" panose="02070309020205020404" pitchFamily="49" charset="0"/>
-                <a:cs typeface="Courier New" panose="02070309020205020404" pitchFamily="49" charset="0"/>
-              </a:rPr>
-              <a:t>GAAA 1</a:t>
-            </a:r>
-          </a:p>
-          <a:p>
-            <a:r>
-              <a:rPr lang="en-US" b="1" dirty="0">
-                <a:latin typeface="Courier New" panose="02070309020205020404" pitchFamily="49" charset="0"/>
-                <a:cs typeface="Courier New" panose="02070309020205020404" pitchFamily="49" charset="0"/>
-              </a:rPr>
-              <a:t>GACG 2</a:t>
-            </a:r>
-          </a:p>
-          <a:p>
-            <a:r>
-              <a:rPr lang="en-US" b="1" dirty="0">
-                <a:latin typeface="Courier New" panose="02070309020205020404" pitchFamily="49" charset="0"/>
-                <a:cs typeface="Courier New" panose="02070309020205020404" pitchFamily="49" charset="0"/>
-              </a:rPr>
-              <a:t>TAAA 1</a:t>
-            </a:r>
-          </a:p>
-        </p:txBody>
-      </p:sp>
-    </p:spTree>
-    <p:extLst>
-      <p:ext uri="{BB962C8B-B14F-4D97-AF65-F5344CB8AC3E}">
-        <p14:creationId xmlns:p14="http://schemas.microsoft.com/office/powerpoint/2010/main" val="1177435844"/>
       </p:ext>
     </p:extLst>
   </p:cSld>
@@ -39527,6 +40407,606 @@
         <p:cNvPr id="1" name="">
           <a:extLst>
             <a:ext uri="{FF2B5EF4-FFF2-40B4-BE49-F238E27FC236}">
+              <a16:creationId xmlns:a16="http://schemas.microsoft.com/office/drawing/2014/main" id="{86B57180-4AC9-CB36-0992-DB6961D7C57B}"/>
+            </a:ext>
+          </a:extLst>
+        </p:cNvPr>
+        <p:cNvGrpSpPr/>
+        <p:nvPr/>
+      </p:nvGrpSpPr>
+      <p:grpSpPr>
+        <a:xfrm>
+          <a:off x="0" y="0"/>
+          <a:ext cx="0" cy="0"/>
+          <a:chOff x="0" y="0"/>
+          <a:chExt cx="0" cy="0"/>
+        </a:xfrm>
+      </p:grpSpPr>
+      <p:sp>
+        <p:nvSpPr>
+          <p:cNvPr id="2" name="Title 1">
+            <a:extLst>
+              <a:ext uri="{FF2B5EF4-FFF2-40B4-BE49-F238E27FC236}">
+                <a16:creationId xmlns:a16="http://schemas.microsoft.com/office/drawing/2014/main" id="{BCB69F4D-2AEF-E97D-DA67-9F50CC0728F3}"/>
+              </a:ext>
+            </a:extLst>
+          </p:cNvPr>
+          <p:cNvSpPr>
+            <a:spLocks noGrp="1"/>
+          </p:cNvSpPr>
+          <p:nvPr>
+            <p:ph type="title"/>
+          </p:nvPr>
+        </p:nvSpPr>
+        <p:spPr/>
+        <p:txBody>
+          <a:bodyPr>
+            <a:normAutofit fontScale="90000"/>
+          </a:bodyPr>
+          <a:lstStyle/>
+          <a:p>
+            <a:r>
+              <a:rPr lang="en-US" dirty="0"/>
+              <a:t>Example of a super-read assembly</a:t>
+            </a:r>
+          </a:p>
+        </p:txBody>
+      </p:sp>
+      <p:sp>
+        <p:nvSpPr>
+          <p:cNvPr id="3" name="Content Placeholder 2">
+            <a:extLst>
+              <a:ext uri="{FF2B5EF4-FFF2-40B4-BE49-F238E27FC236}">
+                <a16:creationId xmlns:a16="http://schemas.microsoft.com/office/drawing/2014/main" id="{E4FEE0A0-4398-10B0-26E8-4EA16339A227}"/>
+              </a:ext>
+            </a:extLst>
+          </p:cNvPr>
+          <p:cNvSpPr>
+            <a:spLocks noGrp="1"/>
+          </p:cNvSpPr>
+          <p:nvPr>
+            <p:ph idx="1"/>
+          </p:nvPr>
+        </p:nvSpPr>
+        <p:spPr>
+          <a:xfrm>
+            <a:off x="598619" y="1596540"/>
+            <a:ext cx="7970194" cy="4936995"/>
+          </a:xfrm>
+        </p:spPr>
+        <p:txBody>
+          <a:bodyPr>
+            <a:normAutofit/>
+          </a:bodyPr>
+          <a:lstStyle/>
+          <a:p>
+            <a:r>
+              <a:rPr lang="en-US" dirty="0"/>
+              <a:t>Genome </a:t>
+            </a:r>
+            <a:r>
+              <a:rPr lang="en-US" dirty="0">
+                <a:latin typeface="Courier New" panose="02070309020205020404" pitchFamily="49" charset="0"/>
+                <a:cs typeface="Courier New" panose="02070309020205020404" pitchFamily="49" charset="0"/>
+              </a:rPr>
+              <a:t>AACAT</a:t>
+            </a:r>
+            <a:r>
+              <a:rPr lang="en-US" dirty="0">
+                <a:solidFill>
+                  <a:srgbClr val="FF0000"/>
+                </a:solidFill>
+                <a:latin typeface="Courier New" panose="02070309020205020404" pitchFamily="49" charset="0"/>
+                <a:cs typeface="Courier New" panose="02070309020205020404" pitchFamily="49" charset="0"/>
+              </a:rPr>
+              <a:t>AAAAAAA</a:t>
+            </a:r>
+            <a:r>
+              <a:rPr lang="en-US" dirty="0">
+                <a:latin typeface="Courier New" panose="02070309020205020404" pitchFamily="49" charset="0"/>
+                <a:cs typeface="Courier New" panose="02070309020205020404" pitchFamily="49" charset="0"/>
+              </a:rPr>
+              <a:t>GACG</a:t>
+            </a:r>
+            <a:r>
+              <a:rPr lang="en-US" dirty="0">
+                <a:solidFill>
+                  <a:srgbClr val="FF0000"/>
+                </a:solidFill>
+                <a:latin typeface="Courier New" panose="02070309020205020404" pitchFamily="49" charset="0"/>
+                <a:cs typeface="Courier New" panose="02070309020205020404" pitchFamily="49" charset="0"/>
+              </a:rPr>
+              <a:t>AAAAAAA</a:t>
+            </a:r>
+            <a:r>
+              <a:rPr lang="en-US" dirty="0">
+                <a:latin typeface="Courier New" panose="02070309020205020404" pitchFamily="49" charset="0"/>
+                <a:cs typeface="Courier New" panose="02070309020205020404" pitchFamily="49" charset="0"/>
+              </a:rPr>
+              <a:t>CGTC</a:t>
+            </a:r>
+          </a:p>
+          <a:p>
+            <a:r>
+              <a:rPr lang="en-US" dirty="0"/>
+              <a:t>Reads</a:t>
+            </a:r>
+            <a:br>
+              <a:rPr lang="en-US" dirty="0">
+                <a:latin typeface="Courier New" panose="02070309020205020404" pitchFamily="49" charset="0"/>
+                <a:cs typeface="Courier New" panose="02070309020205020404" pitchFamily="49" charset="0"/>
+              </a:rPr>
+            </a:br>
+            <a:r>
+              <a:rPr lang="en-US" dirty="0">
+                <a:latin typeface="Courier New" panose="02070309020205020404" pitchFamily="49" charset="0"/>
+                <a:cs typeface="Courier New" panose="02070309020205020404" pitchFamily="49" charset="0"/>
+              </a:rPr>
+              <a:t> ER1:</a:t>
+            </a:r>
+            <a:r>
+              <a:rPr lang="en-US" dirty="0">
+                <a:solidFill>
+                  <a:srgbClr val="FF0000"/>
+                </a:solidFill>
+                <a:latin typeface="Courier New" panose="02070309020205020404" pitchFamily="49" charset="0"/>
+                <a:cs typeface="Courier New" panose="02070309020205020404" pitchFamily="49" charset="0"/>
+              </a:rPr>
+              <a:t>A</a:t>
+            </a:r>
+            <a:r>
+              <a:rPr lang="en-US" dirty="0">
+                <a:latin typeface="Courier New" panose="02070309020205020404" pitchFamily="49" charset="0"/>
+                <a:cs typeface="Courier New" panose="02070309020205020404" pitchFamily="49" charset="0"/>
+              </a:rPr>
+              <a:t>AACAT</a:t>
+            </a:r>
+            <a:r>
+              <a:rPr lang="en-US" dirty="0">
+                <a:solidFill>
+                  <a:srgbClr val="FF0000"/>
+                </a:solidFill>
+                <a:latin typeface="Courier New" panose="02070309020205020404" pitchFamily="49" charset="0"/>
+                <a:cs typeface="Courier New" panose="02070309020205020404" pitchFamily="49" charset="0"/>
+              </a:rPr>
+              <a:t>AAA</a:t>
+            </a:r>
+            <a:br>
+              <a:rPr lang="en-US" dirty="0">
+                <a:solidFill>
+                  <a:srgbClr val="FF0000"/>
+                </a:solidFill>
+                <a:latin typeface="Courier New" panose="02070309020205020404" pitchFamily="49" charset="0"/>
+                <a:cs typeface="Courier New" panose="02070309020205020404" pitchFamily="49" charset="0"/>
+              </a:rPr>
+            </a:br>
+            <a:r>
+              <a:rPr lang="en-US" dirty="0">
+                <a:solidFill>
+                  <a:srgbClr val="FF0000"/>
+                </a:solidFill>
+                <a:latin typeface="Courier New" panose="02070309020205020404" pitchFamily="49" charset="0"/>
+                <a:cs typeface="Courier New" panose="02070309020205020404" pitchFamily="49" charset="0"/>
+              </a:rPr>
+              <a:t> </a:t>
+            </a:r>
+            <a:r>
+              <a:rPr lang="en-US" dirty="0">
+                <a:solidFill>
+                  <a:schemeClr val="tx1"/>
+                </a:solidFill>
+                <a:latin typeface="Courier New" panose="02070309020205020404" pitchFamily="49" charset="0"/>
+                <a:cs typeface="Courier New" panose="02070309020205020404" pitchFamily="49" charset="0"/>
+              </a:rPr>
+              <a:t>ER2:</a:t>
+            </a:r>
+            <a:r>
+              <a:rPr lang="en-US" dirty="0">
+                <a:solidFill>
+                  <a:srgbClr val="FF0000"/>
+                </a:solidFill>
+                <a:latin typeface="Courier New" panose="02070309020205020404" pitchFamily="49" charset="0"/>
+                <a:cs typeface="Courier New" panose="02070309020205020404" pitchFamily="49" charset="0"/>
+              </a:rPr>
+              <a:t>A</a:t>
+            </a:r>
+            <a:r>
+              <a:rPr lang="en-US" dirty="0">
+                <a:solidFill>
+                  <a:schemeClr val="tx1"/>
+                </a:solidFill>
+                <a:latin typeface="Courier New" panose="02070309020205020404" pitchFamily="49" charset="0"/>
+                <a:cs typeface="Courier New" panose="02070309020205020404" pitchFamily="49" charset="0"/>
+              </a:rPr>
+              <a:t>AAC</a:t>
+            </a:r>
+            <a:r>
+              <a:rPr lang="en-US" dirty="0">
+                <a:latin typeface="Courier New" panose="02070309020205020404" pitchFamily="49" charset="0"/>
+                <a:cs typeface="Courier New" panose="02070309020205020404" pitchFamily="49" charset="0"/>
+              </a:rPr>
+              <a:t>AT</a:t>
+            </a:r>
+            <a:r>
+              <a:rPr lang="en-US" dirty="0">
+                <a:solidFill>
+                  <a:srgbClr val="FF0000"/>
+                </a:solidFill>
+                <a:latin typeface="Courier New" panose="02070309020205020404" pitchFamily="49" charset="0"/>
+                <a:cs typeface="Courier New" panose="02070309020205020404" pitchFamily="49" charset="0"/>
+              </a:rPr>
+              <a:t>AAAAA</a:t>
+            </a:r>
+            <a:br>
+              <a:rPr lang="en-US" dirty="0">
+                <a:solidFill>
+                  <a:srgbClr val="FF0000"/>
+                </a:solidFill>
+                <a:latin typeface="Courier New" panose="02070309020205020404" pitchFamily="49" charset="0"/>
+                <a:cs typeface="Courier New" panose="02070309020205020404" pitchFamily="49" charset="0"/>
+              </a:rPr>
+            </a:br>
+            <a:r>
+              <a:rPr lang="en-US" dirty="0">
+                <a:solidFill>
+                  <a:srgbClr val="FF0000"/>
+                </a:solidFill>
+                <a:latin typeface="Courier New" panose="02070309020205020404" pitchFamily="49" charset="0"/>
+                <a:cs typeface="Courier New" panose="02070309020205020404" pitchFamily="49" charset="0"/>
+              </a:rPr>
+              <a:t>        </a:t>
+            </a:r>
+            <a:r>
+              <a:rPr lang="en-US" dirty="0">
+                <a:solidFill>
+                  <a:schemeClr val="tx1"/>
+                </a:solidFill>
+                <a:latin typeface="Courier New" panose="02070309020205020404" pitchFamily="49" charset="0"/>
+                <a:cs typeface="Courier New" panose="02070309020205020404" pitchFamily="49" charset="0"/>
+              </a:rPr>
+              <a:t>ER3:</a:t>
+            </a:r>
+            <a:r>
+              <a:rPr lang="en-US" dirty="0">
+                <a:solidFill>
+                  <a:srgbClr val="FF0000"/>
+                </a:solidFill>
+                <a:latin typeface="Courier New" panose="02070309020205020404" pitchFamily="49" charset="0"/>
+                <a:cs typeface="Courier New" panose="02070309020205020404" pitchFamily="49" charset="0"/>
+              </a:rPr>
+              <a:t>AAAAAA</a:t>
+            </a:r>
+            <a:r>
+              <a:rPr lang="en-US" dirty="0">
+                <a:solidFill>
+                  <a:schemeClr val="tx1"/>
+                </a:solidFill>
+                <a:latin typeface="Courier New" panose="02070309020205020404" pitchFamily="49" charset="0"/>
+                <a:cs typeface="Courier New" panose="02070309020205020404" pitchFamily="49" charset="0"/>
+              </a:rPr>
+              <a:t>GACG</a:t>
+            </a:r>
+            <a:r>
+              <a:rPr lang="en-US" dirty="0">
+                <a:solidFill>
+                  <a:srgbClr val="FF0000"/>
+                </a:solidFill>
+                <a:latin typeface="Courier New" panose="02070309020205020404" pitchFamily="49" charset="0"/>
+                <a:cs typeface="Courier New" panose="02070309020205020404" pitchFamily="49" charset="0"/>
+              </a:rPr>
+              <a:t>AAA</a:t>
+            </a:r>
+            <a:br>
+              <a:rPr lang="en-US" dirty="0">
+                <a:solidFill>
+                  <a:srgbClr val="FF0000"/>
+                </a:solidFill>
+                <a:latin typeface="Courier New" panose="02070309020205020404" pitchFamily="49" charset="0"/>
+                <a:cs typeface="Courier New" panose="02070309020205020404" pitchFamily="49" charset="0"/>
+              </a:rPr>
+            </a:br>
+            <a:r>
+              <a:rPr lang="en-US" dirty="0">
+                <a:solidFill>
+                  <a:srgbClr val="FF0000"/>
+                </a:solidFill>
+                <a:latin typeface="Courier New" panose="02070309020205020404" pitchFamily="49" charset="0"/>
+                <a:cs typeface="Courier New" panose="02070309020205020404" pitchFamily="49" charset="0"/>
+              </a:rPr>
+              <a:t>           </a:t>
+            </a:r>
+            <a:r>
+              <a:rPr lang="en-US" dirty="0">
+                <a:solidFill>
+                  <a:schemeClr val="tx1"/>
+                </a:solidFill>
+                <a:latin typeface="Courier New" panose="02070309020205020404" pitchFamily="49" charset="0"/>
+                <a:cs typeface="Courier New" panose="02070309020205020404" pitchFamily="49" charset="0"/>
+              </a:rPr>
+              <a:t>ER4:</a:t>
+            </a:r>
+            <a:r>
+              <a:rPr lang="en-US" dirty="0">
+                <a:solidFill>
+                  <a:srgbClr val="FF0000"/>
+                </a:solidFill>
+                <a:latin typeface="Courier New" panose="02070309020205020404" pitchFamily="49" charset="0"/>
+                <a:cs typeface="Courier New" panose="02070309020205020404" pitchFamily="49" charset="0"/>
+              </a:rPr>
+              <a:t>AAA</a:t>
+            </a:r>
+            <a:r>
+              <a:rPr lang="en-US" dirty="0">
+                <a:latin typeface="Courier New" panose="02070309020205020404" pitchFamily="49" charset="0"/>
+                <a:cs typeface="Courier New" panose="02070309020205020404" pitchFamily="49" charset="0"/>
+              </a:rPr>
+              <a:t>GACG</a:t>
+            </a:r>
+            <a:r>
+              <a:rPr lang="en-US" dirty="0">
+                <a:solidFill>
+                  <a:srgbClr val="FF0000"/>
+                </a:solidFill>
+                <a:latin typeface="Courier New" panose="02070309020205020404" pitchFamily="49" charset="0"/>
+                <a:cs typeface="Courier New" panose="02070309020205020404" pitchFamily="49" charset="0"/>
+              </a:rPr>
+              <a:t>AAA</a:t>
+            </a:r>
+            <a:br>
+              <a:rPr lang="en-US" dirty="0">
+                <a:latin typeface="Courier New" panose="02070309020205020404" pitchFamily="49" charset="0"/>
+                <a:cs typeface="Courier New" panose="02070309020205020404" pitchFamily="49" charset="0"/>
+              </a:rPr>
+            </a:br>
+            <a:r>
+              <a:rPr lang="en-US" dirty="0">
+                <a:latin typeface="Courier New" panose="02070309020205020404" pitchFamily="49" charset="0"/>
+                <a:cs typeface="Courier New" panose="02070309020205020404" pitchFamily="49" charset="0"/>
+              </a:rPr>
+              <a:t>               </a:t>
+            </a:r>
+          </a:p>
+        </p:txBody>
+      </p:sp>
+      <p:sp>
+        <p:nvSpPr>
+          <p:cNvPr id="4" name="Slide Number Placeholder 3">
+            <a:extLst>
+              <a:ext uri="{FF2B5EF4-FFF2-40B4-BE49-F238E27FC236}">
+                <a16:creationId xmlns:a16="http://schemas.microsoft.com/office/drawing/2014/main" id="{92DA24FA-05B9-289C-6C14-2CA6446DE229}"/>
+              </a:ext>
+            </a:extLst>
+          </p:cNvPr>
+          <p:cNvSpPr>
+            <a:spLocks noGrp="1"/>
+          </p:cNvSpPr>
+          <p:nvPr>
+            <p:ph type="sldNum" sz="quarter" idx="12"/>
+          </p:nvPr>
+        </p:nvSpPr>
+        <p:spPr/>
+        <p:txBody>
+          <a:bodyPr/>
+          <a:lstStyle/>
+          <a:p>
+            <a:fld id="{B82CCC60-E8CD-4174-8B1A-7DF615B22EEF}" type="slidenum">
+              <a:rPr lang="en-US" smtClean="0"/>
+              <a:pPr/>
+              <a:t>70</a:t>
+            </a:fld>
+            <a:endParaRPr lang="en-US"/>
+          </a:p>
+        </p:txBody>
+      </p:sp>
+      <p:sp>
+        <p:nvSpPr>
+          <p:cNvPr id="8" name="TextBox 7">
+            <a:extLst>
+              <a:ext uri="{FF2B5EF4-FFF2-40B4-BE49-F238E27FC236}">
+                <a16:creationId xmlns:a16="http://schemas.microsoft.com/office/drawing/2014/main" id="{8C9E0BCE-2B2D-5A33-C77B-D6A85B29569E}"/>
+              </a:ext>
+            </a:extLst>
+          </p:cNvPr>
+          <p:cNvSpPr txBox="1"/>
+          <p:nvPr/>
+        </p:nvSpPr>
+        <p:spPr>
+          <a:xfrm>
+            <a:off x="10160000" y="1124149"/>
+            <a:ext cx="1834413" cy="5232202"/>
+          </a:xfrm>
+          <a:prstGeom prst="rect">
+            <a:avLst/>
+          </a:prstGeom>
+          <a:noFill/>
+        </p:spPr>
+        <p:txBody>
+          <a:bodyPr wrap="none" rtlCol="0">
+            <a:spAutoFit/>
+          </a:bodyPr>
+          <a:lstStyle/>
+          <a:p>
+            <a:r>
+              <a:rPr lang="en-US" sz="2800" dirty="0"/>
+              <a:t>Use 4-mers</a:t>
+            </a:r>
+          </a:p>
+          <a:p>
+            <a:r>
+              <a:rPr lang="en-US" b="1" dirty="0">
+                <a:latin typeface="Courier New" panose="02070309020205020404" pitchFamily="49" charset="0"/>
+                <a:cs typeface="Courier New" panose="02070309020205020404" pitchFamily="49" charset="0"/>
+              </a:rPr>
+              <a:t>AAAA 9</a:t>
+            </a:r>
+          </a:p>
+          <a:p>
+            <a:r>
+              <a:rPr lang="en-US" b="1" dirty="0">
+                <a:latin typeface="Courier New" panose="02070309020205020404" pitchFamily="49" charset="0"/>
+                <a:cs typeface="Courier New" panose="02070309020205020404" pitchFamily="49" charset="0"/>
+              </a:rPr>
+              <a:t>AAAC 1</a:t>
+            </a:r>
+          </a:p>
+          <a:p>
+            <a:r>
+              <a:rPr lang="en-US" b="1" dirty="0">
+                <a:latin typeface="Courier New" panose="02070309020205020404" pitchFamily="49" charset="0"/>
+                <a:cs typeface="Courier New" panose="02070309020205020404" pitchFamily="49" charset="0"/>
+              </a:rPr>
+              <a:t>AAAG 1</a:t>
+            </a:r>
+          </a:p>
+          <a:p>
+            <a:r>
+              <a:rPr lang="en-US" b="1" dirty="0">
+                <a:latin typeface="Courier New" panose="02070309020205020404" pitchFamily="49" charset="0"/>
+                <a:cs typeface="Courier New" panose="02070309020205020404" pitchFamily="49" charset="0"/>
+              </a:rPr>
+              <a:t>AACA 1</a:t>
+            </a:r>
+          </a:p>
+          <a:p>
+            <a:r>
+              <a:rPr lang="en-US" b="1" dirty="0">
+                <a:latin typeface="Courier New" panose="02070309020205020404" pitchFamily="49" charset="0"/>
+                <a:cs typeface="Courier New" panose="02070309020205020404" pitchFamily="49" charset="0"/>
+              </a:rPr>
+              <a:t>AACG 1</a:t>
+            </a:r>
+          </a:p>
+          <a:p>
+            <a:r>
+              <a:rPr lang="en-US" b="1" dirty="0">
+                <a:latin typeface="Courier New" panose="02070309020205020404" pitchFamily="49" charset="0"/>
+                <a:cs typeface="Courier New" panose="02070309020205020404" pitchFamily="49" charset="0"/>
+              </a:rPr>
+              <a:t>AAGA 1</a:t>
+            </a:r>
+          </a:p>
+          <a:p>
+            <a:r>
+              <a:rPr lang="en-US" b="1" dirty="0">
+                <a:latin typeface="Courier New" panose="02070309020205020404" pitchFamily="49" charset="0"/>
+                <a:cs typeface="Courier New" panose="02070309020205020404" pitchFamily="49" charset="0"/>
+              </a:rPr>
+              <a:t>ACAT 1</a:t>
+            </a:r>
+          </a:p>
+          <a:p>
+            <a:r>
+              <a:rPr lang="en-US" b="1" dirty="0">
+                <a:latin typeface="Courier New" panose="02070309020205020404" pitchFamily="49" charset="0"/>
+                <a:cs typeface="Courier New" panose="02070309020205020404" pitchFamily="49" charset="0"/>
+              </a:rPr>
+              <a:t>ACGA 2</a:t>
+            </a:r>
+          </a:p>
+          <a:p>
+            <a:r>
+              <a:rPr lang="en-US" b="1" dirty="0">
+                <a:latin typeface="Courier New" panose="02070309020205020404" pitchFamily="49" charset="0"/>
+                <a:cs typeface="Courier New" panose="02070309020205020404" pitchFamily="49" charset="0"/>
+              </a:rPr>
+              <a:t>ACGT 1</a:t>
+            </a:r>
+          </a:p>
+          <a:p>
+            <a:r>
+              <a:rPr lang="en-US" b="1" dirty="0">
+                <a:latin typeface="Courier New" panose="02070309020205020404" pitchFamily="49" charset="0"/>
+                <a:cs typeface="Courier New" panose="02070309020205020404" pitchFamily="49" charset="0"/>
+              </a:rPr>
+              <a:t>AGAC 1</a:t>
+            </a:r>
+          </a:p>
+          <a:p>
+            <a:r>
+              <a:rPr lang="en-US" b="1" dirty="0">
+                <a:latin typeface="Courier New" panose="02070309020205020404" pitchFamily="49" charset="0"/>
+                <a:cs typeface="Courier New" panose="02070309020205020404" pitchFamily="49" charset="0"/>
+              </a:rPr>
+              <a:t>ATAA 2</a:t>
+            </a:r>
+          </a:p>
+          <a:p>
+            <a:r>
+              <a:rPr lang="en-US" b="1" dirty="0">
+                <a:latin typeface="Courier New" panose="02070309020205020404" pitchFamily="49" charset="0"/>
+                <a:cs typeface="Courier New" panose="02070309020205020404" pitchFamily="49" charset="0"/>
+              </a:rPr>
+              <a:t>CATA 1</a:t>
+            </a:r>
+          </a:p>
+          <a:p>
+            <a:r>
+              <a:rPr lang="en-US" b="1" dirty="0">
+                <a:latin typeface="Courier New" panose="02070309020205020404" pitchFamily="49" charset="0"/>
+                <a:cs typeface="Courier New" panose="02070309020205020404" pitchFamily="49" charset="0"/>
+              </a:rPr>
+              <a:t>CGAA 1</a:t>
+            </a:r>
+          </a:p>
+          <a:p>
+            <a:r>
+              <a:rPr lang="en-US" b="1" dirty="0">
+                <a:latin typeface="Courier New" panose="02070309020205020404" pitchFamily="49" charset="0"/>
+                <a:cs typeface="Courier New" panose="02070309020205020404" pitchFamily="49" charset="0"/>
+              </a:rPr>
+              <a:t>CGTC 1</a:t>
+            </a:r>
+          </a:p>
+          <a:p>
+            <a:r>
+              <a:rPr lang="en-US" b="1" dirty="0">
+                <a:latin typeface="Courier New" panose="02070309020205020404" pitchFamily="49" charset="0"/>
+                <a:cs typeface="Courier New" panose="02070309020205020404" pitchFamily="49" charset="0"/>
+              </a:rPr>
+              <a:t>GAAA 1</a:t>
+            </a:r>
+          </a:p>
+          <a:p>
+            <a:r>
+              <a:rPr lang="en-US" b="1" dirty="0">
+                <a:latin typeface="Courier New" panose="02070309020205020404" pitchFamily="49" charset="0"/>
+                <a:cs typeface="Courier New" panose="02070309020205020404" pitchFamily="49" charset="0"/>
+              </a:rPr>
+              <a:t>GACG 2</a:t>
+            </a:r>
+          </a:p>
+          <a:p>
+            <a:r>
+              <a:rPr lang="en-US" b="1" dirty="0">
+                <a:latin typeface="Courier New" panose="02070309020205020404" pitchFamily="49" charset="0"/>
+                <a:cs typeface="Courier New" panose="02070309020205020404" pitchFamily="49" charset="0"/>
+              </a:rPr>
+              <a:t>TAAA 1</a:t>
+            </a:r>
+          </a:p>
+        </p:txBody>
+      </p:sp>
+    </p:spTree>
+    <p:extLst>
+      <p:ext uri="{BB962C8B-B14F-4D97-AF65-F5344CB8AC3E}">
+        <p14:creationId xmlns:p14="http://schemas.microsoft.com/office/powerpoint/2010/main" val="1177435844"/>
+      </p:ext>
+    </p:extLst>
+  </p:cSld>
+  <p:clrMapOvr>
+    <a:masterClrMapping/>
+  </p:clrMapOvr>
+</p:sld>
+</file>
+
+<file path=ppt/slides/slide71.xml><?xml version="1.0" encoding="utf-8"?>
+<p:sld xmlns:a="http://schemas.openxmlformats.org/drawingml/2006/main" xmlns:r="http://schemas.openxmlformats.org/officeDocument/2006/relationships" xmlns:p="http://schemas.openxmlformats.org/presentationml/2006/main">
+  <p:cSld>
+    <p:spTree>
+      <p:nvGrpSpPr>
+        <p:cNvPr id="1" name="">
+          <a:extLst>
+            <a:ext uri="{FF2B5EF4-FFF2-40B4-BE49-F238E27FC236}">
               <a16:creationId xmlns:a16="http://schemas.microsoft.com/office/drawing/2014/main" id="{0832E979-61DB-874E-2A78-EDA3402D2905}"/>
             </a:ext>
           </a:extLst>
@@ -39945,7 +41425,7 @@
             <a:fld id="{B82CCC60-E8CD-4174-8B1A-7DF615B22EEF}" type="slidenum">
               <a:rPr lang="en-US" smtClean="0"/>
               <a:pPr/>
-              <a:t>70</a:t>
+              <a:t>71</a:t>
             </a:fld>
             <a:endParaRPr lang="en-US"/>
           </a:p>
@@ -40152,7 +41632,7 @@
 </p:sld>
 </file>
 
-<file path=ppt/slides/slide71.xml><?xml version="1.0" encoding="utf-8"?>
+<file path=ppt/slides/slide72.xml><?xml version="1.0" encoding="utf-8"?>
 <p:sld xmlns:a="http://schemas.openxmlformats.org/drawingml/2006/main" xmlns:r="http://schemas.openxmlformats.org/officeDocument/2006/relationships" xmlns:p="http://schemas.openxmlformats.org/presentationml/2006/main">
   <p:cSld>
     <p:spTree>
@@ -40595,7 +42075,7 @@
             <a:fld id="{B82CCC60-E8CD-4174-8B1A-7DF615B22EEF}" type="slidenum">
               <a:rPr lang="en-US" smtClean="0"/>
               <a:pPr/>
-              <a:t>71</a:t>
+              <a:t>72</a:t>
             </a:fld>
             <a:endParaRPr lang="en-US"/>
           </a:p>
@@ -40802,7 +42282,7 @@
 </p:sld>
 </file>
 
-<file path=ppt/slides/slide72.xml><?xml version="1.0" encoding="utf-8"?>
+<file path=ppt/slides/slide73.xml><?xml version="1.0" encoding="utf-8"?>
 <p:sld xmlns:a="http://schemas.openxmlformats.org/drawingml/2006/main" xmlns:r="http://schemas.openxmlformats.org/officeDocument/2006/relationships" xmlns:p="http://schemas.openxmlformats.org/presentationml/2006/main">
   <p:cSld>
     <p:spTree>
@@ -41321,7 +42801,7 @@
             <a:fld id="{B82CCC60-E8CD-4174-8B1A-7DF615B22EEF}" type="slidenum">
               <a:rPr lang="en-US" smtClean="0"/>
               <a:pPr/>
-              <a:t>72</a:t>
+              <a:t>73</a:t>
             </a:fld>
             <a:endParaRPr lang="en-US"/>
           </a:p>
@@ -41528,7 +43008,7 @@
 </p:sld>
 </file>
 
-<file path=ppt/slides/slide73.xml><?xml version="1.0" encoding="utf-8"?>
+<file path=ppt/slides/slide74.xml><?xml version="1.0" encoding="utf-8"?>
 <p:sld xmlns:a="http://schemas.openxmlformats.org/drawingml/2006/main" xmlns:r="http://schemas.openxmlformats.org/officeDocument/2006/relationships" xmlns:p="http://schemas.openxmlformats.org/presentationml/2006/main">
   <p:cSld>
     <p:spTree>
@@ -42047,7 +43527,7 @@
             <a:fld id="{B82CCC60-E8CD-4174-8B1A-7DF615B22EEF}" type="slidenum">
               <a:rPr lang="en-US" smtClean="0"/>
               <a:pPr/>
-              <a:t>73</a:t>
+              <a:t>74</a:t>
             </a:fld>
             <a:endParaRPr lang="en-US"/>
           </a:p>
@@ -42254,7 +43734,7 @@
 </p:sld>
 </file>
 
-<file path=ppt/slides/slide74.xml><?xml version="1.0" encoding="utf-8"?>
+<file path=ppt/slides/slide75.xml><?xml version="1.0" encoding="utf-8"?>
 <p:sld xmlns:a="http://schemas.openxmlformats.org/drawingml/2006/main" xmlns:r="http://schemas.openxmlformats.org/officeDocument/2006/relationships" xmlns:p="http://schemas.openxmlformats.org/presentationml/2006/main">
   <p:cSld>
     <p:spTree>
@@ -42716,7 +44196,7 @@
             <a:fld id="{B82CCC60-E8CD-4174-8B1A-7DF615B22EEF}" type="slidenum">
               <a:rPr lang="en-US" smtClean="0"/>
               <a:pPr/>
-              <a:t>74</a:t>
+              <a:t>75</a:t>
             </a:fld>
             <a:endParaRPr lang="en-US"/>
           </a:p>
@@ -42964,7 +44444,7 @@
 </p:sld>
 </file>
 
-<file path=ppt/slides/slide75.xml><?xml version="1.0" encoding="utf-8"?>
+<file path=ppt/slides/slide76.xml><?xml version="1.0" encoding="utf-8"?>
 <p:sld xmlns:a="http://schemas.openxmlformats.org/drawingml/2006/main" xmlns:r="http://schemas.openxmlformats.org/officeDocument/2006/relationships" xmlns:p="http://schemas.openxmlformats.org/presentationml/2006/main">
   <p:cSld>
     <p:spTree>
@@ -43085,7 +44565,7 @@
             <a:fld id="{B82CCC60-E8CD-4174-8B1A-7DF615B22EEF}" type="slidenum">
               <a:rPr lang="en-US" smtClean="0"/>
               <a:pPr/>
-              <a:t>75</a:t>
+              <a:t>76</a:t>
             </a:fld>
             <a:endParaRPr lang="en-US"/>
           </a:p>
